--- a/docs/presentation/batchhelm-ai-hackathon-deck.pptx
+++ b/docs/presentation/batchhelm-ai-hackathon-deck.pptx
@@ -1,29 +1,31 @@
 
 <file path=ppt/presentation.xml><?xml version="1.0" encoding="utf-8"?>
-<p:presentation xmlns:a="http://schemas.openxmlformats.org/drawingml/2006/main" xmlns:r="http://schemas.openxmlformats.org/officeDocument/2006/relationships" xmlns:p="http://schemas.openxmlformats.org/presentationml/2006/main" saveSubsetFonts="1" autoCompressPictures="0">
+<p:presentation xmlns:a="http://schemas.openxmlformats.org/drawingml/2006/main" xmlns:r="http://schemas.openxmlformats.org/officeDocument/2006/relationships" xmlns:p="http://schemas.openxmlformats.org/presentationml/2006/main">
   <p:sldMasterIdLst>
     <p:sldMasterId id="2147483648" r:id="rId1"/>
   </p:sldMasterIdLst>
+  <p:notesMasterIdLst>
+    <p:notesMasterId r:id="rId12"/>
+  </p:notesMasterIdLst>
   <p:sldIdLst>
-    <p:sldId id="256" r:id="rId7"/>
-    <p:sldId id="257" r:id="rId8"/>
-    <p:sldId id="258" r:id="rId9"/>
-    <p:sldId id="259" r:id="rId10"/>
-    <p:sldId id="260" r:id="rId11"/>
-    <p:sldId id="261" r:id="rId12"/>
-    <p:sldId id="262" r:id="rId13"/>
-    <p:sldId id="263" r:id="rId14"/>
-    <p:sldId id="264" r:id="rId15"/>
-    <p:sldId id="265" r:id="rId16"/>
-    <p:sldId id="266" r:id="rId17"/>
+    <p:sldId id="256" r:id="rId2"/>
+    <p:sldId id="257" r:id="rId3"/>
+    <p:sldId id="258" r:id="rId4"/>
+    <p:sldId id="259" r:id="rId5"/>
+    <p:sldId id="260" r:id="rId6"/>
+    <p:sldId id="261" r:id="rId7"/>
+    <p:sldId id="262" r:id="rId8"/>
+    <p:sldId id="263" r:id="rId9"/>
+    <p:sldId id="264" r:id="rId10"/>
+    <p:sldId id="265" r:id="rId11"/>
   </p:sldIdLst>
-  <p:sldSz cx="12191695" cy="6858000" type="screen4x3"/>
+  <p:sldSz cx="12192000" cy="6858000"/>
   <p:notesSz cx="6858000" cy="9144000"/>
   <p:defaultTextStyle>
     <a:defPPr>
       <a:defRPr lang="en-US"/>
     </a:defPPr>
-    <a:lvl1pPr marL="0" algn="l" defTabSz="457200" rtl="0" eaLnBrk="1" latinLnBrk="0" hangingPunct="1">
+    <a:lvl1pPr marL="0" indent="0" algn="l" defTabSz="914400">
       <a:defRPr sz="1800" kern="1200">
         <a:solidFill>
           <a:schemeClr val="tx1"/>
@@ -33,7 +35,7 @@
         <a:cs typeface="+mn-cs"/>
       </a:defRPr>
     </a:lvl1pPr>
-    <a:lvl2pPr marL="457200" algn="l" defTabSz="457200" rtl="0" eaLnBrk="1" latinLnBrk="0" hangingPunct="1">
+    <a:lvl2pPr marL="457200" indent="0" algn="l" defTabSz="914400">
       <a:defRPr sz="1800" kern="1200">
         <a:solidFill>
           <a:schemeClr val="tx1"/>
@@ -43,7 +45,7 @@
         <a:cs typeface="+mn-cs"/>
       </a:defRPr>
     </a:lvl2pPr>
-    <a:lvl3pPr marL="914400" algn="l" defTabSz="457200" rtl="0" eaLnBrk="1" latinLnBrk="0" hangingPunct="1">
+    <a:lvl3pPr marL="914400" indent="0" algn="l" defTabSz="914400">
       <a:defRPr sz="1800" kern="1200">
         <a:solidFill>
           <a:schemeClr val="tx1"/>
@@ -53,7 +55,7 @@
         <a:cs typeface="+mn-cs"/>
       </a:defRPr>
     </a:lvl3pPr>
-    <a:lvl4pPr marL="1371600" algn="l" defTabSz="457200" rtl="0" eaLnBrk="1" latinLnBrk="0" hangingPunct="1">
+    <a:lvl4pPr marL="1371600" indent="0" algn="l" defTabSz="914400">
       <a:defRPr sz="1800" kern="1200">
         <a:solidFill>
           <a:schemeClr val="tx1"/>
@@ -63,7 +65,7 @@
         <a:cs typeface="+mn-cs"/>
       </a:defRPr>
     </a:lvl4pPr>
-    <a:lvl5pPr marL="1828800" algn="l" defTabSz="457200" rtl="0" eaLnBrk="1" latinLnBrk="0" hangingPunct="1">
+    <a:lvl5pPr marL="1828800" indent="0" algn="l" defTabSz="914400">
       <a:defRPr sz="1800" kern="1200">
         <a:solidFill>
           <a:schemeClr val="tx1"/>
@@ -73,7 +75,7 @@
         <a:cs typeface="+mn-cs"/>
       </a:defRPr>
     </a:lvl5pPr>
-    <a:lvl6pPr marL="2286000" algn="l" defTabSz="457200" rtl="0" eaLnBrk="1" latinLnBrk="0" hangingPunct="1">
+    <a:lvl6pPr marL="2286000" indent="0" algn="l" defTabSz="914400">
       <a:defRPr sz="1800" kern="1200">
         <a:solidFill>
           <a:schemeClr val="tx1"/>
@@ -83,7 +85,7 @@
         <a:cs typeface="+mn-cs"/>
       </a:defRPr>
     </a:lvl6pPr>
-    <a:lvl7pPr marL="2743200" algn="l" defTabSz="457200" rtl="0" eaLnBrk="1" latinLnBrk="0" hangingPunct="1">
+    <a:lvl7pPr marL="2743200" indent="0" algn="l" defTabSz="914400">
       <a:defRPr sz="1800" kern="1200">
         <a:solidFill>
           <a:schemeClr val="tx1"/>
@@ -93,7 +95,7 @@
         <a:cs typeface="+mn-cs"/>
       </a:defRPr>
     </a:lvl7pPr>
-    <a:lvl8pPr marL="3200400" algn="l" defTabSz="457200" rtl="0" eaLnBrk="1" latinLnBrk="0" hangingPunct="1">
+    <a:lvl8pPr marL="3200400" indent="0" algn="l" defTabSz="914400">
       <a:defRPr sz="1800" kern="1200">
         <a:solidFill>
           <a:schemeClr val="tx1"/>
@@ -103,7 +105,7 @@
         <a:cs typeface="+mn-cs"/>
       </a:defRPr>
     </a:lvl8pPr>
-    <a:lvl9pPr marL="3657600" algn="l" defTabSz="457200" rtl="0" eaLnBrk="1" latinLnBrk="0" hangingPunct="1">
+    <a:lvl9pPr marL="3657600" indent="0" algn="l" defTabSz="914400">
       <a:defRPr sz="1800" kern="1200">
         <a:solidFill>
           <a:schemeClr val="tx1"/>
@@ -115,6 +117,927 @@
     </a:lvl9pPr>
   </p:defaultTextStyle>
 </p:presentation>
+</file>
+
+<file path=ppt/notesMasters/notesMaster1.xml><?xml version="1.0" encoding="utf-8"?>
+<p:notesMaster xmlns:a="http://schemas.openxmlformats.org/drawingml/2006/main" xmlns:r="http://schemas.openxmlformats.org/officeDocument/2006/relationships" xmlns:p="http://schemas.openxmlformats.org/presentationml/2006/main">
+  <p:cSld>
+    <p:bg>
+      <p:bgRef idx="1001">
+        <a:schemeClr val="bg1"/>
+      </p:bgRef>
+    </p:bg>
+    <p:spTree>
+      <p:nvGrpSpPr>
+        <p:cNvPr id="1" name=""/>
+        <p:cNvGrpSpPr/>
+        <p:nvPr/>
+      </p:nvGrpSpPr>
+      <p:grpSpPr>
+        <a:xfrm>
+          <a:off x="0" y="0"/>
+          <a:ext cx="0" cy="0"/>
+          <a:chOff x="0" y="0"/>
+          <a:chExt cx="0" cy="0"/>
+        </a:xfrm>
+      </p:grpSpPr>
+      <p:sp>
+        <p:nvSpPr>
+          <p:cNvPr id="2" name="Header Placeholder"/>
+          <p:cNvSpPr>
+            <a:spLocks noGrp="1"/>
+          </p:cNvSpPr>
+          <p:nvPr>
+            <p:ph type="hdr" sz="quarter"/>
+          </p:nvPr>
+        </p:nvSpPr>
+        <p:spPr>
+          <a:prstGeom prst="rect">
+            <a:avLst/>
+          </a:prstGeom>
+        </p:spPr>
+        <p:txBody>
+          <a:bodyPr/>
+          <a:lstStyle/>
+          <a:p>
+            <a:endParaRPr/>
+          </a:p>
+        </p:txBody>
+      </p:sp>
+      <p:sp>
+        <p:nvSpPr>
+          <p:cNvPr id="3" name="Date Placeholder"/>
+          <p:cNvSpPr>
+            <a:spLocks noGrp="1"/>
+          </p:cNvSpPr>
+          <p:nvPr>
+            <p:ph type="dt" sz="quarter" idx="1"/>
+          </p:nvPr>
+        </p:nvSpPr>
+        <p:spPr>
+          <a:prstGeom prst="rect">
+            <a:avLst/>
+          </a:prstGeom>
+        </p:spPr>
+        <p:txBody>
+          <a:bodyPr/>
+          <a:lstStyle/>
+          <a:p>
+            <a:endParaRPr/>
+          </a:p>
+        </p:txBody>
+      </p:sp>
+      <p:sp>
+        <p:nvSpPr>
+          <p:cNvPr id="4" name="Slide Image Placeholder"/>
+          <p:cNvSpPr>
+            <a:spLocks noGrp="1" noRot="1" noChangeAspect="1"/>
+          </p:cNvSpPr>
+          <p:nvPr>
+            <p:ph type="sldImg" idx="2"/>
+          </p:nvPr>
+        </p:nvSpPr>
+        <p:spPr>
+          <a:prstGeom prst="rect">
+            <a:avLst/>
+          </a:prstGeom>
+        </p:spPr>
+        <p:txBody>
+          <a:bodyPr/>
+          <a:lstStyle/>
+          <a:p>
+            <a:endParaRPr/>
+          </a:p>
+        </p:txBody>
+      </p:sp>
+      <p:sp>
+        <p:nvSpPr>
+          <p:cNvPr id="5" name="Notes Placeholder"/>
+          <p:cNvSpPr>
+            <a:spLocks noGrp="1"/>
+          </p:cNvSpPr>
+          <p:nvPr>
+            <p:ph type="body" sz="quarter" idx="3"/>
+          </p:nvPr>
+        </p:nvSpPr>
+        <p:spPr>
+          <a:prstGeom prst="rect">
+            <a:avLst/>
+          </a:prstGeom>
+        </p:spPr>
+        <p:txBody>
+          <a:bodyPr/>
+          <a:lstStyle/>
+          <a:p>
+            <a:endParaRPr/>
+          </a:p>
+        </p:txBody>
+      </p:sp>
+      <p:sp>
+        <p:nvSpPr>
+          <p:cNvPr id="6" name="Footer Placeholder"/>
+          <p:cNvSpPr>
+            <a:spLocks noGrp="1"/>
+          </p:cNvSpPr>
+          <p:nvPr>
+            <p:ph type="ftr" sz="quarter" idx="4"/>
+          </p:nvPr>
+        </p:nvSpPr>
+        <p:spPr>
+          <a:prstGeom prst="rect">
+            <a:avLst/>
+          </a:prstGeom>
+        </p:spPr>
+        <p:txBody>
+          <a:bodyPr/>
+          <a:lstStyle/>
+          <a:p>
+            <a:endParaRPr/>
+          </a:p>
+        </p:txBody>
+      </p:sp>
+      <p:sp>
+        <p:nvSpPr>
+          <p:cNvPr id="7" name="Slide Number Placeholder"/>
+          <p:cNvSpPr>
+            <a:spLocks noGrp="1"/>
+          </p:cNvSpPr>
+          <p:nvPr>
+            <p:ph type="sldNum" sz="quarter" idx="5"/>
+          </p:nvPr>
+        </p:nvSpPr>
+        <p:spPr>
+          <a:prstGeom prst="rect">
+            <a:avLst/>
+          </a:prstGeom>
+        </p:spPr>
+        <p:txBody>
+          <a:bodyPr/>
+          <a:lstStyle/>
+          <a:p>
+            <a:endParaRPr/>
+          </a:p>
+        </p:txBody>
+      </p:sp>
+    </p:spTree>
+  </p:cSld>
+  <p:clrMap bg1="lt1" tx1="dk1" bg2="lt2" tx2="dk2" accent1="accent1" accent2="accent2" accent3="accent3" accent4="accent4" accent5="accent5" accent6="accent6" hlink="hlink" folHlink="folHlink"/>
+  <p:notesStyle>
+    <a:lvl1pPr marL="0" algn="l" defTabSz="914400" rtl="0" eaLnBrk="1" latinLnBrk="0" hangingPunct="1">
+      <a:defRPr sz="1200" kern="1200"/>
+    </a:lvl1pPr>
+  </p:notesStyle>
+</p:notesMaster>
+</file>
+
+<file path=ppt/notesSlides/notesSlide1.xml><?xml version="1.0" encoding="utf-8"?>
+<p:notes xmlns:a="http://schemas.openxmlformats.org/drawingml/2006/main" xmlns:r="http://schemas.openxmlformats.org/officeDocument/2006/relationships" xmlns:p="http://schemas.openxmlformats.org/presentationml/2006/main">
+  <p:cSld>
+    <p:spTree>
+      <p:nvGrpSpPr>
+        <p:cNvPr id="1" name=""/>
+        <p:cNvGrpSpPr/>
+        <p:nvPr/>
+      </p:nvGrpSpPr>
+      <p:grpSpPr>
+        <a:xfrm>
+          <a:off x="0" y="0"/>
+          <a:ext cx="0" cy="0"/>
+          <a:chOff x="0" y="0"/>
+          <a:chExt cx="0" cy="0"/>
+        </a:xfrm>
+      </p:grpSpPr>
+      <p:sp>
+        <p:nvSpPr>
+          <p:cNvPr id="2" name="Slide Image Placeholder 1"/>
+          <p:cNvSpPr>
+            <a:spLocks noGrp="1" noRot="1" noChangeAspect="1"/>
+          </p:cNvSpPr>
+          <p:nvPr>
+            <p:ph type="sldImg"/>
+          </p:nvPr>
+        </p:nvSpPr>
+        <p:spPr/>
+      </p:sp>
+      <p:sp>
+        <p:nvSpPr>
+          <p:cNvPr id="3" name="Notes Placeholder 2"/>
+          <p:cNvSpPr>
+            <a:spLocks noGrp="1"/>
+          </p:cNvSpPr>
+          <p:nvPr>
+            <p:ph type="body" idx="1"/>
+          </p:nvPr>
+        </p:nvSpPr>
+        <p:spPr/>
+        <p:txBody>
+          <a:bodyPr/>
+          <a:lstStyle/>
+          <a:p>
+            <a:endParaRPr/>
+          </a:p>
+        </p:txBody>
+      </p:sp>
+      <p:sp>
+        <p:nvSpPr>
+          <p:cNvPr id="4" name="Slide Number Placeholder 3"/>
+          <p:cNvSpPr>
+            <a:spLocks noGrp="1"/>
+          </p:cNvSpPr>
+          <p:nvPr>
+            <p:ph type="sldNum" idx="5"/>
+          </p:nvPr>
+        </p:nvSpPr>
+        <p:spPr/>
+        <p:txBody>
+          <a:bodyPr/>
+          <a:lstStyle/>
+          <a:p>
+            <a:endParaRPr/>
+          </a:p>
+        </p:txBody>
+      </p:sp>
+    </p:spTree>
+  </p:cSld>
+  <p:clrMapOvr>
+    <a:masterClrMapping/>
+  </p:clrMapOvr>
+</p:notes>
+</file>
+
+<file path=ppt/notesSlides/notesSlide10.xml><?xml version="1.0" encoding="utf-8"?>
+<p:notes xmlns:a="http://schemas.openxmlformats.org/drawingml/2006/main" xmlns:r="http://schemas.openxmlformats.org/officeDocument/2006/relationships" xmlns:p="http://schemas.openxmlformats.org/presentationml/2006/main">
+  <p:cSld>
+    <p:spTree>
+      <p:nvGrpSpPr>
+        <p:cNvPr id="1" name=""/>
+        <p:cNvGrpSpPr/>
+        <p:nvPr/>
+      </p:nvGrpSpPr>
+      <p:grpSpPr>
+        <a:xfrm>
+          <a:off x="0" y="0"/>
+          <a:ext cx="0" cy="0"/>
+          <a:chOff x="0" y="0"/>
+          <a:chExt cx="0" cy="0"/>
+        </a:xfrm>
+      </p:grpSpPr>
+      <p:sp>
+        <p:nvSpPr>
+          <p:cNvPr id="2" name="Slide Image Placeholder 1"/>
+          <p:cNvSpPr>
+            <a:spLocks noGrp="1" noRot="1" noChangeAspect="1"/>
+          </p:cNvSpPr>
+          <p:nvPr>
+            <p:ph type="sldImg"/>
+          </p:nvPr>
+        </p:nvSpPr>
+        <p:spPr/>
+      </p:sp>
+      <p:sp>
+        <p:nvSpPr>
+          <p:cNvPr id="3" name="Notes Placeholder 2"/>
+          <p:cNvSpPr>
+            <a:spLocks noGrp="1"/>
+          </p:cNvSpPr>
+          <p:nvPr>
+            <p:ph type="body" idx="1"/>
+          </p:nvPr>
+        </p:nvSpPr>
+        <p:spPr/>
+        <p:txBody>
+          <a:bodyPr/>
+          <a:lstStyle/>
+          <a:p>
+            <a:endParaRPr/>
+          </a:p>
+        </p:txBody>
+      </p:sp>
+      <p:sp>
+        <p:nvSpPr>
+          <p:cNvPr id="4" name="Slide Number Placeholder 3"/>
+          <p:cNvSpPr>
+            <a:spLocks noGrp="1"/>
+          </p:cNvSpPr>
+          <p:nvPr>
+            <p:ph type="sldNum" idx="5"/>
+          </p:nvPr>
+        </p:nvSpPr>
+        <p:spPr/>
+        <p:txBody>
+          <a:bodyPr/>
+          <a:lstStyle/>
+          <a:p>
+            <a:endParaRPr/>
+          </a:p>
+        </p:txBody>
+      </p:sp>
+    </p:spTree>
+  </p:cSld>
+  <p:clrMapOvr>
+    <a:masterClrMapping/>
+  </p:clrMapOvr>
+</p:notes>
+</file>
+
+<file path=ppt/notesSlides/notesSlide2.xml><?xml version="1.0" encoding="utf-8"?>
+<p:notes xmlns:a="http://schemas.openxmlformats.org/drawingml/2006/main" xmlns:r="http://schemas.openxmlformats.org/officeDocument/2006/relationships" xmlns:p="http://schemas.openxmlformats.org/presentationml/2006/main">
+  <p:cSld>
+    <p:spTree>
+      <p:nvGrpSpPr>
+        <p:cNvPr id="1" name=""/>
+        <p:cNvGrpSpPr/>
+        <p:nvPr/>
+      </p:nvGrpSpPr>
+      <p:grpSpPr>
+        <a:xfrm>
+          <a:off x="0" y="0"/>
+          <a:ext cx="0" cy="0"/>
+          <a:chOff x="0" y="0"/>
+          <a:chExt cx="0" cy="0"/>
+        </a:xfrm>
+      </p:grpSpPr>
+      <p:sp>
+        <p:nvSpPr>
+          <p:cNvPr id="2" name="Slide Image Placeholder 1"/>
+          <p:cNvSpPr>
+            <a:spLocks noGrp="1" noRot="1" noChangeAspect="1"/>
+          </p:cNvSpPr>
+          <p:nvPr>
+            <p:ph type="sldImg"/>
+          </p:nvPr>
+        </p:nvSpPr>
+        <p:spPr/>
+      </p:sp>
+      <p:sp>
+        <p:nvSpPr>
+          <p:cNvPr id="3" name="Notes Placeholder 2"/>
+          <p:cNvSpPr>
+            <a:spLocks noGrp="1"/>
+          </p:cNvSpPr>
+          <p:nvPr>
+            <p:ph type="body" idx="1"/>
+          </p:nvPr>
+        </p:nvSpPr>
+        <p:spPr/>
+        <p:txBody>
+          <a:bodyPr/>
+          <a:lstStyle/>
+          <a:p>
+            <a:endParaRPr/>
+          </a:p>
+        </p:txBody>
+      </p:sp>
+      <p:sp>
+        <p:nvSpPr>
+          <p:cNvPr id="4" name="Slide Number Placeholder 3"/>
+          <p:cNvSpPr>
+            <a:spLocks noGrp="1"/>
+          </p:cNvSpPr>
+          <p:nvPr>
+            <p:ph type="sldNum" idx="5"/>
+          </p:nvPr>
+        </p:nvSpPr>
+        <p:spPr/>
+        <p:txBody>
+          <a:bodyPr/>
+          <a:lstStyle/>
+          <a:p>
+            <a:endParaRPr/>
+          </a:p>
+        </p:txBody>
+      </p:sp>
+    </p:spTree>
+  </p:cSld>
+  <p:clrMapOvr>
+    <a:masterClrMapping/>
+  </p:clrMapOvr>
+</p:notes>
+</file>
+
+<file path=ppt/notesSlides/notesSlide3.xml><?xml version="1.0" encoding="utf-8"?>
+<p:notes xmlns:a="http://schemas.openxmlformats.org/drawingml/2006/main" xmlns:r="http://schemas.openxmlformats.org/officeDocument/2006/relationships" xmlns:p="http://schemas.openxmlformats.org/presentationml/2006/main">
+  <p:cSld>
+    <p:spTree>
+      <p:nvGrpSpPr>
+        <p:cNvPr id="1" name=""/>
+        <p:cNvGrpSpPr/>
+        <p:nvPr/>
+      </p:nvGrpSpPr>
+      <p:grpSpPr>
+        <a:xfrm>
+          <a:off x="0" y="0"/>
+          <a:ext cx="0" cy="0"/>
+          <a:chOff x="0" y="0"/>
+          <a:chExt cx="0" cy="0"/>
+        </a:xfrm>
+      </p:grpSpPr>
+      <p:sp>
+        <p:nvSpPr>
+          <p:cNvPr id="2" name="Slide Image Placeholder 1"/>
+          <p:cNvSpPr>
+            <a:spLocks noGrp="1" noRot="1" noChangeAspect="1"/>
+          </p:cNvSpPr>
+          <p:nvPr>
+            <p:ph type="sldImg"/>
+          </p:nvPr>
+        </p:nvSpPr>
+        <p:spPr/>
+      </p:sp>
+      <p:sp>
+        <p:nvSpPr>
+          <p:cNvPr id="3" name="Notes Placeholder 2"/>
+          <p:cNvSpPr>
+            <a:spLocks noGrp="1"/>
+          </p:cNvSpPr>
+          <p:nvPr>
+            <p:ph type="body" idx="1"/>
+          </p:nvPr>
+        </p:nvSpPr>
+        <p:spPr/>
+        <p:txBody>
+          <a:bodyPr/>
+          <a:lstStyle/>
+          <a:p>
+            <a:endParaRPr/>
+          </a:p>
+        </p:txBody>
+      </p:sp>
+      <p:sp>
+        <p:nvSpPr>
+          <p:cNvPr id="4" name="Slide Number Placeholder 3"/>
+          <p:cNvSpPr>
+            <a:spLocks noGrp="1"/>
+          </p:cNvSpPr>
+          <p:nvPr>
+            <p:ph type="sldNum" idx="5"/>
+          </p:nvPr>
+        </p:nvSpPr>
+        <p:spPr/>
+        <p:txBody>
+          <a:bodyPr/>
+          <a:lstStyle/>
+          <a:p>
+            <a:endParaRPr/>
+          </a:p>
+        </p:txBody>
+      </p:sp>
+    </p:spTree>
+  </p:cSld>
+  <p:clrMapOvr>
+    <a:masterClrMapping/>
+  </p:clrMapOvr>
+</p:notes>
+</file>
+
+<file path=ppt/notesSlides/notesSlide4.xml><?xml version="1.0" encoding="utf-8"?>
+<p:notes xmlns:a="http://schemas.openxmlformats.org/drawingml/2006/main" xmlns:r="http://schemas.openxmlformats.org/officeDocument/2006/relationships" xmlns:p="http://schemas.openxmlformats.org/presentationml/2006/main">
+  <p:cSld>
+    <p:spTree>
+      <p:nvGrpSpPr>
+        <p:cNvPr id="1" name=""/>
+        <p:cNvGrpSpPr/>
+        <p:nvPr/>
+      </p:nvGrpSpPr>
+      <p:grpSpPr>
+        <a:xfrm>
+          <a:off x="0" y="0"/>
+          <a:ext cx="0" cy="0"/>
+          <a:chOff x="0" y="0"/>
+          <a:chExt cx="0" cy="0"/>
+        </a:xfrm>
+      </p:grpSpPr>
+      <p:sp>
+        <p:nvSpPr>
+          <p:cNvPr id="2" name="Slide Image Placeholder 1"/>
+          <p:cNvSpPr>
+            <a:spLocks noGrp="1" noRot="1" noChangeAspect="1"/>
+          </p:cNvSpPr>
+          <p:nvPr>
+            <p:ph type="sldImg"/>
+          </p:nvPr>
+        </p:nvSpPr>
+        <p:spPr/>
+      </p:sp>
+      <p:sp>
+        <p:nvSpPr>
+          <p:cNvPr id="3" name="Notes Placeholder 2"/>
+          <p:cNvSpPr>
+            <a:spLocks noGrp="1"/>
+          </p:cNvSpPr>
+          <p:nvPr>
+            <p:ph type="body" idx="1"/>
+          </p:nvPr>
+        </p:nvSpPr>
+        <p:spPr/>
+        <p:txBody>
+          <a:bodyPr/>
+          <a:lstStyle/>
+          <a:p>
+            <a:endParaRPr/>
+          </a:p>
+        </p:txBody>
+      </p:sp>
+      <p:sp>
+        <p:nvSpPr>
+          <p:cNvPr id="4" name="Slide Number Placeholder 3"/>
+          <p:cNvSpPr>
+            <a:spLocks noGrp="1"/>
+          </p:cNvSpPr>
+          <p:nvPr>
+            <p:ph type="sldNum" idx="5"/>
+          </p:nvPr>
+        </p:nvSpPr>
+        <p:spPr/>
+        <p:txBody>
+          <a:bodyPr/>
+          <a:lstStyle/>
+          <a:p>
+            <a:endParaRPr/>
+          </a:p>
+        </p:txBody>
+      </p:sp>
+    </p:spTree>
+  </p:cSld>
+  <p:clrMapOvr>
+    <a:masterClrMapping/>
+  </p:clrMapOvr>
+</p:notes>
+</file>
+
+<file path=ppt/notesSlides/notesSlide5.xml><?xml version="1.0" encoding="utf-8"?>
+<p:notes xmlns:a="http://schemas.openxmlformats.org/drawingml/2006/main" xmlns:r="http://schemas.openxmlformats.org/officeDocument/2006/relationships" xmlns:p="http://schemas.openxmlformats.org/presentationml/2006/main">
+  <p:cSld>
+    <p:spTree>
+      <p:nvGrpSpPr>
+        <p:cNvPr id="1" name=""/>
+        <p:cNvGrpSpPr/>
+        <p:nvPr/>
+      </p:nvGrpSpPr>
+      <p:grpSpPr>
+        <a:xfrm>
+          <a:off x="0" y="0"/>
+          <a:ext cx="0" cy="0"/>
+          <a:chOff x="0" y="0"/>
+          <a:chExt cx="0" cy="0"/>
+        </a:xfrm>
+      </p:grpSpPr>
+      <p:sp>
+        <p:nvSpPr>
+          <p:cNvPr id="2" name="Slide Image Placeholder 1"/>
+          <p:cNvSpPr>
+            <a:spLocks noGrp="1" noRot="1" noChangeAspect="1"/>
+          </p:cNvSpPr>
+          <p:nvPr>
+            <p:ph type="sldImg"/>
+          </p:nvPr>
+        </p:nvSpPr>
+        <p:spPr/>
+      </p:sp>
+      <p:sp>
+        <p:nvSpPr>
+          <p:cNvPr id="3" name="Notes Placeholder 2"/>
+          <p:cNvSpPr>
+            <a:spLocks noGrp="1"/>
+          </p:cNvSpPr>
+          <p:nvPr>
+            <p:ph type="body" idx="1"/>
+          </p:nvPr>
+        </p:nvSpPr>
+        <p:spPr/>
+        <p:txBody>
+          <a:bodyPr/>
+          <a:lstStyle/>
+          <a:p>
+            <a:endParaRPr/>
+          </a:p>
+        </p:txBody>
+      </p:sp>
+      <p:sp>
+        <p:nvSpPr>
+          <p:cNvPr id="4" name="Slide Number Placeholder 3"/>
+          <p:cNvSpPr>
+            <a:spLocks noGrp="1"/>
+          </p:cNvSpPr>
+          <p:nvPr>
+            <p:ph type="sldNum" idx="5"/>
+          </p:nvPr>
+        </p:nvSpPr>
+        <p:spPr/>
+        <p:txBody>
+          <a:bodyPr/>
+          <a:lstStyle/>
+          <a:p>
+            <a:endParaRPr/>
+          </a:p>
+        </p:txBody>
+      </p:sp>
+    </p:spTree>
+  </p:cSld>
+  <p:clrMapOvr>
+    <a:masterClrMapping/>
+  </p:clrMapOvr>
+</p:notes>
+</file>
+
+<file path=ppt/notesSlides/notesSlide6.xml><?xml version="1.0" encoding="utf-8"?>
+<p:notes xmlns:a="http://schemas.openxmlformats.org/drawingml/2006/main" xmlns:r="http://schemas.openxmlformats.org/officeDocument/2006/relationships" xmlns:p="http://schemas.openxmlformats.org/presentationml/2006/main">
+  <p:cSld>
+    <p:spTree>
+      <p:nvGrpSpPr>
+        <p:cNvPr id="1" name=""/>
+        <p:cNvGrpSpPr/>
+        <p:nvPr/>
+      </p:nvGrpSpPr>
+      <p:grpSpPr>
+        <a:xfrm>
+          <a:off x="0" y="0"/>
+          <a:ext cx="0" cy="0"/>
+          <a:chOff x="0" y="0"/>
+          <a:chExt cx="0" cy="0"/>
+        </a:xfrm>
+      </p:grpSpPr>
+      <p:sp>
+        <p:nvSpPr>
+          <p:cNvPr id="2" name="Slide Image Placeholder 1"/>
+          <p:cNvSpPr>
+            <a:spLocks noGrp="1" noRot="1" noChangeAspect="1"/>
+          </p:cNvSpPr>
+          <p:nvPr>
+            <p:ph type="sldImg"/>
+          </p:nvPr>
+        </p:nvSpPr>
+        <p:spPr/>
+      </p:sp>
+      <p:sp>
+        <p:nvSpPr>
+          <p:cNvPr id="3" name="Notes Placeholder 2"/>
+          <p:cNvSpPr>
+            <a:spLocks noGrp="1"/>
+          </p:cNvSpPr>
+          <p:nvPr>
+            <p:ph type="body" idx="1"/>
+          </p:nvPr>
+        </p:nvSpPr>
+        <p:spPr/>
+        <p:txBody>
+          <a:bodyPr/>
+          <a:lstStyle/>
+          <a:p>
+            <a:endParaRPr/>
+          </a:p>
+        </p:txBody>
+      </p:sp>
+      <p:sp>
+        <p:nvSpPr>
+          <p:cNvPr id="4" name="Slide Number Placeholder 3"/>
+          <p:cNvSpPr>
+            <a:spLocks noGrp="1"/>
+          </p:cNvSpPr>
+          <p:nvPr>
+            <p:ph type="sldNum" idx="5"/>
+          </p:nvPr>
+        </p:nvSpPr>
+        <p:spPr/>
+        <p:txBody>
+          <a:bodyPr/>
+          <a:lstStyle/>
+          <a:p>
+            <a:endParaRPr/>
+          </a:p>
+        </p:txBody>
+      </p:sp>
+    </p:spTree>
+  </p:cSld>
+  <p:clrMapOvr>
+    <a:masterClrMapping/>
+  </p:clrMapOvr>
+</p:notes>
+</file>
+
+<file path=ppt/notesSlides/notesSlide7.xml><?xml version="1.0" encoding="utf-8"?>
+<p:notes xmlns:a="http://schemas.openxmlformats.org/drawingml/2006/main" xmlns:r="http://schemas.openxmlformats.org/officeDocument/2006/relationships" xmlns:p="http://schemas.openxmlformats.org/presentationml/2006/main">
+  <p:cSld>
+    <p:spTree>
+      <p:nvGrpSpPr>
+        <p:cNvPr id="1" name=""/>
+        <p:cNvGrpSpPr/>
+        <p:nvPr/>
+      </p:nvGrpSpPr>
+      <p:grpSpPr>
+        <a:xfrm>
+          <a:off x="0" y="0"/>
+          <a:ext cx="0" cy="0"/>
+          <a:chOff x="0" y="0"/>
+          <a:chExt cx="0" cy="0"/>
+        </a:xfrm>
+      </p:grpSpPr>
+      <p:sp>
+        <p:nvSpPr>
+          <p:cNvPr id="2" name="Slide Image Placeholder 1"/>
+          <p:cNvSpPr>
+            <a:spLocks noGrp="1" noRot="1" noChangeAspect="1"/>
+          </p:cNvSpPr>
+          <p:nvPr>
+            <p:ph type="sldImg"/>
+          </p:nvPr>
+        </p:nvSpPr>
+        <p:spPr/>
+      </p:sp>
+      <p:sp>
+        <p:nvSpPr>
+          <p:cNvPr id="3" name="Notes Placeholder 2"/>
+          <p:cNvSpPr>
+            <a:spLocks noGrp="1"/>
+          </p:cNvSpPr>
+          <p:nvPr>
+            <p:ph type="body" idx="1"/>
+          </p:nvPr>
+        </p:nvSpPr>
+        <p:spPr/>
+        <p:txBody>
+          <a:bodyPr/>
+          <a:lstStyle/>
+          <a:p>
+            <a:endParaRPr/>
+          </a:p>
+        </p:txBody>
+      </p:sp>
+      <p:sp>
+        <p:nvSpPr>
+          <p:cNvPr id="4" name="Slide Number Placeholder 3"/>
+          <p:cNvSpPr>
+            <a:spLocks noGrp="1"/>
+          </p:cNvSpPr>
+          <p:nvPr>
+            <p:ph type="sldNum" idx="5"/>
+          </p:nvPr>
+        </p:nvSpPr>
+        <p:spPr/>
+        <p:txBody>
+          <a:bodyPr/>
+          <a:lstStyle/>
+          <a:p>
+            <a:endParaRPr/>
+          </a:p>
+        </p:txBody>
+      </p:sp>
+    </p:spTree>
+  </p:cSld>
+  <p:clrMapOvr>
+    <a:masterClrMapping/>
+  </p:clrMapOvr>
+</p:notes>
+</file>
+
+<file path=ppt/notesSlides/notesSlide8.xml><?xml version="1.0" encoding="utf-8"?>
+<p:notes xmlns:a="http://schemas.openxmlformats.org/drawingml/2006/main" xmlns:r="http://schemas.openxmlformats.org/officeDocument/2006/relationships" xmlns:p="http://schemas.openxmlformats.org/presentationml/2006/main">
+  <p:cSld>
+    <p:spTree>
+      <p:nvGrpSpPr>
+        <p:cNvPr id="1" name=""/>
+        <p:cNvGrpSpPr/>
+        <p:nvPr/>
+      </p:nvGrpSpPr>
+      <p:grpSpPr>
+        <a:xfrm>
+          <a:off x="0" y="0"/>
+          <a:ext cx="0" cy="0"/>
+          <a:chOff x="0" y="0"/>
+          <a:chExt cx="0" cy="0"/>
+        </a:xfrm>
+      </p:grpSpPr>
+      <p:sp>
+        <p:nvSpPr>
+          <p:cNvPr id="2" name="Slide Image Placeholder 1"/>
+          <p:cNvSpPr>
+            <a:spLocks noGrp="1" noRot="1" noChangeAspect="1"/>
+          </p:cNvSpPr>
+          <p:nvPr>
+            <p:ph type="sldImg"/>
+          </p:nvPr>
+        </p:nvSpPr>
+        <p:spPr/>
+      </p:sp>
+      <p:sp>
+        <p:nvSpPr>
+          <p:cNvPr id="3" name="Notes Placeholder 2"/>
+          <p:cNvSpPr>
+            <a:spLocks noGrp="1"/>
+          </p:cNvSpPr>
+          <p:nvPr>
+            <p:ph type="body" idx="1"/>
+          </p:nvPr>
+        </p:nvSpPr>
+        <p:spPr/>
+        <p:txBody>
+          <a:bodyPr/>
+          <a:lstStyle/>
+          <a:p>
+            <a:endParaRPr/>
+          </a:p>
+        </p:txBody>
+      </p:sp>
+      <p:sp>
+        <p:nvSpPr>
+          <p:cNvPr id="4" name="Slide Number Placeholder 3"/>
+          <p:cNvSpPr>
+            <a:spLocks noGrp="1"/>
+          </p:cNvSpPr>
+          <p:nvPr>
+            <p:ph type="sldNum" idx="5"/>
+          </p:nvPr>
+        </p:nvSpPr>
+        <p:spPr/>
+        <p:txBody>
+          <a:bodyPr/>
+          <a:lstStyle/>
+          <a:p>
+            <a:endParaRPr/>
+          </a:p>
+        </p:txBody>
+      </p:sp>
+    </p:spTree>
+  </p:cSld>
+  <p:clrMapOvr>
+    <a:masterClrMapping/>
+  </p:clrMapOvr>
+</p:notes>
+</file>
+
+<file path=ppt/notesSlides/notesSlide9.xml><?xml version="1.0" encoding="utf-8"?>
+<p:notes xmlns:a="http://schemas.openxmlformats.org/drawingml/2006/main" xmlns:r="http://schemas.openxmlformats.org/officeDocument/2006/relationships" xmlns:p="http://schemas.openxmlformats.org/presentationml/2006/main">
+  <p:cSld>
+    <p:spTree>
+      <p:nvGrpSpPr>
+        <p:cNvPr id="1" name=""/>
+        <p:cNvGrpSpPr/>
+        <p:nvPr/>
+      </p:nvGrpSpPr>
+      <p:grpSpPr>
+        <a:xfrm>
+          <a:off x="0" y="0"/>
+          <a:ext cx="0" cy="0"/>
+          <a:chOff x="0" y="0"/>
+          <a:chExt cx="0" cy="0"/>
+        </a:xfrm>
+      </p:grpSpPr>
+      <p:sp>
+        <p:nvSpPr>
+          <p:cNvPr id="2" name="Slide Image Placeholder 1"/>
+          <p:cNvSpPr>
+            <a:spLocks noGrp="1" noRot="1" noChangeAspect="1"/>
+          </p:cNvSpPr>
+          <p:nvPr>
+            <p:ph type="sldImg"/>
+          </p:nvPr>
+        </p:nvSpPr>
+        <p:spPr/>
+      </p:sp>
+      <p:sp>
+        <p:nvSpPr>
+          <p:cNvPr id="3" name="Notes Placeholder 2"/>
+          <p:cNvSpPr>
+            <a:spLocks noGrp="1"/>
+          </p:cNvSpPr>
+          <p:nvPr>
+            <p:ph type="body" idx="1"/>
+          </p:nvPr>
+        </p:nvSpPr>
+        <p:spPr/>
+        <p:txBody>
+          <a:bodyPr/>
+          <a:lstStyle/>
+          <a:p>
+            <a:endParaRPr/>
+          </a:p>
+        </p:txBody>
+      </p:sp>
+      <p:sp>
+        <p:nvSpPr>
+          <p:cNvPr id="4" name="Slide Number Placeholder 3"/>
+          <p:cNvSpPr>
+            <a:spLocks noGrp="1"/>
+          </p:cNvSpPr>
+          <p:nvPr>
+            <p:ph type="sldNum" idx="5"/>
+          </p:nvPr>
+        </p:nvSpPr>
+        <p:spPr/>
+        <p:txBody>
+          <a:bodyPr/>
+          <a:lstStyle/>
+          <a:p>
+            <a:endParaRPr/>
+          </a:p>
+        </p:txBody>
+      </p:sp>
+    </p:spTree>
+  </p:cSld>
+  <p:clrMapOvr>
+    <a:masterClrMapping/>
+  </p:clrMapOvr>
+</p:notes>
 </file>
 
 <file path=ppt/slideLayouts/slideLayout1.xml><?xml version="1.0" encoding="utf-8"?>
@@ -136,7 +1059,13 @@
       </p:grpSpPr>
       <p:sp>
         <p:nvSpPr>
-          <p:cNvPr id="2" name="Title 1"/>
+          <p:cNvPr id="2" name="Title 1">
+            <a:extLst>
+              <a:ext uri="{FF2B5EF4-FFF2-40B4-BE49-F238E27FC236}">
+                <a16:creationId xmlns:a16="http://schemas.microsoft.com/office/drawing/2014/main" id="{74CC47CA-50D6-4EDC-A782-E13DA54FF1F6}"/>
+              </a:ext>
+            </a:extLst>
+          </p:cNvPr>
           <p:cNvSpPr>
             <a:spLocks noGrp="1"/>
           </p:cNvSpPr>
@@ -155,16 +1084,20 @@
           <a:lstStyle/>
           <a:p>
             <a:r>
-              <a:rPr lang="en-US" smtClean="0"/>
               <a:t>Click to edit Master title style</a:t>
             </a:r>
-            <a:endParaRPr lang="en-US"/>
-          </a:p>
-        </p:txBody>
-      </p:sp>
-      <p:sp>
-        <p:nvSpPr>
-          <p:cNvPr id="3" name="Subtitle 2"/>
+          </a:p>
+        </p:txBody>
+      </p:sp>
+      <p:sp>
+        <p:nvSpPr>
+          <p:cNvPr id="3" name="Subtitle 2">
+            <a:extLst>
+              <a:ext uri="{FF2B5EF4-FFF2-40B4-BE49-F238E27FC236}">
+                <a16:creationId xmlns:a16="http://schemas.microsoft.com/office/drawing/2014/main" id="{3C48940C-3436-4084-A2EB-03C0D833778B}"/>
+              </a:ext>
+            </a:extLst>
+          </p:cNvPr>
           <p:cNvSpPr>
             <a:spLocks noGrp="1"/>
           </p:cNvSpPr>
@@ -274,21 +1207,25 @@
           </a:lstStyle>
           <a:p>
             <a:r>
-              <a:rPr lang="en-US" smtClean="0"/>
               <a:t>Click to edit Master subtitle style</a:t>
             </a:r>
-            <a:endParaRPr lang="en-US"/>
-          </a:p>
-        </p:txBody>
-      </p:sp>
-      <p:sp>
-        <p:nvSpPr>
-          <p:cNvPr id="4" name="Date Placeholder 3"/>
-          <p:cNvSpPr>
-            <a:spLocks noGrp="1"/>
-          </p:cNvSpPr>
-          <p:nvPr>
-            <p:ph type="dt" sz="half" idx="10"/>
+          </a:p>
+        </p:txBody>
+      </p:sp>
+      <p:sp>
+        <p:nvSpPr>
+          <p:cNvPr id="4" name="Date Placeholder 3">
+            <a:extLst>
+              <a:ext uri="{FF2B5EF4-FFF2-40B4-BE49-F238E27FC236}">
+                <a16:creationId xmlns:a16="http://schemas.microsoft.com/office/drawing/2014/main" id="{05CCAB78-F8F4-4104-B740-C14EE1EC1C93}"/>
+              </a:ext>
+            </a:extLst>
+          </p:cNvPr>
+          <p:cNvSpPr>
+            <a:spLocks noGrp="1"/>
+          </p:cNvSpPr>
+          <p:nvPr>
+            <p:ph type="dt" idx="10"/>
           </p:nvPr>
         </p:nvSpPr>
         <p:spPr/>
@@ -297,21 +1234,26 @@
           <a:lstStyle/>
           <a:p>
             <a:fld id="{5BCAD085-E8A6-8845-BD4E-CB4CCA059FC4}" type="datetimeFigureOut">
-              <a:rPr lang="en-US" smtClean="0"/>
-              <a:t>1/27/13</a:t>
+              <a:t>7/4/26</a:t>
             </a:fld>
-            <a:endParaRPr lang="en-US"/>
-          </a:p>
-        </p:txBody>
-      </p:sp>
-      <p:sp>
-        <p:nvSpPr>
-          <p:cNvPr id="5" name="Footer Placeholder 4"/>
-          <p:cNvSpPr>
-            <a:spLocks noGrp="1"/>
-          </p:cNvSpPr>
-          <p:nvPr>
-            <p:ph type="ftr" sz="quarter" idx="11"/>
+            <a:endParaRPr/>
+          </a:p>
+        </p:txBody>
+      </p:sp>
+      <p:sp>
+        <p:nvSpPr>
+          <p:cNvPr id="5" name="Footer Placeholder 4">
+            <a:extLst>
+              <a:ext uri="{FF2B5EF4-FFF2-40B4-BE49-F238E27FC236}">
+                <a16:creationId xmlns:a16="http://schemas.microsoft.com/office/drawing/2014/main" id="{DE1DAA6E-F6E3-4437-85A9-436ECE2FC1CD}"/>
+              </a:ext>
+            </a:extLst>
+          </p:cNvPr>
+          <p:cNvSpPr>
+            <a:spLocks noGrp="1"/>
+          </p:cNvSpPr>
+          <p:nvPr>
+            <p:ph type="ftr" idx="11"/>
           </p:nvPr>
         </p:nvSpPr>
         <p:spPr/>
@@ -319,18 +1261,24 @@
           <a:bodyPr/>
           <a:lstStyle/>
           <a:p>
-            <a:endParaRPr lang="en-US"/>
-          </a:p>
-        </p:txBody>
-      </p:sp>
-      <p:sp>
-        <p:nvSpPr>
-          <p:cNvPr id="6" name="Slide Number Placeholder 5"/>
-          <p:cNvSpPr>
-            <a:spLocks noGrp="1"/>
-          </p:cNvSpPr>
-          <p:nvPr>
-            <p:ph type="sldNum" sz="quarter" idx="12"/>
+            <a:endParaRPr/>
+          </a:p>
+        </p:txBody>
+      </p:sp>
+      <p:sp>
+        <p:nvSpPr>
+          <p:cNvPr id="6" name="Slide Number Placeholder 5">
+            <a:extLst>
+              <a:ext uri="{FF2B5EF4-FFF2-40B4-BE49-F238E27FC236}">
+                <a16:creationId xmlns:a16="http://schemas.microsoft.com/office/drawing/2014/main" id="{7BE4F376-5BA9-45B8-8E5F-C6B448CE3EC5}"/>
+              </a:ext>
+            </a:extLst>
+          </p:cNvPr>
+          <p:cNvSpPr>
+            <a:spLocks noGrp="1"/>
+          </p:cNvSpPr>
+          <p:nvPr>
+            <p:ph type="sldNum" idx="12"/>
           </p:nvPr>
         </p:nvSpPr>
         <p:spPr/>
@@ -339,19 +1287,13 @@
           <a:lstStyle/>
           <a:p>
             <a:fld id="{C1FF6DA9-008F-8B48-92A6-B652298478BF}" type="slidenum">
-              <a:rPr lang="en-US" smtClean="0"/>
               <a:t>‹#›</a:t>
             </a:fld>
-            <a:endParaRPr lang="en-US"/>
+            <a:endParaRPr/>
           </a:p>
         </p:txBody>
       </p:sp>
     </p:spTree>
-    <p:extLst>
-      <p:ext uri="{BB962C8B-B14F-4D97-AF65-F5344CB8AC3E}">
-        <p14:creationId xmlns:p14="http://schemas.microsoft.com/office/powerpoint/2010/main" val="3168075583"/>
-      </p:ext>
-    </p:extLst>
   </p:cSld>
   <p:clrMapOvr>
     <a:masterClrMapping/>
@@ -378,7 +1320,13 @@
       </p:grpSpPr>
       <p:sp>
         <p:nvSpPr>
-          <p:cNvPr id="2" name="Title 1"/>
+          <p:cNvPr id="2" name="Title 1">
+            <a:extLst>
+              <a:ext uri="{FF2B5EF4-FFF2-40B4-BE49-F238E27FC236}">
+                <a16:creationId xmlns:a16="http://schemas.microsoft.com/office/drawing/2014/main" id="{CE62A8DD-E27C-4201-8459-F6F68CD4FEEC}"/>
+              </a:ext>
+            </a:extLst>
+          </p:cNvPr>
           <p:cNvSpPr>
             <a:spLocks noGrp="1"/>
           </p:cNvSpPr>
@@ -392,21 +1340,25 @@
           <a:lstStyle/>
           <a:p>
             <a:r>
-              <a:rPr lang="en-US" smtClean="0"/>
               <a:t>Click to edit Master title style</a:t>
             </a:r>
-            <a:endParaRPr lang="en-US"/>
-          </a:p>
-        </p:txBody>
-      </p:sp>
-      <p:sp>
-        <p:nvSpPr>
-          <p:cNvPr id="3" name="Vertical Text Placeholder 2"/>
-          <p:cNvSpPr>
-            <a:spLocks noGrp="1"/>
-          </p:cNvSpPr>
-          <p:nvPr>
-            <p:ph type="body" orient="vert" idx="1"/>
+          </a:p>
+        </p:txBody>
+      </p:sp>
+      <p:sp>
+        <p:nvSpPr>
+          <p:cNvPr id="3" name="Vertical Text Placeholder 2">
+            <a:extLst>
+              <a:ext uri="{FF2B5EF4-FFF2-40B4-BE49-F238E27FC236}">
+                <a16:creationId xmlns:a16="http://schemas.microsoft.com/office/drawing/2014/main" id="{E60D90C3-33ED-4A40-BDDC-FF2F2664204E}"/>
+              </a:ext>
+            </a:extLst>
+          </p:cNvPr>
+          <p:cNvSpPr>
+            <a:spLocks noGrp="1"/>
+          </p:cNvSpPr>
+          <p:nvPr>
+            <p:ph type="body" idx="1"/>
           </p:nvPr>
         </p:nvSpPr>
         <p:spPr/>
@@ -414,51 +1366,61 @@
           <a:bodyPr vert="eaVert"/>
           <a:lstStyle/>
           <a:p>
-            <a:pPr lvl="0"/>
-            <a:r>
-              <a:rPr lang="en-US" smtClean="0"/>
+            <a:pPr>
+              <a:buNone/>
+            </a:pPr>
+            <a:r>
               <a:t>Click to edit Master text styles</a:t>
             </a:r>
           </a:p>
           <a:p>
-            <a:pPr lvl="1"/>
-            <a:r>
-              <a:rPr lang="en-US" smtClean="0"/>
+            <a:pPr>
+              <a:buNone/>
+            </a:pPr>
+            <a:r>
               <a:t>Second level</a:t>
             </a:r>
           </a:p>
           <a:p>
-            <a:pPr lvl="2"/>
-            <a:r>
-              <a:rPr lang="en-US" smtClean="0"/>
+            <a:pPr>
+              <a:buNone/>
+            </a:pPr>
+            <a:r>
               <a:t>Third level</a:t>
             </a:r>
           </a:p>
           <a:p>
-            <a:pPr lvl="3"/>
-            <a:r>
-              <a:rPr lang="en-US" smtClean="0"/>
+            <a:pPr>
+              <a:buNone/>
+            </a:pPr>
+            <a:r>
               <a:t>Fourth level</a:t>
             </a:r>
           </a:p>
           <a:p>
-            <a:pPr lvl="4"/>
-            <a:r>
-              <a:rPr lang="en-US" smtClean="0"/>
+            <a:pPr>
+              <a:buNone/>
+            </a:pPr>
+            <a:r>
               <a:t>Fifth level</a:t>
             </a:r>
-            <a:endParaRPr lang="en-US"/>
-          </a:p>
-        </p:txBody>
-      </p:sp>
-      <p:sp>
-        <p:nvSpPr>
-          <p:cNvPr id="4" name="Date Placeholder 3"/>
-          <p:cNvSpPr>
-            <a:spLocks noGrp="1"/>
-          </p:cNvSpPr>
-          <p:nvPr>
-            <p:ph type="dt" sz="half" idx="10"/>
+          </a:p>
+        </p:txBody>
+      </p:sp>
+      <p:sp>
+        <p:nvSpPr>
+          <p:cNvPr id="4" name="Date Placeholder 3">
+            <a:extLst>
+              <a:ext uri="{FF2B5EF4-FFF2-40B4-BE49-F238E27FC236}">
+                <a16:creationId xmlns:a16="http://schemas.microsoft.com/office/drawing/2014/main" id="{F1A3A8F0-A87F-4BD6-B028-7268E2B5A21D}"/>
+              </a:ext>
+            </a:extLst>
+          </p:cNvPr>
+          <p:cNvSpPr>
+            <a:spLocks noGrp="1"/>
+          </p:cNvSpPr>
+          <p:nvPr>
+            <p:ph type="dt" idx="10"/>
           </p:nvPr>
         </p:nvSpPr>
         <p:spPr/>
@@ -467,21 +1429,26 @@
           <a:lstStyle/>
           <a:p>
             <a:fld id="{5BCAD085-E8A6-8845-BD4E-CB4CCA059FC4}" type="datetimeFigureOut">
-              <a:rPr lang="en-US" smtClean="0"/>
-              <a:t>1/27/13</a:t>
+              <a:t>7/4/26</a:t>
             </a:fld>
-            <a:endParaRPr lang="en-US"/>
-          </a:p>
-        </p:txBody>
-      </p:sp>
-      <p:sp>
-        <p:nvSpPr>
-          <p:cNvPr id="5" name="Footer Placeholder 4"/>
-          <p:cNvSpPr>
-            <a:spLocks noGrp="1"/>
-          </p:cNvSpPr>
-          <p:nvPr>
-            <p:ph type="ftr" sz="quarter" idx="11"/>
+            <a:endParaRPr/>
+          </a:p>
+        </p:txBody>
+      </p:sp>
+      <p:sp>
+        <p:nvSpPr>
+          <p:cNvPr id="5" name="Footer Placeholder 4">
+            <a:extLst>
+              <a:ext uri="{FF2B5EF4-FFF2-40B4-BE49-F238E27FC236}">
+                <a16:creationId xmlns:a16="http://schemas.microsoft.com/office/drawing/2014/main" id="{151D44B6-5CB4-4AE2-A1C5-E0E936CDA95D}"/>
+              </a:ext>
+            </a:extLst>
+          </p:cNvPr>
+          <p:cNvSpPr>
+            <a:spLocks noGrp="1"/>
+          </p:cNvSpPr>
+          <p:nvPr>
+            <p:ph type="ftr" idx="11"/>
           </p:nvPr>
         </p:nvSpPr>
         <p:spPr/>
@@ -489,18 +1456,24 @@
           <a:bodyPr/>
           <a:lstStyle/>
           <a:p>
-            <a:endParaRPr lang="en-US"/>
-          </a:p>
-        </p:txBody>
-      </p:sp>
-      <p:sp>
-        <p:nvSpPr>
-          <p:cNvPr id="6" name="Slide Number Placeholder 5"/>
-          <p:cNvSpPr>
-            <a:spLocks noGrp="1"/>
-          </p:cNvSpPr>
-          <p:nvPr>
-            <p:ph type="sldNum" sz="quarter" idx="12"/>
+            <a:endParaRPr/>
+          </a:p>
+        </p:txBody>
+      </p:sp>
+      <p:sp>
+        <p:nvSpPr>
+          <p:cNvPr id="6" name="Slide Number Placeholder 5">
+            <a:extLst>
+              <a:ext uri="{FF2B5EF4-FFF2-40B4-BE49-F238E27FC236}">
+                <a16:creationId xmlns:a16="http://schemas.microsoft.com/office/drawing/2014/main" id="{F165E04D-708F-4175-82DE-5F895C1F5342}"/>
+              </a:ext>
+            </a:extLst>
+          </p:cNvPr>
+          <p:cNvSpPr>
+            <a:spLocks noGrp="1"/>
+          </p:cNvSpPr>
+          <p:nvPr>
+            <p:ph type="sldNum" idx="12"/>
           </p:nvPr>
         </p:nvSpPr>
         <p:spPr/>
@@ -509,19 +1482,13 @@
           <a:lstStyle/>
           <a:p>
             <a:fld id="{C1FF6DA9-008F-8B48-92A6-B652298478BF}" type="slidenum">
-              <a:rPr lang="en-US" smtClean="0"/>
               <a:t>‹#›</a:t>
             </a:fld>
-            <a:endParaRPr lang="en-US"/>
+            <a:endParaRPr/>
           </a:p>
         </p:txBody>
       </p:sp>
     </p:spTree>
-    <p:extLst>
-      <p:ext uri="{BB962C8B-B14F-4D97-AF65-F5344CB8AC3E}">
-        <p14:creationId xmlns:p14="http://schemas.microsoft.com/office/powerpoint/2010/main" val="2910927964"/>
-      </p:ext>
-    </p:extLst>
   </p:cSld>
   <p:clrMapOvr>
     <a:masterClrMapping/>
@@ -548,12 +1515,18 @@
       </p:grpSpPr>
       <p:sp>
         <p:nvSpPr>
-          <p:cNvPr id="2" name="Vertical Title 1"/>
-          <p:cNvSpPr>
-            <a:spLocks noGrp="1"/>
-          </p:cNvSpPr>
-          <p:nvPr>
-            <p:ph type="title" orient="vert"/>
+          <p:cNvPr id="2" name="Vertical Title 1">
+            <a:extLst>
+              <a:ext uri="{FF2B5EF4-FFF2-40B4-BE49-F238E27FC236}">
+                <a16:creationId xmlns:a16="http://schemas.microsoft.com/office/drawing/2014/main" id="{A4075833-E023-458E-A152-47BAD907A385}"/>
+              </a:ext>
+            </a:extLst>
+          </p:cNvPr>
+          <p:cNvSpPr>
+            <a:spLocks noGrp="1"/>
+          </p:cNvSpPr>
+          <p:nvPr>
+            <p:ph type="title"/>
           </p:nvPr>
         </p:nvSpPr>
         <p:spPr>
@@ -567,21 +1540,25 @@
           <a:lstStyle/>
           <a:p>
             <a:r>
-              <a:rPr lang="en-US" smtClean="0"/>
               <a:t>Click to edit Master title style</a:t>
             </a:r>
-            <a:endParaRPr lang="en-US"/>
-          </a:p>
-        </p:txBody>
-      </p:sp>
-      <p:sp>
-        <p:nvSpPr>
-          <p:cNvPr id="3" name="Vertical Text Placeholder 2"/>
-          <p:cNvSpPr>
-            <a:spLocks noGrp="1"/>
-          </p:cNvSpPr>
-          <p:nvPr>
-            <p:ph type="body" orient="vert" idx="1"/>
+          </a:p>
+        </p:txBody>
+      </p:sp>
+      <p:sp>
+        <p:nvSpPr>
+          <p:cNvPr id="3" name="Vertical Text Placeholder 2">
+            <a:extLst>
+              <a:ext uri="{FF2B5EF4-FFF2-40B4-BE49-F238E27FC236}">
+                <a16:creationId xmlns:a16="http://schemas.microsoft.com/office/drawing/2014/main" id="{F9304091-0576-41B1-B057-F906D53F3D2E}"/>
+              </a:ext>
+            </a:extLst>
+          </p:cNvPr>
+          <p:cNvSpPr>
+            <a:spLocks noGrp="1"/>
+          </p:cNvSpPr>
+          <p:nvPr>
+            <p:ph type="body" idx="1"/>
           </p:nvPr>
         </p:nvSpPr>
         <p:spPr>
@@ -594,51 +1571,61 @@
           <a:bodyPr vert="eaVert"/>
           <a:lstStyle/>
           <a:p>
-            <a:pPr lvl="0"/>
-            <a:r>
-              <a:rPr lang="en-US" smtClean="0"/>
+            <a:pPr>
+              <a:buNone/>
+            </a:pPr>
+            <a:r>
               <a:t>Click to edit Master text styles</a:t>
             </a:r>
           </a:p>
           <a:p>
-            <a:pPr lvl="1"/>
-            <a:r>
-              <a:rPr lang="en-US" smtClean="0"/>
+            <a:pPr>
+              <a:buNone/>
+            </a:pPr>
+            <a:r>
               <a:t>Second level</a:t>
             </a:r>
           </a:p>
           <a:p>
-            <a:pPr lvl="2"/>
-            <a:r>
-              <a:rPr lang="en-US" smtClean="0"/>
+            <a:pPr>
+              <a:buNone/>
+            </a:pPr>
+            <a:r>
               <a:t>Third level</a:t>
             </a:r>
           </a:p>
           <a:p>
-            <a:pPr lvl="3"/>
-            <a:r>
-              <a:rPr lang="en-US" smtClean="0"/>
+            <a:pPr>
+              <a:buNone/>
+            </a:pPr>
+            <a:r>
               <a:t>Fourth level</a:t>
             </a:r>
           </a:p>
           <a:p>
-            <a:pPr lvl="4"/>
-            <a:r>
-              <a:rPr lang="en-US" smtClean="0"/>
+            <a:pPr>
+              <a:buNone/>
+            </a:pPr>
+            <a:r>
               <a:t>Fifth level</a:t>
             </a:r>
-            <a:endParaRPr lang="en-US"/>
-          </a:p>
-        </p:txBody>
-      </p:sp>
-      <p:sp>
-        <p:nvSpPr>
-          <p:cNvPr id="4" name="Date Placeholder 3"/>
-          <p:cNvSpPr>
-            <a:spLocks noGrp="1"/>
-          </p:cNvSpPr>
-          <p:nvPr>
-            <p:ph type="dt" sz="half" idx="10"/>
+          </a:p>
+        </p:txBody>
+      </p:sp>
+      <p:sp>
+        <p:nvSpPr>
+          <p:cNvPr id="4" name="Date Placeholder 3">
+            <a:extLst>
+              <a:ext uri="{FF2B5EF4-FFF2-40B4-BE49-F238E27FC236}">
+                <a16:creationId xmlns:a16="http://schemas.microsoft.com/office/drawing/2014/main" id="{F76CD16F-747F-4CCC-8F87-4F9C40BDEEC5}"/>
+              </a:ext>
+            </a:extLst>
+          </p:cNvPr>
+          <p:cNvSpPr>
+            <a:spLocks noGrp="1"/>
+          </p:cNvSpPr>
+          <p:nvPr>
+            <p:ph type="dt" idx="10"/>
           </p:nvPr>
         </p:nvSpPr>
         <p:spPr/>
@@ -647,21 +1634,26 @@
           <a:lstStyle/>
           <a:p>
             <a:fld id="{5BCAD085-E8A6-8845-BD4E-CB4CCA059FC4}" type="datetimeFigureOut">
-              <a:rPr lang="en-US" smtClean="0"/>
-              <a:t>1/27/13</a:t>
+              <a:t>7/4/26</a:t>
             </a:fld>
-            <a:endParaRPr lang="en-US"/>
-          </a:p>
-        </p:txBody>
-      </p:sp>
-      <p:sp>
-        <p:nvSpPr>
-          <p:cNvPr id="5" name="Footer Placeholder 4"/>
-          <p:cNvSpPr>
-            <a:spLocks noGrp="1"/>
-          </p:cNvSpPr>
-          <p:nvPr>
-            <p:ph type="ftr" sz="quarter" idx="11"/>
+            <a:endParaRPr/>
+          </a:p>
+        </p:txBody>
+      </p:sp>
+      <p:sp>
+        <p:nvSpPr>
+          <p:cNvPr id="5" name="Footer Placeholder 4">
+            <a:extLst>
+              <a:ext uri="{FF2B5EF4-FFF2-40B4-BE49-F238E27FC236}">
+                <a16:creationId xmlns:a16="http://schemas.microsoft.com/office/drawing/2014/main" id="{77BCE3F3-6448-4713-BA8F-EF779D3C7E4D}"/>
+              </a:ext>
+            </a:extLst>
+          </p:cNvPr>
+          <p:cNvSpPr>
+            <a:spLocks noGrp="1"/>
+          </p:cNvSpPr>
+          <p:nvPr>
+            <p:ph type="ftr" idx="11"/>
           </p:nvPr>
         </p:nvSpPr>
         <p:spPr/>
@@ -669,18 +1661,24 @@
           <a:bodyPr/>
           <a:lstStyle/>
           <a:p>
-            <a:endParaRPr lang="en-US"/>
-          </a:p>
-        </p:txBody>
-      </p:sp>
-      <p:sp>
-        <p:nvSpPr>
-          <p:cNvPr id="6" name="Slide Number Placeholder 5"/>
-          <p:cNvSpPr>
-            <a:spLocks noGrp="1"/>
-          </p:cNvSpPr>
-          <p:nvPr>
-            <p:ph type="sldNum" sz="quarter" idx="12"/>
+            <a:endParaRPr/>
+          </a:p>
+        </p:txBody>
+      </p:sp>
+      <p:sp>
+        <p:nvSpPr>
+          <p:cNvPr id="6" name="Slide Number Placeholder 5">
+            <a:extLst>
+              <a:ext uri="{FF2B5EF4-FFF2-40B4-BE49-F238E27FC236}">
+                <a16:creationId xmlns:a16="http://schemas.microsoft.com/office/drawing/2014/main" id="{B9280D81-096F-4F89-9E1B-7BD8C760482F}"/>
+              </a:ext>
+            </a:extLst>
+          </p:cNvPr>
+          <p:cNvSpPr>
+            <a:spLocks noGrp="1"/>
+          </p:cNvSpPr>
+          <p:nvPr>
+            <p:ph type="sldNum" idx="12"/>
           </p:nvPr>
         </p:nvSpPr>
         <p:spPr/>
@@ -689,19 +1687,13 @@
           <a:lstStyle/>
           <a:p>
             <a:fld id="{C1FF6DA9-008F-8B48-92A6-B652298478BF}" type="slidenum">
-              <a:rPr lang="en-US" smtClean="0"/>
               <a:t>‹#›</a:t>
             </a:fld>
-            <a:endParaRPr lang="en-US"/>
+            <a:endParaRPr/>
           </a:p>
         </p:txBody>
       </p:sp>
     </p:spTree>
-    <p:extLst>
-      <p:ext uri="{BB962C8B-B14F-4D97-AF65-F5344CB8AC3E}">
-        <p14:creationId xmlns:p14="http://schemas.microsoft.com/office/powerpoint/2010/main" val="3612223792"/>
-      </p:ext>
-    </p:extLst>
   </p:cSld>
   <p:clrMapOvr>
     <a:masterClrMapping/>
@@ -728,7 +1720,13 @@
       </p:grpSpPr>
       <p:sp>
         <p:nvSpPr>
-          <p:cNvPr id="2" name="Title 1"/>
+          <p:cNvPr id="2" name="Title 1">
+            <a:extLst>
+              <a:ext uri="{FF2B5EF4-FFF2-40B4-BE49-F238E27FC236}">
+                <a16:creationId xmlns:a16="http://schemas.microsoft.com/office/drawing/2014/main" id="{F52CD04D-2B0C-4510-9E49-9D883F5566B7}"/>
+              </a:ext>
+            </a:extLst>
+          </p:cNvPr>
           <p:cNvSpPr>
             <a:spLocks noGrp="1"/>
           </p:cNvSpPr>
@@ -742,16 +1740,20 @@
           <a:lstStyle/>
           <a:p>
             <a:r>
-              <a:rPr lang="en-US" smtClean="0"/>
               <a:t>Click to edit Master title style</a:t>
             </a:r>
-            <a:endParaRPr lang="en-US"/>
-          </a:p>
-        </p:txBody>
-      </p:sp>
-      <p:sp>
-        <p:nvSpPr>
-          <p:cNvPr id="3" name="Content Placeholder 2"/>
+          </a:p>
+        </p:txBody>
+      </p:sp>
+      <p:sp>
+        <p:nvSpPr>
+          <p:cNvPr id="3" name="Content Placeholder 2">
+            <a:extLst>
+              <a:ext uri="{FF2B5EF4-FFF2-40B4-BE49-F238E27FC236}">
+                <a16:creationId xmlns:a16="http://schemas.microsoft.com/office/drawing/2014/main" id="{A939E5F3-7E11-406C-895D-C669B393277C}"/>
+              </a:ext>
+            </a:extLst>
+          </p:cNvPr>
           <p:cNvSpPr>
             <a:spLocks noGrp="1"/>
           </p:cNvSpPr>
@@ -764,51 +1766,61 @@
           <a:bodyPr/>
           <a:lstStyle/>
           <a:p>
-            <a:pPr lvl="0"/>
-            <a:r>
-              <a:rPr lang="en-US" smtClean="0"/>
+            <a:pPr>
+              <a:buNone/>
+            </a:pPr>
+            <a:r>
               <a:t>Click to edit Master text styles</a:t>
             </a:r>
           </a:p>
           <a:p>
-            <a:pPr lvl="1"/>
-            <a:r>
-              <a:rPr lang="en-US" smtClean="0"/>
+            <a:pPr>
+              <a:buNone/>
+            </a:pPr>
+            <a:r>
               <a:t>Second level</a:t>
             </a:r>
           </a:p>
           <a:p>
-            <a:pPr lvl="2"/>
-            <a:r>
-              <a:rPr lang="en-US" smtClean="0"/>
+            <a:pPr>
+              <a:buNone/>
+            </a:pPr>
+            <a:r>
               <a:t>Third level</a:t>
             </a:r>
           </a:p>
           <a:p>
-            <a:pPr lvl="3"/>
-            <a:r>
-              <a:rPr lang="en-US" smtClean="0"/>
+            <a:pPr>
+              <a:buNone/>
+            </a:pPr>
+            <a:r>
               <a:t>Fourth level</a:t>
             </a:r>
           </a:p>
           <a:p>
-            <a:pPr lvl="4"/>
-            <a:r>
-              <a:rPr lang="en-US" smtClean="0"/>
+            <a:pPr>
+              <a:buNone/>
+            </a:pPr>
+            <a:r>
               <a:t>Fifth level</a:t>
             </a:r>
-            <a:endParaRPr lang="en-US"/>
-          </a:p>
-        </p:txBody>
-      </p:sp>
-      <p:sp>
-        <p:nvSpPr>
-          <p:cNvPr id="4" name="Date Placeholder 3"/>
-          <p:cNvSpPr>
-            <a:spLocks noGrp="1"/>
-          </p:cNvSpPr>
-          <p:nvPr>
-            <p:ph type="dt" sz="half" idx="10"/>
+          </a:p>
+        </p:txBody>
+      </p:sp>
+      <p:sp>
+        <p:nvSpPr>
+          <p:cNvPr id="4" name="Date Placeholder 3">
+            <a:extLst>
+              <a:ext uri="{FF2B5EF4-FFF2-40B4-BE49-F238E27FC236}">
+                <a16:creationId xmlns:a16="http://schemas.microsoft.com/office/drawing/2014/main" id="{C056E2B2-3F9E-452C-AC93-55ECD59E9036}"/>
+              </a:ext>
+            </a:extLst>
+          </p:cNvPr>
+          <p:cNvSpPr>
+            <a:spLocks noGrp="1"/>
+          </p:cNvSpPr>
+          <p:nvPr>
+            <p:ph type="dt" idx="10"/>
           </p:nvPr>
         </p:nvSpPr>
         <p:spPr/>
@@ -817,21 +1829,26 @@
           <a:lstStyle/>
           <a:p>
             <a:fld id="{5BCAD085-E8A6-8845-BD4E-CB4CCA059FC4}" type="datetimeFigureOut">
-              <a:rPr lang="en-US" smtClean="0"/>
-              <a:t>1/27/13</a:t>
+              <a:t>7/4/26</a:t>
             </a:fld>
-            <a:endParaRPr lang="en-US"/>
-          </a:p>
-        </p:txBody>
-      </p:sp>
-      <p:sp>
-        <p:nvSpPr>
-          <p:cNvPr id="5" name="Footer Placeholder 4"/>
-          <p:cNvSpPr>
-            <a:spLocks noGrp="1"/>
-          </p:cNvSpPr>
-          <p:nvPr>
-            <p:ph type="ftr" sz="quarter" idx="11"/>
+            <a:endParaRPr/>
+          </a:p>
+        </p:txBody>
+      </p:sp>
+      <p:sp>
+        <p:nvSpPr>
+          <p:cNvPr id="5" name="Footer Placeholder 4">
+            <a:extLst>
+              <a:ext uri="{FF2B5EF4-FFF2-40B4-BE49-F238E27FC236}">
+                <a16:creationId xmlns:a16="http://schemas.microsoft.com/office/drawing/2014/main" id="{B9C7986C-7E0C-4E03-B4C4-3B084CF40371}"/>
+              </a:ext>
+            </a:extLst>
+          </p:cNvPr>
+          <p:cNvSpPr>
+            <a:spLocks noGrp="1"/>
+          </p:cNvSpPr>
+          <p:nvPr>
+            <p:ph type="ftr" idx="11"/>
           </p:nvPr>
         </p:nvSpPr>
         <p:spPr/>
@@ -839,18 +1856,24 @@
           <a:bodyPr/>
           <a:lstStyle/>
           <a:p>
-            <a:endParaRPr lang="en-US"/>
-          </a:p>
-        </p:txBody>
-      </p:sp>
-      <p:sp>
-        <p:nvSpPr>
-          <p:cNvPr id="6" name="Slide Number Placeholder 5"/>
-          <p:cNvSpPr>
-            <a:spLocks noGrp="1"/>
-          </p:cNvSpPr>
-          <p:nvPr>
-            <p:ph type="sldNum" sz="quarter" idx="12"/>
+            <a:endParaRPr/>
+          </a:p>
+        </p:txBody>
+      </p:sp>
+      <p:sp>
+        <p:nvSpPr>
+          <p:cNvPr id="6" name="Slide Number Placeholder 5">
+            <a:extLst>
+              <a:ext uri="{FF2B5EF4-FFF2-40B4-BE49-F238E27FC236}">
+                <a16:creationId xmlns:a16="http://schemas.microsoft.com/office/drawing/2014/main" id="{345E4A1D-75C2-4B66-84D3-0B6D1F055D56}"/>
+              </a:ext>
+            </a:extLst>
+          </p:cNvPr>
+          <p:cNvSpPr>
+            <a:spLocks noGrp="1"/>
+          </p:cNvSpPr>
+          <p:nvPr>
+            <p:ph type="sldNum" idx="12"/>
           </p:nvPr>
         </p:nvSpPr>
         <p:spPr/>
@@ -859,19 +1882,13 @@
           <a:lstStyle/>
           <a:p>
             <a:fld id="{C1FF6DA9-008F-8B48-92A6-B652298478BF}" type="slidenum">
-              <a:rPr lang="en-US" smtClean="0"/>
               <a:t>‹#›</a:t>
             </a:fld>
-            <a:endParaRPr lang="en-US"/>
+            <a:endParaRPr/>
           </a:p>
         </p:txBody>
       </p:sp>
     </p:spTree>
-    <p:extLst>
-      <p:ext uri="{BB962C8B-B14F-4D97-AF65-F5344CB8AC3E}">
-        <p14:creationId xmlns:p14="http://schemas.microsoft.com/office/powerpoint/2010/main" val="2614314258"/>
-      </p:ext>
-    </p:extLst>
   </p:cSld>
   <p:clrMapOvr>
     <a:masterClrMapping/>
@@ -898,7 +1915,13 @@
       </p:grpSpPr>
       <p:sp>
         <p:nvSpPr>
-          <p:cNvPr id="2" name="Title 1"/>
+          <p:cNvPr id="2" name="Title 1">
+            <a:extLst>
+              <a:ext uri="{FF2B5EF4-FFF2-40B4-BE49-F238E27FC236}">
+                <a16:creationId xmlns:a16="http://schemas.microsoft.com/office/drawing/2014/main" id="{7D4BEE51-E12D-4376-8830-94E32793B43B}"/>
+              </a:ext>
+            </a:extLst>
+          </p:cNvPr>
           <p:cNvSpPr>
             <a:spLocks noGrp="1"/>
           </p:cNvSpPr>
@@ -916,21 +1939,26 @@
           <a:bodyPr anchor="t"/>
           <a:lstStyle>
             <a:lvl1pPr algn="l">
+              <a:buNone/>
               <a:defRPr sz="4000" b="1" cap="all"/>
             </a:lvl1pPr>
           </a:lstStyle>
           <a:p>
             <a:r>
-              <a:rPr lang="en-US" smtClean="0"/>
               <a:t>Click to edit Master title style</a:t>
             </a:r>
-            <a:endParaRPr lang="en-US"/>
-          </a:p>
-        </p:txBody>
-      </p:sp>
-      <p:sp>
-        <p:nvSpPr>
-          <p:cNvPr id="3" name="Text Placeholder 2"/>
+          </a:p>
+        </p:txBody>
+      </p:sp>
+      <p:sp>
+        <p:nvSpPr>
+          <p:cNvPr id="3" name="Text Placeholder 2">
+            <a:extLst>
+              <a:ext uri="{FF2B5EF4-FFF2-40B4-BE49-F238E27FC236}">
+                <a16:creationId xmlns:a16="http://schemas.microsoft.com/office/drawing/2014/main" id="{790D5068-57F8-472A-8A1C-48BAF3C54D68}"/>
+              </a:ext>
+            </a:extLst>
+          </p:cNvPr>
           <p:cNvSpPr>
             <a:spLocks noGrp="1"/>
           </p:cNvSpPr>
@@ -1039,9 +2067,10 @@
             </a:lvl9pPr>
           </a:lstStyle>
           <a:p>
-            <a:pPr lvl="0"/>
-            <a:r>
-              <a:rPr lang="en-US" smtClean="0"/>
+            <a:pPr>
+              <a:buNone/>
+            </a:pPr>
+            <a:r>
               <a:t>Click to edit Master text styles</a:t>
             </a:r>
           </a:p>
@@ -1049,12 +2078,18 @@
       </p:sp>
       <p:sp>
         <p:nvSpPr>
-          <p:cNvPr id="4" name="Date Placeholder 3"/>
-          <p:cNvSpPr>
-            <a:spLocks noGrp="1"/>
-          </p:cNvSpPr>
-          <p:nvPr>
-            <p:ph type="dt" sz="half" idx="10"/>
+          <p:cNvPr id="4" name="Date Placeholder 3">
+            <a:extLst>
+              <a:ext uri="{FF2B5EF4-FFF2-40B4-BE49-F238E27FC236}">
+                <a16:creationId xmlns:a16="http://schemas.microsoft.com/office/drawing/2014/main" id="{AC1335AE-9ECB-4A80-A38A-7E0FD073823D}"/>
+              </a:ext>
+            </a:extLst>
+          </p:cNvPr>
+          <p:cNvSpPr>
+            <a:spLocks noGrp="1"/>
+          </p:cNvSpPr>
+          <p:nvPr>
+            <p:ph type="dt" idx="10"/>
           </p:nvPr>
         </p:nvSpPr>
         <p:spPr/>
@@ -1063,21 +2098,26 @@
           <a:lstStyle/>
           <a:p>
             <a:fld id="{5BCAD085-E8A6-8845-BD4E-CB4CCA059FC4}" type="datetimeFigureOut">
-              <a:rPr lang="en-US" smtClean="0"/>
-              <a:t>1/27/13</a:t>
+              <a:t>7/4/26</a:t>
             </a:fld>
-            <a:endParaRPr lang="en-US"/>
-          </a:p>
-        </p:txBody>
-      </p:sp>
-      <p:sp>
-        <p:nvSpPr>
-          <p:cNvPr id="5" name="Footer Placeholder 4"/>
-          <p:cNvSpPr>
-            <a:spLocks noGrp="1"/>
-          </p:cNvSpPr>
-          <p:nvPr>
-            <p:ph type="ftr" sz="quarter" idx="11"/>
+            <a:endParaRPr/>
+          </a:p>
+        </p:txBody>
+      </p:sp>
+      <p:sp>
+        <p:nvSpPr>
+          <p:cNvPr id="5" name="Footer Placeholder 4">
+            <a:extLst>
+              <a:ext uri="{FF2B5EF4-FFF2-40B4-BE49-F238E27FC236}">
+                <a16:creationId xmlns:a16="http://schemas.microsoft.com/office/drawing/2014/main" id="{60836E5C-BD2C-4BCB-ABFA-9235B268676A}"/>
+              </a:ext>
+            </a:extLst>
+          </p:cNvPr>
+          <p:cNvSpPr>
+            <a:spLocks noGrp="1"/>
+          </p:cNvSpPr>
+          <p:nvPr>
+            <p:ph type="ftr" idx="11"/>
           </p:nvPr>
         </p:nvSpPr>
         <p:spPr/>
@@ -1085,18 +2125,24 @@
           <a:bodyPr/>
           <a:lstStyle/>
           <a:p>
-            <a:endParaRPr lang="en-US"/>
-          </a:p>
-        </p:txBody>
-      </p:sp>
-      <p:sp>
-        <p:nvSpPr>
-          <p:cNvPr id="6" name="Slide Number Placeholder 5"/>
-          <p:cNvSpPr>
-            <a:spLocks noGrp="1"/>
-          </p:cNvSpPr>
-          <p:nvPr>
-            <p:ph type="sldNum" sz="quarter" idx="12"/>
+            <a:endParaRPr/>
+          </a:p>
+        </p:txBody>
+      </p:sp>
+      <p:sp>
+        <p:nvSpPr>
+          <p:cNvPr id="6" name="Slide Number Placeholder 5">
+            <a:extLst>
+              <a:ext uri="{FF2B5EF4-FFF2-40B4-BE49-F238E27FC236}">
+                <a16:creationId xmlns:a16="http://schemas.microsoft.com/office/drawing/2014/main" id="{DE0CC26A-6A55-4BD6-90D5-41E1E144825A}"/>
+              </a:ext>
+            </a:extLst>
+          </p:cNvPr>
+          <p:cNvSpPr>
+            <a:spLocks noGrp="1"/>
+          </p:cNvSpPr>
+          <p:nvPr>
+            <p:ph type="sldNum" idx="12"/>
           </p:nvPr>
         </p:nvSpPr>
         <p:spPr/>
@@ -1105,19 +2151,13 @@
           <a:lstStyle/>
           <a:p>
             <a:fld id="{C1FF6DA9-008F-8B48-92A6-B652298478BF}" type="slidenum">
-              <a:rPr lang="en-US" smtClean="0"/>
               <a:t>‹#›</a:t>
             </a:fld>
-            <a:endParaRPr lang="en-US"/>
+            <a:endParaRPr/>
           </a:p>
         </p:txBody>
       </p:sp>
     </p:spTree>
-    <p:extLst>
-      <p:ext uri="{BB962C8B-B14F-4D97-AF65-F5344CB8AC3E}">
-        <p14:creationId xmlns:p14="http://schemas.microsoft.com/office/powerpoint/2010/main" val="960648375"/>
-      </p:ext>
-    </p:extLst>
   </p:cSld>
   <p:clrMapOvr>
     <a:masterClrMapping/>
@@ -1144,7 +2184,13 @@
       </p:grpSpPr>
       <p:sp>
         <p:nvSpPr>
-          <p:cNvPr id="2" name="Title 1"/>
+          <p:cNvPr id="2" name="Title 1">
+            <a:extLst>
+              <a:ext uri="{FF2B5EF4-FFF2-40B4-BE49-F238E27FC236}">
+                <a16:creationId xmlns:a16="http://schemas.microsoft.com/office/drawing/2014/main" id="{A6603C39-A5E3-4E99-A98C-F36D006E350F}"/>
+              </a:ext>
+            </a:extLst>
+          </p:cNvPr>
           <p:cNvSpPr>
             <a:spLocks noGrp="1"/>
           </p:cNvSpPr>
@@ -1158,21 +2204,25 @@
           <a:lstStyle/>
           <a:p>
             <a:r>
-              <a:rPr lang="en-US" smtClean="0"/>
               <a:t>Click to edit Master title style</a:t>
             </a:r>
-            <a:endParaRPr lang="en-US"/>
-          </a:p>
-        </p:txBody>
-      </p:sp>
-      <p:sp>
-        <p:nvSpPr>
-          <p:cNvPr id="3" name="Content Placeholder 2"/>
-          <p:cNvSpPr>
-            <a:spLocks noGrp="1"/>
-          </p:cNvSpPr>
-          <p:nvPr>
-            <p:ph sz="half" idx="1"/>
+          </a:p>
+        </p:txBody>
+      </p:sp>
+      <p:sp>
+        <p:nvSpPr>
+          <p:cNvPr id="3" name="Content Placeholder 2">
+            <a:extLst>
+              <a:ext uri="{FF2B5EF4-FFF2-40B4-BE49-F238E27FC236}">
+                <a16:creationId xmlns:a16="http://schemas.microsoft.com/office/drawing/2014/main" id="{B579A5D2-2A88-4662-8FBF-1190C077FC61}"/>
+              </a:ext>
+            </a:extLst>
+          </p:cNvPr>
+          <p:cNvSpPr>
+            <a:spLocks noGrp="1"/>
+          </p:cNvSpPr>
+          <p:nvPr>
+            <p:ph idx="1"/>
           </p:nvPr>
         </p:nvSpPr>
         <p:spPr>
@@ -1185,79 +2235,98 @@
           <a:bodyPr/>
           <a:lstStyle>
             <a:lvl1pPr>
+              <a:buNone/>
               <a:defRPr sz="2800"/>
             </a:lvl1pPr>
             <a:lvl2pPr>
+              <a:buNone/>
               <a:defRPr sz="2400"/>
             </a:lvl2pPr>
             <a:lvl3pPr>
+              <a:buNone/>
               <a:defRPr sz="2000"/>
             </a:lvl3pPr>
             <a:lvl4pPr>
+              <a:buNone/>
               <a:defRPr sz="1800"/>
             </a:lvl4pPr>
             <a:lvl5pPr>
+              <a:buNone/>
               <a:defRPr sz="1800"/>
             </a:lvl5pPr>
             <a:lvl6pPr>
+              <a:buNone/>
               <a:defRPr sz="1800"/>
             </a:lvl6pPr>
             <a:lvl7pPr>
+              <a:buNone/>
               <a:defRPr sz="1800"/>
             </a:lvl7pPr>
             <a:lvl8pPr>
+              <a:buNone/>
               <a:defRPr sz="1800"/>
             </a:lvl8pPr>
             <a:lvl9pPr>
+              <a:buNone/>
               <a:defRPr sz="1800"/>
             </a:lvl9pPr>
           </a:lstStyle>
           <a:p>
-            <a:pPr lvl="0"/>
-            <a:r>
-              <a:rPr lang="en-US" smtClean="0"/>
+            <a:pPr>
+              <a:buNone/>
+            </a:pPr>
+            <a:r>
               <a:t>Click to edit Master text styles</a:t>
             </a:r>
           </a:p>
           <a:p>
-            <a:pPr lvl="1"/>
-            <a:r>
-              <a:rPr lang="en-US" smtClean="0"/>
+            <a:pPr>
+              <a:buNone/>
+            </a:pPr>
+            <a:r>
               <a:t>Second level</a:t>
             </a:r>
           </a:p>
           <a:p>
-            <a:pPr lvl="2"/>
-            <a:r>
-              <a:rPr lang="en-US" smtClean="0"/>
+            <a:pPr>
+              <a:buNone/>
+            </a:pPr>
+            <a:r>
               <a:t>Third level</a:t>
             </a:r>
           </a:p>
           <a:p>
-            <a:pPr lvl="3"/>
-            <a:r>
-              <a:rPr lang="en-US" smtClean="0"/>
+            <a:pPr>
+              <a:buNone/>
+            </a:pPr>
+            <a:r>
               <a:t>Fourth level</a:t>
             </a:r>
           </a:p>
           <a:p>
-            <a:pPr lvl="4"/>
-            <a:r>
-              <a:rPr lang="en-US" smtClean="0"/>
+            <a:pPr>
+              <a:buNone/>
+            </a:pPr>
+            <a:r>
               <a:t>Fifth level</a:t>
             </a:r>
-            <a:endParaRPr lang="en-US"/>
-          </a:p>
-        </p:txBody>
-      </p:sp>
-      <p:sp>
-        <p:nvSpPr>
-          <p:cNvPr id="4" name="Content Placeholder 3"/>
-          <p:cNvSpPr>
-            <a:spLocks noGrp="1"/>
-          </p:cNvSpPr>
-          <p:nvPr>
-            <p:ph sz="half" idx="2"/>
+          </a:p>
+        </p:txBody>
+      </p:sp>
+      <p:sp>
+        <p:nvSpPr>
+          <p:cNvPr id="4" name="Content Placeholder 3">
+            <a:extLst>
+              <a:ext uri="{FF2B5EF4-FFF2-40B4-BE49-F238E27FC236}">
+                <a16:creationId xmlns:a16="http://schemas.microsoft.com/office/drawing/2014/main" id="{900B8A9D-732E-4BE2-B6DF-E1D452026920}"/>
+              </a:ext>
+            </a:extLst>
+          </p:cNvPr>
+          <p:cNvSpPr>
+            <a:spLocks noGrp="1"/>
+          </p:cNvSpPr>
+          <p:nvPr>
+            <p:ph idx="2"/>
           </p:nvPr>
         </p:nvSpPr>
         <p:spPr>
@@ -1270,79 +2339,98 @@
           <a:bodyPr/>
           <a:lstStyle>
             <a:lvl1pPr>
+              <a:buNone/>
               <a:defRPr sz="2800"/>
             </a:lvl1pPr>
             <a:lvl2pPr>
+              <a:buNone/>
               <a:defRPr sz="2400"/>
             </a:lvl2pPr>
             <a:lvl3pPr>
+              <a:buNone/>
               <a:defRPr sz="2000"/>
             </a:lvl3pPr>
             <a:lvl4pPr>
+              <a:buNone/>
               <a:defRPr sz="1800"/>
             </a:lvl4pPr>
             <a:lvl5pPr>
+              <a:buNone/>
               <a:defRPr sz="1800"/>
             </a:lvl5pPr>
             <a:lvl6pPr>
+              <a:buNone/>
               <a:defRPr sz="1800"/>
             </a:lvl6pPr>
             <a:lvl7pPr>
+              <a:buNone/>
               <a:defRPr sz="1800"/>
             </a:lvl7pPr>
             <a:lvl8pPr>
+              <a:buNone/>
               <a:defRPr sz="1800"/>
             </a:lvl8pPr>
             <a:lvl9pPr>
+              <a:buNone/>
               <a:defRPr sz="1800"/>
             </a:lvl9pPr>
           </a:lstStyle>
           <a:p>
-            <a:pPr lvl="0"/>
-            <a:r>
-              <a:rPr lang="en-US" smtClean="0"/>
+            <a:pPr>
+              <a:buNone/>
+            </a:pPr>
+            <a:r>
               <a:t>Click to edit Master text styles</a:t>
             </a:r>
           </a:p>
           <a:p>
-            <a:pPr lvl="1"/>
-            <a:r>
-              <a:rPr lang="en-US" smtClean="0"/>
+            <a:pPr>
+              <a:buNone/>
+            </a:pPr>
+            <a:r>
               <a:t>Second level</a:t>
             </a:r>
           </a:p>
           <a:p>
-            <a:pPr lvl="2"/>
-            <a:r>
-              <a:rPr lang="en-US" smtClean="0"/>
+            <a:pPr>
+              <a:buNone/>
+            </a:pPr>
+            <a:r>
               <a:t>Third level</a:t>
             </a:r>
           </a:p>
           <a:p>
-            <a:pPr lvl="3"/>
-            <a:r>
-              <a:rPr lang="en-US" smtClean="0"/>
+            <a:pPr>
+              <a:buNone/>
+            </a:pPr>
+            <a:r>
               <a:t>Fourth level</a:t>
             </a:r>
           </a:p>
           <a:p>
-            <a:pPr lvl="4"/>
-            <a:r>
-              <a:rPr lang="en-US" smtClean="0"/>
+            <a:pPr>
+              <a:buNone/>
+            </a:pPr>
+            <a:r>
               <a:t>Fifth level</a:t>
             </a:r>
-            <a:endParaRPr lang="en-US"/>
-          </a:p>
-        </p:txBody>
-      </p:sp>
-      <p:sp>
-        <p:nvSpPr>
-          <p:cNvPr id="5" name="Date Placeholder 4"/>
-          <p:cNvSpPr>
-            <a:spLocks noGrp="1"/>
-          </p:cNvSpPr>
-          <p:nvPr>
-            <p:ph type="dt" sz="half" idx="10"/>
+          </a:p>
+        </p:txBody>
+      </p:sp>
+      <p:sp>
+        <p:nvSpPr>
+          <p:cNvPr id="5" name="Date Placeholder 4">
+            <a:extLst>
+              <a:ext uri="{FF2B5EF4-FFF2-40B4-BE49-F238E27FC236}">
+                <a16:creationId xmlns:a16="http://schemas.microsoft.com/office/drawing/2014/main" id="{C3ABB1E2-6EAF-47EF-8A3A-4E6CD6DD683B}"/>
+              </a:ext>
+            </a:extLst>
+          </p:cNvPr>
+          <p:cNvSpPr>
+            <a:spLocks noGrp="1"/>
+          </p:cNvSpPr>
+          <p:nvPr>
+            <p:ph type="dt" idx="10"/>
           </p:nvPr>
         </p:nvSpPr>
         <p:spPr/>
@@ -1351,21 +2439,26 @@
           <a:lstStyle/>
           <a:p>
             <a:fld id="{5BCAD085-E8A6-8845-BD4E-CB4CCA059FC4}" type="datetimeFigureOut">
-              <a:rPr lang="en-US" smtClean="0"/>
-              <a:t>1/27/13</a:t>
+              <a:t>7/4/26</a:t>
             </a:fld>
-            <a:endParaRPr lang="en-US"/>
-          </a:p>
-        </p:txBody>
-      </p:sp>
-      <p:sp>
-        <p:nvSpPr>
-          <p:cNvPr id="6" name="Footer Placeholder 5"/>
-          <p:cNvSpPr>
-            <a:spLocks noGrp="1"/>
-          </p:cNvSpPr>
-          <p:nvPr>
-            <p:ph type="ftr" sz="quarter" idx="11"/>
+            <a:endParaRPr/>
+          </a:p>
+        </p:txBody>
+      </p:sp>
+      <p:sp>
+        <p:nvSpPr>
+          <p:cNvPr id="6" name="Footer Placeholder 5">
+            <a:extLst>
+              <a:ext uri="{FF2B5EF4-FFF2-40B4-BE49-F238E27FC236}">
+                <a16:creationId xmlns:a16="http://schemas.microsoft.com/office/drawing/2014/main" id="{86358B11-C9BC-41C1-8078-73F84FD7ECC4}"/>
+              </a:ext>
+            </a:extLst>
+          </p:cNvPr>
+          <p:cNvSpPr>
+            <a:spLocks noGrp="1"/>
+          </p:cNvSpPr>
+          <p:nvPr>
+            <p:ph type="ftr" idx="11"/>
           </p:nvPr>
         </p:nvSpPr>
         <p:spPr/>
@@ -1373,18 +2466,24 @@
           <a:bodyPr/>
           <a:lstStyle/>
           <a:p>
-            <a:endParaRPr lang="en-US"/>
-          </a:p>
-        </p:txBody>
-      </p:sp>
-      <p:sp>
-        <p:nvSpPr>
-          <p:cNvPr id="7" name="Slide Number Placeholder 6"/>
-          <p:cNvSpPr>
-            <a:spLocks noGrp="1"/>
-          </p:cNvSpPr>
-          <p:nvPr>
-            <p:ph type="sldNum" sz="quarter" idx="12"/>
+            <a:endParaRPr/>
+          </a:p>
+        </p:txBody>
+      </p:sp>
+      <p:sp>
+        <p:nvSpPr>
+          <p:cNvPr id="7" name="Slide Number Placeholder 6">
+            <a:extLst>
+              <a:ext uri="{FF2B5EF4-FFF2-40B4-BE49-F238E27FC236}">
+                <a16:creationId xmlns:a16="http://schemas.microsoft.com/office/drawing/2014/main" id="{769B466F-9662-4316-80AD-CE4421AAD8FF}"/>
+              </a:ext>
+            </a:extLst>
+          </p:cNvPr>
+          <p:cNvSpPr>
+            <a:spLocks noGrp="1"/>
+          </p:cNvSpPr>
+          <p:nvPr>
+            <p:ph type="sldNum" idx="12"/>
           </p:nvPr>
         </p:nvSpPr>
         <p:spPr/>
@@ -1393,19 +2492,13 @@
           <a:lstStyle/>
           <a:p>
             <a:fld id="{C1FF6DA9-008F-8B48-92A6-B652298478BF}" type="slidenum">
-              <a:rPr lang="en-US" smtClean="0"/>
               <a:t>‹#›</a:t>
             </a:fld>
-            <a:endParaRPr lang="en-US"/>
+            <a:endParaRPr/>
           </a:p>
         </p:txBody>
       </p:sp>
     </p:spTree>
-    <p:extLst>
-      <p:ext uri="{BB962C8B-B14F-4D97-AF65-F5344CB8AC3E}">
-        <p14:creationId xmlns:p14="http://schemas.microsoft.com/office/powerpoint/2010/main" val="2782244947"/>
-      </p:ext>
-    </p:extLst>
   </p:cSld>
   <p:clrMapOvr>
     <a:masterClrMapping/>
@@ -1432,7 +2525,13 @@
       </p:grpSpPr>
       <p:sp>
         <p:nvSpPr>
-          <p:cNvPr id="2" name="Title 1"/>
+          <p:cNvPr id="2" name="Title 1">
+            <a:extLst>
+              <a:ext uri="{FF2B5EF4-FFF2-40B4-BE49-F238E27FC236}">
+                <a16:creationId xmlns:a16="http://schemas.microsoft.com/office/drawing/2014/main" id="{A4AC135C-35E7-480B-B390-CC075F23D0BE}"/>
+              </a:ext>
+            </a:extLst>
+          </p:cNvPr>
           <p:cNvSpPr>
             <a:spLocks noGrp="1"/>
           </p:cNvSpPr>
@@ -1445,21 +2544,26 @@
           <a:bodyPr/>
           <a:lstStyle>
             <a:lvl1pPr>
+              <a:buNone/>
               <a:defRPr/>
             </a:lvl1pPr>
           </a:lstStyle>
           <a:p>
             <a:r>
-              <a:rPr lang="en-US" smtClean="0"/>
               <a:t>Click to edit Master title style</a:t>
             </a:r>
-            <a:endParaRPr lang="en-US"/>
-          </a:p>
-        </p:txBody>
-      </p:sp>
-      <p:sp>
-        <p:nvSpPr>
-          <p:cNvPr id="3" name="Text Placeholder 2"/>
+          </a:p>
+        </p:txBody>
+      </p:sp>
+      <p:sp>
+        <p:nvSpPr>
+          <p:cNvPr id="3" name="Text Placeholder 2">
+            <a:extLst>
+              <a:ext uri="{FF2B5EF4-FFF2-40B4-BE49-F238E27FC236}">
+                <a16:creationId xmlns:a16="http://schemas.microsoft.com/office/drawing/2014/main" id="{C4DEEEB0-1CFF-4423-87B3-7974C726C289}"/>
+              </a:ext>
+            </a:extLst>
+          </p:cNvPr>
           <p:cNvSpPr>
             <a:spLocks noGrp="1"/>
           </p:cNvSpPr>
@@ -1514,9 +2618,10 @@
             </a:lvl9pPr>
           </a:lstStyle>
           <a:p>
-            <a:pPr lvl="0"/>
-            <a:r>
-              <a:rPr lang="en-US" smtClean="0"/>
+            <a:pPr>
+              <a:buNone/>
+            </a:pPr>
+            <a:r>
               <a:t>Click to edit Master text styles</a:t>
             </a:r>
           </a:p>
@@ -1524,12 +2629,18 @@
       </p:sp>
       <p:sp>
         <p:nvSpPr>
-          <p:cNvPr id="4" name="Content Placeholder 3"/>
-          <p:cNvSpPr>
-            <a:spLocks noGrp="1"/>
-          </p:cNvSpPr>
-          <p:nvPr>
-            <p:ph sz="half" idx="2"/>
+          <p:cNvPr id="4" name="Content Placeholder 3">
+            <a:extLst>
+              <a:ext uri="{FF2B5EF4-FFF2-40B4-BE49-F238E27FC236}">
+                <a16:creationId xmlns:a16="http://schemas.microsoft.com/office/drawing/2014/main" id="{FA057DB0-9F5E-4958-AA7C-53B728C3D221}"/>
+              </a:ext>
+            </a:extLst>
+          </p:cNvPr>
+          <p:cNvSpPr>
+            <a:spLocks noGrp="1"/>
+          </p:cNvSpPr>
+          <p:nvPr>
+            <p:ph idx="2"/>
           </p:nvPr>
         </p:nvSpPr>
         <p:spPr>
@@ -1542,79 +2653,98 @@
           <a:bodyPr/>
           <a:lstStyle>
             <a:lvl1pPr>
+              <a:buNone/>
               <a:defRPr sz="2400"/>
             </a:lvl1pPr>
             <a:lvl2pPr>
+              <a:buNone/>
               <a:defRPr sz="2000"/>
             </a:lvl2pPr>
             <a:lvl3pPr>
+              <a:buNone/>
               <a:defRPr sz="1800"/>
             </a:lvl3pPr>
             <a:lvl4pPr>
+              <a:buNone/>
               <a:defRPr sz="1600"/>
             </a:lvl4pPr>
             <a:lvl5pPr>
+              <a:buNone/>
               <a:defRPr sz="1600"/>
             </a:lvl5pPr>
             <a:lvl6pPr>
+              <a:buNone/>
               <a:defRPr sz="1600"/>
             </a:lvl6pPr>
             <a:lvl7pPr>
+              <a:buNone/>
               <a:defRPr sz="1600"/>
             </a:lvl7pPr>
             <a:lvl8pPr>
+              <a:buNone/>
               <a:defRPr sz="1600"/>
             </a:lvl8pPr>
             <a:lvl9pPr>
+              <a:buNone/>
               <a:defRPr sz="1600"/>
             </a:lvl9pPr>
           </a:lstStyle>
           <a:p>
-            <a:pPr lvl="0"/>
-            <a:r>
-              <a:rPr lang="en-US" smtClean="0"/>
+            <a:pPr>
+              <a:buNone/>
+            </a:pPr>
+            <a:r>
               <a:t>Click to edit Master text styles</a:t>
             </a:r>
           </a:p>
           <a:p>
-            <a:pPr lvl="1"/>
-            <a:r>
-              <a:rPr lang="en-US" smtClean="0"/>
+            <a:pPr>
+              <a:buNone/>
+            </a:pPr>
+            <a:r>
               <a:t>Second level</a:t>
             </a:r>
           </a:p>
           <a:p>
-            <a:pPr lvl="2"/>
-            <a:r>
-              <a:rPr lang="en-US" smtClean="0"/>
+            <a:pPr>
+              <a:buNone/>
+            </a:pPr>
+            <a:r>
               <a:t>Third level</a:t>
             </a:r>
           </a:p>
           <a:p>
-            <a:pPr lvl="3"/>
-            <a:r>
-              <a:rPr lang="en-US" smtClean="0"/>
+            <a:pPr>
+              <a:buNone/>
+            </a:pPr>
+            <a:r>
               <a:t>Fourth level</a:t>
             </a:r>
           </a:p>
           <a:p>
-            <a:pPr lvl="4"/>
-            <a:r>
-              <a:rPr lang="en-US" smtClean="0"/>
+            <a:pPr>
+              <a:buNone/>
+            </a:pPr>
+            <a:r>
               <a:t>Fifth level</a:t>
             </a:r>
-            <a:endParaRPr lang="en-US"/>
-          </a:p>
-        </p:txBody>
-      </p:sp>
-      <p:sp>
-        <p:nvSpPr>
-          <p:cNvPr id="5" name="Text Placeholder 4"/>
-          <p:cNvSpPr>
-            <a:spLocks noGrp="1"/>
-          </p:cNvSpPr>
-          <p:nvPr>
-            <p:ph type="body" sz="quarter" idx="3"/>
+          </a:p>
+        </p:txBody>
+      </p:sp>
+      <p:sp>
+        <p:nvSpPr>
+          <p:cNvPr id="5" name="Text Placeholder 4">
+            <a:extLst>
+              <a:ext uri="{FF2B5EF4-FFF2-40B4-BE49-F238E27FC236}">
+                <a16:creationId xmlns:a16="http://schemas.microsoft.com/office/drawing/2014/main" id="{B0F5BEF0-EB99-40B0-916A-F3BD7F9624E8}"/>
+              </a:ext>
+            </a:extLst>
+          </p:cNvPr>
+          <p:cNvSpPr>
+            <a:spLocks noGrp="1"/>
+          </p:cNvSpPr>
+          <p:nvPr>
+            <p:ph type="body" idx="3"/>
           </p:nvPr>
         </p:nvSpPr>
         <p:spPr>
@@ -1664,9 +2794,10 @@
             </a:lvl9pPr>
           </a:lstStyle>
           <a:p>
-            <a:pPr lvl="0"/>
-            <a:r>
-              <a:rPr lang="en-US" smtClean="0"/>
+            <a:pPr>
+              <a:buNone/>
+            </a:pPr>
+            <a:r>
               <a:t>Click to edit Master text styles</a:t>
             </a:r>
           </a:p>
@@ -1674,12 +2805,18 @@
       </p:sp>
       <p:sp>
         <p:nvSpPr>
-          <p:cNvPr id="6" name="Content Placeholder 5"/>
-          <p:cNvSpPr>
-            <a:spLocks noGrp="1"/>
-          </p:cNvSpPr>
-          <p:nvPr>
-            <p:ph sz="quarter" idx="4"/>
+          <p:cNvPr id="6" name="Content Placeholder 5">
+            <a:extLst>
+              <a:ext uri="{FF2B5EF4-FFF2-40B4-BE49-F238E27FC236}">
+                <a16:creationId xmlns:a16="http://schemas.microsoft.com/office/drawing/2014/main" id="{A7193612-60FA-45CD-9608-2298182EF59C}"/>
+              </a:ext>
+            </a:extLst>
+          </p:cNvPr>
+          <p:cNvSpPr>
+            <a:spLocks noGrp="1"/>
+          </p:cNvSpPr>
+          <p:nvPr>
+            <p:ph idx="4"/>
           </p:nvPr>
         </p:nvSpPr>
         <p:spPr>
@@ -1692,79 +2829,98 @@
           <a:bodyPr/>
           <a:lstStyle>
             <a:lvl1pPr>
+              <a:buNone/>
               <a:defRPr sz="2400"/>
             </a:lvl1pPr>
             <a:lvl2pPr>
+              <a:buNone/>
               <a:defRPr sz="2000"/>
             </a:lvl2pPr>
             <a:lvl3pPr>
+              <a:buNone/>
               <a:defRPr sz="1800"/>
             </a:lvl3pPr>
             <a:lvl4pPr>
+              <a:buNone/>
               <a:defRPr sz="1600"/>
             </a:lvl4pPr>
             <a:lvl5pPr>
+              <a:buNone/>
               <a:defRPr sz="1600"/>
             </a:lvl5pPr>
             <a:lvl6pPr>
+              <a:buNone/>
               <a:defRPr sz="1600"/>
             </a:lvl6pPr>
             <a:lvl7pPr>
+              <a:buNone/>
               <a:defRPr sz="1600"/>
             </a:lvl7pPr>
             <a:lvl8pPr>
+              <a:buNone/>
               <a:defRPr sz="1600"/>
             </a:lvl8pPr>
             <a:lvl9pPr>
+              <a:buNone/>
               <a:defRPr sz="1600"/>
             </a:lvl9pPr>
           </a:lstStyle>
           <a:p>
-            <a:pPr lvl="0"/>
-            <a:r>
-              <a:rPr lang="en-US" smtClean="0"/>
+            <a:pPr>
+              <a:buNone/>
+            </a:pPr>
+            <a:r>
               <a:t>Click to edit Master text styles</a:t>
             </a:r>
           </a:p>
           <a:p>
-            <a:pPr lvl="1"/>
-            <a:r>
-              <a:rPr lang="en-US" smtClean="0"/>
+            <a:pPr>
+              <a:buNone/>
+            </a:pPr>
+            <a:r>
               <a:t>Second level</a:t>
             </a:r>
           </a:p>
           <a:p>
-            <a:pPr lvl="2"/>
-            <a:r>
-              <a:rPr lang="en-US" smtClean="0"/>
+            <a:pPr>
+              <a:buNone/>
+            </a:pPr>
+            <a:r>
               <a:t>Third level</a:t>
             </a:r>
           </a:p>
           <a:p>
-            <a:pPr lvl="3"/>
-            <a:r>
-              <a:rPr lang="en-US" smtClean="0"/>
+            <a:pPr>
+              <a:buNone/>
+            </a:pPr>
+            <a:r>
               <a:t>Fourth level</a:t>
             </a:r>
           </a:p>
           <a:p>
-            <a:pPr lvl="4"/>
-            <a:r>
-              <a:rPr lang="en-US" smtClean="0"/>
+            <a:pPr>
+              <a:buNone/>
+            </a:pPr>
+            <a:r>
               <a:t>Fifth level</a:t>
             </a:r>
-            <a:endParaRPr lang="en-US"/>
-          </a:p>
-        </p:txBody>
-      </p:sp>
-      <p:sp>
-        <p:nvSpPr>
-          <p:cNvPr id="7" name="Date Placeholder 6"/>
-          <p:cNvSpPr>
-            <a:spLocks noGrp="1"/>
-          </p:cNvSpPr>
-          <p:nvPr>
-            <p:ph type="dt" sz="half" idx="10"/>
+          </a:p>
+        </p:txBody>
+      </p:sp>
+      <p:sp>
+        <p:nvSpPr>
+          <p:cNvPr id="7" name="Date Placeholder 6">
+            <a:extLst>
+              <a:ext uri="{FF2B5EF4-FFF2-40B4-BE49-F238E27FC236}">
+                <a16:creationId xmlns:a16="http://schemas.microsoft.com/office/drawing/2014/main" id="{2B9C4935-9061-4698-B96E-C7BFCC28B216}"/>
+              </a:ext>
+            </a:extLst>
+          </p:cNvPr>
+          <p:cNvSpPr>
+            <a:spLocks noGrp="1"/>
+          </p:cNvSpPr>
+          <p:nvPr>
+            <p:ph type="dt" idx="10"/>
           </p:nvPr>
         </p:nvSpPr>
         <p:spPr/>
@@ -1773,21 +2929,26 @@
           <a:lstStyle/>
           <a:p>
             <a:fld id="{5BCAD085-E8A6-8845-BD4E-CB4CCA059FC4}" type="datetimeFigureOut">
-              <a:rPr lang="en-US" smtClean="0"/>
-              <a:t>1/27/13</a:t>
+              <a:t>7/4/26</a:t>
             </a:fld>
-            <a:endParaRPr lang="en-US"/>
-          </a:p>
-        </p:txBody>
-      </p:sp>
-      <p:sp>
-        <p:nvSpPr>
-          <p:cNvPr id="8" name="Footer Placeholder 7"/>
-          <p:cNvSpPr>
-            <a:spLocks noGrp="1"/>
-          </p:cNvSpPr>
-          <p:nvPr>
-            <p:ph type="ftr" sz="quarter" idx="11"/>
+            <a:endParaRPr/>
+          </a:p>
+        </p:txBody>
+      </p:sp>
+      <p:sp>
+        <p:nvSpPr>
+          <p:cNvPr id="8" name="Footer Placeholder 7">
+            <a:extLst>
+              <a:ext uri="{FF2B5EF4-FFF2-40B4-BE49-F238E27FC236}">
+                <a16:creationId xmlns:a16="http://schemas.microsoft.com/office/drawing/2014/main" id="{7E309049-0F72-42B5-808D-FEB0BFE6E64F}"/>
+              </a:ext>
+            </a:extLst>
+          </p:cNvPr>
+          <p:cNvSpPr>
+            <a:spLocks noGrp="1"/>
+          </p:cNvSpPr>
+          <p:nvPr>
+            <p:ph type="ftr" idx="11"/>
           </p:nvPr>
         </p:nvSpPr>
         <p:spPr/>
@@ -1795,18 +2956,24 @@
           <a:bodyPr/>
           <a:lstStyle/>
           <a:p>
-            <a:endParaRPr lang="en-US"/>
-          </a:p>
-        </p:txBody>
-      </p:sp>
-      <p:sp>
-        <p:nvSpPr>
-          <p:cNvPr id="9" name="Slide Number Placeholder 8"/>
-          <p:cNvSpPr>
-            <a:spLocks noGrp="1"/>
-          </p:cNvSpPr>
-          <p:nvPr>
-            <p:ph type="sldNum" sz="quarter" idx="12"/>
+            <a:endParaRPr/>
+          </a:p>
+        </p:txBody>
+      </p:sp>
+      <p:sp>
+        <p:nvSpPr>
+          <p:cNvPr id="9" name="Slide Number Placeholder 8">
+            <a:extLst>
+              <a:ext uri="{FF2B5EF4-FFF2-40B4-BE49-F238E27FC236}">
+                <a16:creationId xmlns:a16="http://schemas.microsoft.com/office/drawing/2014/main" id="{8CC1CA5B-62C0-47D9-9E98-CFA1060F5C94}"/>
+              </a:ext>
+            </a:extLst>
+          </p:cNvPr>
+          <p:cNvSpPr>
+            <a:spLocks noGrp="1"/>
+          </p:cNvSpPr>
+          <p:nvPr>
+            <p:ph type="sldNum" idx="12"/>
           </p:nvPr>
         </p:nvSpPr>
         <p:spPr/>
@@ -1815,19 +2982,13 @@
           <a:lstStyle/>
           <a:p>
             <a:fld id="{C1FF6DA9-008F-8B48-92A6-B652298478BF}" type="slidenum">
-              <a:rPr lang="en-US" smtClean="0"/>
               <a:t>‹#›</a:t>
             </a:fld>
-            <a:endParaRPr lang="en-US"/>
+            <a:endParaRPr/>
           </a:p>
         </p:txBody>
       </p:sp>
     </p:spTree>
-    <p:extLst>
-      <p:ext uri="{BB962C8B-B14F-4D97-AF65-F5344CB8AC3E}">
-        <p14:creationId xmlns:p14="http://schemas.microsoft.com/office/powerpoint/2010/main" val="990158736"/>
-      </p:ext>
-    </p:extLst>
   </p:cSld>
   <p:clrMapOvr>
     <a:masterClrMapping/>
@@ -1854,7 +3015,13 @@
       </p:grpSpPr>
       <p:sp>
         <p:nvSpPr>
-          <p:cNvPr id="2" name="Title 1"/>
+          <p:cNvPr id="2" name="Title 1">
+            <a:extLst>
+              <a:ext uri="{FF2B5EF4-FFF2-40B4-BE49-F238E27FC236}">
+                <a16:creationId xmlns:a16="http://schemas.microsoft.com/office/drawing/2014/main" id="{F98C6D86-F588-4918-917F-639202B5B4DD}"/>
+              </a:ext>
+            </a:extLst>
+          </p:cNvPr>
           <p:cNvSpPr>
             <a:spLocks noGrp="1"/>
           </p:cNvSpPr>
@@ -1868,21 +3035,25 @@
           <a:lstStyle/>
           <a:p>
             <a:r>
-              <a:rPr lang="en-US" smtClean="0"/>
               <a:t>Click to edit Master title style</a:t>
             </a:r>
-            <a:endParaRPr lang="en-US"/>
-          </a:p>
-        </p:txBody>
-      </p:sp>
-      <p:sp>
-        <p:nvSpPr>
-          <p:cNvPr id="3" name="Date Placeholder 2"/>
-          <p:cNvSpPr>
-            <a:spLocks noGrp="1"/>
-          </p:cNvSpPr>
-          <p:nvPr>
-            <p:ph type="dt" sz="half" idx="10"/>
+          </a:p>
+        </p:txBody>
+      </p:sp>
+      <p:sp>
+        <p:nvSpPr>
+          <p:cNvPr id="3" name="Date Placeholder 2">
+            <a:extLst>
+              <a:ext uri="{FF2B5EF4-FFF2-40B4-BE49-F238E27FC236}">
+                <a16:creationId xmlns:a16="http://schemas.microsoft.com/office/drawing/2014/main" id="{BF0BBFEE-F5A5-4E9A-AAE5-85BD6157B0D0}"/>
+              </a:ext>
+            </a:extLst>
+          </p:cNvPr>
+          <p:cNvSpPr>
+            <a:spLocks noGrp="1"/>
+          </p:cNvSpPr>
+          <p:nvPr>
+            <p:ph type="dt" idx="10"/>
           </p:nvPr>
         </p:nvSpPr>
         <p:spPr/>
@@ -1891,21 +3062,26 @@
           <a:lstStyle/>
           <a:p>
             <a:fld id="{5BCAD085-E8A6-8845-BD4E-CB4CCA059FC4}" type="datetimeFigureOut">
-              <a:rPr lang="en-US" smtClean="0"/>
-              <a:t>1/27/13</a:t>
+              <a:t>7/4/26</a:t>
             </a:fld>
-            <a:endParaRPr lang="en-US"/>
-          </a:p>
-        </p:txBody>
-      </p:sp>
-      <p:sp>
-        <p:nvSpPr>
-          <p:cNvPr id="4" name="Footer Placeholder 3"/>
-          <p:cNvSpPr>
-            <a:spLocks noGrp="1"/>
-          </p:cNvSpPr>
-          <p:nvPr>
-            <p:ph type="ftr" sz="quarter" idx="11"/>
+            <a:endParaRPr/>
+          </a:p>
+        </p:txBody>
+      </p:sp>
+      <p:sp>
+        <p:nvSpPr>
+          <p:cNvPr id="4" name="Footer Placeholder 3">
+            <a:extLst>
+              <a:ext uri="{FF2B5EF4-FFF2-40B4-BE49-F238E27FC236}">
+                <a16:creationId xmlns:a16="http://schemas.microsoft.com/office/drawing/2014/main" id="{54AB8C27-7687-463F-81CB-3B68721FA9E0}"/>
+              </a:ext>
+            </a:extLst>
+          </p:cNvPr>
+          <p:cNvSpPr>
+            <a:spLocks noGrp="1"/>
+          </p:cNvSpPr>
+          <p:nvPr>
+            <p:ph type="ftr" idx="11"/>
           </p:nvPr>
         </p:nvSpPr>
         <p:spPr/>
@@ -1913,18 +3089,24 @@
           <a:bodyPr/>
           <a:lstStyle/>
           <a:p>
-            <a:endParaRPr lang="en-US"/>
-          </a:p>
-        </p:txBody>
-      </p:sp>
-      <p:sp>
-        <p:nvSpPr>
-          <p:cNvPr id="5" name="Slide Number Placeholder 4"/>
-          <p:cNvSpPr>
-            <a:spLocks noGrp="1"/>
-          </p:cNvSpPr>
-          <p:nvPr>
-            <p:ph type="sldNum" sz="quarter" idx="12"/>
+            <a:endParaRPr/>
+          </a:p>
+        </p:txBody>
+      </p:sp>
+      <p:sp>
+        <p:nvSpPr>
+          <p:cNvPr id="5" name="Slide Number Placeholder 4">
+            <a:extLst>
+              <a:ext uri="{FF2B5EF4-FFF2-40B4-BE49-F238E27FC236}">
+                <a16:creationId xmlns:a16="http://schemas.microsoft.com/office/drawing/2014/main" id="{B672C0C6-2681-403E-9410-736920223C6E}"/>
+              </a:ext>
+            </a:extLst>
+          </p:cNvPr>
+          <p:cNvSpPr>
+            <a:spLocks noGrp="1"/>
+          </p:cNvSpPr>
+          <p:nvPr>
+            <p:ph type="sldNum" idx="12"/>
           </p:nvPr>
         </p:nvSpPr>
         <p:spPr/>
@@ -1933,19 +3115,13 @@
           <a:lstStyle/>
           <a:p>
             <a:fld id="{C1FF6DA9-008F-8B48-92A6-B652298478BF}" type="slidenum">
-              <a:rPr lang="en-US" smtClean="0"/>
               <a:t>‹#›</a:t>
             </a:fld>
-            <a:endParaRPr lang="en-US"/>
+            <a:endParaRPr/>
           </a:p>
         </p:txBody>
       </p:sp>
     </p:spTree>
-    <p:extLst>
-      <p:ext uri="{BB962C8B-B14F-4D97-AF65-F5344CB8AC3E}">
-        <p14:creationId xmlns:p14="http://schemas.microsoft.com/office/powerpoint/2010/main" val="727027711"/>
-      </p:ext>
-    </p:extLst>
   </p:cSld>
   <p:clrMapOvr>
     <a:masterClrMapping/>
@@ -1972,12 +3148,18 @@
       </p:grpSpPr>
       <p:sp>
         <p:nvSpPr>
-          <p:cNvPr id="2" name="Date Placeholder 1"/>
-          <p:cNvSpPr>
-            <a:spLocks noGrp="1"/>
-          </p:cNvSpPr>
-          <p:nvPr>
-            <p:ph type="dt" sz="half" idx="10"/>
+          <p:cNvPr id="2" name="Date Placeholder 1">
+            <a:extLst>
+              <a:ext uri="{FF2B5EF4-FFF2-40B4-BE49-F238E27FC236}">
+                <a16:creationId xmlns:a16="http://schemas.microsoft.com/office/drawing/2014/main" id="{CA9E6899-8F40-4E9C-A0E4-C0F0CDEBC178}"/>
+              </a:ext>
+            </a:extLst>
+          </p:cNvPr>
+          <p:cNvSpPr>
+            <a:spLocks noGrp="1"/>
+          </p:cNvSpPr>
+          <p:nvPr>
+            <p:ph type="dt" idx="10"/>
           </p:nvPr>
         </p:nvSpPr>
         <p:spPr/>
@@ -1986,21 +3168,26 @@
           <a:lstStyle/>
           <a:p>
             <a:fld id="{5BCAD085-E8A6-8845-BD4E-CB4CCA059FC4}" type="datetimeFigureOut">
-              <a:rPr lang="en-US" smtClean="0"/>
-              <a:t>1/27/13</a:t>
+              <a:t>7/4/26</a:t>
             </a:fld>
-            <a:endParaRPr lang="en-US"/>
-          </a:p>
-        </p:txBody>
-      </p:sp>
-      <p:sp>
-        <p:nvSpPr>
-          <p:cNvPr id="3" name="Footer Placeholder 2"/>
-          <p:cNvSpPr>
-            <a:spLocks noGrp="1"/>
-          </p:cNvSpPr>
-          <p:nvPr>
-            <p:ph type="ftr" sz="quarter" idx="11"/>
+            <a:endParaRPr/>
+          </a:p>
+        </p:txBody>
+      </p:sp>
+      <p:sp>
+        <p:nvSpPr>
+          <p:cNvPr id="3" name="Footer Placeholder 2">
+            <a:extLst>
+              <a:ext uri="{FF2B5EF4-FFF2-40B4-BE49-F238E27FC236}">
+                <a16:creationId xmlns:a16="http://schemas.microsoft.com/office/drawing/2014/main" id="{5D0D9C7D-A483-451C-A264-33865CD2E8C1}"/>
+              </a:ext>
+            </a:extLst>
+          </p:cNvPr>
+          <p:cNvSpPr>
+            <a:spLocks noGrp="1"/>
+          </p:cNvSpPr>
+          <p:nvPr>
+            <p:ph type="ftr" idx="11"/>
           </p:nvPr>
         </p:nvSpPr>
         <p:spPr/>
@@ -2008,18 +3195,24 @@
           <a:bodyPr/>
           <a:lstStyle/>
           <a:p>
-            <a:endParaRPr lang="en-US"/>
-          </a:p>
-        </p:txBody>
-      </p:sp>
-      <p:sp>
-        <p:nvSpPr>
-          <p:cNvPr id="4" name="Slide Number Placeholder 3"/>
-          <p:cNvSpPr>
-            <a:spLocks noGrp="1"/>
-          </p:cNvSpPr>
-          <p:nvPr>
-            <p:ph type="sldNum" sz="quarter" idx="12"/>
+            <a:endParaRPr/>
+          </a:p>
+        </p:txBody>
+      </p:sp>
+      <p:sp>
+        <p:nvSpPr>
+          <p:cNvPr id="4" name="Slide Number Placeholder 3">
+            <a:extLst>
+              <a:ext uri="{FF2B5EF4-FFF2-40B4-BE49-F238E27FC236}">
+                <a16:creationId xmlns:a16="http://schemas.microsoft.com/office/drawing/2014/main" id="{787049D4-99B9-4203-942C-CAEEA1223962}"/>
+              </a:ext>
+            </a:extLst>
+          </p:cNvPr>
+          <p:cNvSpPr>
+            <a:spLocks noGrp="1"/>
+          </p:cNvSpPr>
+          <p:nvPr>
+            <p:ph type="sldNum" idx="12"/>
           </p:nvPr>
         </p:nvSpPr>
         <p:spPr/>
@@ -2028,19 +3221,13 @@
           <a:lstStyle/>
           <a:p>
             <a:fld id="{C1FF6DA9-008F-8B48-92A6-B652298478BF}" type="slidenum">
-              <a:rPr lang="en-US" smtClean="0"/>
               <a:t>‹#›</a:t>
             </a:fld>
-            <a:endParaRPr lang="en-US"/>
+            <a:endParaRPr/>
           </a:p>
         </p:txBody>
       </p:sp>
     </p:spTree>
-    <p:extLst>
-      <p:ext uri="{BB962C8B-B14F-4D97-AF65-F5344CB8AC3E}">
-        <p14:creationId xmlns:p14="http://schemas.microsoft.com/office/powerpoint/2010/main" val="1212999818"/>
-      </p:ext>
-    </p:extLst>
   </p:cSld>
   <p:clrMapOvr>
     <a:masterClrMapping/>
@@ -2067,7 +3254,13 @@
       </p:grpSpPr>
       <p:sp>
         <p:nvSpPr>
-          <p:cNvPr id="2" name="Title 1"/>
+          <p:cNvPr id="2" name="Title 1">
+            <a:extLst>
+              <a:ext uri="{FF2B5EF4-FFF2-40B4-BE49-F238E27FC236}">
+                <a16:creationId xmlns:a16="http://schemas.microsoft.com/office/drawing/2014/main" id="{B5FE8468-099D-45F2-B309-301F7F5DDD5E}"/>
+              </a:ext>
+            </a:extLst>
+          </p:cNvPr>
           <p:cNvSpPr>
             <a:spLocks noGrp="1"/>
           </p:cNvSpPr>
@@ -2085,21 +3278,26 @@
           <a:bodyPr anchor="b"/>
           <a:lstStyle>
             <a:lvl1pPr algn="l">
+              <a:buNone/>
               <a:defRPr sz="2000" b="1"/>
             </a:lvl1pPr>
           </a:lstStyle>
           <a:p>
             <a:r>
-              <a:rPr lang="en-US" smtClean="0"/>
               <a:t>Click to edit Master title style</a:t>
             </a:r>
-            <a:endParaRPr lang="en-US"/>
-          </a:p>
-        </p:txBody>
-      </p:sp>
-      <p:sp>
-        <p:nvSpPr>
-          <p:cNvPr id="3" name="Content Placeholder 2"/>
+          </a:p>
+        </p:txBody>
+      </p:sp>
+      <p:sp>
+        <p:nvSpPr>
+          <p:cNvPr id="3" name="Content Placeholder 2">
+            <a:extLst>
+              <a:ext uri="{FF2B5EF4-FFF2-40B4-BE49-F238E27FC236}">
+                <a16:creationId xmlns:a16="http://schemas.microsoft.com/office/drawing/2014/main" id="{F46CF688-575D-4C46-AC85-242FBBAF0054}"/>
+              </a:ext>
+            </a:extLst>
+          </p:cNvPr>
           <p:cNvSpPr>
             <a:spLocks noGrp="1"/>
           </p:cNvSpPr>
@@ -2117,79 +3315,98 @@
           <a:bodyPr/>
           <a:lstStyle>
             <a:lvl1pPr>
+              <a:buNone/>
               <a:defRPr sz="3200"/>
             </a:lvl1pPr>
             <a:lvl2pPr>
+              <a:buNone/>
               <a:defRPr sz="2800"/>
             </a:lvl2pPr>
             <a:lvl3pPr>
+              <a:buNone/>
               <a:defRPr sz="2400"/>
             </a:lvl3pPr>
             <a:lvl4pPr>
+              <a:buNone/>
               <a:defRPr sz="2000"/>
             </a:lvl4pPr>
             <a:lvl5pPr>
+              <a:buNone/>
               <a:defRPr sz="2000"/>
             </a:lvl5pPr>
             <a:lvl6pPr>
+              <a:buNone/>
               <a:defRPr sz="2000"/>
             </a:lvl6pPr>
             <a:lvl7pPr>
+              <a:buNone/>
               <a:defRPr sz="2000"/>
             </a:lvl7pPr>
             <a:lvl8pPr>
+              <a:buNone/>
               <a:defRPr sz="2000"/>
             </a:lvl8pPr>
             <a:lvl9pPr>
+              <a:buNone/>
               <a:defRPr sz="2000"/>
             </a:lvl9pPr>
           </a:lstStyle>
           <a:p>
-            <a:pPr lvl="0"/>
-            <a:r>
-              <a:rPr lang="en-US" smtClean="0"/>
+            <a:pPr>
+              <a:buNone/>
+            </a:pPr>
+            <a:r>
               <a:t>Click to edit Master text styles</a:t>
             </a:r>
           </a:p>
           <a:p>
-            <a:pPr lvl="1"/>
-            <a:r>
-              <a:rPr lang="en-US" smtClean="0"/>
+            <a:pPr>
+              <a:buNone/>
+            </a:pPr>
+            <a:r>
               <a:t>Second level</a:t>
             </a:r>
           </a:p>
           <a:p>
-            <a:pPr lvl="2"/>
-            <a:r>
-              <a:rPr lang="en-US" smtClean="0"/>
+            <a:pPr>
+              <a:buNone/>
+            </a:pPr>
+            <a:r>
               <a:t>Third level</a:t>
             </a:r>
           </a:p>
           <a:p>
-            <a:pPr lvl="3"/>
-            <a:r>
-              <a:rPr lang="en-US" smtClean="0"/>
+            <a:pPr>
+              <a:buNone/>
+            </a:pPr>
+            <a:r>
               <a:t>Fourth level</a:t>
             </a:r>
           </a:p>
           <a:p>
-            <a:pPr lvl="4"/>
-            <a:r>
-              <a:rPr lang="en-US" smtClean="0"/>
+            <a:pPr>
+              <a:buNone/>
+            </a:pPr>
+            <a:r>
               <a:t>Fifth level</a:t>
             </a:r>
-            <a:endParaRPr lang="en-US"/>
-          </a:p>
-        </p:txBody>
-      </p:sp>
-      <p:sp>
-        <p:nvSpPr>
-          <p:cNvPr id="4" name="Text Placeholder 3"/>
-          <p:cNvSpPr>
-            <a:spLocks noGrp="1"/>
-          </p:cNvSpPr>
-          <p:nvPr>
-            <p:ph type="body" sz="half" idx="2"/>
+          </a:p>
+        </p:txBody>
+      </p:sp>
+      <p:sp>
+        <p:nvSpPr>
+          <p:cNvPr id="4" name="Text Placeholder 3">
+            <a:extLst>
+              <a:ext uri="{FF2B5EF4-FFF2-40B4-BE49-F238E27FC236}">
+                <a16:creationId xmlns:a16="http://schemas.microsoft.com/office/drawing/2014/main" id="{F7024C26-4B72-434A-8CA6-E8943BA7581D}"/>
+              </a:ext>
+            </a:extLst>
+          </p:cNvPr>
+          <p:cNvSpPr>
+            <a:spLocks noGrp="1"/>
+          </p:cNvSpPr>
+          <p:nvPr>
+            <p:ph type="body" idx="2"/>
           </p:nvPr>
         </p:nvSpPr>
         <p:spPr>
@@ -2239,9 +3456,10 @@
             </a:lvl9pPr>
           </a:lstStyle>
           <a:p>
-            <a:pPr lvl="0"/>
-            <a:r>
-              <a:rPr lang="en-US" smtClean="0"/>
+            <a:pPr>
+              <a:buNone/>
+            </a:pPr>
+            <a:r>
               <a:t>Click to edit Master text styles</a:t>
             </a:r>
           </a:p>
@@ -2249,12 +3467,18 @@
       </p:sp>
       <p:sp>
         <p:nvSpPr>
-          <p:cNvPr id="5" name="Date Placeholder 4"/>
-          <p:cNvSpPr>
-            <a:spLocks noGrp="1"/>
-          </p:cNvSpPr>
-          <p:nvPr>
-            <p:ph type="dt" sz="half" idx="10"/>
+          <p:cNvPr id="5" name="Date Placeholder 4">
+            <a:extLst>
+              <a:ext uri="{FF2B5EF4-FFF2-40B4-BE49-F238E27FC236}">
+                <a16:creationId xmlns:a16="http://schemas.microsoft.com/office/drawing/2014/main" id="{FD43E391-0326-44C3-B49D-A413A0AE5528}"/>
+              </a:ext>
+            </a:extLst>
+          </p:cNvPr>
+          <p:cNvSpPr>
+            <a:spLocks noGrp="1"/>
+          </p:cNvSpPr>
+          <p:nvPr>
+            <p:ph type="dt" idx="10"/>
           </p:nvPr>
         </p:nvSpPr>
         <p:spPr/>
@@ -2263,21 +3487,26 @@
           <a:lstStyle/>
           <a:p>
             <a:fld id="{5BCAD085-E8A6-8845-BD4E-CB4CCA059FC4}" type="datetimeFigureOut">
-              <a:rPr lang="en-US" smtClean="0"/>
-              <a:t>1/27/13</a:t>
+              <a:t>7/4/26</a:t>
             </a:fld>
-            <a:endParaRPr lang="en-US"/>
-          </a:p>
-        </p:txBody>
-      </p:sp>
-      <p:sp>
-        <p:nvSpPr>
-          <p:cNvPr id="6" name="Footer Placeholder 5"/>
-          <p:cNvSpPr>
-            <a:spLocks noGrp="1"/>
-          </p:cNvSpPr>
-          <p:nvPr>
-            <p:ph type="ftr" sz="quarter" idx="11"/>
+            <a:endParaRPr/>
+          </a:p>
+        </p:txBody>
+      </p:sp>
+      <p:sp>
+        <p:nvSpPr>
+          <p:cNvPr id="6" name="Footer Placeholder 5">
+            <a:extLst>
+              <a:ext uri="{FF2B5EF4-FFF2-40B4-BE49-F238E27FC236}">
+                <a16:creationId xmlns:a16="http://schemas.microsoft.com/office/drawing/2014/main" id="{221CFADA-A45B-4433-A805-48C46A427A8D}"/>
+              </a:ext>
+            </a:extLst>
+          </p:cNvPr>
+          <p:cNvSpPr>
+            <a:spLocks noGrp="1"/>
+          </p:cNvSpPr>
+          <p:nvPr>
+            <p:ph type="ftr" idx="11"/>
           </p:nvPr>
         </p:nvSpPr>
         <p:spPr/>
@@ -2285,18 +3514,24 @@
           <a:bodyPr/>
           <a:lstStyle/>
           <a:p>
-            <a:endParaRPr lang="en-US"/>
-          </a:p>
-        </p:txBody>
-      </p:sp>
-      <p:sp>
-        <p:nvSpPr>
-          <p:cNvPr id="7" name="Slide Number Placeholder 6"/>
-          <p:cNvSpPr>
-            <a:spLocks noGrp="1"/>
-          </p:cNvSpPr>
-          <p:nvPr>
-            <p:ph type="sldNum" sz="quarter" idx="12"/>
+            <a:endParaRPr/>
+          </a:p>
+        </p:txBody>
+      </p:sp>
+      <p:sp>
+        <p:nvSpPr>
+          <p:cNvPr id="7" name="Slide Number Placeholder 6">
+            <a:extLst>
+              <a:ext uri="{FF2B5EF4-FFF2-40B4-BE49-F238E27FC236}">
+                <a16:creationId xmlns:a16="http://schemas.microsoft.com/office/drawing/2014/main" id="{F558EA63-4DB6-4914-A723-D229AC0C3473}"/>
+              </a:ext>
+            </a:extLst>
+          </p:cNvPr>
+          <p:cNvSpPr>
+            <a:spLocks noGrp="1"/>
+          </p:cNvSpPr>
+          <p:nvPr>
+            <p:ph type="sldNum" idx="12"/>
           </p:nvPr>
         </p:nvSpPr>
         <p:spPr/>
@@ -2305,19 +3540,13 @@
           <a:lstStyle/>
           <a:p>
             <a:fld id="{C1FF6DA9-008F-8B48-92A6-B652298478BF}" type="slidenum">
-              <a:rPr lang="en-US" smtClean="0"/>
               <a:t>‹#›</a:t>
             </a:fld>
-            <a:endParaRPr lang="en-US"/>
+            <a:endParaRPr/>
           </a:p>
         </p:txBody>
       </p:sp>
     </p:spTree>
-    <p:extLst>
-      <p:ext uri="{BB962C8B-B14F-4D97-AF65-F5344CB8AC3E}">
-        <p14:creationId xmlns:p14="http://schemas.microsoft.com/office/powerpoint/2010/main" val="1840726560"/>
-      </p:ext>
-    </p:extLst>
   </p:cSld>
   <p:clrMapOvr>
     <a:masterClrMapping/>
@@ -2344,7 +3573,13 @@
       </p:grpSpPr>
       <p:sp>
         <p:nvSpPr>
-          <p:cNvPr id="2" name="Title 1"/>
+          <p:cNvPr id="2" name="Title 1">
+            <a:extLst>
+              <a:ext uri="{FF2B5EF4-FFF2-40B4-BE49-F238E27FC236}">
+                <a16:creationId xmlns:a16="http://schemas.microsoft.com/office/drawing/2014/main" id="{25010292-C8B3-477A-800A-18E01DF99C9E}"/>
+              </a:ext>
+            </a:extLst>
+          </p:cNvPr>
           <p:cNvSpPr>
             <a:spLocks noGrp="1"/>
           </p:cNvSpPr>
@@ -2362,21 +3597,26 @@
           <a:bodyPr anchor="b"/>
           <a:lstStyle>
             <a:lvl1pPr algn="l">
+              <a:buNone/>
               <a:defRPr sz="2000" b="1"/>
             </a:lvl1pPr>
           </a:lstStyle>
           <a:p>
             <a:r>
-              <a:rPr lang="en-US" smtClean="0"/>
               <a:t>Click to edit Master title style</a:t>
             </a:r>
-            <a:endParaRPr lang="en-US"/>
-          </a:p>
-        </p:txBody>
-      </p:sp>
-      <p:sp>
-        <p:nvSpPr>
-          <p:cNvPr id="3" name="Picture Placeholder 2"/>
+          </a:p>
+        </p:txBody>
+      </p:sp>
+      <p:sp>
+        <p:nvSpPr>
+          <p:cNvPr id="3" name="Picture Placeholder 2">
+            <a:extLst>
+              <a:ext uri="{FF2B5EF4-FFF2-40B4-BE49-F238E27FC236}">
+                <a16:creationId xmlns:a16="http://schemas.microsoft.com/office/drawing/2014/main" id="{74FE97E5-850F-46B6-A20D-471E909B26E8}"/>
+              </a:ext>
+            </a:extLst>
+          </p:cNvPr>
           <p:cNvSpPr>
             <a:spLocks noGrp="1"/>
           </p:cNvSpPr>
@@ -2431,18 +3671,24 @@
             </a:lvl9pPr>
           </a:lstStyle>
           <a:p>
-            <a:endParaRPr lang="en-US"/>
-          </a:p>
-        </p:txBody>
-      </p:sp>
-      <p:sp>
-        <p:nvSpPr>
-          <p:cNvPr id="4" name="Text Placeholder 3"/>
-          <p:cNvSpPr>
-            <a:spLocks noGrp="1"/>
-          </p:cNvSpPr>
-          <p:nvPr>
-            <p:ph type="body" sz="half" idx="2"/>
+            <a:endParaRPr/>
+          </a:p>
+        </p:txBody>
+      </p:sp>
+      <p:sp>
+        <p:nvSpPr>
+          <p:cNvPr id="4" name="Text Placeholder 3">
+            <a:extLst>
+              <a:ext uri="{FF2B5EF4-FFF2-40B4-BE49-F238E27FC236}">
+                <a16:creationId xmlns:a16="http://schemas.microsoft.com/office/drawing/2014/main" id="{3295DF34-5566-4761-93F5-1D1AFCA61256}"/>
+              </a:ext>
+            </a:extLst>
+          </p:cNvPr>
+          <p:cNvSpPr>
+            <a:spLocks noGrp="1"/>
+          </p:cNvSpPr>
+          <p:nvPr>
+            <p:ph type="body" idx="2"/>
           </p:nvPr>
         </p:nvSpPr>
         <p:spPr>
@@ -2492,9 +3738,10 @@
             </a:lvl9pPr>
           </a:lstStyle>
           <a:p>
-            <a:pPr lvl="0"/>
-            <a:r>
-              <a:rPr lang="en-US" smtClean="0"/>
+            <a:pPr>
+              <a:buNone/>
+            </a:pPr>
+            <a:r>
               <a:t>Click to edit Master text styles</a:t>
             </a:r>
           </a:p>
@@ -2502,12 +3749,18 @@
       </p:sp>
       <p:sp>
         <p:nvSpPr>
-          <p:cNvPr id="5" name="Date Placeholder 4"/>
-          <p:cNvSpPr>
-            <a:spLocks noGrp="1"/>
-          </p:cNvSpPr>
-          <p:nvPr>
-            <p:ph type="dt" sz="half" idx="10"/>
+          <p:cNvPr id="5" name="Date Placeholder 4">
+            <a:extLst>
+              <a:ext uri="{FF2B5EF4-FFF2-40B4-BE49-F238E27FC236}">
+                <a16:creationId xmlns:a16="http://schemas.microsoft.com/office/drawing/2014/main" id="{6282B1E4-F2F7-41C6-9EED-8C7505182928}"/>
+              </a:ext>
+            </a:extLst>
+          </p:cNvPr>
+          <p:cNvSpPr>
+            <a:spLocks noGrp="1"/>
+          </p:cNvSpPr>
+          <p:nvPr>
+            <p:ph type="dt" idx="10"/>
           </p:nvPr>
         </p:nvSpPr>
         <p:spPr/>
@@ -2516,21 +3769,26 @@
           <a:lstStyle/>
           <a:p>
             <a:fld id="{5BCAD085-E8A6-8845-BD4E-CB4CCA059FC4}" type="datetimeFigureOut">
-              <a:rPr lang="en-US" smtClean="0"/>
-              <a:t>1/27/13</a:t>
+              <a:t>7/4/26</a:t>
             </a:fld>
-            <a:endParaRPr lang="en-US"/>
-          </a:p>
-        </p:txBody>
-      </p:sp>
-      <p:sp>
-        <p:nvSpPr>
-          <p:cNvPr id="6" name="Footer Placeholder 5"/>
-          <p:cNvSpPr>
-            <a:spLocks noGrp="1"/>
-          </p:cNvSpPr>
-          <p:nvPr>
-            <p:ph type="ftr" sz="quarter" idx="11"/>
+            <a:endParaRPr/>
+          </a:p>
+        </p:txBody>
+      </p:sp>
+      <p:sp>
+        <p:nvSpPr>
+          <p:cNvPr id="6" name="Footer Placeholder 5">
+            <a:extLst>
+              <a:ext uri="{FF2B5EF4-FFF2-40B4-BE49-F238E27FC236}">
+                <a16:creationId xmlns:a16="http://schemas.microsoft.com/office/drawing/2014/main" id="{4B9597BB-A807-46E2-8064-289E9E38B7D2}"/>
+              </a:ext>
+            </a:extLst>
+          </p:cNvPr>
+          <p:cNvSpPr>
+            <a:spLocks noGrp="1"/>
+          </p:cNvSpPr>
+          <p:nvPr>
+            <p:ph type="ftr" idx="11"/>
           </p:nvPr>
         </p:nvSpPr>
         <p:spPr/>
@@ -2538,18 +3796,24 @@
           <a:bodyPr/>
           <a:lstStyle/>
           <a:p>
-            <a:endParaRPr lang="en-US"/>
-          </a:p>
-        </p:txBody>
-      </p:sp>
-      <p:sp>
-        <p:nvSpPr>
-          <p:cNvPr id="7" name="Slide Number Placeholder 6"/>
-          <p:cNvSpPr>
-            <a:spLocks noGrp="1"/>
-          </p:cNvSpPr>
-          <p:nvPr>
-            <p:ph type="sldNum" sz="quarter" idx="12"/>
+            <a:endParaRPr/>
+          </a:p>
+        </p:txBody>
+      </p:sp>
+      <p:sp>
+        <p:nvSpPr>
+          <p:cNvPr id="7" name="Slide Number Placeholder 6">
+            <a:extLst>
+              <a:ext uri="{FF2B5EF4-FFF2-40B4-BE49-F238E27FC236}">
+                <a16:creationId xmlns:a16="http://schemas.microsoft.com/office/drawing/2014/main" id="{0B79706C-CC84-4AEE-84EE-EFFD8159DD34}"/>
+              </a:ext>
+            </a:extLst>
+          </p:cNvPr>
+          <p:cNvSpPr>
+            <a:spLocks noGrp="1"/>
+          </p:cNvSpPr>
+          <p:nvPr>
+            <p:ph type="sldNum" idx="12"/>
           </p:nvPr>
         </p:nvSpPr>
         <p:spPr/>
@@ -2558,19 +3822,13 @@
           <a:lstStyle/>
           <a:p>
             <a:fld id="{C1FF6DA9-008F-8B48-92A6-B652298478BF}" type="slidenum">
-              <a:rPr lang="en-US" smtClean="0"/>
               <a:t>‹#›</a:t>
             </a:fld>
-            <a:endParaRPr lang="en-US"/>
+            <a:endParaRPr/>
           </a:p>
         </p:txBody>
       </p:sp>
     </p:spTree>
-    <p:extLst>
-      <p:ext uri="{BB962C8B-B14F-4D97-AF65-F5344CB8AC3E}">
-        <p14:creationId xmlns:p14="http://schemas.microsoft.com/office/powerpoint/2010/main" val="3889236939"/>
-      </p:ext>
-    </p:extLst>
   </p:cSld>
   <p:clrMapOvr>
     <a:masterClrMapping/>
@@ -2602,7 +3860,13 @@
       </p:grpSpPr>
       <p:sp>
         <p:nvSpPr>
-          <p:cNvPr id="2" name="Title Placeholder 1"/>
+          <p:cNvPr id="2" name="Title Placeholder 1">
+            <a:extLst>
+              <a:ext uri="{FF2B5EF4-FFF2-40B4-BE49-F238E27FC236}">
+                <a16:creationId xmlns:a16="http://schemas.microsoft.com/office/drawing/2014/main" id="{F9F28B1A-E204-4FCB-93F1-5F7AA3960A81}"/>
+              </a:ext>
+            </a:extLst>
+          </p:cNvPr>
           <p:cNvSpPr>
             <a:spLocks noGrp="1"/>
           </p:cNvSpPr>
@@ -2620,22 +3884,26 @@
           </a:prstGeom>
         </p:spPr>
         <p:txBody>
-          <a:bodyPr vert="horz" lIns="91440" tIns="45720" rIns="91440" bIns="45720" rtlCol="0" anchor="ctr">
+          <a:bodyPr vert="horz" lIns="91440" tIns="45720" rIns="91440" bIns="45720" anchor="ctr">
             <a:normAutofit/>
           </a:bodyPr>
           <a:lstStyle/>
           <a:p>
             <a:r>
-              <a:rPr lang="en-US" smtClean="0"/>
               <a:t>Click to edit Master title style</a:t>
             </a:r>
-            <a:endParaRPr lang="en-US"/>
-          </a:p>
-        </p:txBody>
-      </p:sp>
-      <p:sp>
-        <p:nvSpPr>
-          <p:cNvPr id="3" name="Text Placeholder 2"/>
+          </a:p>
+        </p:txBody>
+      </p:sp>
+      <p:sp>
+        <p:nvSpPr>
+          <p:cNvPr id="3" name="Text Placeholder 2">
+            <a:extLst>
+              <a:ext uri="{FF2B5EF4-FFF2-40B4-BE49-F238E27FC236}">
+                <a16:creationId xmlns:a16="http://schemas.microsoft.com/office/drawing/2014/main" id="{4391396C-43DC-4CB0-805B-8BA71FCD9622}"/>
+              </a:ext>
+            </a:extLst>
+          </p:cNvPr>
           <p:cNvSpPr>
             <a:spLocks noGrp="1"/>
           </p:cNvSpPr>
@@ -2653,56 +3921,66 @@
           </a:prstGeom>
         </p:spPr>
         <p:txBody>
-          <a:bodyPr vert="horz" lIns="91440" tIns="45720" rIns="91440" bIns="45720" rtlCol="0">
+          <a:bodyPr vert="horz" lIns="91440" tIns="45720" rIns="91440" bIns="45720">
             <a:normAutofit/>
           </a:bodyPr>
           <a:lstStyle/>
           <a:p>
-            <a:pPr lvl="0"/>
-            <a:r>
-              <a:rPr lang="en-US" smtClean="0"/>
+            <a:pPr>
+              <a:buNone/>
+            </a:pPr>
+            <a:r>
               <a:t>Click to edit Master text styles</a:t>
             </a:r>
           </a:p>
           <a:p>
-            <a:pPr lvl="1"/>
-            <a:r>
-              <a:rPr lang="en-US" smtClean="0"/>
+            <a:pPr>
+              <a:buNone/>
+            </a:pPr>
+            <a:r>
               <a:t>Second level</a:t>
             </a:r>
           </a:p>
           <a:p>
-            <a:pPr lvl="2"/>
-            <a:r>
-              <a:rPr lang="en-US" smtClean="0"/>
+            <a:pPr>
+              <a:buNone/>
+            </a:pPr>
+            <a:r>
               <a:t>Third level</a:t>
             </a:r>
           </a:p>
           <a:p>
-            <a:pPr lvl="3"/>
-            <a:r>
-              <a:rPr lang="en-US" smtClean="0"/>
+            <a:pPr>
+              <a:buNone/>
+            </a:pPr>
+            <a:r>
               <a:t>Fourth level</a:t>
             </a:r>
           </a:p>
           <a:p>
-            <a:pPr lvl="4"/>
-            <a:r>
-              <a:rPr lang="en-US" smtClean="0"/>
+            <a:pPr>
+              <a:buNone/>
+            </a:pPr>
+            <a:r>
               <a:t>Fifth level</a:t>
             </a:r>
-            <a:endParaRPr lang="en-US"/>
-          </a:p>
-        </p:txBody>
-      </p:sp>
-      <p:sp>
-        <p:nvSpPr>
-          <p:cNvPr id="4" name="Date Placeholder 3"/>
-          <p:cNvSpPr>
-            <a:spLocks noGrp="1"/>
-          </p:cNvSpPr>
-          <p:nvPr>
-            <p:ph type="dt" sz="half" idx="2"/>
+          </a:p>
+        </p:txBody>
+      </p:sp>
+      <p:sp>
+        <p:nvSpPr>
+          <p:cNvPr id="4" name="Date Placeholder 3">
+            <a:extLst>
+              <a:ext uri="{FF2B5EF4-FFF2-40B4-BE49-F238E27FC236}">
+                <a16:creationId xmlns:a16="http://schemas.microsoft.com/office/drawing/2014/main" id="{9973987A-1CF3-4A1F-9DD3-4245E25F333E}"/>
+              </a:ext>
+            </a:extLst>
+          </p:cNvPr>
+          <p:cNvSpPr>
+            <a:spLocks noGrp="1"/>
+          </p:cNvSpPr>
+          <p:nvPr>
+            <p:ph type="dt" idx="2"/>
           </p:nvPr>
         </p:nvSpPr>
         <p:spPr>
@@ -2715,9 +3993,10 @@
           </a:prstGeom>
         </p:spPr>
         <p:txBody>
-          <a:bodyPr vert="horz" lIns="91440" tIns="45720" rIns="91440" bIns="45720" rtlCol="0" anchor="ctr"/>
+          <a:bodyPr vert="horz" lIns="91440" tIns="45720" rIns="91440" bIns="45720" anchor="ctr"/>
           <a:lstStyle>
             <a:lvl1pPr algn="l">
+              <a:buNone/>
               <a:defRPr sz="1200">
                 <a:solidFill>
                   <a:schemeClr val="tx1">
@@ -2729,21 +4008,26 @@
           </a:lstStyle>
           <a:p>
             <a:fld id="{5BCAD085-E8A6-8845-BD4E-CB4CCA059FC4}" type="datetimeFigureOut">
-              <a:rPr lang="en-US" smtClean="0"/>
-              <a:t>1/27/13</a:t>
+              <a:t>7/4/26</a:t>
             </a:fld>
-            <a:endParaRPr lang="en-US"/>
-          </a:p>
-        </p:txBody>
-      </p:sp>
-      <p:sp>
-        <p:nvSpPr>
-          <p:cNvPr id="5" name="Footer Placeholder 4"/>
-          <p:cNvSpPr>
-            <a:spLocks noGrp="1"/>
-          </p:cNvSpPr>
-          <p:nvPr>
-            <p:ph type="ftr" sz="quarter" idx="3"/>
+            <a:endParaRPr/>
+          </a:p>
+        </p:txBody>
+      </p:sp>
+      <p:sp>
+        <p:nvSpPr>
+          <p:cNvPr id="5" name="Footer Placeholder 4">
+            <a:extLst>
+              <a:ext uri="{FF2B5EF4-FFF2-40B4-BE49-F238E27FC236}">
+                <a16:creationId xmlns:a16="http://schemas.microsoft.com/office/drawing/2014/main" id="{122F758A-A055-48F8-8890-B861C6CD9785}"/>
+              </a:ext>
+            </a:extLst>
+          </p:cNvPr>
+          <p:cNvSpPr>
+            <a:spLocks noGrp="1"/>
+          </p:cNvSpPr>
+          <p:nvPr>
+            <p:ph type="ftr" idx="3"/>
           </p:nvPr>
         </p:nvSpPr>
         <p:spPr>
@@ -2756,9 +4040,10 @@
           </a:prstGeom>
         </p:spPr>
         <p:txBody>
-          <a:bodyPr vert="horz" lIns="91440" tIns="45720" rIns="91440" bIns="45720" rtlCol="0" anchor="ctr"/>
+          <a:bodyPr vert="horz" lIns="91440" tIns="45720" rIns="91440" bIns="45720" anchor="ctr"/>
           <a:lstStyle>
             <a:lvl1pPr algn="ctr">
+              <a:buNone/>
               <a:defRPr sz="1200">
                 <a:solidFill>
                   <a:schemeClr val="tx1">
@@ -2769,18 +4054,24 @@
             </a:lvl1pPr>
           </a:lstStyle>
           <a:p>
-            <a:endParaRPr lang="en-US"/>
-          </a:p>
-        </p:txBody>
-      </p:sp>
-      <p:sp>
-        <p:nvSpPr>
-          <p:cNvPr id="6" name="Slide Number Placeholder 5"/>
-          <p:cNvSpPr>
-            <a:spLocks noGrp="1"/>
-          </p:cNvSpPr>
-          <p:nvPr>
-            <p:ph type="sldNum" sz="quarter" idx="4"/>
+            <a:endParaRPr/>
+          </a:p>
+        </p:txBody>
+      </p:sp>
+      <p:sp>
+        <p:nvSpPr>
+          <p:cNvPr id="6" name="Slide Number Placeholder 5">
+            <a:extLst>
+              <a:ext uri="{FF2B5EF4-FFF2-40B4-BE49-F238E27FC236}">
+                <a16:creationId xmlns:a16="http://schemas.microsoft.com/office/drawing/2014/main" id="{80B0C24B-3564-4DB5-B917-653032D0416E}"/>
+              </a:ext>
+            </a:extLst>
+          </p:cNvPr>
+          <p:cNvSpPr>
+            <a:spLocks noGrp="1"/>
+          </p:cNvSpPr>
+          <p:nvPr>
+            <p:ph type="sldNum" idx="4"/>
           </p:nvPr>
         </p:nvSpPr>
         <p:spPr>
@@ -2793,9 +4084,10 @@
           </a:prstGeom>
         </p:spPr>
         <p:txBody>
-          <a:bodyPr vert="horz" lIns="91440" tIns="45720" rIns="91440" bIns="45720" rtlCol="0" anchor="ctr"/>
+          <a:bodyPr vert="horz" lIns="91440" tIns="45720" rIns="91440" bIns="45720" anchor="ctr"/>
           <a:lstStyle>
             <a:lvl1pPr algn="r">
+              <a:buNone/>
               <a:defRPr sz="1200">
                 <a:solidFill>
                   <a:schemeClr val="tx1">
@@ -2807,19 +4099,13 @@
           </a:lstStyle>
           <a:p>
             <a:fld id="{C1FF6DA9-008F-8B48-92A6-B652298478BF}" type="slidenum">
-              <a:rPr lang="en-US" smtClean="0"/>
               <a:t>‹#›</a:t>
             </a:fld>
-            <a:endParaRPr lang="en-US"/>
+            <a:endParaRPr/>
           </a:p>
         </p:txBody>
       </p:sp>
     </p:spTree>
-    <p:extLst>
-      <p:ext uri="{BB962C8B-B14F-4D97-AF65-F5344CB8AC3E}">
-        <p14:creationId xmlns:p14="http://schemas.microsoft.com/office/powerpoint/2010/main" val="2209977519"/>
-      </p:ext>
-    </p:extLst>
   </p:cSld>
   <p:clrMap bg1="lt1" tx1="dk1" bg2="lt2" tx2="dk2" accent1="accent1" accent2="accent2" accent3="accent3" accent4="accent4" accent5="accent5" accent6="accent6" hlink="hlink" folHlink="folHlink"/>
   <p:sldLayoutIdLst>
@@ -2837,250 +4123,217 @@
   </p:sldLayoutIdLst>
   <p:txStyles>
     <p:titleStyle>
-      <a:lvl1pPr algn="ctr" defTabSz="457200" rtl="0" eaLnBrk="1" latinLnBrk="0" hangingPunct="1">
-        <a:spcBef>
-          <a:spcPct val="0"/>
-        </a:spcBef>
+      <a:lvl1pPr algn="ctr">
         <a:buNone/>
-        <a:defRPr sz="4400" kern="1200">
+        <a:defRPr sz="4400">
           <a:solidFill>
             <a:schemeClr val="tx1"/>
           </a:solidFill>
           <a:latin typeface="+mj-lt"/>
-          <a:ea typeface="+mj-ea"/>
-          <a:cs typeface="+mj-cs"/>
+          <a:ea typeface="+mj-lt"/>
+          <a:cs typeface="+mj-lt"/>
         </a:defRPr>
       </a:lvl1pPr>
     </p:titleStyle>
     <p:bodyStyle>
-      <a:lvl1pPr marL="342900" indent="-342900" algn="l" defTabSz="457200" rtl="0" eaLnBrk="1" latinLnBrk="0" hangingPunct="1">
-        <a:spcBef>
-          <a:spcPct val="20000"/>
-        </a:spcBef>
-        <a:buFont typeface="Arial"/>
+      <a:lvl1pPr marL="342900" indent="-342900" algn="l">
         <a:buChar char="•"/>
-        <a:defRPr sz="3200" kern="1200">
+        <a:defRPr sz="3200">
           <a:solidFill>
             <a:schemeClr val="tx1"/>
           </a:solidFill>
           <a:latin typeface="+mn-lt"/>
-          <a:ea typeface="+mn-ea"/>
-          <a:cs typeface="+mn-cs"/>
+          <a:ea typeface="+mn-lt"/>
+          <a:cs typeface="+mn-lt"/>
         </a:defRPr>
       </a:lvl1pPr>
-      <a:lvl2pPr marL="742950" indent="-285750" algn="l" defTabSz="457200" rtl="0" eaLnBrk="1" latinLnBrk="0" hangingPunct="1">
-        <a:spcBef>
-          <a:spcPct val="20000"/>
-        </a:spcBef>
-        <a:buFont typeface="Arial"/>
+      <a:lvl2pPr marL="742950" indent="-285750" algn="l">
         <a:buChar char="–"/>
-        <a:defRPr sz="2800" kern="1200">
+        <a:defRPr sz="2800">
           <a:solidFill>
             <a:schemeClr val="tx1"/>
           </a:solidFill>
           <a:latin typeface="+mn-lt"/>
-          <a:ea typeface="+mn-ea"/>
-          <a:cs typeface="+mn-cs"/>
+          <a:ea typeface="+mn-lt"/>
+          <a:cs typeface="+mn-lt"/>
         </a:defRPr>
       </a:lvl2pPr>
-      <a:lvl3pPr marL="1143000" indent="-228600" algn="l" defTabSz="457200" rtl="0" eaLnBrk="1" latinLnBrk="0" hangingPunct="1">
-        <a:spcBef>
-          <a:spcPct val="20000"/>
-        </a:spcBef>
-        <a:buFont typeface="Arial"/>
+      <a:lvl3pPr marL="1143000" indent="-228600" algn="l">
         <a:buChar char="•"/>
-        <a:defRPr sz="2400" kern="1200">
+        <a:defRPr sz="2400">
           <a:solidFill>
             <a:schemeClr val="tx1"/>
           </a:solidFill>
           <a:latin typeface="+mn-lt"/>
-          <a:ea typeface="+mn-ea"/>
-          <a:cs typeface="+mn-cs"/>
+          <a:ea typeface="+mn-lt"/>
+          <a:cs typeface="+mn-lt"/>
         </a:defRPr>
       </a:lvl3pPr>
-      <a:lvl4pPr marL="1600200" indent="-228600" algn="l" defTabSz="457200" rtl="0" eaLnBrk="1" latinLnBrk="0" hangingPunct="1">
-        <a:spcBef>
-          <a:spcPct val="20000"/>
-        </a:spcBef>
-        <a:buFont typeface="Arial"/>
+      <a:lvl4pPr marL="1600200" indent="-228600" algn="l">
         <a:buChar char="–"/>
-        <a:defRPr sz="2000" kern="1200">
+        <a:defRPr sz="2000">
           <a:solidFill>
             <a:schemeClr val="tx1"/>
           </a:solidFill>
           <a:latin typeface="+mn-lt"/>
-          <a:ea typeface="+mn-ea"/>
-          <a:cs typeface="+mn-cs"/>
+          <a:ea typeface="+mn-lt"/>
+          <a:cs typeface="+mn-lt"/>
         </a:defRPr>
       </a:lvl4pPr>
-      <a:lvl5pPr marL="2057400" indent="-228600" algn="l" defTabSz="457200" rtl="0" eaLnBrk="1" latinLnBrk="0" hangingPunct="1">
-        <a:spcBef>
-          <a:spcPct val="20000"/>
-        </a:spcBef>
-        <a:buFont typeface="Arial"/>
+      <a:lvl5pPr marL="2057400" indent="-228600" algn="l">
         <a:buChar char="»"/>
-        <a:defRPr sz="2000" kern="1200">
+        <a:defRPr sz="2000">
           <a:solidFill>
             <a:schemeClr val="tx1"/>
           </a:solidFill>
           <a:latin typeface="+mn-lt"/>
-          <a:ea typeface="+mn-ea"/>
-          <a:cs typeface="+mn-cs"/>
+          <a:ea typeface="+mn-lt"/>
+          <a:cs typeface="+mn-lt"/>
         </a:defRPr>
       </a:lvl5pPr>
-      <a:lvl6pPr marL="2514600" indent="-228600" algn="l" defTabSz="457200" rtl="0" eaLnBrk="1" latinLnBrk="0" hangingPunct="1">
-        <a:spcBef>
-          <a:spcPct val="20000"/>
-        </a:spcBef>
-        <a:buFont typeface="Arial"/>
+      <a:lvl6pPr marL="2514600" indent="-228600" algn="l">
         <a:buChar char="•"/>
-        <a:defRPr sz="2000" kern="1200">
+        <a:defRPr sz="2000">
           <a:solidFill>
             <a:schemeClr val="tx1"/>
           </a:solidFill>
           <a:latin typeface="+mn-lt"/>
-          <a:ea typeface="+mn-ea"/>
-          <a:cs typeface="+mn-cs"/>
+          <a:ea typeface="+mn-lt"/>
+          <a:cs typeface="+mn-lt"/>
         </a:defRPr>
       </a:lvl6pPr>
-      <a:lvl7pPr marL="2971800" indent="-228600" algn="l" defTabSz="457200" rtl="0" eaLnBrk="1" latinLnBrk="0" hangingPunct="1">
-        <a:spcBef>
-          <a:spcPct val="20000"/>
-        </a:spcBef>
-        <a:buFont typeface="Arial"/>
+      <a:lvl7pPr marL="2971800" indent="-228600" algn="l">
         <a:buChar char="•"/>
-        <a:defRPr sz="2000" kern="1200">
+        <a:defRPr sz="2000">
           <a:solidFill>
             <a:schemeClr val="tx1"/>
           </a:solidFill>
           <a:latin typeface="+mn-lt"/>
-          <a:ea typeface="+mn-ea"/>
-          <a:cs typeface="+mn-cs"/>
+          <a:ea typeface="+mn-lt"/>
+          <a:cs typeface="+mn-lt"/>
         </a:defRPr>
       </a:lvl7pPr>
-      <a:lvl8pPr marL="3429000" indent="-228600" algn="l" defTabSz="457200" rtl="0" eaLnBrk="1" latinLnBrk="0" hangingPunct="1">
-        <a:spcBef>
-          <a:spcPct val="20000"/>
-        </a:spcBef>
-        <a:buFont typeface="Arial"/>
+      <a:lvl8pPr marL="3429000" indent="-228600" algn="l">
         <a:buChar char="•"/>
-        <a:defRPr sz="2000" kern="1200">
+        <a:defRPr sz="2000">
           <a:solidFill>
             <a:schemeClr val="tx1"/>
           </a:solidFill>
           <a:latin typeface="+mn-lt"/>
-          <a:ea typeface="+mn-ea"/>
-          <a:cs typeface="+mn-cs"/>
+          <a:ea typeface="+mn-lt"/>
+          <a:cs typeface="+mn-lt"/>
         </a:defRPr>
       </a:lvl8pPr>
-      <a:lvl9pPr marL="3886200" indent="-228600" algn="l" defTabSz="457200" rtl="0" eaLnBrk="1" latinLnBrk="0" hangingPunct="1">
-        <a:spcBef>
-          <a:spcPct val="20000"/>
-        </a:spcBef>
-        <a:buFont typeface="Arial"/>
+      <a:lvl9pPr marL="3886200" indent="-228600" algn="l">
         <a:buChar char="•"/>
-        <a:defRPr sz="2000" kern="1200">
+        <a:defRPr sz="2000">
           <a:solidFill>
             <a:schemeClr val="tx1"/>
           </a:solidFill>
           <a:latin typeface="+mn-lt"/>
-          <a:ea typeface="+mn-ea"/>
-          <a:cs typeface="+mn-cs"/>
+          <a:ea typeface="+mn-lt"/>
+          <a:cs typeface="+mn-lt"/>
         </a:defRPr>
       </a:lvl9pPr>
     </p:bodyStyle>
     <p:otherStyle>
-      <a:defPPr>
-        <a:defRPr lang="en-US"/>
-      </a:defPPr>
-      <a:lvl1pPr marL="0" algn="l" defTabSz="457200" rtl="0" eaLnBrk="1" latinLnBrk="0" hangingPunct="1">
-        <a:defRPr sz="1800" kern="1200">
+      <a:lvl1pPr marL="0" algn="l">
+        <a:buNone/>
+        <a:defRPr sz="1800">
           <a:solidFill>
             <a:schemeClr val="tx1"/>
           </a:solidFill>
           <a:latin typeface="+mn-lt"/>
-          <a:ea typeface="+mn-ea"/>
-          <a:cs typeface="+mn-cs"/>
+          <a:ea typeface="+mn-lt"/>
+          <a:cs typeface="+mn-lt"/>
         </a:defRPr>
       </a:lvl1pPr>
-      <a:lvl2pPr marL="457200" algn="l" defTabSz="457200" rtl="0" eaLnBrk="1" latinLnBrk="0" hangingPunct="1">
-        <a:defRPr sz="1800" kern="1200">
+      <a:lvl2pPr marL="457200" algn="l">
+        <a:buNone/>
+        <a:defRPr sz="1800">
           <a:solidFill>
             <a:schemeClr val="tx1"/>
           </a:solidFill>
           <a:latin typeface="+mn-lt"/>
-          <a:ea typeface="+mn-ea"/>
-          <a:cs typeface="+mn-cs"/>
+          <a:ea typeface="+mn-lt"/>
+          <a:cs typeface="+mn-lt"/>
         </a:defRPr>
       </a:lvl2pPr>
-      <a:lvl3pPr marL="914400" algn="l" defTabSz="457200" rtl="0" eaLnBrk="1" latinLnBrk="0" hangingPunct="1">
-        <a:defRPr sz="1800" kern="1200">
+      <a:lvl3pPr marL="914400" algn="l">
+        <a:buNone/>
+        <a:defRPr sz="1800">
           <a:solidFill>
             <a:schemeClr val="tx1"/>
           </a:solidFill>
           <a:latin typeface="+mn-lt"/>
-          <a:ea typeface="+mn-ea"/>
-          <a:cs typeface="+mn-cs"/>
+          <a:ea typeface="+mn-lt"/>
+          <a:cs typeface="+mn-lt"/>
         </a:defRPr>
       </a:lvl3pPr>
-      <a:lvl4pPr marL="1371600" algn="l" defTabSz="457200" rtl="0" eaLnBrk="1" latinLnBrk="0" hangingPunct="1">
-        <a:defRPr sz="1800" kern="1200">
+      <a:lvl4pPr marL="1371600" algn="l">
+        <a:buNone/>
+        <a:defRPr sz="1800">
           <a:solidFill>
             <a:schemeClr val="tx1"/>
           </a:solidFill>
           <a:latin typeface="+mn-lt"/>
-          <a:ea typeface="+mn-ea"/>
-          <a:cs typeface="+mn-cs"/>
+          <a:ea typeface="+mn-lt"/>
+          <a:cs typeface="+mn-lt"/>
         </a:defRPr>
       </a:lvl4pPr>
-      <a:lvl5pPr marL="1828800" algn="l" defTabSz="457200" rtl="0" eaLnBrk="1" latinLnBrk="0" hangingPunct="1">
-        <a:defRPr sz="1800" kern="1200">
+      <a:lvl5pPr marL="1828800" algn="l">
+        <a:buNone/>
+        <a:defRPr sz="1800">
           <a:solidFill>
             <a:schemeClr val="tx1"/>
           </a:solidFill>
           <a:latin typeface="+mn-lt"/>
-          <a:ea typeface="+mn-ea"/>
-          <a:cs typeface="+mn-cs"/>
+          <a:ea typeface="+mn-lt"/>
+          <a:cs typeface="+mn-lt"/>
         </a:defRPr>
       </a:lvl5pPr>
-      <a:lvl6pPr marL="2286000" algn="l" defTabSz="457200" rtl="0" eaLnBrk="1" latinLnBrk="0" hangingPunct="1">
-        <a:defRPr sz="1800" kern="1200">
+      <a:lvl6pPr marL="2286000" algn="l">
+        <a:buNone/>
+        <a:defRPr sz="1800">
           <a:solidFill>
             <a:schemeClr val="tx1"/>
           </a:solidFill>
           <a:latin typeface="+mn-lt"/>
-          <a:ea typeface="+mn-ea"/>
-          <a:cs typeface="+mn-cs"/>
+          <a:ea typeface="+mn-lt"/>
+          <a:cs typeface="+mn-lt"/>
         </a:defRPr>
       </a:lvl6pPr>
-      <a:lvl7pPr marL="2743200" algn="l" defTabSz="457200" rtl="0" eaLnBrk="1" latinLnBrk="0" hangingPunct="1">
-        <a:defRPr sz="1800" kern="1200">
+      <a:lvl7pPr marL="2743200" algn="l">
+        <a:buNone/>
+        <a:defRPr sz="1800">
           <a:solidFill>
             <a:schemeClr val="tx1"/>
           </a:solidFill>
           <a:latin typeface="+mn-lt"/>
-          <a:ea typeface="+mn-ea"/>
-          <a:cs typeface="+mn-cs"/>
+          <a:ea typeface="+mn-lt"/>
+          <a:cs typeface="+mn-lt"/>
         </a:defRPr>
       </a:lvl7pPr>
-      <a:lvl8pPr marL="3200400" algn="l" defTabSz="457200" rtl="0" eaLnBrk="1" latinLnBrk="0" hangingPunct="1">
-        <a:defRPr sz="1800" kern="1200">
+      <a:lvl8pPr marL="3200400" algn="l">
+        <a:buNone/>
+        <a:defRPr sz="1800">
           <a:solidFill>
             <a:schemeClr val="tx1"/>
           </a:solidFill>
           <a:latin typeface="+mn-lt"/>
-          <a:ea typeface="+mn-ea"/>
-          <a:cs typeface="+mn-cs"/>
+          <a:ea typeface="+mn-lt"/>
+          <a:cs typeface="+mn-lt"/>
         </a:defRPr>
       </a:lvl8pPr>
-      <a:lvl9pPr marL="3657600" algn="l" defTabSz="457200" rtl="0" eaLnBrk="1" latinLnBrk="0" hangingPunct="1">
-        <a:defRPr sz="1800" kern="1200">
+      <a:lvl9pPr marL="3657600" algn="l">
+        <a:buNone/>
+        <a:defRPr sz="1800">
           <a:solidFill>
             <a:schemeClr val="tx1"/>
           </a:solidFill>
           <a:latin typeface="+mn-lt"/>
-          <a:ea typeface="+mn-ea"/>
-          <a:cs typeface="+mn-cs"/>
+          <a:ea typeface="+mn-lt"/>
+          <a:cs typeface="+mn-lt"/>
         </a:defRPr>
       </a:lvl9pPr>
     </p:otherStyle>
@@ -3089,18 +4342,39 @@
 </file>
 
 <file path=ppt/slides/slide1.xml><?xml version="1.0" encoding="utf-8"?>
-<p:sld xmlns:a="http://schemas.openxmlformats.org/drawingml/2006/main" xmlns:p="http://schemas.openxmlformats.org/presentationml/2006/main" xmlns:r="http://schemas.openxmlformats.org/officeDocument/2006/relationships">
+<p:sld xmlns:a="http://schemas.openxmlformats.org/drawingml/2006/main" xmlns:r="http://schemas.openxmlformats.org/officeDocument/2006/relationships" xmlns:p="http://schemas.openxmlformats.org/presentationml/2006/main">
   <p:cSld>
+    <p:bg>
+      <p:bgPr>
+        <a:solidFill>
+          <a:srgbClr val="0B3D38"/>
+        </a:solidFill>
+        <a:effectLst/>
+      </p:bgPr>
+    </p:bg>
     <p:spTree>
       <p:nvGrpSpPr>
         <p:cNvPr id="1" name=""/>
         <p:cNvGrpSpPr/>
         <p:nvPr/>
       </p:nvGrpSpPr>
-      <p:grpSpPr/>
-      <p:sp>
-        <p:nvSpPr>
-          <p:cNvPr id="2" name="Title 1"/>
+      <p:grpSpPr>
+        <a:xfrm>
+          <a:off x="0" y="0"/>
+          <a:ext cx="0" cy="0"/>
+          <a:chOff x="0" y="0"/>
+          <a:chExt cx="0" cy="0"/>
+        </a:xfrm>
+      </p:grpSpPr>
+      <p:sp>
+        <p:nvSpPr>
+          <p:cNvPr id="2" name="Title 1">
+            <a:extLst>
+              <a:ext uri="{FF2B5EF4-FFF2-40B4-BE49-F238E27FC236}">
+                <a16:creationId xmlns:a16="http://schemas.microsoft.com/office/drawing/2014/main" id="{7261585E-705D-4054-A8CA-792C10D16BEC}"/>
+              </a:ext>
+            </a:extLst>
+          </p:cNvPr>
           <p:cNvSpPr>
             <a:spLocks noGrp="1"/>
           </p:cNvSpPr>
@@ -3108,27 +4382,55 @@
             <p:ph type="ctrTitle"/>
           </p:nvPr>
         </p:nvSpPr>
-        <p:spPr/>
-        <p:txBody>
-          <a:bodyPr/>
-          <a:lstStyle/>
-          <a:p>
-            <a:pPr>
-              <a:defRPr sz="5400">
-                <a:solidFill>
-                  <a:srgbClr val="0F2A43"/>
-                </a:solidFill>
+        <p:spPr>
+          <a:xfrm>
+            <a:off x="609600" y="781050"/>
+            <a:ext cx="3619500" cy="895350"/>
+          </a:xfrm>
+        </p:spPr>
+        <p:txBody>
+          <a:bodyPr wrap="square" lIns="0" tIns="0" rIns="0" bIns="0" anchor="ctr">
+            <a:normAutofit/>
+          </a:bodyPr>
+          <a:lstStyle/>
+          <a:p>
+            <a:pPr marL="0" indent="0" algn="l">
+              <a:spcAft>
+                <a:spcPts val="0"/>
+              </a:spcAft>
+              <a:buNone/>
+              <a:defRPr sz="5400" b="1">
+                <a:solidFill>
+                  <a:srgbClr val="FFFFFF"/>
+                </a:solidFill>
+                <a:latin typeface="Aptos Display"/>
+                <a:ea typeface="Aptos Display"/>
+                <a:cs typeface="Aptos Display"/>
               </a:defRPr>
             </a:pPr>
             <a:r>
-              <a:t>BatchHelm AI</a:t>
-            </a:r>
-          </a:p>
-        </p:txBody>
-      </p:sp>
-      <p:sp>
-        <p:nvSpPr>
-          <p:cNvPr id="3" name="Subtitle 2"/>
+              <a:rPr sz="5400" b="1" i="0">
+                <a:solidFill>
+                  <a:srgbClr val="FFFFFF"/>
+                </a:solidFill>
+                <a:latin typeface="Aptos Display"/>
+                <a:ea typeface="Aptos Display"/>
+                <a:cs typeface="Aptos Display"/>
+              </a:rPr>
+              <a:t>BatchHelm</a:t>
+            </a:r>
+          </a:p>
+        </p:txBody>
+      </p:sp>
+      <p:sp>
+        <p:nvSpPr>
+          <p:cNvPr id="3" name="Subtitle 2">
+            <a:extLst>
+              <a:ext uri="{FF2B5EF4-FFF2-40B4-BE49-F238E27FC236}">
+                <a16:creationId xmlns:a16="http://schemas.microsoft.com/office/drawing/2014/main" id="{32BC035C-DDA9-4142-BBCA-A08D1929D84C}"/>
+              </a:ext>
+            </a:extLst>
+          </p:cNvPr>
           <p:cNvSpPr>
             <a:spLocks noGrp="1"/>
           </p:cNvSpPr>
@@ -3136,67 +4438,202 @@
             <p:ph type="subTitle" idx="1"/>
           </p:nvPr>
         </p:nvSpPr>
-        <p:spPr/>
-        <p:txBody>
-          <a:bodyPr/>
-          <a:lstStyle/>
-          <a:p>
-            <a:pPr>
-              <a:defRPr sz="2000">
-                <a:solidFill>
-                  <a:srgbClr val="222222"/>
-                </a:solidFill>
+        <p:spPr>
+          <a:xfrm>
+            <a:off x="609600" y="1924050"/>
+            <a:ext cx="3562350" cy="3238500"/>
+          </a:xfrm>
+        </p:spPr>
+        <p:txBody>
+          <a:bodyPr wrap="square" lIns="0" tIns="0" rIns="76200" bIns="0" anchor="t">
+            <a:normAutofit/>
+          </a:bodyPr>
+          <a:lstStyle/>
+          <a:p>
+            <a:pPr marL="0" indent="0" algn="l">
+              <a:spcAft>
+                <a:spcPts val="24"/>
+              </a:spcAft>
+              <a:buNone/>
+              <a:defRPr sz="1575" b="0">
+                <a:solidFill>
+                  <a:srgbClr val="FFFFFF"/>
+                </a:solidFill>
+                <a:latin typeface="Aptos"/>
+                <a:ea typeface="Aptos"/>
+                <a:cs typeface="Aptos"/>
               </a:defRPr>
             </a:pPr>
             <a:r>
-              <a:t>Autonomous recall command center for small grocers, restaurants, pharmacies, cafeterias, and distributors</a:t>
-            </a:r>
-          </a:p>
-          <a:p>
-            <a:pPr>
-              <a:defRPr sz="2000">
-                <a:solidFill>
-                  <a:srgbClr val="222222"/>
-                </a:solidFill>
+              <a:rPr sz="2325" b="1" i="0">
+                <a:solidFill>
+                  <a:srgbClr val="FFFFFF"/>
+                </a:solidFill>
+                <a:latin typeface="Aptos"/>
+                <a:ea typeface="Aptos"/>
+                <a:cs typeface="Aptos"/>
+              </a:rPr>
+              <a:t>A recall packet becomes a controlled response.</a:t>
+            </a:r>
+          </a:p>
+          <a:p>
+            <a:pPr marL="0" indent="0" algn="l">
+              <a:spcAft>
+                <a:spcPts val="38"/>
+              </a:spcAft>
+              <a:buNone/>
+              <a:defRPr sz="1575" b="0">
+                <a:solidFill>
+                  <a:srgbClr val="FFFFFF"/>
+                </a:solidFill>
+                <a:latin typeface="Aptos"/>
+                <a:ea typeface="Aptos"/>
+                <a:cs typeface="Aptos"/>
               </a:defRPr>
             </a:pPr>
-          </a:p>
-          <a:p>
-            <a:pPr>
-              <a:defRPr sz="2000">
-                <a:solidFill>
-                  <a:srgbClr val="222222"/>
-                </a:solidFill>
+            <a:r>
+              <a:rPr sz="1575" b="0" i="0">
+                <a:solidFill>
+                  <a:srgbClr val="D6E3DF"/>
+                </a:solidFill>
+                <a:latin typeface="Aptos"/>
+                <a:ea typeface="Aptos"/>
+                <a:cs typeface="Aptos"/>
+              </a:rPr>
+              <a:t>Real intake. Nine specialist agents. Human evidence gate.</a:t>
+            </a:r>
+          </a:p>
+          <a:p>
+            <a:pPr marL="0" indent="0" algn="l">
+              <a:spcAft>
+                <a:spcPts val="7"/>
+              </a:spcAft>
+              <a:buNone/>
+              <a:defRPr sz="1575" b="0">
+                <a:solidFill>
+                  <a:srgbClr val="FFFFFF"/>
+                </a:solidFill>
+                <a:latin typeface="Aptos"/>
+                <a:ea typeface="Aptos"/>
+                <a:cs typeface="Aptos"/>
               </a:defRPr>
             </a:pPr>
             <a:r>
-              <a:t>Qwen Global AI Hackathon — Autopilot Agent (primary track) · Agent Society (secondary track)</a:t>
-            </a:r>
-          </a:p>
-          <a:p>
-            <a:pPr>
-              <a:defRPr sz="2000">
-                <a:solidFill>
-                  <a:srgbClr val="222222"/>
-                </a:solidFill>
+              <a:rPr sz="1275" b="1" i="0">
+                <a:solidFill>
+                  <a:srgbClr val="A9D8D3"/>
+                </a:solidFill>
+                <a:latin typeface="Aptos"/>
+                <a:ea typeface="Aptos"/>
+                <a:cs typeface="Aptos"/>
+              </a:rPr>
+              <a:t>Qwen Global AI Hackathon</a:t>
+            </a:r>
+          </a:p>
+          <a:p>
+            <a:pPr marL="0" indent="0" algn="l">
+              <a:spcAft>
+                <a:spcPts val="0"/>
+              </a:spcAft>
+              <a:buNone/>
+              <a:defRPr sz="1575" b="0">
+                <a:solidFill>
+                  <a:srgbClr val="FFFFFF"/>
+                </a:solidFill>
+                <a:latin typeface="Aptos"/>
+                <a:ea typeface="Aptos"/>
+                <a:cs typeface="Aptos"/>
               </a:defRPr>
             </a:pPr>
-          </a:p>
-          <a:p>
-            <a:pPr>
-              <a:defRPr sz="2000">
-                <a:solidFill>
-                  <a:srgbClr val="222222"/>
-                </a:solidFill>
-              </a:defRPr>
-            </a:pPr>
-            <a:r>
-              <a:t>github.com/ankitranjan-dsai/batchhelm-ai</a:t>
-            </a:r>
-          </a:p>
-        </p:txBody>
-      </p:sp>
+            <a:r>
+              <a:rPr sz="1275" b="0" i="0">
+                <a:solidFill>
+                  <a:srgbClr val="FFFFFF"/>
+                </a:solidFill>
+                <a:latin typeface="Aptos"/>
+                <a:ea typeface="Aptos"/>
+                <a:cs typeface="Aptos"/>
+              </a:rPr>
+              <a:t>Ankit Ranjan</a:t>
+            </a:r>
+          </a:p>
+        </p:txBody>
+      </p:sp>
+      <p:sp>
+        <p:nvSpPr>
+          <p:cNvPr id="4" name="Rounded Rectangle 3">
+            <a:extLst>
+              <a:ext uri="{FF2B5EF4-FFF2-40B4-BE49-F238E27FC236}">
+                <a16:creationId xmlns:a16="http://schemas.microsoft.com/office/drawing/2014/main" id="{1FA28C1A-DE4E-4383-A352-07DEA7222B68}"/>
+              </a:ext>
+            </a:extLst>
+          </p:cNvPr>
+          <p:cNvSpPr>
+            <a:spLocks noGrp="1"/>
+          </p:cNvSpPr>
+          <p:nvPr/>
+        </p:nvSpPr>
+        <p:spPr>
+          <a:xfrm>
+            <a:off x="4743450" y="571500"/>
+            <a:ext cx="6781800" cy="5715000"/>
+          </a:xfrm>
+          <a:prstGeom prst="roundRect">
+            <a:avLst>
+              <a:gd name="adj" fmla="val 1000"/>
+            </a:avLst>
+          </a:prstGeom>
+          <a:solidFill>
+            <a:srgbClr val="FFFFFF"/>
+          </a:solidFill>
+          <a:ln w="9525">
+            <a:solidFill>
+              <a:srgbClr val="2C625D"/>
+            </a:solidFill>
+            <a:prstDash val="solid"/>
+          </a:ln>
+        </p:spPr>
+        <p:txBody>
+          <a:bodyPr/>
+          <a:lstStyle/>
+          <a:p>
+            <a:endParaRPr lang="en-US"/>
+          </a:p>
+        </p:txBody>
+      </p:sp>
+      <p:pic>
+        <p:nvPicPr>
+          <p:cNvPr id="9" name="Picture 8"/>
+          <p:cNvPicPr>
+            <a:picLocks noChangeAspect="1"/>
+          </p:cNvPicPr>
+          <p:nvPr/>
+        </p:nvPicPr>
+        <p:blipFill>
+          <a:blip r:embed="rId3"/>
+          <a:srcRect l="16590" r="16590"/>
+          <a:stretch>
+            <a:fillRect/>
+          </a:stretch>
+        </p:blipFill>
+        <p:spPr>
+          <a:xfrm>
+            <a:off x="4762500" y="590550"/>
+            <a:ext cx="6743700" cy="5676900"/>
+          </a:xfrm>
+          <a:prstGeom prst="roundRect">
+            <a:avLst>
+              <a:gd name="adj" fmla="val 1007"/>
+            </a:avLst>
+          </a:prstGeom>
+        </p:spPr>
+      </p:pic>
     </p:spTree>
+    <p:extLst>
+      <p:ext uri="{BB962C8B-B14F-4D97-AF65-F5344CB8AC3E}">
+        <p14:creationId xmlns:p14="http://schemas.microsoft.com/office/powerpoint/2010/main" val="523999370"/>
+      </p:ext>
+    </p:extLst>
   </p:cSld>
   <p:clrMapOvr>
     <a:masterClrMapping/>
@@ -3205,7 +4642,7 @@
 </file>
 
 <file path=ppt/slides/slide10.xml><?xml version="1.0" encoding="utf-8"?>
-<p:sld xmlns:a="http://schemas.openxmlformats.org/drawingml/2006/main" xmlns:p="http://schemas.openxmlformats.org/presentationml/2006/main" xmlns:r="http://schemas.openxmlformats.org/officeDocument/2006/relationships">
+<p:sld xmlns:a="http://schemas.openxmlformats.org/drawingml/2006/main" xmlns:r="http://schemas.openxmlformats.org/officeDocument/2006/relationships" xmlns:p="http://schemas.openxmlformats.org/presentationml/2006/main">
   <p:cSld>
     <p:spTree>
       <p:nvGrpSpPr>
@@ -3213,10 +4650,23 @@
         <p:cNvGrpSpPr/>
         <p:nvPr/>
       </p:nvGrpSpPr>
-      <p:grpSpPr/>
-      <p:sp>
-        <p:nvSpPr>
-          <p:cNvPr id="2" name="Title 1"/>
+      <p:grpSpPr>
+        <a:xfrm>
+          <a:off x="0" y="0"/>
+          <a:ext cx="0" cy="0"/>
+          <a:chOff x="0" y="0"/>
+          <a:chExt cx="0" cy="0"/>
+        </a:xfrm>
+      </p:grpSpPr>
+      <p:sp>
+        <p:nvSpPr>
+          <p:cNvPr id="2" name="Title 1">
+            <a:extLst>
+              <a:ext uri="{FF2B5EF4-FFF2-40B4-BE49-F238E27FC236}">
+                <a16:creationId xmlns:a16="http://schemas.microsoft.com/office/drawing/2014/main" id="{4580EBE0-D5C7-4610-BE00-124DCC0EDEDC}"/>
+              </a:ext>
+            </a:extLst>
+          </p:cNvPr>
           <p:cNvSpPr>
             <a:spLocks noGrp="1"/>
           </p:cNvSpPr>
@@ -3230,6 +4680,7 @@
           <a:lstStyle/>
           <a:p>
             <a:pPr>
+              <a:buNone/>
               <a:defRPr sz="3200">
                 <a:solidFill>
                   <a:srgbClr val="1F6FEB"/>
@@ -3237,14 +4688,20 @@
               </a:defRPr>
             </a:pPr>
             <a:r>
-              <a:t>Known Limitations (Honest Scope)</a:t>
-            </a:r>
-          </a:p>
-        </p:txBody>
-      </p:sp>
-      <p:sp>
-        <p:nvSpPr>
-          <p:cNvPr id="3" name="Content Placeholder 2"/>
+              <a:t>Demo &amp; Links</a:t>
+            </a:r>
+          </a:p>
+        </p:txBody>
+      </p:sp>
+      <p:sp>
+        <p:nvSpPr>
+          <p:cNvPr id="3" name="Content Placeholder 2">
+            <a:extLst>
+              <a:ext uri="{FF2B5EF4-FFF2-40B4-BE49-F238E27FC236}">
+                <a16:creationId xmlns:a16="http://schemas.microsoft.com/office/drawing/2014/main" id="{CF87DEEF-0C49-435F-B11A-AFF9A8EDE228}"/>
+              </a:ext>
+            </a:extLst>
+          </p:cNvPr>
           <p:cNvSpPr>
             <a:spLocks noGrp="1"/>
           </p:cNvSpPr>
@@ -3257,191 +4714,91 @@
           <a:bodyPr wrap="square"/>
           <a:lstStyle/>
           <a:p>
-            <a:pPr/>
+            <a:pPr>
+              <a:buNone/>
+            </a:pPr>
             <a:r>
               <a:rPr sz="1800">
                 <a:solidFill>
                   <a:srgbClr val="222222"/>
                 </a:solidFill>
               </a:rPr>
-              <a:t>The workflow runs against one bundled demo incident today; multi-incident intake and real document upload parsing are not yet wired.</a:t>
-            </a:r>
-          </a:p>
-          <a:p>
-            <a:pPr/>
+              <a:t>Repository: github.com/ankitranjan-dsai/batchhelm-ai (MIT license)</a:t>
+            </a:r>
+          </a:p>
+          <a:p>
+            <a:pPr>
+              <a:buNone/>
+            </a:pPr>
             <a:r>
               <a:rPr sz="1800">
                 <a:solidFill>
                   <a:srgbClr val="222222"/>
                 </a:solidFill>
               </a:rPr>
-              <a:t>Demo-fallback is the default without QWEN_API_KEY — reliable for tests and demos, but it does not exercise live Qwen latency.</a:t>
-            </a:r>
-          </a:p>
-          <a:p>
-            <a:pPr/>
+              <a:t>Architecture: docs/architecture.md   ·   Qwen integration: docs/qwen-integration.md</a:t>
+            </a:r>
+          </a:p>
+          <a:p>
+            <a:pPr>
+              <a:buNone/>
+            </a:pPr>
             <a:r>
               <a:rPr sz="1800">
                 <a:solidFill>
                   <a:srgbClr val="222222"/>
                 </a:solidFill>
               </a:rPr>
-              <a:t>Reviewer identity is a configurable role, not real authentication; there is no login or RBAC yet.</a:t>
-            </a:r>
-          </a:p>
-          <a:p>
-            <a:pPr/>
+              <a:t>Sample evidence packet: docs/sample-evidence-packet.md   ·   Sample walkthrough: docs/sample-incident-walkthrough.md</a:t>
+            </a:r>
+          </a:p>
+          <a:p>
+            <a:pPr>
+              <a:buNone/>
+            </a:pPr>
             <a:r>
               <a:rPr sz="1800">
                 <a:solidFill>
                   <a:srgbClr val="222222"/>
                 </a:solidFill>
               </a:rPr>
-              <a:t>Storage is SQLite with a Postgres-ready interface, but the Postgres adapter is not implemented; orchestration is single-process today.</a:t>
-            </a:r>
-          </a:p>
-          <a:p>
-            <a:pPr/>
+              <a:t>Benchmark report: docs/benchmarks/agent-society-vs-single-agent.md</a:t>
+            </a:r>
+          </a:p>
+          <a:p>
+            <a:pPr>
+              <a:buNone/>
+            </a:pPr>
             <a:r>
               <a:rPr sz="1800">
                 <a:solidFill>
                   <a:srgbClr val="222222"/>
                 </a:solidFill>
               </a:rPr>
-              <a:t>No automated browser/E2E tests yet — frontend logic has Vitest coverage and the UI has been checked manually at desktop and mobile sizes.</a:t>
+              <a:t>Demo script: docs/demo-script.md</a:t>
+            </a:r>
+          </a:p>
+          <a:p>
+            <a:pPr>
+              <a:buNone/>
+            </a:pPr>
+            <a:r>
+              <a:rPr sz="1800">
+                <a:solidFill>
+                  <a:srgbClr val="222222"/>
+                </a:solidFill>
+              </a:rPr>
+              <a:t>Live deployment URL and demo video: in progress — tracked in docs/submission-checklist.md</a:t>
             </a:r>
           </a:p>
         </p:txBody>
       </p:sp>
     </p:spTree>
-  </p:cSld>
-  <p:clrMapOvr>
-    <a:masterClrMapping/>
-  </p:clrMapOvr>
-</p:sld>
-</file>
-
-<file path=ppt/slides/slide11.xml><?xml version="1.0" encoding="utf-8"?>
-<p:sld xmlns:a="http://schemas.openxmlformats.org/drawingml/2006/main" xmlns:p="http://schemas.openxmlformats.org/presentationml/2006/main" xmlns:r="http://schemas.openxmlformats.org/officeDocument/2006/relationships">
-  <p:cSld>
-    <p:spTree>
-      <p:nvGrpSpPr>
-        <p:cNvPr id="1" name=""/>
-        <p:cNvGrpSpPr/>
-        <p:nvPr/>
-      </p:nvGrpSpPr>
-      <p:grpSpPr/>
-      <p:sp>
-        <p:nvSpPr>
-          <p:cNvPr id="2" name="Title 1"/>
-          <p:cNvSpPr>
-            <a:spLocks noGrp="1"/>
-          </p:cNvSpPr>
-          <p:nvPr>
-            <p:ph type="title"/>
-          </p:nvPr>
-        </p:nvSpPr>
-        <p:spPr/>
-        <p:txBody>
-          <a:bodyPr/>
-          <a:lstStyle/>
-          <a:p>
-            <a:pPr>
-              <a:defRPr sz="3200">
-                <a:solidFill>
-                  <a:srgbClr val="1F6FEB"/>
-                </a:solidFill>
-              </a:defRPr>
-            </a:pPr>
-            <a:r>
-              <a:t>Demo &amp; Links</a:t>
-            </a:r>
-          </a:p>
-        </p:txBody>
-      </p:sp>
-      <p:sp>
-        <p:nvSpPr>
-          <p:cNvPr id="3" name="Content Placeholder 2"/>
-          <p:cNvSpPr>
-            <a:spLocks noGrp="1"/>
-          </p:cNvSpPr>
-          <p:nvPr>
-            <p:ph idx="1"/>
-          </p:nvPr>
-        </p:nvSpPr>
-        <p:spPr/>
-        <p:txBody>
-          <a:bodyPr wrap="square"/>
-          <a:lstStyle/>
-          <a:p>
-            <a:pPr/>
-            <a:r>
-              <a:rPr sz="1800">
-                <a:solidFill>
-                  <a:srgbClr val="222222"/>
-                </a:solidFill>
-              </a:rPr>
-              <a:t>Repository: github.com/ankitranjan-dsai/batchhelm-ai (MIT license)</a:t>
-            </a:r>
-          </a:p>
-          <a:p>
-            <a:pPr/>
-            <a:r>
-              <a:rPr sz="1800">
-                <a:solidFill>
-                  <a:srgbClr val="222222"/>
-                </a:solidFill>
-              </a:rPr>
-              <a:t>Architecture: docs/architecture.md   ·   Qwen integration: docs/qwen-integration.md</a:t>
-            </a:r>
-          </a:p>
-          <a:p>
-            <a:pPr/>
-            <a:r>
-              <a:rPr sz="1800">
-                <a:solidFill>
-                  <a:srgbClr val="222222"/>
-                </a:solidFill>
-              </a:rPr>
-              <a:t>Sample evidence packet: docs/sample-evidence-packet.md   ·   Sample walkthrough: docs/sample-incident-walkthrough.md</a:t>
-            </a:r>
-          </a:p>
-          <a:p>
-            <a:pPr/>
-            <a:r>
-              <a:rPr sz="1800">
-                <a:solidFill>
-                  <a:srgbClr val="222222"/>
-                </a:solidFill>
-              </a:rPr>
-              <a:t>Benchmark report: docs/benchmarks/agent-society-vs-single-agent.md</a:t>
-            </a:r>
-          </a:p>
-          <a:p>
-            <a:pPr/>
-            <a:r>
-              <a:rPr sz="1800">
-                <a:solidFill>
-                  <a:srgbClr val="222222"/>
-                </a:solidFill>
-              </a:rPr>
-              <a:t>Demo script: docs/demo-script.md</a:t>
-            </a:r>
-          </a:p>
-          <a:p>
-            <a:pPr/>
-            <a:r>
-              <a:rPr sz="1800">
-                <a:solidFill>
-                  <a:srgbClr val="222222"/>
-                </a:solidFill>
-              </a:rPr>
-              <a:t>Live deployment URL and demo video: in progress — tracked in docs/submission-checklist.md</a:t>
-            </a:r>
-          </a:p>
-        </p:txBody>
-      </p:sp>
-    </p:spTree>
+    <p:extLst>
+      <p:ext uri="{BB962C8B-B14F-4D97-AF65-F5344CB8AC3E}">
+        <p14:creationId xmlns:p14="http://schemas.microsoft.com/office/powerpoint/2010/main" val="2106645588"/>
+      </p:ext>
+    </p:extLst>
   </p:cSld>
   <p:clrMapOvr>
     <a:masterClrMapping/>
@@ -3450,18 +4807,39 @@
 </file>
 
 <file path=ppt/slides/slide2.xml><?xml version="1.0" encoding="utf-8"?>
-<p:sld xmlns:a="http://schemas.openxmlformats.org/drawingml/2006/main" xmlns:p="http://schemas.openxmlformats.org/presentationml/2006/main" xmlns:r="http://schemas.openxmlformats.org/officeDocument/2006/relationships">
+<p:sld xmlns:a="http://schemas.openxmlformats.org/drawingml/2006/main" xmlns:r="http://schemas.openxmlformats.org/officeDocument/2006/relationships" xmlns:p="http://schemas.openxmlformats.org/presentationml/2006/main">
   <p:cSld>
+    <p:bg>
+      <p:bgPr>
+        <a:solidFill>
+          <a:srgbClr val="F8FBFA"/>
+        </a:solidFill>
+        <a:effectLst/>
+      </p:bgPr>
+    </p:bg>
     <p:spTree>
       <p:nvGrpSpPr>
         <p:cNvPr id="1" name=""/>
         <p:cNvGrpSpPr/>
         <p:nvPr/>
       </p:nvGrpSpPr>
-      <p:grpSpPr/>
-      <p:sp>
-        <p:nvSpPr>
-          <p:cNvPr id="2" name="Title 1"/>
+      <p:grpSpPr>
+        <a:xfrm>
+          <a:off x="0" y="0"/>
+          <a:ext cx="0" cy="0"/>
+          <a:chOff x="0" y="0"/>
+          <a:chExt cx="0" cy="0"/>
+        </a:xfrm>
+      </p:grpSpPr>
+      <p:sp>
+        <p:nvSpPr>
+          <p:cNvPr id="2" name="Title 1">
+            <a:extLst>
+              <a:ext uri="{FF2B5EF4-FFF2-40B4-BE49-F238E27FC236}">
+                <a16:creationId xmlns:a16="http://schemas.microsoft.com/office/drawing/2014/main" id="{7BEAD60A-BC59-4F1F-B069-8D3E800FD8D1}"/>
+              </a:ext>
+            </a:extLst>
+          </p:cNvPr>
           <p:cNvSpPr>
             <a:spLocks noGrp="1"/>
           </p:cNvSpPr>
@@ -3469,27 +4847,55 @@
             <p:ph type="title"/>
           </p:nvPr>
         </p:nvSpPr>
-        <p:spPr/>
-        <p:txBody>
-          <a:bodyPr/>
-          <a:lstStyle/>
-          <a:p>
-            <a:pPr>
-              <a:defRPr sz="3200">
-                <a:solidFill>
-                  <a:srgbClr val="1F6FEB"/>
-                </a:solidFill>
+        <p:spPr>
+          <a:xfrm>
+            <a:off x="609600" y="419100"/>
+            <a:ext cx="10934700" cy="781050"/>
+          </a:xfrm>
+        </p:spPr>
+        <p:txBody>
+          <a:bodyPr wrap="square" lIns="0" tIns="0" rIns="0" bIns="0" anchor="ctr">
+            <a:normAutofit/>
+          </a:bodyPr>
+          <a:lstStyle/>
+          <a:p>
+            <a:pPr marL="0" indent="0" algn="l">
+              <a:spcAft>
+                <a:spcPts val="0"/>
+              </a:spcAft>
+              <a:buNone/>
+              <a:defRPr sz="3600" b="1">
+                <a:solidFill>
+                  <a:srgbClr val="132925"/>
+                </a:solidFill>
+                <a:latin typeface="Aptos Display"/>
+                <a:ea typeface="Aptos Display"/>
+                <a:cs typeface="Aptos Display"/>
               </a:defRPr>
             </a:pPr>
             <a:r>
-              <a:t>The Problem</a:t>
-            </a:r>
-          </a:p>
-        </p:txBody>
-      </p:sp>
-      <p:sp>
-        <p:nvSpPr>
-          <p:cNvPr id="3" name="Content Placeholder 2"/>
+              <a:rPr sz="3600" b="1" i="0">
+                <a:solidFill>
+                  <a:srgbClr val="132925"/>
+                </a:solidFill>
+                <a:latin typeface="Aptos Display"/>
+                <a:ea typeface="Aptos Display"/>
+                <a:cs typeface="Aptos Display"/>
+              </a:rPr>
+              <a:t>Recalls create five unanswered questions</a:t>
+            </a:r>
+          </a:p>
+        </p:txBody>
+      </p:sp>
+      <p:sp>
+        <p:nvSpPr>
+          <p:cNvPr id="3" name="Content Placeholder 2">
+            <a:extLst>
+              <a:ext uri="{FF2B5EF4-FFF2-40B4-BE49-F238E27FC236}">
+                <a16:creationId xmlns:a16="http://schemas.microsoft.com/office/drawing/2014/main" id="{6AD342A9-69CB-47E2-BC98-74284CB8A2A8}"/>
+              </a:ext>
+            </a:extLst>
+          </p:cNvPr>
           <p:cNvSpPr>
             <a:spLocks noGrp="1"/>
           </p:cNvSpPr>
@@ -3497,46 +4903,570 @@
             <p:ph idx="1"/>
           </p:nvPr>
         </p:nvSpPr>
-        <p:spPr/>
-        <p:txBody>
-          <a:bodyPr wrap="square"/>
-          <a:lstStyle/>
-          <a:p>
-            <a:pPr/>
-            <a:r>
-              <a:rPr sz="1800">
-                <a:solidFill>
-                  <a:srgbClr val="222222"/>
-                </a:solidFill>
-              </a:rPr>
-              <a:t>A recall notice arrives and small operators have no tooling to answer basic questions fast: are we affected, where is the product, who needs to act, who must be notified, what evidence must be kept.</a:t>
-            </a:r>
-          </a:p>
-          <a:p>
-            <a:pPr/>
-            <a:r>
-              <a:rPr sz="1800">
-                <a:solidFill>
-                  <a:srgbClr val="222222"/>
-                </a:solidFill>
-              </a:rPr>
-              <a:t>Enterprise recall-management software is built for large chains — small grocers, restaurants, pharmacies, and distributors are left doing this by hand: cross-checking invoices, walking shelves, and tracking removal tasks on paper or spreadsheets.</a:t>
-            </a:r>
-          </a:p>
-          <a:p>
-            <a:pPr/>
-            <a:r>
-              <a:rPr sz="1800">
-                <a:solidFill>
-                  <a:srgbClr val="222222"/>
-                </a:solidFill>
-              </a:rPr>
-              <a:t>Manual response is slow and error-prone at exactly the moment regulators and customers expect speed and an auditable trail.</a:t>
+        <p:spPr>
+          <a:xfrm>
+            <a:off x="685800" y="1600200"/>
+            <a:ext cx="4667250" cy="4324350"/>
+          </a:xfrm>
+        </p:spPr>
+        <p:txBody>
+          <a:bodyPr wrap="square" lIns="0" tIns="0" rIns="76200" bIns="0" anchor="t">
+            <a:normAutofit/>
+          </a:bodyPr>
+          <a:lstStyle/>
+          <a:p>
+            <a:pPr marL="0" indent="0" algn="l">
+              <a:spcAft>
+                <a:spcPts val="15"/>
+              </a:spcAft>
+              <a:buNone/>
+              <a:defRPr sz="1650" b="0">
+                <a:solidFill>
+                  <a:srgbClr val="132925"/>
+                </a:solidFill>
+                <a:latin typeface="Aptos"/>
+                <a:ea typeface="Aptos"/>
+                <a:cs typeface="Aptos"/>
+              </a:defRPr>
+            </a:pPr>
+            <a:r>
+              <a:rPr sz="1650" b="1" i="0">
+                <a:solidFill>
+                  <a:srgbClr val="B42318"/>
+                </a:solidFill>
+                <a:latin typeface="Aptos"/>
+                <a:ea typeface="Aptos"/>
+                <a:cs typeface="Aptos"/>
+              </a:rPr>
+              <a:t>01</a:t>
+            </a:r>
+            <a:r>
+              <a:rPr sz="1650" b="0" i="0">
+                <a:solidFill>
+                  <a:srgbClr val="132925"/>
+                </a:solidFill>
+                <a:latin typeface="Aptos"/>
+                <a:ea typeface="Aptos"/>
+                <a:cs typeface="Aptos"/>
+              </a:rPr>
+              <a:t>  What product and lots are affected?</a:t>
+            </a:r>
+          </a:p>
+          <a:p>
+            <a:pPr marL="0" indent="0" algn="l">
+              <a:spcAft>
+                <a:spcPts val="15"/>
+              </a:spcAft>
+              <a:buNone/>
+              <a:defRPr sz="1650" b="0">
+                <a:solidFill>
+                  <a:srgbClr val="132925"/>
+                </a:solidFill>
+                <a:latin typeface="Aptos"/>
+                <a:ea typeface="Aptos"/>
+                <a:cs typeface="Aptos"/>
+              </a:defRPr>
+            </a:pPr>
+            <a:r>
+              <a:rPr sz="1650" b="1" i="0">
+                <a:solidFill>
+                  <a:srgbClr val="B42318"/>
+                </a:solidFill>
+                <a:latin typeface="Aptos"/>
+                <a:ea typeface="Aptos"/>
+                <a:cs typeface="Aptos"/>
+              </a:rPr>
+              <a:t>02</a:t>
+            </a:r>
+            <a:r>
+              <a:rPr sz="1650" b="0" i="0">
+                <a:solidFill>
+                  <a:srgbClr val="132925"/>
+                </a:solidFill>
+                <a:latin typeface="Aptos"/>
+                <a:ea typeface="Aptos"/>
+                <a:cs typeface="Aptos"/>
+              </a:rPr>
+              <a:t>  Where are matching units now?</a:t>
+            </a:r>
+          </a:p>
+          <a:p>
+            <a:pPr marL="0" indent="0" algn="l">
+              <a:spcAft>
+                <a:spcPts val="15"/>
+              </a:spcAft>
+              <a:buNone/>
+              <a:defRPr sz="1650" b="0">
+                <a:solidFill>
+                  <a:srgbClr val="132925"/>
+                </a:solidFill>
+                <a:latin typeface="Aptos"/>
+                <a:ea typeface="Aptos"/>
+                <a:cs typeface="Aptos"/>
+              </a:defRPr>
+            </a:pPr>
+            <a:r>
+              <a:rPr sz="1650" b="1" i="0">
+                <a:solidFill>
+                  <a:srgbClr val="B42318"/>
+                </a:solidFill>
+                <a:latin typeface="Aptos"/>
+                <a:ea typeface="Aptos"/>
+                <a:cs typeface="Aptos"/>
+              </a:rPr>
+              <a:t>03</a:t>
+            </a:r>
+            <a:r>
+              <a:rPr sz="1650" b="0" i="0">
+                <a:solidFill>
+                  <a:srgbClr val="132925"/>
+                </a:solidFill>
+                <a:latin typeface="Aptos"/>
+                <a:ea typeface="Aptos"/>
+                <a:cs typeface="Aptos"/>
+              </a:rPr>
+              <a:t>  Who must act?</a:t>
+            </a:r>
+          </a:p>
+          <a:p>
+            <a:pPr marL="0" indent="0" algn="l">
+              <a:spcAft>
+                <a:spcPts val="15"/>
+              </a:spcAft>
+              <a:buNone/>
+              <a:defRPr sz="1650" b="0">
+                <a:solidFill>
+                  <a:srgbClr val="132925"/>
+                </a:solidFill>
+                <a:latin typeface="Aptos"/>
+                <a:ea typeface="Aptos"/>
+                <a:cs typeface="Aptos"/>
+              </a:defRPr>
+            </a:pPr>
+            <a:r>
+              <a:rPr sz="1650" b="1" i="0">
+                <a:solidFill>
+                  <a:srgbClr val="B42318"/>
+                </a:solidFill>
+                <a:latin typeface="Aptos"/>
+                <a:ea typeface="Aptos"/>
+                <a:cs typeface="Aptos"/>
+              </a:rPr>
+              <a:t>04</a:t>
+            </a:r>
+            <a:r>
+              <a:rPr sz="1650" b="0" i="0">
+                <a:solidFill>
+                  <a:srgbClr val="132925"/>
+                </a:solidFill>
+                <a:latin typeface="Aptos"/>
+                <a:ea typeface="Aptos"/>
+                <a:cs typeface="Aptos"/>
+              </a:rPr>
+              <a:t>  Who may need notification?</a:t>
+            </a:r>
+          </a:p>
+          <a:p>
+            <a:pPr marL="0" indent="0" algn="l">
+              <a:spcAft>
+                <a:spcPts val="22"/>
+              </a:spcAft>
+              <a:buNone/>
+              <a:defRPr sz="1650" b="0">
+                <a:solidFill>
+                  <a:srgbClr val="132925"/>
+                </a:solidFill>
+                <a:latin typeface="Aptos"/>
+                <a:ea typeface="Aptos"/>
+                <a:cs typeface="Aptos"/>
+              </a:defRPr>
+            </a:pPr>
+            <a:r>
+              <a:rPr sz="1650" b="1" i="0">
+                <a:solidFill>
+                  <a:srgbClr val="B42318"/>
+                </a:solidFill>
+                <a:latin typeface="Aptos"/>
+                <a:ea typeface="Aptos"/>
+                <a:cs typeface="Aptos"/>
+              </a:rPr>
+              <a:t>05</a:t>
+            </a:r>
+            <a:r>
+              <a:rPr sz="1650" b="0" i="0">
+                <a:solidFill>
+                  <a:srgbClr val="132925"/>
+                </a:solidFill>
+                <a:latin typeface="Aptos"/>
+                <a:ea typeface="Aptos"/>
+                <a:cs typeface="Aptos"/>
+              </a:rPr>
+              <a:t>  What evidence must survive?</a:t>
+            </a:r>
+          </a:p>
+          <a:p>
+            <a:pPr marL="0" indent="0" algn="l">
+              <a:spcAft>
+                <a:spcPts val="15"/>
+              </a:spcAft>
+              <a:buNone/>
+              <a:defRPr sz="1650" b="0">
+                <a:solidFill>
+                  <a:srgbClr val="132925"/>
+                </a:solidFill>
+                <a:latin typeface="Aptos"/>
+                <a:ea typeface="Aptos"/>
+                <a:cs typeface="Aptos"/>
+              </a:defRPr>
+            </a:pPr>
+            <a:r>
+              <a:rPr sz="1425" b="1" i="0">
+                <a:solidFill>
+                  <a:srgbClr val="132925"/>
+                </a:solidFill>
+                <a:latin typeface="Aptos"/>
+                <a:ea typeface="Aptos"/>
+                <a:cs typeface="Aptos"/>
+              </a:rPr>
+              <a:t>Small operators must answer all five without enterprise recall tooling.</a:t>
+            </a:r>
+          </a:p>
+        </p:txBody>
+      </p:sp>
+      <p:sp>
+        <p:nvSpPr>
+          <p:cNvPr id="4" name="Rounded Rectangle 3">
+            <a:extLst>
+              <a:ext uri="{FF2B5EF4-FFF2-40B4-BE49-F238E27FC236}">
+                <a16:creationId xmlns:a16="http://schemas.microsoft.com/office/drawing/2014/main" id="{2B490E8F-00CF-45F6-B973-6DA0619C4643}"/>
+              </a:ext>
+            </a:extLst>
+          </p:cNvPr>
+          <p:cNvSpPr>
+            <a:spLocks noGrp="1"/>
+          </p:cNvSpPr>
+          <p:nvPr/>
+        </p:nvSpPr>
+        <p:spPr>
+          <a:xfrm>
+            <a:off x="6019800" y="1504950"/>
+            <a:ext cx="2095500" cy="323850"/>
+          </a:xfrm>
+          <a:prstGeom prst="roundRect">
+            <a:avLst>
+              <a:gd name="adj" fmla="val 17647"/>
+            </a:avLst>
+          </a:prstGeom>
+          <a:solidFill>
+            <a:srgbClr val="FBEAE8"/>
+          </a:solidFill>
+          <a:ln w="9525">
+            <a:solidFill>
+              <a:srgbClr val="F3C4BE"/>
+            </a:solidFill>
+            <a:prstDash val="solid"/>
+          </a:ln>
+        </p:spPr>
+        <p:txBody>
+          <a:bodyPr/>
+          <a:lstStyle/>
+          <a:p>
+            <a:endParaRPr lang="en-US"/>
+          </a:p>
+        </p:txBody>
+      </p:sp>
+      <p:sp>
+        <p:nvSpPr>
+          <p:cNvPr id="5" name="Rectangle 4">
+            <a:extLst>
+              <a:ext uri="{FF2B5EF4-FFF2-40B4-BE49-F238E27FC236}">
+                <a16:creationId xmlns:a16="http://schemas.microsoft.com/office/drawing/2014/main" id="{888064A8-12A9-45DF-A2B4-A349722D436B}"/>
+              </a:ext>
+            </a:extLst>
+          </p:cNvPr>
+          <p:cNvSpPr>
+            <a:spLocks noGrp="1"/>
+          </p:cNvSpPr>
+          <p:nvPr/>
+        </p:nvSpPr>
+        <p:spPr>
+          <a:xfrm>
+            <a:off x="6096000" y="1533525"/>
+            <a:ext cx="1943100" cy="266700"/>
+          </a:xfrm>
+          <a:prstGeom prst="rect">
+            <a:avLst/>
+          </a:prstGeom>
+          <a:noFill/>
+          <a:ln w="0">
+            <a:noFill/>
+            <a:prstDash val="solid"/>
+          </a:ln>
+        </p:spPr>
+        <p:txBody>
+          <a:bodyPr wrap="square" lIns="0" tIns="0" rIns="0" bIns="0" anchor="ctr">
+            <a:normAutofit/>
+          </a:bodyPr>
+          <a:lstStyle/>
+          <a:p>
+            <a:pPr marL="0" indent="0" algn="ctr">
+              <a:spcAft>
+                <a:spcPts val="0"/>
+              </a:spcAft>
+              <a:buNone/>
+              <a:defRPr sz="1125" b="1">
+                <a:solidFill>
+                  <a:srgbClr val="B42318"/>
+                </a:solidFill>
+                <a:latin typeface="Aptos"/>
+                <a:ea typeface="Aptos"/>
+                <a:cs typeface="Aptos"/>
+              </a:defRPr>
+            </a:pPr>
+            <a:r>
+              <a:rPr sz="1125" b="1" i="0">
+                <a:solidFill>
+                  <a:srgbClr val="B42318"/>
+                </a:solidFill>
+                <a:latin typeface="Aptos"/>
+                <a:ea typeface="Aptos"/>
+                <a:cs typeface="Aptos"/>
+              </a:rPr>
+              <a:t>SYNTHETIC DEMO PACKET</a:t>
+            </a:r>
+          </a:p>
+        </p:txBody>
+      </p:sp>
+      <p:sp>
+        <p:nvSpPr>
+          <p:cNvPr id="6" name="Rounded Rectangle 5">
+            <a:extLst>
+              <a:ext uri="{FF2B5EF4-FFF2-40B4-BE49-F238E27FC236}">
+                <a16:creationId xmlns:a16="http://schemas.microsoft.com/office/drawing/2014/main" id="{BE193801-2704-484B-8D49-0049E7BCE4AC}"/>
+              </a:ext>
+            </a:extLst>
+          </p:cNvPr>
+          <p:cNvSpPr>
+            <a:spLocks noGrp="1"/>
+          </p:cNvSpPr>
+          <p:nvPr/>
+        </p:nvSpPr>
+        <p:spPr>
+          <a:xfrm>
+            <a:off x="6000750" y="1962150"/>
+            <a:ext cx="2647950" cy="4210050"/>
+          </a:xfrm>
+          <a:prstGeom prst="roundRect">
+            <a:avLst>
+              <a:gd name="adj" fmla="val 2158"/>
+            </a:avLst>
+          </a:prstGeom>
+          <a:solidFill>
+            <a:srgbClr val="FFFFFF"/>
+          </a:solidFill>
+          <a:ln w="9525">
+            <a:solidFill>
+              <a:srgbClr val="D6E3DF"/>
+            </a:solidFill>
+            <a:prstDash val="solid"/>
+          </a:ln>
+        </p:spPr>
+        <p:txBody>
+          <a:bodyPr/>
+          <a:lstStyle/>
+          <a:p>
+            <a:endParaRPr lang="en-US"/>
+          </a:p>
+        </p:txBody>
+      </p:sp>
+      <p:pic>
+        <p:nvPicPr>
+          <p:cNvPr id="16" name="Picture 15"/>
+          <p:cNvPicPr>
+            <a:picLocks noChangeAspect="1"/>
+          </p:cNvPicPr>
+          <p:nvPr/>
+        </p:nvPicPr>
+        <p:blipFill>
+          <a:blip r:embed="rId3"/>
+          <a:stretch/>
+        </p:blipFill>
+        <p:spPr>
+          <a:xfrm>
+            <a:off x="6019800" y="2378449"/>
+            <a:ext cx="2609850" cy="3377453"/>
+          </a:xfrm>
+          <a:prstGeom prst="roundRect">
+            <a:avLst>
+              <a:gd name="adj" fmla="val 2190"/>
+            </a:avLst>
+          </a:prstGeom>
+        </p:spPr>
+      </p:pic>
+      <p:sp>
+        <p:nvSpPr>
+          <p:cNvPr id="8" name="Rounded Rectangle 7">
+            <a:extLst>
+              <a:ext uri="{FF2B5EF4-FFF2-40B4-BE49-F238E27FC236}">
+                <a16:creationId xmlns:a16="http://schemas.microsoft.com/office/drawing/2014/main" id="{9783372D-E10D-4C3F-B63E-6A027688112D}"/>
+              </a:ext>
+            </a:extLst>
+          </p:cNvPr>
+          <p:cNvSpPr>
+            <a:spLocks noGrp="1"/>
+          </p:cNvSpPr>
+          <p:nvPr/>
+        </p:nvSpPr>
+        <p:spPr>
+          <a:xfrm>
+            <a:off x="8839200" y="1962150"/>
+            <a:ext cx="2590800" cy="2019300"/>
+          </a:xfrm>
+          <a:prstGeom prst="roundRect">
+            <a:avLst>
+              <a:gd name="adj" fmla="val 2830"/>
+            </a:avLst>
+          </a:prstGeom>
+          <a:solidFill>
+            <a:srgbClr val="FFFFFF"/>
+          </a:solidFill>
+          <a:ln w="9525">
+            <a:solidFill>
+              <a:srgbClr val="D6E3DF"/>
+            </a:solidFill>
+            <a:prstDash val="solid"/>
+          </a:ln>
+        </p:spPr>
+        <p:txBody>
+          <a:bodyPr/>
+          <a:lstStyle/>
+          <a:p>
+            <a:endParaRPr lang="en-US"/>
+          </a:p>
+        </p:txBody>
+      </p:sp>
+      <p:pic>
+        <p:nvPicPr>
+          <p:cNvPr id="18" name="Picture 17"/>
+          <p:cNvPicPr>
+            <a:picLocks noChangeAspect="1"/>
+          </p:cNvPicPr>
+          <p:nvPr/>
+        </p:nvPicPr>
+        <p:blipFill>
+          <a:blip r:embed="rId4"/>
+          <a:srcRect l="10994" r="10994"/>
+          <a:stretch>
+            <a:fillRect/>
+          </a:stretch>
+        </p:blipFill>
+        <p:spPr>
+          <a:xfrm>
+            <a:off x="8858250" y="1981200"/>
+            <a:ext cx="2552700" cy="1981200"/>
+          </a:xfrm>
+          <a:prstGeom prst="roundRect">
+            <a:avLst>
+              <a:gd name="adj" fmla="val 2885"/>
+            </a:avLst>
+          </a:prstGeom>
+        </p:spPr>
+      </p:pic>
+      <p:sp>
+        <p:nvSpPr>
+          <p:cNvPr id="10" name="Rectangle 9">
+            <a:extLst>
+              <a:ext uri="{FF2B5EF4-FFF2-40B4-BE49-F238E27FC236}">
+                <a16:creationId xmlns:a16="http://schemas.microsoft.com/office/drawing/2014/main" id="{2148A1BA-B2D9-4B9A-82C7-4D4CD3C411EA}"/>
+              </a:ext>
+            </a:extLst>
+          </p:cNvPr>
+          <p:cNvSpPr>
+            <a:spLocks noGrp="1"/>
+          </p:cNvSpPr>
+          <p:nvPr/>
+        </p:nvSpPr>
+        <p:spPr>
+          <a:xfrm>
+            <a:off x="8858250" y="4267200"/>
+            <a:ext cx="2552700" cy="1428750"/>
+          </a:xfrm>
+          <a:prstGeom prst="rect">
+            <a:avLst/>
+          </a:prstGeom>
+          <a:noFill/>
+          <a:ln w="0">
+            <a:noFill/>
+            <a:prstDash val="solid"/>
+          </a:ln>
+        </p:spPr>
+        <p:txBody>
+          <a:bodyPr wrap="square" lIns="0" tIns="0" rIns="0" bIns="0" anchor="t">
+            <a:normAutofit/>
+          </a:bodyPr>
+          <a:lstStyle/>
+          <a:p>
+            <a:pPr marL="0" indent="0" algn="l">
+              <a:spcAft>
+                <a:spcPts val="10"/>
+              </a:spcAft>
+              <a:buNone/>
+              <a:defRPr sz="1350" b="0">
+                <a:solidFill>
+                  <a:srgbClr val="132925"/>
+                </a:solidFill>
+                <a:latin typeface="Aptos"/>
+                <a:ea typeface="Aptos"/>
+                <a:cs typeface="Aptos"/>
+              </a:defRPr>
+            </a:pPr>
+            <a:r>
+              <a:rPr sz="1500" b="1" i="0">
+                <a:solidFill>
+                  <a:srgbClr val="132925"/>
+                </a:solidFill>
+                <a:latin typeface="Aptos"/>
+                <a:ea typeface="Aptos"/>
+                <a:cs typeface="Aptos"/>
+              </a:rPr>
+              <a:t>The notice identifies risk.</a:t>
+            </a:r>
+          </a:p>
+          <a:p>
+            <a:pPr marL="0" indent="0" algn="l">
+              <a:spcAft>
+                <a:spcPts val="8"/>
+              </a:spcAft>
+              <a:buNone/>
+              <a:defRPr sz="1350" b="0">
+                <a:solidFill>
+                  <a:srgbClr val="132925"/>
+                </a:solidFill>
+                <a:latin typeface="Aptos"/>
+                <a:ea typeface="Aptos"/>
+                <a:cs typeface="Aptos"/>
+              </a:defRPr>
+            </a:pPr>
+            <a:r>
+              <a:rPr sz="1350" b="0" i="0">
+                <a:solidFill>
+                  <a:srgbClr val="5B6F6A"/>
+                </a:solidFill>
+                <a:latin typeface="Aptos"/>
+                <a:ea typeface="Aptos"/>
+                <a:cs typeface="Aptos"/>
+              </a:rPr>
+              <a:t>The shelf image proves why evidence still needs interpretation.</a:t>
             </a:r>
           </a:p>
         </p:txBody>
       </p:sp>
     </p:spTree>
+    <p:extLst>
+      <p:ext uri="{BB962C8B-B14F-4D97-AF65-F5344CB8AC3E}">
+        <p14:creationId xmlns:p14="http://schemas.microsoft.com/office/powerpoint/2010/main" val="1868529775"/>
+      </p:ext>
+    </p:extLst>
   </p:cSld>
   <p:clrMapOvr>
     <a:masterClrMapping/>
@@ -3545,18 +5475,39 @@
 </file>
 
 <file path=ppt/slides/slide3.xml><?xml version="1.0" encoding="utf-8"?>
-<p:sld xmlns:a="http://schemas.openxmlformats.org/drawingml/2006/main" xmlns:p="http://schemas.openxmlformats.org/presentationml/2006/main" xmlns:r="http://schemas.openxmlformats.org/officeDocument/2006/relationships">
+<p:sld xmlns:a="http://schemas.openxmlformats.org/drawingml/2006/main" xmlns:r="http://schemas.openxmlformats.org/officeDocument/2006/relationships" xmlns:p="http://schemas.openxmlformats.org/presentationml/2006/main">
   <p:cSld>
+    <p:bg>
+      <p:bgPr>
+        <a:solidFill>
+          <a:srgbClr val="F8FBFA"/>
+        </a:solidFill>
+        <a:effectLst/>
+      </p:bgPr>
+    </p:bg>
     <p:spTree>
       <p:nvGrpSpPr>
         <p:cNvPr id="1" name=""/>
         <p:cNvGrpSpPr/>
         <p:nvPr/>
       </p:nvGrpSpPr>
-      <p:grpSpPr/>
-      <p:sp>
-        <p:nvSpPr>
-          <p:cNvPr id="2" name="Title 1"/>
+      <p:grpSpPr>
+        <a:xfrm>
+          <a:off x="0" y="0"/>
+          <a:ext cx="0" cy="0"/>
+          <a:chOff x="0" y="0"/>
+          <a:chExt cx="0" cy="0"/>
+        </a:xfrm>
+      </p:grpSpPr>
+      <p:sp>
+        <p:nvSpPr>
+          <p:cNvPr id="2" name="Title 1">
+            <a:extLst>
+              <a:ext uri="{FF2B5EF4-FFF2-40B4-BE49-F238E27FC236}">
+                <a16:creationId xmlns:a16="http://schemas.microsoft.com/office/drawing/2014/main" id="{47AB0532-8A55-4D89-A415-332A73002D81}"/>
+              </a:ext>
+            </a:extLst>
+          </p:cNvPr>
           <p:cNvSpPr>
             <a:spLocks noGrp="1"/>
           </p:cNvSpPr>
@@ -3564,27 +5515,55 @@
             <p:ph type="title"/>
           </p:nvPr>
         </p:nvSpPr>
-        <p:spPr/>
-        <p:txBody>
-          <a:bodyPr/>
-          <a:lstStyle/>
-          <a:p>
-            <a:pPr>
-              <a:defRPr sz="3200">
-                <a:solidFill>
-                  <a:srgbClr val="1F6FEB"/>
-                </a:solidFill>
+        <p:spPr>
+          <a:xfrm>
+            <a:off x="609600" y="419100"/>
+            <a:ext cx="10934700" cy="781050"/>
+          </a:xfrm>
+        </p:spPr>
+        <p:txBody>
+          <a:bodyPr wrap="square" lIns="0" tIns="0" rIns="0" bIns="0" anchor="ctr">
+            <a:normAutofit/>
+          </a:bodyPr>
+          <a:lstStyle/>
+          <a:p>
+            <a:pPr marL="0" indent="0" algn="l">
+              <a:spcAft>
+                <a:spcPts val="0"/>
+              </a:spcAft>
+              <a:buNone/>
+              <a:defRPr sz="3600" b="1">
+                <a:solidFill>
+                  <a:srgbClr val="132925"/>
+                </a:solidFill>
+                <a:latin typeface="Aptos Display"/>
+                <a:ea typeface="Aptos Display"/>
+                <a:cs typeface="Aptos Display"/>
               </a:defRPr>
             </a:pPr>
             <a:r>
-              <a:t>What BatchHelm Does</a:t>
-            </a:r>
-          </a:p>
-        </p:txBody>
-      </p:sp>
-      <p:sp>
-        <p:nvSpPr>
-          <p:cNvPr id="3" name="Content Placeholder 2"/>
+              <a:rPr sz="3600" b="1" i="0">
+                <a:solidFill>
+                  <a:srgbClr val="132925"/>
+                </a:solidFill>
+                <a:latin typeface="Aptos Display"/>
+                <a:ea typeface="Aptos Display"/>
+                <a:cs typeface="Aptos Display"/>
+              </a:rPr>
+              <a:t>Files, Review, Launch</a:t>
+            </a:r>
+          </a:p>
+        </p:txBody>
+      </p:sp>
+      <p:sp>
+        <p:nvSpPr>
+          <p:cNvPr id="3" name="Content Placeholder 2">
+            <a:extLst>
+              <a:ext uri="{FF2B5EF4-FFF2-40B4-BE49-F238E27FC236}">
+                <a16:creationId xmlns:a16="http://schemas.microsoft.com/office/drawing/2014/main" id="{BAB2178D-AC97-4B37-85AB-F5ECFEDB5EAE}"/>
+              </a:ext>
+            </a:extLst>
+          </p:cNvPr>
           <p:cNvSpPr>
             <a:spLocks noGrp="1"/>
           </p:cNvSpPr>
@@ -3592,68 +5571,859 @@
             <p:ph idx="1"/>
           </p:nvPr>
         </p:nvSpPr>
-        <p:spPr/>
-        <p:txBody>
-          <a:bodyPr wrap="square"/>
-          <a:lstStyle/>
-          <a:p>
-            <a:pPr/>
-            <a:r>
-              <a:rPr sz="1800">
-                <a:solidFill>
-                  <a:srgbClr val="222222"/>
-                </a:solidFill>
-              </a:rPr>
-              <a:t>Turns a recall notice, invoices, POS/inventory exports, and shelf photos into one coordinated response workflow.</a:t>
-            </a:r>
-          </a:p>
-          <a:p>
-            <a:pPr/>
-            <a:r>
-              <a:rPr sz="1800">
-                <a:solidFill>
-                  <a:srgbClr val="222222"/>
-                </a:solidFill>
-              </a:rPr>
-              <a:t>Identifies affected products and lots, matches them against real inventory, and inspects shelf photos for labels, dates, and lot codes.</a:t>
-            </a:r>
-          </a:p>
-          <a:p>
-            <a:pPr/>
-            <a:r>
-              <a:rPr sz="1800">
-                <a:solidFill>
-                  <a:srgbClr val="222222"/>
-                </a:solidFill>
-              </a:rPr>
-              <a:t>Generates removal, quarantine, disposal, refund, and customer-notice tasks, plus a management briefing.</a:t>
-            </a:r>
-          </a:p>
-          <a:p>
-            <a:pPr/>
-            <a:r>
-              <a:rPr sz="1800">
-                <a:solidFill>
-                  <a:srgbClr val="222222"/>
-                </a:solidFill>
-              </a:rPr>
-              <a:t>Preserves every step in an audit-ready evidence packet with a human reviewer approval gate.</a:t>
-            </a:r>
-          </a:p>
-          <a:p>
-            <a:pPr/>
-            <a:r>
-              <a:rPr sz="1800">
-                <a:solidFill>
-                  <a:srgbClr val="222222"/>
-                </a:solidFill>
-              </a:rPr>
-              <a:t>Remembers supplier aliases, prior decisions, and recurring false positives across runs.</a:t>
+        <p:spPr>
+          <a:xfrm>
+            <a:off x="685800" y="1485900"/>
+            <a:ext cx="2914650" cy="4762500"/>
+          </a:xfrm>
+        </p:spPr>
+        <p:txBody>
+          <a:bodyPr wrap="square" lIns="0" tIns="0" rIns="76200" bIns="0" anchor="t">
+            <a:normAutofit/>
+          </a:bodyPr>
+          <a:lstStyle/>
+          <a:p>
+            <a:pPr marL="0" indent="0" algn="l">
+              <a:spcAft>
+                <a:spcPts val="28"/>
+              </a:spcAft>
+              <a:buNone/>
+              <a:defRPr sz="1500" b="0">
+                <a:solidFill>
+                  <a:srgbClr val="132925"/>
+                </a:solidFill>
+                <a:latin typeface="Aptos"/>
+                <a:ea typeface="Aptos"/>
+                <a:cs typeface="Aptos"/>
+              </a:defRPr>
+            </a:pPr>
+            <a:r>
+              <a:rPr sz="1800" b="1" i="0">
+                <a:solidFill>
+                  <a:srgbClr val="132925"/>
+                </a:solidFill>
+                <a:latin typeface="Aptos"/>
+                <a:ea typeface="Aptos"/>
+                <a:cs typeface="Aptos"/>
+              </a:rPr>
+              <a:t>Ambiguous inputs become a launchable incident only after review.</a:t>
+            </a:r>
+          </a:p>
+          <a:p>
+            <a:pPr marL="0" indent="0" algn="l">
+              <a:spcAft>
+                <a:spcPts val="8"/>
+              </a:spcAft>
+              <a:buNone/>
+              <a:defRPr sz="1500" b="0">
+                <a:solidFill>
+                  <a:srgbClr val="132925"/>
+                </a:solidFill>
+                <a:latin typeface="Aptos"/>
+                <a:ea typeface="Aptos"/>
+                <a:cs typeface="Aptos"/>
+              </a:defRPr>
+            </a:pPr>
+            <a:r>
+              <a:rPr sz="2325" b="1" i="0">
+                <a:solidFill>
+                  <a:srgbClr val="087C72"/>
+                </a:solidFill>
+                <a:latin typeface="Aptos"/>
+                <a:ea typeface="Aptos"/>
+                <a:cs typeface="Aptos"/>
+              </a:rPr>
+              <a:t>6</a:t>
+            </a:r>
+            <a:r>
+              <a:rPr sz="1350" b="0" i="0">
+                <a:solidFill>
+                  <a:srgbClr val="5B6F6A"/>
+                </a:solidFill>
+                <a:latin typeface="Aptos"/>
+                <a:ea typeface="Aptos"/>
+                <a:cs typeface="Aptos"/>
+              </a:rPr>
+              <a:t> accepted rows</a:t>
+            </a:r>
+          </a:p>
+          <a:p>
+            <a:pPr marL="0" indent="0" algn="l">
+              <a:spcAft>
+                <a:spcPts val="8"/>
+              </a:spcAft>
+              <a:buNone/>
+              <a:defRPr sz="1500" b="0">
+                <a:solidFill>
+                  <a:srgbClr val="132925"/>
+                </a:solidFill>
+                <a:latin typeface="Aptos"/>
+                <a:ea typeface="Aptos"/>
+                <a:cs typeface="Aptos"/>
+              </a:defRPr>
+            </a:pPr>
+            <a:r>
+              <a:rPr sz="2325" b="1" i="0">
+                <a:solidFill>
+                  <a:srgbClr val="B42318"/>
+                </a:solidFill>
+                <a:latin typeface="Aptos"/>
+                <a:ea typeface="Aptos"/>
+                <a:cs typeface="Aptos"/>
+              </a:rPr>
+              <a:t>2</a:t>
+            </a:r>
+            <a:r>
+              <a:rPr sz="1350" b="0" i="0">
+                <a:solidFill>
+                  <a:srgbClr val="5B6F6A"/>
+                </a:solidFill>
+                <a:latin typeface="Aptos"/>
+                <a:ea typeface="Aptos"/>
+                <a:cs typeface="Aptos"/>
+              </a:rPr>
+              <a:t> safely rejected</a:t>
+            </a:r>
+          </a:p>
+          <a:p>
+            <a:pPr marL="0" indent="0" algn="l">
+              <a:spcAft>
+                <a:spcPts val="8"/>
+              </a:spcAft>
+              <a:buNone/>
+              <a:defRPr sz="1500" b="0">
+                <a:solidFill>
+                  <a:srgbClr val="132925"/>
+                </a:solidFill>
+                <a:latin typeface="Aptos"/>
+                <a:ea typeface="Aptos"/>
+                <a:cs typeface="Aptos"/>
+              </a:defRPr>
+            </a:pPr>
+            <a:r>
+              <a:rPr sz="2325" b="1" i="0">
+                <a:solidFill>
+                  <a:srgbClr val="132925"/>
+                </a:solidFill>
+                <a:latin typeface="Aptos"/>
+                <a:ea typeface="Aptos"/>
+                <a:cs typeface="Aptos"/>
+              </a:rPr>
+              <a:t>23</a:t>
+            </a:r>
+            <a:r>
+              <a:rPr sz="1350" b="0" i="0">
+                <a:solidFill>
+                  <a:srgbClr val="5B6F6A"/>
+                </a:solidFill>
+                <a:latin typeface="Aptos"/>
+                <a:ea typeface="Aptos"/>
+                <a:cs typeface="Aptos"/>
+              </a:rPr>
+              <a:t> on-hand units</a:t>
+            </a:r>
+          </a:p>
+          <a:p>
+            <a:pPr marL="0" indent="0" algn="l">
+              <a:spcAft>
+                <a:spcPts val="8"/>
+              </a:spcAft>
+              <a:buNone/>
+              <a:defRPr sz="1500" b="0">
+                <a:solidFill>
+                  <a:srgbClr val="132925"/>
+                </a:solidFill>
+                <a:latin typeface="Aptos"/>
+                <a:ea typeface="Aptos"/>
+                <a:cs typeface="Aptos"/>
+              </a:defRPr>
+            </a:pPr>
+            <a:r>
+              <a:rPr sz="2325" b="1" i="0">
+                <a:solidFill>
+                  <a:srgbClr val="132925"/>
+                </a:solidFill>
+                <a:latin typeface="Aptos"/>
+                <a:ea typeface="Aptos"/>
+                <a:cs typeface="Aptos"/>
+              </a:rPr>
+              <a:t>2</a:t>
+            </a:r>
+            <a:r>
+              <a:rPr sz="1350" b="0" i="0">
+                <a:solidFill>
+                  <a:srgbClr val="5B6F6A"/>
+                </a:solidFill>
+                <a:latin typeface="Aptos"/>
+                <a:ea typeface="Aptos"/>
+                <a:cs typeface="Aptos"/>
+              </a:rPr>
+              <a:t> stores</a:t>
+            </a:r>
+          </a:p>
+          <a:p>
+            <a:pPr marL="0" indent="0" algn="l">
+              <a:spcAft>
+                <a:spcPts val="8"/>
+              </a:spcAft>
+              <a:buNone/>
+              <a:defRPr sz="1500" b="0">
+                <a:solidFill>
+                  <a:srgbClr val="132925"/>
+                </a:solidFill>
+                <a:latin typeface="Aptos"/>
+                <a:ea typeface="Aptos"/>
+                <a:cs typeface="Aptos"/>
+              </a:defRPr>
+            </a:pPr>
+            <a:r>
+              <a:rPr sz="2325" b="1" i="0">
+                <a:solidFill>
+                  <a:srgbClr val="C47A00"/>
+                </a:solidFill>
+                <a:latin typeface="Aptos"/>
+                <a:ea typeface="Aptos"/>
+                <a:cs typeface="Aptos"/>
+              </a:rPr>
+              <a:t>2</a:t>
+            </a:r>
+            <a:r>
+              <a:rPr sz="1350" b="0" i="0">
+                <a:solidFill>
+                  <a:srgbClr val="5B6F6A"/>
+                </a:solidFill>
+                <a:latin typeface="Aptos"/>
+                <a:ea typeface="Aptos"/>
+                <a:cs typeface="Aptos"/>
+              </a:rPr>
+              <a:t> review warnings</a:t>
+            </a:r>
+          </a:p>
+        </p:txBody>
+      </p:sp>
+      <p:sp>
+        <p:nvSpPr>
+          <p:cNvPr id="4" name="Rectangle 3">
+            <a:extLst>
+              <a:ext uri="{FF2B5EF4-FFF2-40B4-BE49-F238E27FC236}">
+                <a16:creationId xmlns:a16="http://schemas.microsoft.com/office/drawing/2014/main" id="{1CF70062-3F71-4744-A0CB-D0CB43B2DAFE}"/>
+              </a:ext>
+            </a:extLst>
+          </p:cNvPr>
+          <p:cNvSpPr>
+            <a:spLocks noGrp="1"/>
+          </p:cNvSpPr>
+          <p:nvPr/>
+        </p:nvSpPr>
+        <p:spPr>
+          <a:xfrm>
+            <a:off x="4095750" y="1543050"/>
+            <a:ext cx="1143000" cy="304800"/>
+          </a:xfrm>
+          <a:prstGeom prst="rect">
+            <a:avLst/>
+          </a:prstGeom>
+          <a:noFill/>
+          <a:ln w="0">
+            <a:noFill/>
+            <a:prstDash val="solid"/>
+          </a:ln>
+        </p:spPr>
+        <p:txBody>
+          <a:bodyPr wrap="square" lIns="0" tIns="0" rIns="0" bIns="0" anchor="ctr">
+            <a:normAutofit/>
+          </a:bodyPr>
+          <a:lstStyle/>
+          <a:p>
+            <a:pPr marL="0" indent="0" algn="l">
+              <a:spcAft>
+                <a:spcPts val="0"/>
+              </a:spcAft>
+              <a:buNone/>
+              <a:defRPr sz="1200" b="0">
+                <a:solidFill>
+                  <a:srgbClr val="132925"/>
+                </a:solidFill>
+                <a:latin typeface="Aptos"/>
+                <a:ea typeface="Aptos"/>
+                <a:cs typeface="Aptos"/>
+              </a:defRPr>
+            </a:pPr>
+            <a:r>
+              <a:rPr sz="1200" b="1" i="0">
+                <a:solidFill>
+                  <a:srgbClr val="087C72"/>
+                </a:solidFill>
+                <a:latin typeface="Aptos"/>
+                <a:ea typeface="Aptos"/>
+                <a:cs typeface="Aptos"/>
+              </a:rPr>
+              <a:t>01</a:t>
+            </a:r>
+            <a:r>
+              <a:rPr sz="1200" b="1" i="0">
+                <a:solidFill>
+                  <a:srgbClr val="132925"/>
+                </a:solidFill>
+                <a:latin typeface="Aptos"/>
+                <a:ea typeface="Aptos"/>
+                <a:cs typeface="Aptos"/>
+              </a:rPr>
+              <a:t>  FILES</a:t>
+            </a:r>
+          </a:p>
+        </p:txBody>
+      </p:sp>
+      <p:sp>
+        <p:nvSpPr>
+          <p:cNvPr id="5" name="Rectangle 4">
+            <a:extLst>
+              <a:ext uri="{FF2B5EF4-FFF2-40B4-BE49-F238E27FC236}">
+                <a16:creationId xmlns:a16="http://schemas.microsoft.com/office/drawing/2014/main" id="{E49406E0-FB77-40D0-92AF-9C7ECDDB0F65}"/>
+              </a:ext>
+            </a:extLst>
+          </p:cNvPr>
+          <p:cNvSpPr>
+            <a:spLocks noGrp="1"/>
+          </p:cNvSpPr>
+          <p:nvPr/>
+        </p:nvSpPr>
+        <p:spPr>
+          <a:xfrm>
+            <a:off x="5219700" y="1704975"/>
+            <a:ext cx="895350" cy="19050"/>
+          </a:xfrm>
+          <a:prstGeom prst="rect">
+            <a:avLst/>
+          </a:prstGeom>
+          <a:solidFill>
+            <a:srgbClr val="D6E3DF"/>
+          </a:solidFill>
+          <a:ln w="0">
+            <a:solidFill>
+              <a:srgbClr val="D6E3DF"/>
+            </a:solidFill>
+            <a:prstDash val="solid"/>
+          </a:ln>
+        </p:spPr>
+        <p:txBody>
+          <a:bodyPr/>
+          <a:lstStyle/>
+          <a:p>
+            <a:endParaRPr lang="en-US"/>
+          </a:p>
+        </p:txBody>
+      </p:sp>
+      <p:sp>
+        <p:nvSpPr>
+          <p:cNvPr id="6" name="Rectangle 5">
+            <a:extLst>
+              <a:ext uri="{FF2B5EF4-FFF2-40B4-BE49-F238E27FC236}">
+                <a16:creationId xmlns:a16="http://schemas.microsoft.com/office/drawing/2014/main" id="{CD7E3841-2DC3-41D2-9CB3-17452DAD3E8E}"/>
+              </a:ext>
+            </a:extLst>
+          </p:cNvPr>
+          <p:cNvSpPr>
+            <a:spLocks noGrp="1"/>
+          </p:cNvSpPr>
+          <p:nvPr/>
+        </p:nvSpPr>
+        <p:spPr>
+          <a:xfrm>
+            <a:off x="6229350" y="1543050"/>
+            <a:ext cx="1333500" cy="304800"/>
+          </a:xfrm>
+          <a:prstGeom prst="rect">
+            <a:avLst/>
+          </a:prstGeom>
+          <a:noFill/>
+          <a:ln w="0">
+            <a:noFill/>
+            <a:prstDash val="solid"/>
+          </a:ln>
+        </p:spPr>
+        <p:txBody>
+          <a:bodyPr wrap="square" lIns="0" tIns="0" rIns="0" bIns="0" anchor="ctr">
+            <a:normAutofit/>
+          </a:bodyPr>
+          <a:lstStyle/>
+          <a:p>
+            <a:pPr marL="0" indent="0" algn="l">
+              <a:spcAft>
+                <a:spcPts val="0"/>
+              </a:spcAft>
+              <a:buNone/>
+              <a:defRPr sz="1200" b="0">
+                <a:solidFill>
+                  <a:srgbClr val="132925"/>
+                </a:solidFill>
+                <a:latin typeface="Aptos"/>
+                <a:ea typeface="Aptos"/>
+                <a:cs typeface="Aptos"/>
+              </a:defRPr>
+            </a:pPr>
+            <a:r>
+              <a:rPr sz="1200" b="1" i="0">
+                <a:solidFill>
+                  <a:srgbClr val="087C72"/>
+                </a:solidFill>
+                <a:latin typeface="Aptos"/>
+                <a:ea typeface="Aptos"/>
+                <a:cs typeface="Aptos"/>
+              </a:rPr>
+              <a:t>02</a:t>
+            </a:r>
+            <a:r>
+              <a:rPr sz="1200" b="1" i="0">
+                <a:solidFill>
+                  <a:srgbClr val="132925"/>
+                </a:solidFill>
+                <a:latin typeface="Aptos"/>
+                <a:ea typeface="Aptos"/>
+                <a:cs typeface="Aptos"/>
+              </a:rPr>
+              <a:t>  REVIEW</a:t>
+            </a:r>
+          </a:p>
+        </p:txBody>
+      </p:sp>
+      <p:sp>
+        <p:nvSpPr>
+          <p:cNvPr id="7" name="Rectangle 6">
+            <a:extLst>
+              <a:ext uri="{FF2B5EF4-FFF2-40B4-BE49-F238E27FC236}">
+                <a16:creationId xmlns:a16="http://schemas.microsoft.com/office/drawing/2014/main" id="{62DAB98C-AF8E-42BE-8A72-D113CBCF80B9}"/>
+              </a:ext>
+            </a:extLst>
+          </p:cNvPr>
+          <p:cNvSpPr>
+            <a:spLocks noGrp="1"/>
+          </p:cNvSpPr>
+          <p:nvPr/>
+        </p:nvSpPr>
+        <p:spPr>
+          <a:xfrm>
+            <a:off x="7524750" y="1704975"/>
+            <a:ext cx="895350" cy="19050"/>
+          </a:xfrm>
+          <a:prstGeom prst="rect">
+            <a:avLst/>
+          </a:prstGeom>
+          <a:solidFill>
+            <a:srgbClr val="D6E3DF"/>
+          </a:solidFill>
+          <a:ln w="0">
+            <a:solidFill>
+              <a:srgbClr val="D6E3DF"/>
+            </a:solidFill>
+            <a:prstDash val="solid"/>
+          </a:ln>
+        </p:spPr>
+        <p:txBody>
+          <a:bodyPr/>
+          <a:lstStyle/>
+          <a:p>
+            <a:endParaRPr lang="en-US"/>
+          </a:p>
+        </p:txBody>
+      </p:sp>
+      <p:sp>
+        <p:nvSpPr>
+          <p:cNvPr id="8" name="Rectangle 7">
+            <a:extLst>
+              <a:ext uri="{FF2B5EF4-FFF2-40B4-BE49-F238E27FC236}">
+                <a16:creationId xmlns:a16="http://schemas.microsoft.com/office/drawing/2014/main" id="{F7AD2D69-77BC-4EDA-8F89-18DFD7E13089}"/>
+              </a:ext>
+            </a:extLst>
+          </p:cNvPr>
+          <p:cNvSpPr>
+            <a:spLocks noGrp="1"/>
+          </p:cNvSpPr>
+          <p:nvPr/>
+        </p:nvSpPr>
+        <p:spPr>
+          <a:xfrm>
+            <a:off x="8534400" y="1543050"/>
+            <a:ext cx="1333500" cy="304800"/>
+          </a:xfrm>
+          <a:prstGeom prst="rect">
+            <a:avLst/>
+          </a:prstGeom>
+          <a:noFill/>
+          <a:ln w="0">
+            <a:noFill/>
+            <a:prstDash val="solid"/>
+          </a:ln>
+        </p:spPr>
+        <p:txBody>
+          <a:bodyPr wrap="square" lIns="0" tIns="0" rIns="0" bIns="0" anchor="ctr">
+            <a:normAutofit/>
+          </a:bodyPr>
+          <a:lstStyle/>
+          <a:p>
+            <a:pPr marL="0" indent="0" algn="l">
+              <a:spcAft>
+                <a:spcPts val="0"/>
+              </a:spcAft>
+              <a:buNone/>
+              <a:defRPr sz="1200" b="0">
+                <a:solidFill>
+                  <a:srgbClr val="132925"/>
+                </a:solidFill>
+                <a:latin typeface="Aptos"/>
+                <a:ea typeface="Aptos"/>
+                <a:cs typeface="Aptos"/>
+              </a:defRPr>
+            </a:pPr>
+            <a:r>
+              <a:rPr sz="1200" b="1" i="0">
+                <a:solidFill>
+                  <a:srgbClr val="087C72"/>
+                </a:solidFill>
+                <a:latin typeface="Aptos"/>
+                <a:ea typeface="Aptos"/>
+                <a:cs typeface="Aptos"/>
+              </a:rPr>
+              <a:t>03</a:t>
+            </a:r>
+            <a:r>
+              <a:rPr sz="1200" b="1" i="0">
+                <a:solidFill>
+                  <a:srgbClr val="132925"/>
+                </a:solidFill>
+                <a:latin typeface="Aptos"/>
+                <a:ea typeface="Aptos"/>
+                <a:cs typeface="Aptos"/>
+              </a:rPr>
+              <a:t>  LAUNCH</a:t>
+            </a:r>
+          </a:p>
+        </p:txBody>
+      </p:sp>
+      <p:sp>
+        <p:nvSpPr>
+          <p:cNvPr id="9" name="Rounded Rectangle 8">
+            <a:extLst>
+              <a:ext uri="{FF2B5EF4-FFF2-40B4-BE49-F238E27FC236}">
+                <a16:creationId xmlns:a16="http://schemas.microsoft.com/office/drawing/2014/main" id="{13F33523-382D-4588-8EDC-A527AFF4FBB9}"/>
+              </a:ext>
+            </a:extLst>
+          </p:cNvPr>
+          <p:cNvSpPr>
+            <a:spLocks noGrp="1"/>
+          </p:cNvSpPr>
+          <p:nvPr/>
+        </p:nvSpPr>
+        <p:spPr>
+          <a:xfrm>
+            <a:off x="4076700" y="2019300"/>
+            <a:ext cx="3105150" cy="1762125"/>
+          </a:xfrm>
+          <a:prstGeom prst="roundRect">
+            <a:avLst>
+              <a:gd name="adj" fmla="val 3243"/>
+            </a:avLst>
+          </a:prstGeom>
+          <a:solidFill>
+            <a:srgbClr val="FFFFFF"/>
+          </a:solidFill>
+          <a:ln w="9525">
+            <a:solidFill>
+              <a:srgbClr val="D6E3DF"/>
+            </a:solidFill>
+            <a:prstDash val="solid"/>
+          </a:ln>
+        </p:spPr>
+        <p:txBody>
+          <a:bodyPr/>
+          <a:lstStyle/>
+          <a:p>
+            <a:endParaRPr lang="en-US"/>
+          </a:p>
+        </p:txBody>
+      </p:sp>
+      <p:pic>
+        <p:nvPicPr>
+          <p:cNvPr id="23" name="Picture 22"/>
+          <p:cNvPicPr>
+            <a:picLocks noChangeAspect="1"/>
+          </p:cNvPicPr>
+          <p:nvPr/>
+        </p:nvPicPr>
+        <p:blipFill>
+          <a:blip r:embed="rId3"/>
+          <a:stretch/>
+        </p:blipFill>
+        <p:spPr>
+          <a:xfrm>
+            <a:off x="4096808" y="2038350"/>
+            <a:ext cx="3064933" cy="1724025"/>
+          </a:xfrm>
+          <a:prstGeom prst="roundRect">
+            <a:avLst>
+              <a:gd name="adj" fmla="val 3315"/>
+            </a:avLst>
+          </a:prstGeom>
+        </p:spPr>
+      </p:pic>
+      <p:sp>
+        <p:nvSpPr>
+          <p:cNvPr id="11" name="Rounded Rectangle 10">
+            <a:extLst>
+              <a:ext uri="{FF2B5EF4-FFF2-40B4-BE49-F238E27FC236}">
+                <a16:creationId xmlns:a16="http://schemas.microsoft.com/office/drawing/2014/main" id="{11FD2D1A-7507-437C-8997-0926BEB0417B}"/>
+              </a:ext>
+            </a:extLst>
+          </p:cNvPr>
+          <p:cNvSpPr>
+            <a:spLocks noGrp="1"/>
+          </p:cNvSpPr>
+          <p:nvPr/>
+        </p:nvSpPr>
+        <p:spPr>
+          <a:xfrm>
+            <a:off x="7353300" y="2019300"/>
+            <a:ext cx="4076700" cy="2305050"/>
+          </a:xfrm>
+          <a:prstGeom prst="roundRect">
+            <a:avLst>
+              <a:gd name="adj" fmla="val 2479"/>
+            </a:avLst>
+          </a:prstGeom>
+          <a:solidFill>
+            <a:srgbClr val="FFFFFF"/>
+          </a:solidFill>
+          <a:ln w="9525">
+            <a:solidFill>
+              <a:srgbClr val="D6E3DF"/>
+            </a:solidFill>
+            <a:prstDash val="solid"/>
+          </a:ln>
+        </p:spPr>
+        <p:txBody>
+          <a:bodyPr/>
+          <a:lstStyle/>
+          <a:p>
+            <a:endParaRPr lang="en-US"/>
+          </a:p>
+        </p:txBody>
+      </p:sp>
+      <p:pic>
+        <p:nvPicPr>
+          <p:cNvPr id="25" name="Picture 24"/>
+          <p:cNvPicPr>
+            <a:picLocks noChangeAspect="1"/>
+          </p:cNvPicPr>
+          <p:nvPr/>
+        </p:nvPicPr>
+        <p:blipFill>
+          <a:blip r:embed="rId4"/>
+          <a:stretch/>
+        </p:blipFill>
+        <p:spPr>
+          <a:xfrm>
+            <a:off x="7376583" y="2038350"/>
+            <a:ext cx="4030133" cy="2266950"/>
+          </a:xfrm>
+          <a:prstGeom prst="roundRect">
+            <a:avLst>
+              <a:gd name="adj" fmla="val 2521"/>
+            </a:avLst>
+          </a:prstGeom>
+        </p:spPr>
+      </p:pic>
+      <p:sp>
+        <p:nvSpPr>
+          <p:cNvPr id="13" name="Rounded Rectangle 12">
+            <a:extLst>
+              <a:ext uri="{FF2B5EF4-FFF2-40B4-BE49-F238E27FC236}">
+                <a16:creationId xmlns:a16="http://schemas.microsoft.com/office/drawing/2014/main" id="{B5D0DEFD-8056-4060-A23E-DCDEC2B6FEBC}"/>
+              </a:ext>
+            </a:extLst>
+          </p:cNvPr>
+          <p:cNvSpPr>
+            <a:spLocks noGrp="1"/>
+          </p:cNvSpPr>
+          <p:nvPr/>
+        </p:nvSpPr>
+        <p:spPr>
+          <a:xfrm>
+            <a:off x="4095750" y="4552950"/>
+            <a:ext cx="7315200" cy="1524000"/>
+          </a:xfrm>
+          <a:prstGeom prst="roundRect">
+            <a:avLst>
+              <a:gd name="adj" fmla="val 3750"/>
+            </a:avLst>
+          </a:prstGeom>
+          <a:solidFill>
+            <a:srgbClr val="E6F3F1"/>
+          </a:solidFill>
+          <a:ln w="9525">
+            <a:solidFill>
+              <a:srgbClr val="B8DAD6"/>
+            </a:solidFill>
+            <a:prstDash val="solid"/>
+          </a:ln>
+        </p:spPr>
+        <p:txBody>
+          <a:bodyPr/>
+          <a:lstStyle/>
+          <a:p>
+            <a:endParaRPr lang="en-US"/>
+          </a:p>
+        </p:txBody>
+      </p:sp>
+      <p:sp>
+        <p:nvSpPr>
+          <p:cNvPr id="14" name="Rectangle 13">
+            <a:extLst>
+              <a:ext uri="{FF2B5EF4-FFF2-40B4-BE49-F238E27FC236}">
+                <a16:creationId xmlns:a16="http://schemas.microsoft.com/office/drawing/2014/main" id="{34F8F8FC-510E-41D3-BEA3-6A6CAC39DAD5}"/>
+              </a:ext>
+            </a:extLst>
+          </p:cNvPr>
+          <p:cNvSpPr>
+            <a:spLocks noGrp="1"/>
+          </p:cNvSpPr>
+          <p:nvPr/>
+        </p:nvSpPr>
+        <p:spPr>
+          <a:xfrm>
+            <a:off x="4324350" y="4762500"/>
+            <a:ext cx="6858000" cy="1085850"/>
+          </a:xfrm>
+          <a:prstGeom prst="rect">
+            <a:avLst/>
+          </a:prstGeom>
+          <a:noFill/>
+          <a:ln w="0">
+            <a:noFill/>
+            <a:prstDash val="solid"/>
+          </a:ln>
+        </p:spPr>
+        <p:txBody>
+          <a:bodyPr wrap="square" lIns="0" tIns="0" rIns="0" bIns="0" anchor="t">
+            <a:normAutofit/>
+          </a:bodyPr>
+          <a:lstStyle/>
+          <a:p>
+            <a:pPr marL="0" indent="0" algn="l">
+              <a:spcAft>
+                <a:spcPts val="14"/>
+              </a:spcAft>
+              <a:buNone/>
+              <a:defRPr sz="1350" b="0">
+                <a:solidFill>
+                  <a:srgbClr val="132925"/>
+                </a:solidFill>
+                <a:latin typeface="Aptos"/>
+                <a:ea typeface="Aptos"/>
+                <a:cs typeface="Aptos"/>
+              </a:defRPr>
+            </a:pPr>
+            <a:r>
+              <a:rPr sz="1725" b="1" i="0">
+                <a:solidFill>
+                  <a:srgbClr val="0B3D38"/>
+                </a:solidFill>
+                <a:latin typeface="Aptos"/>
+                <a:ea typeface="Aptos"/>
+                <a:cs typeface="Aptos"/>
+              </a:rPr>
+              <a:t>Field-level provenance is visible before launch</a:t>
+            </a:r>
+          </a:p>
+          <a:p>
+            <a:pPr marL="0" indent="0" algn="l">
+              <a:spcAft>
+                <a:spcPts val="8"/>
+              </a:spcAft>
+              <a:buNone/>
+              <a:defRPr sz="1350" b="0">
+                <a:solidFill>
+                  <a:srgbClr val="132925"/>
+                </a:solidFill>
+                <a:latin typeface="Aptos"/>
+                <a:ea typeface="Aptos"/>
+                <a:cs typeface="Aptos"/>
+              </a:defRPr>
+            </a:pPr>
+            <a:r>
+              <a:rPr sz="1350" b="1" i="0">
+                <a:solidFill>
+                  <a:srgbClr val="087C72"/>
+                </a:solidFill>
+                <a:latin typeface="Aptos"/>
+                <a:ea typeface="Aptos"/>
+                <a:cs typeface="Aptos"/>
+              </a:rPr>
+              <a:t>Supplier notice</a:t>
+            </a:r>
+            <a:r>
+              <a:rPr sz="1350" b="0" i="0">
+                <a:solidFill>
+                  <a:srgbClr val="132925"/>
+                </a:solidFill>
+                <a:latin typeface="Aptos"/>
+                <a:ea typeface="Aptos"/>
+                <a:cs typeface="Aptos"/>
+              </a:rPr>
+              <a:t> identifies the product and lots. </a:t>
+            </a:r>
+            <a:r>
+              <a:rPr sz="1350" b="1" i="0">
+                <a:solidFill>
+                  <a:srgbClr val="087C72"/>
+                </a:solidFill>
+                <a:latin typeface="Aptos"/>
+                <a:ea typeface="Aptos"/>
+                <a:cs typeface="Aptos"/>
+              </a:rPr>
+              <a:t>Inventory rows</a:t>
+            </a:r>
+            <a:r>
+              <a:rPr sz="1350" b="0" i="0">
+                <a:solidFill>
+                  <a:srgbClr val="132925"/>
+                </a:solidFill>
+                <a:latin typeface="Aptos"/>
+                <a:ea typeface="Aptos"/>
+                <a:cs typeface="Aptos"/>
+              </a:rPr>
+              <a:t> carry accepted or rejected status. </a:t>
+            </a:r>
+            <a:r>
+              <a:rPr sz="1350" b="1" i="0">
+                <a:solidFill>
+                  <a:srgbClr val="087C72"/>
+                </a:solidFill>
+                <a:latin typeface="Aptos"/>
+                <a:ea typeface="Aptos"/>
+                <a:cs typeface="Aptos"/>
+              </a:rPr>
+              <a:t>Shelf evidence</a:t>
+            </a:r>
+            <a:r>
+              <a:rPr sz="1350" b="0" i="0">
+                <a:solidFill>
+                  <a:srgbClr val="132925"/>
+                </a:solidFill>
+                <a:latin typeface="Aptos"/>
+                <a:ea typeface="Aptos"/>
+                <a:cs typeface="Aptos"/>
+              </a:rPr>
+              <a:t> remains explicitly unknown until reviewed.</a:t>
             </a:r>
           </a:p>
         </p:txBody>
       </p:sp>
     </p:spTree>
+    <p:extLst>
+      <p:ext uri="{BB962C8B-B14F-4D97-AF65-F5344CB8AC3E}">
+        <p14:creationId xmlns:p14="http://schemas.microsoft.com/office/powerpoint/2010/main" val="1563788633"/>
+      </p:ext>
+    </p:extLst>
   </p:cSld>
   <p:clrMapOvr>
     <a:masterClrMapping/>
@@ -3662,18 +6432,39 @@
 </file>
 
 <file path=ppt/slides/slide4.xml><?xml version="1.0" encoding="utf-8"?>
-<p:sld xmlns:a="http://schemas.openxmlformats.org/drawingml/2006/main" xmlns:p="http://schemas.openxmlformats.org/presentationml/2006/main" xmlns:r="http://schemas.openxmlformats.org/officeDocument/2006/relationships">
+<p:sld xmlns:a="http://schemas.openxmlformats.org/drawingml/2006/main" xmlns:r="http://schemas.openxmlformats.org/officeDocument/2006/relationships" xmlns:p="http://schemas.openxmlformats.org/presentationml/2006/main">
   <p:cSld>
+    <p:bg>
+      <p:bgPr>
+        <a:solidFill>
+          <a:srgbClr val="F8FBFA"/>
+        </a:solidFill>
+        <a:effectLst/>
+      </p:bgPr>
+    </p:bg>
     <p:spTree>
       <p:nvGrpSpPr>
         <p:cNvPr id="1" name=""/>
         <p:cNvGrpSpPr/>
         <p:nvPr/>
       </p:nvGrpSpPr>
-      <p:grpSpPr/>
-      <p:sp>
-        <p:nvSpPr>
-          <p:cNvPr id="2" name="Title 1"/>
+      <p:grpSpPr>
+        <a:xfrm>
+          <a:off x="0" y="0"/>
+          <a:ext cx="0" cy="0"/>
+          <a:chOff x="0" y="0"/>
+          <a:chExt cx="0" cy="0"/>
+        </a:xfrm>
+      </p:grpSpPr>
+      <p:sp>
+        <p:nvSpPr>
+          <p:cNvPr id="2" name="Title 1">
+            <a:extLst>
+              <a:ext uri="{FF2B5EF4-FFF2-40B4-BE49-F238E27FC236}">
+                <a16:creationId xmlns:a16="http://schemas.microsoft.com/office/drawing/2014/main" id="{36C3F721-E1D7-4F93-8C0B-8C1E1A7DAD0B}"/>
+              </a:ext>
+            </a:extLst>
+          </p:cNvPr>
           <p:cNvSpPr>
             <a:spLocks noGrp="1"/>
           </p:cNvSpPr>
@@ -3681,27 +6472,55 @@
             <p:ph type="title"/>
           </p:nvPr>
         </p:nvSpPr>
-        <p:spPr/>
-        <p:txBody>
-          <a:bodyPr/>
-          <a:lstStyle/>
-          <a:p>
-            <a:pPr>
-              <a:defRPr sz="3200">
-                <a:solidFill>
-                  <a:srgbClr val="1F6FEB"/>
-                </a:solidFill>
+        <p:spPr>
+          <a:xfrm>
+            <a:off x="609600" y="419100"/>
+            <a:ext cx="10934700" cy="781050"/>
+          </a:xfrm>
+        </p:spPr>
+        <p:txBody>
+          <a:bodyPr wrap="square" lIns="0" tIns="0" rIns="0" bIns="0" anchor="ctr">
+            <a:normAutofit/>
+          </a:bodyPr>
+          <a:lstStyle/>
+          <a:p>
+            <a:pPr marL="0" indent="0" algn="l">
+              <a:spcAft>
+                <a:spcPts val="0"/>
+              </a:spcAft>
+              <a:buNone/>
+              <a:defRPr sz="3600" b="1">
+                <a:solidFill>
+                  <a:srgbClr val="132925"/>
+                </a:solidFill>
+                <a:latin typeface="Aptos Display"/>
+                <a:ea typeface="Aptos Display"/>
+                <a:cs typeface="Aptos Display"/>
               </a:defRPr>
             </a:pPr>
             <a:r>
-              <a:t>Architecture</a:t>
-            </a:r>
-          </a:p>
-        </p:txBody>
-      </p:sp>
-      <p:sp>
-        <p:nvSpPr>
-          <p:cNvPr id="3" name="Content Placeholder 2"/>
+              <a:rPr sz="3600" b="1" i="0">
+                <a:solidFill>
+                  <a:srgbClr val="132925"/>
+                </a:solidFill>
+                <a:latin typeface="Aptos Display"/>
+                <a:ea typeface="Aptos Display"/>
+                <a:cs typeface="Aptos Display"/>
+              </a:rPr>
+              <a:t>Autonomy stops at the evidence gate</a:t>
+            </a:r>
+          </a:p>
+        </p:txBody>
+      </p:sp>
+      <p:sp>
+        <p:nvSpPr>
+          <p:cNvPr id="3" name="Content Placeholder 2">
+            <a:extLst>
+              <a:ext uri="{FF2B5EF4-FFF2-40B4-BE49-F238E27FC236}">
+                <a16:creationId xmlns:a16="http://schemas.microsoft.com/office/drawing/2014/main" id="{B1958AE3-BB07-41D6-BE8F-697A1BF4220E}"/>
+              </a:ext>
+            </a:extLst>
+          </p:cNvPr>
           <p:cNvSpPr>
             <a:spLocks noGrp="1"/>
           </p:cNvSpPr>
@@ -3709,68 +6528,769 @@
             <p:ph idx="1"/>
           </p:nvPr>
         </p:nvSpPr>
-        <p:spPr/>
-        <p:txBody>
-          <a:bodyPr wrap="square"/>
-          <a:lstStyle/>
-          <a:p>
-            <a:pPr/>
-            <a:r>
-              <a:rPr sz="1800">
-                <a:solidFill>
-                  <a:srgbClr val="222222"/>
-                </a:solidFill>
-              </a:rPr>
-              <a:t>React + Vite + TypeScript dashboard talking to a FastAPI + Pydantic backend over REST and Server-Sent Events.</a:t>
-            </a:r>
-          </a:p>
-          <a:p>
-            <a:pPr/>
-            <a:r>
-              <a:rPr sz="1800">
-                <a:solidFill>
-                  <a:srgbClr val="222222"/>
-                </a:solidFill>
-              </a:rPr>
-              <a:t>An OrchestrationService backed by SQLite starts idempotent runs and persists every event so a reconnect replays history before following the live stream.</a:t>
-            </a:r>
-          </a:p>
-          <a:p>
-            <a:pPr/>
-            <a:r>
-              <a:rPr sz="1800">
-                <a:solidFill>
-                  <a:srgbClr val="222222"/>
-                </a:solidFill>
-              </a:rPr>
-              <a:t>A real Agent Orchestrator runs nine specialist agents as a dependency graph (DAG) with parallel waves, retries, and durable per-wave checkpoints.</a:t>
-            </a:r>
-          </a:p>
-          <a:p>
-            <a:pPr/>
-            <a:r>
-              <a:rPr sz="1800">
-                <a:solidFill>
-                  <a:srgbClr val="222222"/>
-                </a:solidFill>
-              </a:rPr>
-              <a:t>A Qwen Cloud gateway drives extraction, matching, vision, risk, notices, and the briefing, with every output validated against a Pydantic schema.</a:t>
-            </a:r>
-          </a:p>
-          <a:p>
-            <a:pPr/>
-            <a:r>
-              <a:rPr sz="1800">
-                <a:solidFill>
-                  <a:srgbClr val="222222"/>
-                </a:solidFill>
-              </a:rPr>
-              <a:t>Deployment target: Docker + Compose on Alibaba Cloud Container Service or Elastic Compute Service.</a:t>
+        <p:spPr>
+          <a:xfrm>
+            <a:off x="685800" y="1504950"/>
+            <a:ext cx="4762500" cy="4762500"/>
+          </a:xfrm>
+        </p:spPr>
+        <p:txBody>
+          <a:bodyPr wrap="square" lIns="0" tIns="0" rIns="76200" bIns="0" anchor="t">
+            <a:normAutofit/>
+          </a:bodyPr>
+          <a:lstStyle/>
+          <a:p>
+            <a:pPr marL="0" indent="0" algn="l">
+              <a:spcAft>
+                <a:spcPts val="26"/>
+              </a:spcAft>
+              <a:buNone/>
+              <a:defRPr sz="1500" b="0">
+                <a:solidFill>
+                  <a:srgbClr val="132925"/>
+                </a:solidFill>
+                <a:latin typeface="Aptos"/>
+                <a:ea typeface="Aptos"/>
+                <a:cs typeface="Aptos"/>
+              </a:defRPr>
+            </a:pPr>
+            <a:r>
+              <a:rPr sz="1800" b="1" i="0">
+                <a:solidFill>
+                  <a:srgbClr val="132925"/>
+                </a:solidFill>
+                <a:latin typeface="Aptos"/>
+                <a:ea typeface="Aptos"/>
+                <a:cs typeface="Aptos"/>
+              </a:rPr>
+              <a:t>The system can act quickly because uncertainty is never hidden.</a:t>
+            </a:r>
+          </a:p>
+          <a:p>
+            <a:pPr marL="0" indent="0" algn="l">
+              <a:spcAft>
+                <a:spcPts val="13"/>
+              </a:spcAft>
+              <a:buNone/>
+              <a:defRPr sz="1500" b="0">
+                <a:solidFill>
+                  <a:srgbClr val="132925"/>
+                </a:solidFill>
+                <a:latin typeface="Aptos"/>
+                <a:ea typeface="Aptos"/>
+                <a:cs typeface="Aptos"/>
+              </a:defRPr>
+            </a:pPr>
+            <a:r>
+              <a:rPr sz="1125" b="1" i="0">
+                <a:solidFill>
+                  <a:srgbClr val="087C72"/>
+                </a:solidFill>
+                <a:latin typeface="Aptos"/>
+                <a:ea typeface="Aptos"/>
+                <a:cs typeface="Aptos"/>
+              </a:rPr>
+              <a:t>VERSIONED</a:t>
+            </a:r>
+            <a:r>
+              <a:rPr sz="1500" b="0" i="0">
+                <a:solidFill>
+                  <a:srgbClr val="132925"/>
+                </a:solidFill>
+                <a:latin typeface="Aptos"/>
+                <a:ea typeface="Aptos"/>
+                <a:cs typeface="Aptos"/>
+              </a:rPr>
+              <a:t>  Reviewer corrections become new evidence.</a:t>
+            </a:r>
+          </a:p>
+          <a:p>
+            <a:pPr marL="0" indent="0" algn="l">
+              <a:spcAft>
+                <a:spcPts val="13"/>
+              </a:spcAft>
+              <a:buNone/>
+              <a:defRPr sz="1500" b="0">
+                <a:solidFill>
+                  <a:srgbClr val="132925"/>
+                </a:solidFill>
+                <a:latin typeface="Aptos"/>
+                <a:ea typeface="Aptos"/>
+                <a:cs typeface="Aptos"/>
+              </a:defRPr>
+            </a:pPr>
+            <a:r>
+              <a:rPr sz="1125" b="1" i="0">
+                <a:solidFill>
+                  <a:srgbClr val="B42318"/>
+                </a:solidFill>
+                <a:latin typeface="Aptos"/>
+                <a:ea typeface="Aptos"/>
+                <a:cs typeface="Aptos"/>
+              </a:rPr>
+              <a:t>CONFLICT</a:t>
+            </a:r>
+            <a:r>
+              <a:rPr sz="1500" b="0" i="0">
+                <a:solidFill>
+                  <a:srgbClr val="132925"/>
+                </a:solidFill>
+                <a:latin typeface="Aptos"/>
+                <a:ea typeface="Aptos"/>
+                <a:cs typeface="Aptos"/>
+              </a:rPr>
+              <a:t>  Stale reviewer versions cannot overwrite newer work.</a:t>
+            </a:r>
+          </a:p>
+          <a:p>
+            <a:pPr marL="0" indent="0" algn="l">
+              <a:spcAft>
+                <a:spcPts val="13"/>
+              </a:spcAft>
+              <a:buNone/>
+              <a:defRPr sz="1500" b="0">
+                <a:solidFill>
+                  <a:srgbClr val="132925"/>
+                </a:solidFill>
+                <a:latin typeface="Aptos"/>
+                <a:ea typeface="Aptos"/>
+                <a:cs typeface="Aptos"/>
+              </a:defRPr>
+            </a:pPr>
+            <a:r>
+              <a:rPr sz="1125" b="1" i="0">
+                <a:solidFill>
+                  <a:srgbClr val="087C72"/>
+                </a:solidFill>
+                <a:latin typeface="Aptos"/>
+                <a:ea typeface="Aptos"/>
+                <a:cs typeface="Aptos"/>
+              </a:rPr>
+              <a:t>IMMUTABLE</a:t>
+            </a:r>
+            <a:r>
+              <a:rPr sz="1500" b="0" i="0">
+                <a:solidFill>
+                  <a:srgbClr val="132925"/>
+                </a:solidFill>
+                <a:latin typeface="Aptos"/>
+                <a:ea typeface="Aptos"/>
+                <a:cs typeface="Aptos"/>
+              </a:rPr>
+              <a:t>  Confirmation creates the incident snapshot.</a:t>
+            </a:r>
+          </a:p>
+          <a:p>
+            <a:pPr marL="0" indent="0" algn="l">
+              <a:spcAft>
+                <a:spcPts val="13"/>
+              </a:spcAft>
+              <a:buNone/>
+              <a:defRPr sz="1500" b="0">
+                <a:solidFill>
+                  <a:srgbClr val="132925"/>
+                </a:solidFill>
+                <a:latin typeface="Aptos"/>
+                <a:ea typeface="Aptos"/>
+                <a:cs typeface="Aptos"/>
+              </a:defRPr>
+            </a:pPr>
+            <a:r>
+              <a:rPr sz="1125" b="1" i="0">
+                <a:solidFill>
+                  <a:srgbClr val="B42318"/>
+                </a:solidFill>
+                <a:latin typeface="Aptos"/>
+                <a:ea typeface="Aptos"/>
+                <a:cs typeface="Aptos"/>
+              </a:rPr>
+              <a:t>BLOCKED</a:t>
+            </a:r>
+            <a:r>
+              <a:rPr sz="1500" b="0" i="0">
+                <a:solidFill>
+                  <a:srgbClr val="132925"/>
+                </a:solidFill>
+                <a:latin typeface="Aptos"/>
+                <a:ea typeface="Aptos"/>
+                <a:cs typeface="Aptos"/>
+              </a:rPr>
+              <a:t>  Launch is unavailable before confirmation.</a:t>
+            </a:r>
+          </a:p>
+          <a:p>
+            <a:pPr marL="0" indent="0" algn="l">
+              <a:spcAft>
+                <a:spcPts val="13"/>
+              </a:spcAft>
+              <a:buNone/>
+              <a:defRPr sz="1500" b="0">
+                <a:solidFill>
+                  <a:srgbClr val="132925"/>
+                </a:solidFill>
+                <a:latin typeface="Aptos"/>
+                <a:ea typeface="Aptos"/>
+                <a:cs typeface="Aptos"/>
+              </a:defRPr>
+            </a:pPr>
+            <a:r>
+              <a:rPr sz="1125" b="1" i="0">
+                <a:solidFill>
+                  <a:srgbClr val="C47A00"/>
+                </a:solidFill>
+                <a:latin typeface="Aptos"/>
+                <a:ea typeface="Aptos"/>
+                <a:cs typeface="Aptos"/>
+              </a:rPr>
+              <a:t>UNKNOWN</a:t>
+            </a:r>
+            <a:r>
+              <a:rPr sz="1500" b="0" i="0">
+                <a:solidFill>
+                  <a:srgbClr val="132925"/>
+                </a:solidFill>
+                <a:latin typeface="Aptos"/>
+                <a:ea typeface="Aptos"/>
+                <a:cs typeface="Aptos"/>
+              </a:rPr>
+              <a:t>  Unreadable shelf evidence escalates to review.</a:t>
+            </a:r>
+          </a:p>
+        </p:txBody>
+      </p:sp>
+      <p:sp>
+        <p:nvSpPr>
+          <p:cNvPr id="4" name="Rounded Rectangle 3">
+            <a:extLst>
+              <a:ext uri="{FF2B5EF4-FFF2-40B4-BE49-F238E27FC236}">
+                <a16:creationId xmlns:a16="http://schemas.microsoft.com/office/drawing/2014/main" id="{7F73BC63-2B07-4DC0-AFAB-7BD27815B0B8}"/>
+              </a:ext>
+            </a:extLst>
+          </p:cNvPr>
+          <p:cNvSpPr>
+            <a:spLocks noGrp="1"/>
+          </p:cNvSpPr>
+          <p:nvPr/>
+        </p:nvSpPr>
+        <p:spPr>
+          <a:xfrm>
+            <a:off x="6057900" y="1485900"/>
+            <a:ext cx="2171700" cy="4648200"/>
+          </a:xfrm>
+          <a:prstGeom prst="roundRect">
+            <a:avLst>
+              <a:gd name="adj" fmla="val 2632"/>
+            </a:avLst>
+          </a:prstGeom>
+          <a:solidFill>
+            <a:srgbClr val="FFFFFF"/>
+          </a:solidFill>
+          <a:ln w="9525">
+            <a:solidFill>
+              <a:srgbClr val="D6E3DF"/>
+            </a:solidFill>
+            <a:prstDash val="solid"/>
+          </a:ln>
+        </p:spPr>
+        <p:txBody>
+          <a:bodyPr/>
+          <a:lstStyle/>
+          <a:p>
+            <a:endParaRPr lang="en-US"/>
+          </a:p>
+        </p:txBody>
+      </p:sp>
+      <p:pic>
+        <p:nvPicPr>
+          <p:cNvPr id="17" name="Picture 16"/>
+          <p:cNvPicPr>
+            <a:picLocks noChangeAspect="1"/>
+          </p:cNvPicPr>
+          <p:nvPr/>
+        </p:nvPicPr>
+        <p:blipFill>
+          <a:blip r:embed="rId3"/>
+          <a:stretch/>
+        </p:blipFill>
+        <p:spPr>
+          <a:xfrm>
+            <a:off x="6078620" y="1504950"/>
+            <a:ext cx="2130259" cy="4610100"/>
+          </a:xfrm>
+          <a:prstGeom prst="roundRect">
+            <a:avLst>
+              <a:gd name="adj" fmla="val 2679"/>
+            </a:avLst>
+          </a:prstGeom>
+        </p:spPr>
+      </p:pic>
+      <p:sp>
+        <p:nvSpPr>
+          <p:cNvPr id="6" name="Rounded Rectangle 5">
+            <a:extLst>
+              <a:ext uri="{FF2B5EF4-FFF2-40B4-BE49-F238E27FC236}">
+                <a16:creationId xmlns:a16="http://schemas.microsoft.com/office/drawing/2014/main" id="{B3D48685-D400-4977-AB16-250FE05F7A9D}"/>
+              </a:ext>
+            </a:extLst>
+          </p:cNvPr>
+          <p:cNvSpPr>
+            <a:spLocks noGrp="1"/>
+          </p:cNvSpPr>
+          <p:nvPr/>
+        </p:nvSpPr>
+        <p:spPr>
+          <a:xfrm>
+            <a:off x="8553450" y="1638300"/>
+            <a:ext cx="2667000" cy="381000"/>
+          </a:xfrm>
+          <a:prstGeom prst="roundRect">
+            <a:avLst>
+              <a:gd name="adj" fmla="val 15000"/>
+            </a:avLst>
+          </a:prstGeom>
+          <a:solidFill>
+            <a:srgbClr val="FFF3D6"/>
+          </a:solidFill>
+          <a:ln w="9525">
+            <a:solidFill>
+              <a:srgbClr val="EACB88"/>
+            </a:solidFill>
+            <a:prstDash val="solid"/>
+          </a:ln>
+        </p:spPr>
+        <p:txBody>
+          <a:bodyPr/>
+          <a:lstStyle/>
+          <a:p>
+            <a:endParaRPr lang="en-US"/>
+          </a:p>
+        </p:txBody>
+      </p:sp>
+      <p:sp>
+        <p:nvSpPr>
+          <p:cNvPr id="7" name="Rectangle 6">
+            <a:extLst>
+              <a:ext uri="{FF2B5EF4-FFF2-40B4-BE49-F238E27FC236}">
+                <a16:creationId xmlns:a16="http://schemas.microsoft.com/office/drawing/2014/main" id="{7C23BA79-8918-41B5-B9CF-FC8FD5167DB3}"/>
+              </a:ext>
+            </a:extLst>
+          </p:cNvPr>
+          <p:cNvSpPr>
+            <a:spLocks noGrp="1"/>
+          </p:cNvSpPr>
+          <p:nvPr/>
+        </p:nvSpPr>
+        <p:spPr>
+          <a:xfrm>
+            <a:off x="8629650" y="1666875"/>
+            <a:ext cx="2514600" cy="323850"/>
+          </a:xfrm>
+          <a:prstGeom prst="rect">
+            <a:avLst/>
+          </a:prstGeom>
+          <a:noFill/>
+          <a:ln w="0">
+            <a:noFill/>
+            <a:prstDash val="solid"/>
+          </a:ln>
+        </p:spPr>
+        <p:txBody>
+          <a:bodyPr wrap="square" lIns="0" tIns="0" rIns="0" bIns="0" anchor="ctr">
+            <a:normAutofit/>
+          </a:bodyPr>
+          <a:lstStyle/>
+          <a:p>
+            <a:pPr marL="0" indent="0" algn="ctr">
+              <a:spcAft>
+                <a:spcPts val="0"/>
+              </a:spcAft>
+              <a:buNone/>
+              <a:defRPr sz="1125" b="1">
+                <a:solidFill>
+                  <a:srgbClr val="C47A00"/>
+                </a:solidFill>
+                <a:latin typeface="Aptos"/>
+                <a:ea typeface="Aptos"/>
+                <a:cs typeface="Aptos"/>
+              </a:defRPr>
+            </a:pPr>
+            <a:r>
+              <a:rPr sz="1125" b="1" i="0">
+                <a:solidFill>
+                  <a:srgbClr val="C47A00"/>
+                </a:solidFill>
+                <a:latin typeface="Aptos"/>
+                <a:ea typeface="Aptos"/>
+                <a:cs typeface="Aptos"/>
+              </a:rPr>
+              <a:t>HUMAN EVIDENCE GATE</a:t>
+            </a:r>
+          </a:p>
+        </p:txBody>
+      </p:sp>
+      <p:sp>
+        <p:nvSpPr>
+          <p:cNvPr id="8" name="Rounded Rectangle 7">
+            <a:extLst>
+              <a:ext uri="{FF2B5EF4-FFF2-40B4-BE49-F238E27FC236}">
+                <a16:creationId xmlns:a16="http://schemas.microsoft.com/office/drawing/2014/main" id="{43CA64C9-ECC5-4F61-978A-4976A87719A2}"/>
+              </a:ext>
+            </a:extLst>
+          </p:cNvPr>
+          <p:cNvSpPr>
+            <a:spLocks noGrp="1"/>
+          </p:cNvSpPr>
+          <p:nvPr/>
+        </p:nvSpPr>
+        <p:spPr>
+          <a:xfrm>
+            <a:off x="8553450" y="2247900"/>
+            <a:ext cx="2667000" cy="1657350"/>
+          </a:xfrm>
+          <a:prstGeom prst="roundRect">
+            <a:avLst>
+              <a:gd name="adj" fmla="val 3448"/>
+            </a:avLst>
+          </a:prstGeom>
+          <a:solidFill>
+            <a:srgbClr val="FFFFFF"/>
+          </a:solidFill>
+          <a:ln w="9525">
+            <a:solidFill>
+              <a:srgbClr val="D6E3DF"/>
+            </a:solidFill>
+            <a:prstDash val="solid"/>
+          </a:ln>
+        </p:spPr>
+        <p:txBody>
+          <a:bodyPr/>
+          <a:lstStyle/>
+          <a:p>
+            <a:endParaRPr lang="en-US"/>
+          </a:p>
+        </p:txBody>
+      </p:sp>
+      <p:sp>
+        <p:nvSpPr>
+          <p:cNvPr id="9" name="Rectangle 8">
+            <a:extLst>
+              <a:ext uri="{FF2B5EF4-FFF2-40B4-BE49-F238E27FC236}">
+                <a16:creationId xmlns:a16="http://schemas.microsoft.com/office/drawing/2014/main" id="{C5C8CA68-C7FA-45DB-9334-5057F5A174FA}"/>
+              </a:ext>
+            </a:extLst>
+          </p:cNvPr>
+          <p:cNvSpPr>
+            <a:spLocks noGrp="1"/>
+          </p:cNvSpPr>
+          <p:nvPr/>
+        </p:nvSpPr>
+        <p:spPr>
+          <a:xfrm>
+            <a:off x="8782050" y="2457450"/>
+            <a:ext cx="2209800" cy="1200150"/>
+          </a:xfrm>
+          <a:prstGeom prst="rect">
+            <a:avLst/>
+          </a:prstGeom>
+          <a:noFill/>
+          <a:ln w="0">
+            <a:noFill/>
+            <a:prstDash val="solid"/>
+          </a:ln>
+        </p:spPr>
+        <p:txBody>
+          <a:bodyPr wrap="square" lIns="0" tIns="0" rIns="0" bIns="0" anchor="t">
+            <a:normAutofit fontScale="92724"/>
+          </a:bodyPr>
+          <a:lstStyle/>
+          <a:p>
+            <a:pPr marL="0" indent="0" algn="l">
+              <a:spcAft>
+                <a:spcPts val="12"/>
+              </a:spcAft>
+              <a:buNone/>
+              <a:defRPr sz="1350" b="0">
+                <a:solidFill>
+                  <a:srgbClr val="132925"/>
+                </a:solidFill>
+                <a:latin typeface="Aptos"/>
+                <a:ea typeface="Aptos"/>
+                <a:cs typeface="Aptos"/>
+              </a:defRPr>
+            </a:pPr>
+            <a:r>
+              <a:rPr sz="1725" b="1" i="0">
+                <a:solidFill>
+                  <a:srgbClr val="132925"/>
+                </a:solidFill>
+                <a:latin typeface="Aptos"/>
+                <a:ea typeface="Aptos"/>
+                <a:cs typeface="Aptos"/>
+              </a:rPr>
+              <a:t>Neutral fallback</a:t>
+            </a:r>
+          </a:p>
+          <a:p>
+            <a:pPr marL="0" indent="0" algn="l">
+              <a:spcAft>
+                <a:spcPts val="8"/>
+              </a:spcAft>
+              <a:buNone/>
+              <a:defRPr sz="1350" b="0">
+                <a:solidFill>
+                  <a:srgbClr val="132925"/>
+                </a:solidFill>
+                <a:latin typeface="Aptos"/>
+                <a:ea typeface="Aptos"/>
+                <a:cs typeface="Aptos"/>
+              </a:defRPr>
+            </a:pPr>
+            <a:r>
+              <a:rPr sz="1350" b="0" i="0">
+                <a:solidFill>
+                  <a:srgbClr val="5B6F6A"/>
+                </a:solidFill>
+                <a:latin typeface="Aptos"/>
+                <a:ea typeface="Aptos"/>
+                <a:cs typeface="Aptos"/>
+              </a:rPr>
+              <a:t>An arbitrary image never becomes a false match. It stays unknown, preserves provenance, and requires review.</a:t>
+            </a:r>
+          </a:p>
+        </p:txBody>
+      </p:sp>
+      <p:sp>
+        <p:nvSpPr>
+          <p:cNvPr id="10" name="Rectangle 9">
+            <a:extLst>
+              <a:ext uri="{FF2B5EF4-FFF2-40B4-BE49-F238E27FC236}">
+                <a16:creationId xmlns:a16="http://schemas.microsoft.com/office/drawing/2014/main" id="{3F76FC5B-C359-490C-9465-0A15A9D37864}"/>
+              </a:ext>
+            </a:extLst>
+          </p:cNvPr>
+          <p:cNvSpPr>
+            <a:spLocks noGrp="1"/>
+          </p:cNvSpPr>
+          <p:nvPr/>
+        </p:nvSpPr>
+        <p:spPr>
+          <a:xfrm>
+            <a:off x="8553450" y="4248150"/>
+            <a:ext cx="38100" cy="533400"/>
+          </a:xfrm>
+          <a:prstGeom prst="rect">
+            <a:avLst/>
+          </a:prstGeom>
+          <a:solidFill>
+            <a:srgbClr val="C47A00"/>
+          </a:solidFill>
+          <a:ln w="0">
+            <a:solidFill>
+              <a:srgbClr val="C47A00"/>
+            </a:solidFill>
+            <a:prstDash val="solid"/>
+          </a:ln>
+        </p:spPr>
+        <p:txBody>
+          <a:bodyPr/>
+          <a:lstStyle/>
+          <a:p>
+            <a:endParaRPr lang="en-US"/>
+          </a:p>
+        </p:txBody>
+      </p:sp>
+      <p:sp>
+        <p:nvSpPr>
+          <p:cNvPr id="11" name="Rectangle 10">
+            <a:extLst>
+              <a:ext uri="{FF2B5EF4-FFF2-40B4-BE49-F238E27FC236}">
+                <a16:creationId xmlns:a16="http://schemas.microsoft.com/office/drawing/2014/main" id="{55A326A9-1925-4416-B3CC-BB4B52C1BB45}"/>
+              </a:ext>
+            </a:extLst>
+          </p:cNvPr>
+          <p:cNvSpPr>
+            <a:spLocks noGrp="1"/>
+          </p:cNvSpPr>
+          <p:nvPr/>
+        </p:nvSpPr>
+        <p:spPr>
+          <a:xfrm>
+            <a:off x="8686800" y="4248150"/>
+            <a:ext cx="2533650" cy="533400"/>
+          </a:xfrm>
+          <a:prstGeom prst="rect">
+            <a:avLst/>
+          </a:prstGeom>
+          <a:noFill/>
+          <a:ln w="0">
+            <a:noFill/>
+            <a:prstDash val="solid"/>
+          </a:ln>
+        </p:spPr>
+        <p:txBody>
+          <a:bodyPr wrap="square" lIns="0" tIns="0" rIns="0" bIns="0" anchor="ctr">
+            <a:normAutofit/>
+          </a:bodyPr>
+          <a:lstStyle/>
+          <a:p>
+            <a:pPr marL="0" indent="0" algn="l">
+              <a:spcAft>
+                <a:spcPts val="0"/>
+              </a:spcAft>
+              <a:buNone/>
+              <a:defRPr sz="1275" b="0">
+                <a:solidFill>
+                  <a:srgbClr val="132925"/>
+                </a:solidFill>
+                <a:latin typeface="Aptos"/>
+                <a:ea typeface="Aptos"/>
+                <a:cs typeface="Aptos"/>
+              </a:defRPr>
+            </a:pPr>
+            <a:r>
+              <a:rPr sz="2025" b="1" i="0">
+                <a:solidFill>
+                  <a:srgbClr val="132925"/>
+                </a:solidFill>
+                <a:latin typeface="Aptos"/>
+                <a:ea typeface="Aptos"/>
+                <a:cs typeface="Aptos"/>
+              </a:rPr>
+              <a:t>2</a:t>
+            </a:r>
+            <a:r>
+              <a:rPr sz="1275" b="0" i="0">
+                <a:solidFill>
+                  <a:srgbClr val="5B6F6A"/>
+                </a:solidFill>
+                <a:latin typeface="Aptos"/>
+                <a:ea typeface="Aptos"/>
+                <a:cs typeface="Aptos"/>
+              </a:rPr>
+              <a:t>  warnings remain visible</a:t>
+            </a:r>
+          </a:p>
+        </p:txBody>
+      </p:sp>
+      <p:sp>
+        <p:nvSpPr>
+          <p:cNvPr id="12" name="Rectangle 11">
+            <a:extLst>
+              <a:ext uri="{FF2B5EF4-FFF2-40B4-BE49-F238E27FC236}">
+                <a16:creationId xmlns:a16="http://schemas.microsoft.com/office/drawing/2014/main" id="{3EF8F6BA-A4C1-48A9-9F8F-4170C38CB8F6}"/>
+              </a:ext>
+            </a:extLst>
+          </p:cNvPr>
+          <p:cNvSpPr>
+            <a:spLocks noGrp="1"/>
+          </p:cNvSpPr>
+          <p:nvPr/>
+        </p:nvSpPr>
+        <p:spPr>
+          <a:xfrm>
+            <a:off x="8553450" y="5010150"/>
+            <a:ext cx="38100" cy="533400"/>
+          </a:xfrm>
+          <a:prstGeom prst="rect">
+            <a:avLst/>
+          </a:prstGeom>
+          <a:solidFill>
+            <a:srgbClr val="087C72"/>
+          </a:solidFill>
+          <a:ln w="0">
+            <a:solidFill>
+              <a:srgbClr val="087C72"/>
+            </a:solidFill>
+            <a:prstDash val="solid"/>
+          </a:ln>
+        </p:spPr>
+        <p:txBody>
+          <a:bodyPr/>
+          <a:lstStyle/>
+          <a:p>
+            <a:endParaRPr lang="en-US"/>
+          </a:p>
+        </p:txBody>
+      </p:sp>
+      <p:sp>
+        <p:nvSpPr>
+          <p:cNvPr id="13" name="Rectangle 12">
+            <a:extLst>
+              <a:ext uri="{FF2B5EF4-FFF2-40B4-BE49-F238E27FC236}">
+                <a16:creationId xmlns:a16="http://schemas.microsoft.com/office/drawing/2014/main" id="{76AEFC66-9AD9-4079-A6DE-EA10BB2BBA4B}"/>
+              </a:ext>
+            </a:extLst>
+          </p:cNvPr>
+          <p:cNvSpPr>
+            <a:spLocks noGrp="1"/>
+          </p:cNvSpPr>
+          <p:nvPr/>
+        </p:nvSpPr>
+        <p:spPr>
+          <a:xfrm>
+            <a:off x="8686800" y="5010150"/>
+            <a:ext cx="2533650" cy="533400"/>
+          </a:xfrm>
+          <a:prstGeom prst="rect">
+            <a:avLst/>
+          </a:prstGeom>
+          <a:noFill/>
+          <a:ln w="0">
+            <a:noFill/>
+            <a:prstDash val="solid"/>
+          </a:ln>
+        </p:spPr>
+        <p:txBody>
+          <a:bodyPr wrap="square" lIns="0" tIns="0" rIns="0" bIns="0" anchor="ctr">
+            <a:normAutofit/>
+          </a:bodyPr>
+          <a:lstStyle/>
+          <a:p>
+            <a:pPr marL="0" indent="0" algn="l">
+              <a:spcAft>
+                <a:spcPts val="0"/>
+              </a:spcAft>
+              <a:buNone/>
+              <a:defRPr sz="1275" b="0">
+                <a:solidFill>
+                  <a:srgbClr val="132925"/>
+                </a:solidFill>
+                <a:latin typeface="Aptos"/>
+                <a:ea typeface="Aptos"/>
+                <a:cs typeface="Aptos"/>
+              </a:defRPr>
+            </a:pPr>
+            <a:r>
+              <a:rPr sz="2025" b="1" i="0">
+                <a:solidFill>
+                  <a:srgbClr val="132925"/>
+                </a:solidFill>
+                <a:latin typeface="Aptos"/>
+                <a:ea typeface="Aptos"/>
+                <a:cs typeface="Aptos"/>
+              </a:rPr>
+              <a:t>1</a:t>
+            </a:r>
+            <a:r>
+              <a:rPr sz="1275" b="0" i="0">
+                <a:solidFill>
+                  <a:srgbClr val="5B6F6A"/>
+                </a:solidFill>
+                <a:latin typeface="Aptos"/>
+                <a:ea typeface="Aptos"/>
+                <a:cs typeface="Aptos"/>
+              </a:rPr>
+              <a:t>  confirmation unlocks launch</a:t>
             </a:r>
           </a:p>
         </p:txBody>
       </p:sp>
     </p:spTree>
+    <p:extLst>
+      <p:ext uri="{BB962C8B-B14F-4D97-AF65-F5344CB8AC3E}">
+        <p14:creationId xmlns:p14="http://schemas.microsoft.com/office/powerpoint/2010/main" val="200148082"/>
+      </p:ext>
+    </p:extLst>
   </p:cSld>
   <p:clrMapOvr>
     <a:masterClrMapping/>
@@ -3779,7 +7299,7 @@
 </file>
 
 <file path=ppt/slides/slide5.xml><?xml version="1.0" encoding="utf-8"?>
-<p:sld xmlns:a="http://schemas.openxmlformats.org/drawingml/2006/main" xmlns:p="http://schemas.openxmlformats.org/presentationml/2006/main" xmlns:r="http://schemas.openxmlformats.org/officeDocument/2006/relationships">
+<p:sld xmlns:a="http://schemas.openxmlformats.org/drawingml/2006/main" xmlns:r="http://schemas.openxmlformats.org/officeDocument/2006/relationships" xmlns:p="http://schemas.openxmlformats.org/presentationml/2006/main">
   <p:cSld>
     <p:spTree>
       <p:nvGrpSpPr>
@@ -3787,10 +7307,23 @@
         <p:cNvGrpSpPr/>
         <p:nvPr/>
       </p:nvGrpSpPr>
-      <p:grpSpPr/>
-      <p:sp>
-        <p:nvSpPr>
-          <p:cNvPr id="2" name="Title 1"/>
+      <p:grpSpPr>
+        <a:xfrm>
+          <a:off x="0" y="0"/>
+          <a:ext cx="0" cy="0"/>
+          <a:chOff x="0" y="0"/>
+          <a:chExt cx="0" cy="0"/>
+        </a:xfrm>
+      </p:grpSpPr>
+      <p:sp>
+        <p:nvSpPr>
+          <p:cNvPr id="2" name="Title 1">
+            <a:extLst>
+              <a:ext uri="{FF2B5EF4-FFF2-40B4-BE49-F238E27FC236}">
+                <a16:creationId xmlns:a16="http://schemas.microsoft.com/office/drawing/2014/main" id="{F2AA2C61-4A53-47E3-9FCA-06D5335842FC}"/>
+              </a:ext>
+            </a:extLst>
+          </p:cNvPr>
           <p:cNvSpPr>
             <a:spLocks noGrp="1"/>
           </p:cNvSpPr>
@@ -3804,6 +7337,7 @@
           <a:lstStyle/>
           <a:p>
             <a:pPr>
+              <a:buNone/>
               <a:defRPr sz="3200">
                 <a:solidFill>
                   <a:srgbClr val="1F6FEB"/>
@@ -3811,14 +7345,20 @@
               </a:defRPr>
             </a:pPr>
             <a:r>
-              <a:t>Agent Society — Nine Specialists, One DAG</a:t>
-            </a:r>
-          </a:p>
-        </p:txBody>
-      </p:sp>
-      <p:sp>
-        <p:nvSpPr>
-          <p:cNvPr id="3" name="Content Placeholder 2"/>
+              <a:t>Qwen Cloud Integration</a:t>
+            </a:r>
+          </a:p>
+        </p:txBody>
+      </p:sp>
+      <p:sp>
+        <p:nvSpPr>
+          <p:cNvPr id="3" name="Content Placeholder 2">
+            <a:extLst>
+              <a:ext uri="{FF2B5EF4-FFF2-40B4-BE49-F238E27FC236}">
+                <a16:creationId xmlns:a16="http://schemas.microsoft.com/office/drawing/2014/main" id="{69B05989-85E0-400D-AE2A-A7ED24F6A0A0}"/>
+              </a:ext>
+            </a:extLst>
+          </p:cNvPr>
           <p:cNvSpPr>
             <a:spLocks noGrp="1"/>
           </p:cNvSpPr>
@@ -3831,52 +7371,65 @@
           <a:bodyPr wrap="square"/>
           <a:lstStyle/>
           <a:p>
-            <a:pPr/>
+            <a:pPr>
+              <a:buNone/>
+            </a:pPr>
             <a:r>
               <a:rPr sz="1800">
                 <a:solidFill>
                   <a:srgbClr val="222222"/>
                 </a:solidFill>
               </a:rPr>
-              <a:t>Recall Intake -&gt; Document Extraction -&gt; Inventory Matching / Shelf Vision -&gt; Risk Scoring / Memory -&gt; Operations Task / Communications -&gt; Compliance Evidence.</a:t>
-            </a:r>
-          </a:p>
-          <a:p>
-            <a:pPr/>
+              <a:t>Calls Qwen Cloud through Alibaba Cloud Model Studio's OpenAI-compatible chat endpoint — qwen-plus for text, qwen-vl-plus for shelf-photo vision.</a:t>
+            </a:r>
+          </a:p>
+          <a:p>
+            <a:pPr>
+              <a:buNone/>
+            </a:pPr>
             <a:r>
               <a:rPr sz="1800">
                 <a:solidFill>
                   <a:srgbClr val="222222"/>
                 </a:solidFill>
               </a:rPr>
-              <a:t>Independent specialists run inside the same wave instead of one after another — six parallel waves in total for nine agents.</a:t>
-            </a:r>
-          </a:p>
-          <a:p>
-            <a:pPr/>
+              <a:t>Six workflow steps are Qwen-driven: recall extraction, inventory-match reasoning, risk classification, customer-notice drafting, shelf-photo interpretation, and the management briefing.</a:t>
+            </a:r>
+          </a:p>
+          <a:p>
+            <a:pPr>
+              <a:buNone/>
+            </a:pPr>
             <a:r>
               <a:rPr sz="1800">
                 <a:solidFill>
                   <a:srgbClr val="222222"/>
                 </a:solidFill>
               </a:rPr>
-              <a:t>Each agent gets per-attempt retries, and a failing agent's downstream dependents are skipped cleanly rather than aborting the whole run.</a:t>
-            </a:r>
-          </a:p>
-          <a:p>
-            <a:pPr/>
+              <a:t>Every Qwen response is validated against a Pydantic schema and repaired to a deterministic fallback on any failure, so the workflow never breaks.</a:t>
+            </a:r>
+          </a:p>
+          <a:p>
+            <a:pPr>
+              <a:buNone/>
+            </a:pPr>
             <a:r>
               <a:rPr sz="1800">
                 <a:solidFill>
                   <a:srgbClr val="222222"/>
                 </a:solidFill>
               </a:rPr>
-              <a:t>The orchestrator reconciles disagreement between Qwen's reasoning and the authoritative inventory ground truth before assembling the final analysis.</a:t>
+              <a:t>Two runtime modes: live (QWEN_API_KEY configured) and demo-fallback (deterministic outputs, used for reliable tests and demos without credentials).</a:t>
             </a:r>
           </a:p>
         </p:txBody>
       </p:sp>
     </p:spTree>
+    <p:extLst>
+      <p:ext uri="{BB962C8B-B14F-4D97-AF65-F5344CB8AC3E}">
+        <p14:creationId xmlns:p14="http://schemas.microsoft.com/office/powerpoint/2010/main" val="2108647386"/>
+      </p:ext>
+    </p:extLst>
   </p:cSld>
   <p:clrMapOvr>
     <a:masterClrMapping/>
@@ -3885,7 +7438,7 @@
 </file>
 
 <file path=ppt/slides/slide6.xml><?xml version="1.0" encoding="utf-8"?>
-<p:sld xmlns:a="http://schemas.openxmlformats.org/drawingml/2006/main" xmlns:p="http://schemas.openxmlformats.org/presentationml/2006/main" xmlns:r="http://schemas.openxmlformats.org/officeDocument/2006/relationships">
+<p:sld xmlns:a="http://schemas.openxmlformats.org/drawingml/2006/main" xmlns:r="http://schemas.openxmlformats.org/officeDocument/2006/relationships" xmlns:p="http://schemas.openxmlformats.org/presentationml/2006/main">
   <p:cSld>
     <p:spTree>
       <p:nvGrpSpPr>
@@ -3893,10 +7446,23 @@
         <p:cNvGrpSpPr/>
         <p:nvPr/>
       </p:nvGrpSpPr>
-      <p:grpSpPr/>
-      <p:sp>
-        <p:nvSpPr>
-          <p:cNvPr id="2" name="Title 1"/>
+      <p:grpSpPr>
+        <a:xfrm>
+          <a:off x="0" y="0"/>
+          <a:ext cx="0" cy="0"/>
+          <a:chOff x="0" y="0"/>
+          <a:chExt cx="0" cy="0"/>
+        </a:xfrm>
+      </p:grpSpPr>
+      <p:sp>
+        <p:nvSpPr>
+          <p:cNvPr id="2" name="Title 1">
+            <a:extLst>
+              <a:ext uri="{FF2B5EF4-FFF2-40B4-BE49-F238E27FC236}">
+                <a16:creationId xmlns:a16="http://schemas.microsoft.com/office/drawing/2014/main" id="{A5E16AC3-1E0A-46ED-BCD5-FBFE66B87F33}"/>
+              </a:ext>
+            </a:extLst>
+          </p:cNvPr>
           <p:cNvSpPr>
             <a:spLocks noGrp="1"/>
           </p:cNvSpPr>
@@ -3910,6 +7476,7 @@
           <a:lstStyle/>
           <a:p>
             <a:pPr>
+              <a:buNone/>
               <a:defRPr sz="3200">
                 <a:solidFill>
                   <a:srgbClr val="1F6FEB"/>
@@ -3917,14 +7484,20 @@
               </a:defRPr>
             </a:pPr>
             <a:r>
-              <a:t>Qwen Cloud Integration</a:t>
-            </a:r>
-          </a:p>
-        </p:txBody>
-      </p:sp>
-      <p:sp>
-        <p:nvSpPr>
-          <p:cNvPr id="3" name="Content Placeholder 2"/>
+              <a:t>Agent Society — Nine Specialists, One DAG</a:t>
+            </a:r>
+          </a:p>
+        </p:txBody>
+      </p:sp>
+      <p:sp>
+        <p:nvSpPr>
+          <p:cNvPr id="3" name="Content Placeholder 2">
+            <a:extLst>
+              <a:ext uri="{FF2B5EF4-FFF2-40B4-BE49-F238E27FC236}">
+                <a16:creationId xmlns:a16="http://schemas.microsoft.com/office/drawing/2014/main" id="{826F577C-6D71-40F0-83E0-AF935CCF5167}"/>
+              </a:ext>
+            </a:extLst>
+          </p:cNvPr>
           <p:cNvSpPr>
             <a:spLocks noGrp="1"/>
           </p:cNvSpPr>
@@ -3937,52 +7510,65 @@
           <a:bodyPr wrap="square"/>
           <a:lstStyle/>
           <a:p>
-            <a:pPr/>
+            <a:pPr>
+              <a:buNone/>
+            </a:pPr>
             <a:r>
               <a:rPr sz="1800">
                 <a:solidFill>
                   <a:srgbClr val="222222"/>
                 </a:solidFill>
               </a:rPr>
-              <a:t>Calls Qwen Cloud through Alibaba Cloud Model Studio's OpenAI-compatible chat endpoint — qwen-plus for text, qwen-vl-plus for shelf-photo vision.</a:t>
-            </a:r>
-          </a:p>
-          <a:p>
-            <a:pPr/>
+              <a:t>Recall Intake -&gt; Document Extraction -&gt; Inventory Matching / Shelf Vision -&gt; Risk Scoring / Memory -&gt; Operations Task / Communications -&gt; Compliance Evidence.</a:t>
+            </a:r>
+          </a:p>
+          <a:p>
+            <a:pPr>
+              <a:buNone/>
+            </a:pPr>
             <a:r>
               <a:rPr sz="1800">
                 <a:solidFill>
                   <a:srgbClr val="222222"/>
                 </a:solidFill>
               </a:rPr>
-              <a:t>Six workflow steps are Qwen-driven: recall extraction, inventory-match reasoning, risk classification, customer-notice drafting, shelf-photo interpretation, and the management briefing.</a:t>
-            </a:r>
-          </a:p>
-          <a:p>
-            <a:pPr/>
+              <a:t>Independent specialists run inside the same wave instead of one after another — six parallel waves in total for nine agents.</a:t>
+            </a:r>
+          </a:p>
+          <a:p>
+            <a:pPr>
+              <a:buNone/>
+            </a:pPr>
             <a:r>
               <a:rPr sz="1800">
                 <a:solidFill>
                   <a:srgbClr val="222222"/>
                 </a:solidFill>
               </a:rPr>
-              <a:t>Every Qwen response is validated against a Pydantic schema and repaired to a deterministic fallback on any failure, so the workflow never breaks.</a:t>
-            </a:r>
-          </a:p>
-          <a:p>
-            <a:pPr/>
+              <a:t>Each agent gets per-attempt retries, and a failing agent's downstream dependents are skipped cleanly rather than aborting the whole run.</a:t>
+            </a:r>
+          </a:p>
+          <a:p>
+            <a:pPr>
+              <a:buNone/>
+            </a:pPr>
             <a:r>
               <a:rPr sz="1800">
                 <a:solidFill>
                   <a:srgbClr val="222222"/>
                 </a:solidFill>
               </a:rPr>
-              <a:t>Two runtime modes: live (QWEN_API_KEY configured) and demo-fallback (deterministic outputs, used for reliable tests and demos without credentials).</a:t>
+              <a:t>The orchestrator reconciles disagreement between Qwen's reasoning and the authoritative inventory ground truth before assembling the final analysis.</a:t>
             </a:r>
           </a:p>
         </p:txBody>
       </p:sp>
     </p:spTree>
+    <p:extLst>
+      <p:ext uri="{BB962C8B-B14F-4D97-AF65-F5344CB8AC3E}">
+        <p14:creationId xmlns:p14="http://schemas.microsoft.com/office/powerpoint/2010/main" val="467347097"/>
+      </p:ext>
+    </p:extLst>
   </p:cSld>
   <p:clrMapOvr>
     <a:masterClrMapping/>
@@ -3991,7 +7577,7 @@
 </file>
 
 <file path=ppt/slides/slide7.xml><?xml version="1.0" encoding="utf-8"?>
-<p:sld xmlns:a="http://schemas.openxmlformats.org/drawingml/2006/main" xmlns:p="http://schemas.openxmlformats.org/presentationml/2006/main" xmlns:r="http://schemas.openxmlformats.org/officeDocument/2006/relationships">
+<p:sld xmlns:a="http://schemas.openxmlformats.org/drawingml/2006/main" xmlns:r="http://schemas.openxmlformats.org/officeDocument/2006/relationships" xmlns:p="http://schemas.openxmlformats.org/presentationml/2006/main">
   <p:cSld>
     <p:spTree>
       <p:nvGrpSpPr>
@@ -3999,10 +7585,23 @@
         <p:cNvGrpSpPr/>
         <p:nvPr/>
       </p:nvGrpSpPr>
-      <p:grpSpPr/>
-      <p:sp>
-        <p:nvSpPr>
-          <p:cNvPr id="2" name="Title 1"/>
+      <p:grpSpPr>
+        <a:xfrm>
+          <a:off x="0" y="0"/>
+          <a:ext cx="0" cy="0"/>
+          <a:chOff x="0" y="0"/>
+          <a:chExt cx="0" cy="0"/>
+        </a:xfrm>
+      </p:grpSpPr>
+      <p:sp>
+        <p:nvSpPr>
+          <p:cNvPr id="2" name="Title 1">
+            <a:extLst>
+              <a:ext uri="{FF2B5EF4-FFF2-40B4-BE49-F238E27FC236}">
+                <a16:creationId xmlns:a16="http://schemas.microsoft.com/office/drawing/2014/main" id="{818BD6AE-8ADB-4D5F-A80E-545FA590A16F}"/>
+              </a:ext>
+            </a:extLst>
+          </p:cNvPr>
           <p:cNvSpPr>
             <a:spLocks noGrp="1"/>
           </p:cNvSpPr>
@@ -4016,6 +7615,7 @@
           <a:lstStyle/>
           <a:p>
             <a:pPr>
+              <a:buNone/>
               <a:defRPr sz="3200">
                 <a:solidFill>
                   <a:srgbClr val="1F6FEB"/>
@@ -4030,7 +7630,13 @@
       </p:sp>
       <p:sp>
         <p:nvSpPr>
-          <p:cNvPr id="3" name="Content Placeholder 2"/>
+          <p:cNvPr id="3" name="Content Placeholder 2">
+            <a:extLst>
+              <a:ext uri="{FF2B5EF4-FFF2-40B4-BE49-F238E27FC236}">
+                <a16:creationId xmlns:a16="http://schemas.microsoft.com/office/drawing/2014/main" id="{46A86F71-5261-4A18-B921-541BF4FE7509}"/>
+              </a:ext>
+            </a:extLst>
+          </p:cNvPr>
           <p:cNvSpPr>
             <a:spLocks noGrp="1"/>
           </p:cNvSpPr>
@@ -4043,7 +7649,9 @@
           <a:bodyPr wrap="square"/>
           <a:lstStyle/>
           <a:p>
-            <a:pPr/>
+            <a:pPr>
+              <a:buNone/>
+            </a:pPr>
             <a:r>
               <a:rPr sz="1800">
                 <a:solidFill>
@@ -4054,7 +7662,9 @@
             </a:r>
           </a:p>
           <a:p>
-            <a:pPr/>
+            <a:pPr>
+              <a:buNone/>
+            </a:pPr>
             <a:r>
               <a:rPr sz="1800">
                 <a:solidFill>
@@ -4065,7 +7675,9 @@
             </a:r>
           </a:p>
           <a:p>
-            <a:pPr/>
+            <a:pPr>
+              <a:buNone/>
+            </a:pPr>
             <a:r>
               <a:rPr sz="1800">
                 <a:solidFill>
@@ -4076,7 +7688,9 @@
             </a:r>
           </a:p>
           <a:p>
-            <a:pPr/>
+            <a:pPr>
+              <a:buNone/>
+            </a:pPr>
             <a:r>
               <a:rPr sz="1800">
                 <a:solidFill>
@@ -4089,6 +7703,11 @@
         </p:txBody>
       </p:sp>
     </p:spTree>
+    <p:extLst>
+      <p:ext uri="{BB962C8B-B14F-4D97-AF65-F5344CB8AC3E}">
+        <p14:creationId xmlns:p14="http://schemas.microsoft.com/office/powerpoint/2010/main" val="1551165043"/>
+      </p:ext>
+    </p:extLst>
   </p:cSld>
   <p:clrMapOvr>
     <a:masterClrMapping/>
@@ -4097,7 +7716,7 @@
 </file>
 
 <file path=ppt/slides/slide8.xml><?xml version="1.0" encoding="utf-8"?>
-<p:sld xmlns:a="http://schemas.openxmlformats.org/drawingml/2006/main" xmlns:p="http://schemas.openxmlformats.org/presentationml/2006/main" xmlns:r="http://schemas.openxmlformats.org/officeDocument/2006/relationships">
+<p:sld xmlns:a="http://schemas.openxmlformats.org/drawingml/2006/main" xmlns:r="http://schemas.openxmlformats.org/officeDocument/2006/relationships" xmlns:p="http://schemas.openxmlformats.org/presentationml/2006/main">
   <p:cSld>
     <p:spTree>
       <p:nvGrpSpPr>
@@ -4105,10 +7724,23 @@
         <p:cNvGrpSpPr/>
         <p:nvPr/>
       </p:nvGrpSpPr>
-      <p:grpSpPr/>
-      <p:sp>
-        <p:nvSpPr>
-          <p:cNvPr id="2" name="Title 1"/>
+      <p:grpSpPr>
+        <a:xfrm>
+          <a:off x="0" y="0"/>
+          <a:ext cx="0" cy="0"/>
+          <a:chOff x="0" y="0"/>
+          <a:chExt cx="0" cy="0"/>
+        </a:xfrm>
+      </p:grpSpPr>
+      <p:sp>
+        <p:nvSpPr>
+          <p:cNvPr id="2" name="Title 1">
+            <a:extLst>
+              <a:ext uri="{FF2B5EF4-FFF2-40B4-BE49-F238E27FC236}">
+                <a16:creationId xmlns:a16="http://schemas.microsoft.com/office/drawing/2014/main" id="{030E9728-6A1D-424E-8DE9-74AC0CEEF366}"/>
+              </a:ext>
+            </a:extLst>
+          </p:cNvPr>
           <p:cNvSpPr>
             <a:spLocks noGrp="1"/>
           </p:cNvSpPr>
@@ -4122,6 +7754,7 @@
           <a:lstStyle/>
           <a:p>
             <a:pPr>
+              <a:buNone/>
               <a:defRPr sz="3200">
                 <a:solidFill>
                   <a:srgbClr val="1F6FEB"/>
@@ -4136,7 +7769,13 @@
       </p:sp>
       <p:sp>
         <p:nvSpPr>
-          <p:cNvPr id="3" name="Content Placeholder 2"/>
+          <p:cNvPr id="3" name="Content Placeholder 2">
+            <a:extLst>
+              <a:ext uri="{FF2B5EF4-FFF2-40B4-BE49-F238E27FC236}">
+                <a16:creationId xmlns:a16="http://schemas.microsoft.com/office/drawing/2014/main" id="{6CBA32D6-BDE7-4FCA-8DA4-2791F6663348}"/>
+              </a:ext>
+            </a:extLst>
+          </p:cNvPr>
           <p:cNvSpPr>
             <a:spLocks noGrp="1"/>
           </p:cNvSpPr>
@@ -4149,7 +7788,9 @@
           <a:bodyPr wrap="square"/>
           <a:lstStyle/>
           <a:p>
-            <a:pPr/>
+            <a:pPr>
+              <a:buNone/>
+            </a:pPr>
             <a:r>
               <a:rPr sz="1800">
                 <a:solidFill>
@@ -4160,7 +7801,9 @@
             </a:r>
           </a:p>
           <a:p>
-            <a:pPr/>
+            <a:pPr>
+              <a:buNone/>
+            </a:pPr>
             <a:r>
               <a:rPr sz="1800">
                 <a:solidFill>
@@ -4171,7 +7814,9 @@
             </a:r>
           </a:p>
           <a:p>
-            <a:pPr/>
+            <a:pPr>
+              <a:buNone/>
+            </a:pPr>
             <a:r>
               <a:rPr sz="1800">
                 <a:solidFill>
@@ -4182,7 +7827,9 @@
             </a:r>
           </a:p>
           <a:p>
-            <a:pPr/>
+            <a:pPr>
+              <a:buNone/>
+            </a:pPr>
             <a:r>
               <a:rPr sz="1800">
                 <a:solidFill>
@@ -4195,6 +7842,11 @@
         </p:txBody>
       </p:sp>
     </p:spTree>
+    <p:extLst>
+      <p:ext uri="{BB962C8B-B14F-4D97-AF65-F5344CB8AC3E}">
+        <p14:creationId xmlns:p14="http://schemas.microsoft.com/office/powerpoint/2010/main" val="1332969948"/>
+      </p:ext>
+    </p:extLst>
   </p:cSld>
   <p:clrMapOvr>
     <a:masterClrMapping/>
@@ -4203,7 +7855,7 @@
 </file>
 
 <file path=ppt/slides/slide9.xml><?xml version="1.0" encoding="utf-8"?>
-<p:sld xmlns:a="http://schemas.openxmlformats.org/drawingml/2006/main" xmlns:p="http://schemas.openxmlformats.org/presentationml/2006/main" xmlns:r="http://schemas.openxmlformats.org/officeDocument/2006/relationships">
+<p:sld xmlns:a="http://schemas.openxmlformats.org/drawingml/2006/main" xmlns:r="http://schemas.openxmlformats.org/officeDocument/2006/relationships" xmlns:p="http://schemas.openxmlformats.org/presentationml/2006/main">
   <p:cSld>
     <p:spTree>
       <p:nvGrpSpPr>
@@ -4211,10 +7863,23 @@
         <p:cNvGrpSpPr/>
         <p:nvPr/>
       </p:nvGrpSpPr>
-      <p:grpSpPr/>
-      <p:sp>
-        <p:nvSpPr>
-          <p:cNvPr id="2" name="Title 1"/>
+      <p:grpSpPr>
+        <a:xfrm>
+          <a:off x="0" y="0"/>
+          <a:ext cx="0" cy="0"/>
+          <a:chOff x="0" y="0"/>
+          <a:chExt cx="0" cy="0"/>
+        </a:xfrm>
+      </p:grpSpPr>
+      <p:sp>
+        <p:nvSpPr>
+          <p:cNvPr id="2" name="Title 1">
+            <a:extLst>
+              <a:ext uri="{FF2B5EF4-FFF2-40B4-BE49-F238E27FC236}">
+                <a16:creationId xmlns:a16="http://schemas.microsoft.com/office/drawing/2014/main" id="{17E5BE9B-2AAC-411B-98E3-742853BD9045}"/>
+              </a:ext>
+            </a:extLst>
+          </p:cNvPr>
           <p:cNvSpPr>
             <a:spLocks noGrp="1"/>
           </p:cNvSpPr>
@@ -4228,6 +7893,7 @@
           <a:lstStyle/>
           <a:p>
             <a:pPr>
+              <a:buNone/>
               <a:defRPr sz="3200">
                 <a:solidFill>
                   <a:srgbClr val="1F6FEB"/>
@@ -4242,7 +7908,13 @@
       </p:sp>
       <p:sp>
         <p:nvSpPr>
-          <p:cNvPr id="3" name="Content Placeholder 2"/>
+          <p:cNvPr id="3" name="Content Placeholder 2">
+            <a:extLst>
+              <a:ext uri="{FF2B5EF4-FFF2-40B4-BE49-F238E27FC236}">
+                <a16:creationId xmlns:a16="http://schemas.microsoft.com/office/drawing/2014/main" id="{FAFF59C1-19B6-4DEF-AA1A-C8E47814F51F}"/>
+              </a:ext>
+            </a:extLst>
+          </p:cNvPr>
           <p:cNvSpPr>
             <a:spLocks noGrp="1"/>
           </p:cNvSpPr>
@@ -4255,7 +7927,9 @@
           <a:bodyPr wrap="square"/>
           <a:lstStyle/>
           <a:p>
-            <a:pPr/>
+            <a:pPr>
+              <a:buNone/>
+            </a:pPr>
             <a:r>
               <a:rPr sz="1800">
                 <a:solidFill>
@@ -4266,7 +7940,9 @@
             </a:r>
           </a:p>
           <a:p>
-            <a:pPr/>
+            <a:pPr>
+              <a:buNone/>
+            </a:pPr>
             <a:r>
               <a:rPr sz="1800">
                 <a:solidFill>
@@ -4277,7 +7953,9 @@
             </a:r>
           </a:p>
           <a:p>
-            <a:pPr/>
+            <a:pPr>
+              <a:buNone/>
+            </a:pPr>
             <a:r>
               <a:rPr sz="1800">
                 <a:solidFill>
@@ -4288,7 +7966,9 @@
             </a:r>
           </a:p>
           <a:p>
-            <a:pPr/>
+            <a:pPr>
+              <a:buNone/>
+            </a:pPr>
             <a:r>
               <a:rPr sz="1800">
                 <a:solidFill>
@@ -4301,6 +7981,11 @@
         </p:txBody>
       </p:sp>
     </p:spTree>
+    <p:extLst>
+      <p:ext uri="{BB962C8B-B14F-4D97-AF65-F5344CB8AC3E}">
+        <p14:creationId xmlns:p14="http://schemas.microsoft.com/office/powerpoint/2010/main" val="2038076628"/>
+      </p:ext>
+    </p:extLst>
   </p:cSld>
   <p:clrMapOvr>
     <a:masterClrMapping/>
@@ -4470,7 +8155,7 @@
         </a:gradFill>
       </a:fillStyleLst>
       <a:lnStyleLst>
-        <a:ln w="9525" cap="flat" cmpd="sng" algn="ctr">
+        <a:ln w="9525">
           <a:solidFill>
             <a:schemeClr val="phClr">
               <a:shade val="95000"/>
@@ -4479,13 +8164,13 @@
           </a:solidFill>
           <a:prstDash val="solid"/>
         </a:ln>
-        <a:ln w="25400" cap="flat" cmpd="sng" algn="ctr">
+        <a:ln w="25400">
           <a:solidFill>
             <a:schemeClr val="phClr"/>
           </a:solidFill>
           <a:prstDash val="solid"/>
         </a:ln>
-        <a:ln w="38100" cap="flat" cmpd="sng" algn="ctr">
+        <a:ln w="38100">
           <a:solidFill>
             <a:schemeClr val="phClr"/>
           </a:solidFill>
@@ -4519,17 +8204,6 @@
               </a:srgbClr>
             </a:outerShdw>
           </a:effectLst>
-          <a:scene3d>
-            <a:camera prst="orthographicFront">
-              <a:rot lat="0" lon="0" rev="0"/>
-            </a:camera>
-            <a:lightRig rig="threePt" dir="t">
-              <a:rot lat="0" lon="0" rev="1200000"/>
-            </a:lightRig>
-          </a:scene3d>
-          <a:sp3d>
-            <a:bevelT w="63500" h="25400"/>
-          </a:sp3d>
         </a:effectStyle>
       </a:effectStyleLst>
       <a:bgFillStyleLst>
@@ -4584,46 +8258,277 @@
       </a:bgFillStyleLst>
     </a:fmtScheme>
   </a:themeElements>
-  <a:objectDefaults>
-    <a:spDef>
-      <a:spPr/>
-      <a:bodyPr/>
-      <a:lstStyle/>
-      <a:style>
-        <a:lnRef idx="1">
-          <a:schemeClr val="accent1"/>
-        </a:lnRef>
-        <a:fillRef idx="3">
-          <a:schemeClr val="accent1"/>
-        </a:fillRef>
-        <a:effectRef idx="2">
-          <a:schemeClr val="accent1"/>
-        </a:effectRef>
-        <a:fontRef idx="minor">
-          <a:schemeClr val="lt1"/>
-        </a:fontRef>
-      </a:style>
-    </a:spDef>
-    <a:lnDef>
-      <a:spPr/>
-      <a:bodyPr/>
-      <a:lstStyle/>
-      <a:style>
-        <a:lnRef idx="2">
-          <a:schemeClr val="accent1"/>
-        </a:lnRef>
-        <a:fillRef idx="0">
-          <a:schemeClr val="accent1"/>
-        </a:fillRef>
-        <a:effectRef idx="1">
-          <a:schemeClr val="accent1"/>
-        </a:effectRef>
-        <a:fontRef idx="minor">
-          <a:schemeClr val="tx1"/>
-        </a:fontRef>
-      </a:style>
-    </a:lnDef>
-  </a:objectDefaults>
+  <a:objectDefaults/>
+  <a:extraClrSchemeLst/>
+</a:theme>
+</file>
+
+<file path=ppt/theme/theme2.xml><?xml version="1.0" encoding="utf-8"?>
+<a:theme xmlns:a="http://schemas.openxmlformats.org/drawingml/2006/main" name="Office Theme">
+  <a:themeElements>
+    <a:clrScheme name="Office">
+      <a:dk1>
+        <a:sysClr val="windowText" lastClr="000000"/>
+      </a:dk1>
+      <a:lt1>
+        <a:sysClr val="window" lastClr="FFFFFF"/>
+      </a:lt1>
+      <a:dk2>
+        <a:srgbClr val="1F497D"/>
+      </a:dk2>
+      <a:lt2>
+        <a:srgbClr val="EEECE1"/>
+      </a:lt2>
+      <a:accent1>
+        <a:srgbClr val="4F81BD"/>
+      </a:accent1>
+      <a:accent2>
+        <a:srgbClr val="C0504D"/>
+      </a:accent2>
+      <a:accent3>
+        <a:srgbClr val="9BBB59"/>
+      </a:accent3>
+      <a:accent4>
+        <a:srgbClr val="8064A2"/>
+      </a:accent4>
+      <a:accent5>
+        <a:srgbClr val="4BACC6"/>
+      </a:accent5>
+      <a:accent6>
+        <a:srgbClr val="F79646"/>
+      </a:accent6>
+      <a:hlink>
+        <a:srgbClr val="0000FF"/>
+      </a:hlink>
+      <a:folHlink>
+        <a:srgbClr val="800080"/>
+      </a:folHlink>
+    </a:clrScheme>
+    <a:fontScheme name="Office">
+      <a:majorFont>
+        <a:latin typeface="Calibri"/>
+        <a:ea typeface=""/>
+        <a:cs typeface=""/>
+        <a:font script="Jpan" typeface="ＭＳ Ｐゴシック"/>
+        <a:font script="Hang" typeface="맑은 고딕"/>
+        <a:font script="Hans" typeface="宋体"/>
+        <a:font script="Hant" typeface="新細明體"/>
+        <a:font script="Arab" typeface="Times New Roman"/>
+        <a:font script="Hebr" typeface="Times New Roman"/>
+        <a:font script="Thai" typeface="Angsana New"/>
+        <a:font script="Ethi" typeface="Nyala"/>
+        <a:font script="Beng" typeface="Vrinda"/>
+        <a:font script="Gujr" typeface="Shruti"/>
+        <a:font script="Khmr" typeface="MoolBoran"/>
+        <a:font script="Knda" typeface="Tunga"/>
+        <a:font script="Guru" typeface="Raavi"/>
+        <a:font script="Cans" typeface="Euphemia"/>
+        <a:font script="Cher" typeface="Plantagenet Cherokee"/>
+        <a:font script="Yiii" typeface="Microsoft Yi Baiti"/>
+        <a:font script="Tibt" typeface="Microsoft Himalaya"/>
+        <a:font script="Thaa" typeface="MV Boli"/>
+        <a:font script="Deva" typeface="Mangal"/>
+        <a:font script="Telu" typeface="Gautami"/>
+        <a:font script="Taml" typeface="Latha"/>
+        <a:font script="Syrc" typeface="Estrangelo Edessa"/>
+        <a:font script="Orya" typeface="Kalinga"/>
+        <a:font script="Mlym" typeface="Kartika"/>
+        <a:font script="Laoo" typeface="DokChampa"/>
+        <a:font script="Sinh" typeface="Iskoola Pota"/>
+        <a:font script="Mong" typeface="Mongolian Baiti"/>
+        <a:font script="Viet" typeface="Times New Roman"/>
+        <a:font script="Uigh" typeface="Microsoft Uighur"/>
+        <a:font script="Geor" typeface="Sylfaen"/>
+      </a:majorFont>
+      <a:minorFont>
+        <a:latin typeface="Calibri"/>
+        <a:ea typeface=""/>
+        <a:cs typeface=""/>
+        <a:font script="Jpan" typeface="ＭＳ Ｐゴシック"/>
+        <a:font script="Hang" typeface="맑은 고딕"/>
+        <a:font script="Hans" typeface="宋体"/>
+        <a:font script="Hant" typeface="新細明體"/>
+        <a:font script="Arab" typeface="Arial"/>
+        <a:font script="Hebr" typeface="Arial"/>
+        <a:font script="Thai" typeface="Cordia New"/>
+        <a:font script="Ethi" typeface="Nyala"/>
+        <a:font script="Beng" typeface="Vrinda"/>
+        <a:font script="Gujr" typeface="Shruti"/>
+        <a:font script="Khmr" typeface="DaunPenh"/>
+        <a:font script="Knda" typeface="Tunga"/>
+        <a:font script="Guru" typeface="Raavi"/>
+        <a:font script="Cans" typeface="Euphemia"/>
+        <a:font script="Cher" typeface="Plantagenet Cherokee"/>
+        <a:font script="Yiii" typeface="Microsoft Yi Baiti"/>
+        <a:font script="Tibt" typeface="Microsoft Himalaya"/>
+        <a:font script="Thaa" typeface="MV Boli"/>
+        <a:font script="Deva" typeface="Mangal"/>
+        <a:font script="Telu" typeface="Gautami"/>
+        <a:font script="Taml" typeface="Latha"/>
+        <a:font script="Syrc" typeface="Estrangelo Edessa"/>
+        <a:font script="Orya" typeface="Kalinga"/>
+        <a:font script="Mlym" typeface="Kartika"/>
+        <a:font script="Laoo" typeface="DokChampa"/>
+        <a:font script="Sinh" typeface="Iskoola Pota"/>
+        <a:font script="Mong" typeface="Mongolian Baiti"/>
+        <a:font script="Viet" typeface="Arial"/>
+        <a:font script="Uigh" typeface="Microsoft Uighur"/>
+        <a:font script="Geor" typeface="Sylfaen"/>
+      </a:minorFont>
+    </a:fontScheme>
+    <a:fmtScheme name="Office">
+      <a:fillStyleLst>
+        <a:solidFill>
+          <a:schemeClr val="phClr"/>
+        </a:solidFill>
+        <a:gradFill rotWithShape="1">
+          <a:gsLst>
+            <a:gs pos="0">
+              <a:schemeClr val="phClr">
+                <a:tint val="50000"/>
+                <a:satMod val="300000"/>
+              </a:schemeClr>
+            </a:gs>
+            <a:gs pos="35000">
+              <a:schemeClr val="phClr">
+                <a:tint val="37000"/>
+                <a:satMod val="300000"/>
+              </a:schemeClr>
+            </a:gs>
+            <a:gs pos="100000">
+              <a:schemeClr val="phClr">
+                <a:tint val="15000"/>
+                <a:satMod val="350000"/>
+              </a:schemeClr>
+            </a:gs>
+          </a:gsLst>
+          <a:lin ang="16200000" scaled="1"/>
+        </a:gradFill>
+        <a:gradFill rotWithShape="1">
+          <a:gsLst>
+            <a:gs pos="0">
+              <a:schemeClr val="phClr">
+                <a:tint val="100000"/>
+                <a:shade val="100000"/>
+                <a:satMod val="130000"/>
+              </a:schemeClr>
+            </a:gs>
+            <a:gs pos="100000">
+              <a:schemeClr val="phClr">
+                <a:tint val="50000"/>
+                <a:shade val="100000"/>
+                <a:satMod val="350000"/>
+              </a:schemeClr>
+            </a:gs>
+          </a:gsLst>
+          <a:lin ang="16200000" scaled="0"/>
+        </a:gradFill>
+      </a:fillStyleLst>
+      <a:lnStyleLst>
+        <a:ln w="9525">
+          <a:solidFill>
+            <a:schemeClr val="phClr">
+              <a:shade val="95000"/>
+              <a:satMod val="105000"/>
+            </a:schemeClr>
+          </a:solidFill>
+          <a:prstDash val="solid"/>
+        </a:ln>
+        <a:ln w="25400">
+          <a:solidFill>
+            <a:schemeClr val="phClr"/>
+          </a:solidFill>
+          <a:prstDash val="solid"/>
+        </a:ln>
+        <a:ln w="38100">
+          <a:solidFill>
+            <a:schemeClr val="phClr"/>
+          </a:solidFill>
+          <a:prstDash val="solid"/>
+        </a:ln>
+      </a:lnStyleLst>
+      <a:effectStyleLst>
+        <a:effectStyle>
+          <a:effectLst>
+            <a:outerShdw blurRad="40000" dist="20000" dir="5400000" rotWithShape="0">
+              <a:srgbClr val="000000">
+                <a:alpha val="38000"/>
+              </a:srgbClr>
+            </a:outerShdw>
+          </a:effectLst>
+        </a:effectStyle>
+        <a:effectStyle>
+          <a:effectLst>
+            <a:outerShdw blurRad="40000" dist="23000" dir="5400000" rotWithShape="0">
+              <a:srgbClr val="000000">
+                <a:alpha val="35000"/>
+              </a:srgbClr>
+            </a:outerShdw>
+          </a:effectLst>
+        </a:effectStyle>
+        <a:effectStyle>
+          <a:effectLst>
+            <a:outerShdw blurRad="40000" dist="23000" dir="5400000" rotWithShape="0">
+              <a:srgbClr val="000000">
+                <a:alpha val="35000"/>
+              </a:srgbClr>
+            </a:outerShdw>
+          </a:effectLst>
+        </a:effectStyle>
+      </a:effectStyleLst>
+      <a:bgFillStyleLst>
+        <a:solidFill>
+          <a:schemeClr val="phClr"/>
+        </a:solidFill>
+        <a:gradFill rotWithShape="1">
+          <a:gsLst>
+            <a:gs pos="0">
+              <a:schemeClr val="phClr">
+                <a:tint val="40000"/>
+                <a:satMod val="350000"/>
+              </a:schemeClr>
+            </a:gs>
+            <a:gs pos="40000">
+              <a:schemeClr val="phClr">
+                <a:tint val="45000"/>
+                <a:shade val="99000"/>
+                <a:satMod val="350000"/>
+              </a:schemeClr>
+            </a:gs>
+            <a:gs pos="100000">
+              <a:schemeClr val="phClr">
+                <a:shade val="20000"/>
+                <a:satMod val="255000"/>
+              </a:schemeClr>
+            </a:gs>
+          </a:gsLst>
+          <a:path path="circle">
+            <a:fillToRect l="50000" t="-80000" r="50000" b="180000"/>
+          </a:path>
+        </a:gradFill>
+        <a:gradFill rotWithShape="1">
+          <a:gsLst>
+            <a:gs pos="0">
+              <a:schemeClr val="phClr">
+                <a:tint val="80000"/>
+                <a:satMod val="300000"/>
+              </a:schemeClr>
+            </a:gs>
+            <a:gs pos="100000">
+              <a:schemeClr val="phClr">
+                <a:shade val="30000"/>
+                <a:satMod val="200000"/>
+              </a:schemeClr>
+            </a:gs>
+          </a:gsLst>
+          <a:path path="circle">
+            <a:fillToRect l="50000" t="50000" r="50000" b="50000"/>
+          </a:path>
+        </a:gradFill>
+      </a:bgFillStyleLst>
+    </a:fmtScheme>
+  </a:themeElements>
+  <a:objectDefaults/>
   <a:extraClrSchemeLst/>
 </a:theme>
 </file>
--- a/docs/presentation/batchhelm-ai-hackathon-deck.pptx
+++ b/docs/presentation/batchhelm-ai-hackathon-deck.pptx
@@ -4564,7 +4564,7 @@
           <p:cNvPr id="4" name="Rounded Rectangle 3">
             <a:extLst>
               <a:ext uri="{FF2B5EF4-FFF2-40B4-BE49-F238E27FC236}">
-                <a16:creationId xmlns:a16="http://schemas.microsoft.com/office/drawing/2014/main" id="{1FA28C1A-DE4E-4383-A352-07DEA7222B68}"/>
+                <a16:creationId xmlns:a16="http://schemas.microsoft.com/office/drawing/2014/main" id="{5E9C2518-2735-404A-8D1B-F550CF62E5B8}"/>
               </a:ext>
             </a:extLst>
           </p:cNvPr>
@@ -5138,7 +5138,7 @@
           <p:cNvPr id="4" name="Rounded Rectangle 3">
             <a:extLst>
               <a:ext uri="{FF2B5EF4-FFF2-40B4-BE49-F238E27FC236}">
-                <a16:creationId xmlns:a16="http://schemas.microsoft.com/office/drawing/2014/main" id="{2B490E8F-00CF-45F6-B973-6DA0619C4643}"/>
+                <a16:creationId xmlns:a16="http://schemas.microsoft.com/office/drawing/2014/main" id="{78E3EF89-EEAF-4F60-A1B1-4B4483142F6B}"/>
               </a:ext>
             </a:extLst>
           </p:cNvPr>
@@ -5180,7 +5180,7 @@
           <p:cNvPr id="5" name="Rectangle 4">
             <a:extLst>
               <a:ext uri="{FF2B5EF4-FFF2-40B4-BE49-F238E27FC236}">
-                <a16:creationId xmlns:a16="http://schemas.microsoft.com/office/drawing/2014/main" id="{888064A8-12A9-45DF-A2B4-A349722D436B}"/>
+                <a16:creationId xmlns:a16="http://schemas.microsoft.com/office/drawing/2014/main" id="{32F7A7FA-E038-471F-8626-48B19F8B4F5C}"/>
               </a:ext>
             </a:extLst>
           </p:cNvPr>
@@ -5242,7 +5242,7 @@
           <p:cNvPr id="6" name="Rounded Rectangle 5">
             <a:extLst>
               <a:ext uri="{FF2B5EF4-FFF2-40B4-BE49-F238E27FC236}">
-                <a16:creationId xmlns:a16="http://schemas.microsoft.com/office/drawing/2014/main" id="{BE193801-2704-484B-8D49-0049E7BCE4AC}"/>
+                <a16:creationId xmlns:a16="http://schemas.microsoft.com/office/drawing/2014/main" id="{D5E98621-BDEE-428B-B5ED-F116E5DBBDAA}"/>
               </a:ext>
             </a:extLst>
           </p:cNvPr>
@@ -5308,7 +5308,7 @@
           <p:cNvPr id="8" name="Rounded Rectangle 7">
             <a:extLst>
               <a:ext uri="{FF2B5EF4-FFF2-40B4-BE49-F238E27FC236}">
-                <a16:creationId xmlns:a16="http://schemas.microsoft.com/office/drawing/2014/main" id="{9783372D-E10D-4C3F-B63E-6A027688112D}"/>
+                <a16:creationId xmlns:a16="http://schemas.microsoft.com/office/drawing/2014/main" id="{63DDFC06-13AF-4E9A-B444-8A604638BFF5}"/>
               </a:ext>
             </a:extLst>
           </p:cNvPr>
@@ -5377,7 +5377,7 @@
           <p:cNvPr id="10" name="Rectangle 9">
             <a:extLst>
               <a:ext uri="{FF2B5EF4-FFF2-40B4-BE49-F238E27FC236}">
-                <a16:creationId xmlns:a16="http://schemas.microsoft.com/office/drawing/2014/main" id="{2148A1BA-B2D9-4B9A-82C7-4D4CD3C411EA}"/>
+                <a16:creationId xmlns:a16="http://schemas.microsoft.com/office/drawing/2014/main" id="{50D66590-44F1-4708-8617-F8CEC4BC1F12}"/>
               </a:ext>
             </a:extLst>
           </p:cNvPr>
@@ -5806,7 +5806,7 @@
           <p:cNvPr id="4" name="Rectangle 3">
             <a:extLst>
               <a:ext uri="{FF2B5EF4-FFF2-40B4-BE49-F238E27FC236}">
-                <a16:creationId xmlns:a16="http://schemas.microsoft.com/office/drawing/2014/main" id="{1CF70062-3F71-4744-A0CB-D0CB43B2DAFE}"/>
+                <a16:creationId xmlns:a16="http://schemas.microsoft.com/office/drawing/2014/main" id="{CFC7DA05-A0A6-43F1-B11C-649CC014A181}"/>
               </a:ext>
             </a:extLst>
           </p:cNvPr>
@@ -5879,7 +5879,7 @@
           <p:cNvPr id="5" name="Rectangle 4">
             <a:extLst>
               <a:ext uri="{FF2B5EF4-FFF2-40B4-BE49-F238E27FC236}">
-                <a16:creationId xmlns:a16="http://schemas.microsoft.com/office/drawing/2014/main" id="{E49406E0-FB77-40D0-92AF-9C7ECDDB0F65}"/>
+                <a16:creationId xmlns:a16="http://schemas.microsoft.com/office/drawing/2014/main" id="{44638042-81DC-41E5-9A67-3D389E2985F3}"/>
               </a:ext>
             </a:extLst>
           </p:cNvPr>
@@ -5919,7 +5919,7 @@
           <p:cNvPr id="6" name="Rectangle 5">
             <a:extLst>
               <a:ext uri="{FF2B5EF4-FFF2-40B4-BE49-F238E27FC236}">
-                <a16:creationId xmlns:a16="http://schemas.microsoft.com/office/drawing/2014/main" id="{CD7E3841-2DC3-41D2-9CB3-17452DAD3E8E}"/>
+                <a16:creationId xmlns:a16="http://schemas.microsoft.com/office/drawing/2014/main" id="{80E8BE82-F1AB-47FF-908A-88220C0A9BAB}"/>
               </a:ext>
             </a:extLst>
           </p:cNvPr>
@@ -5992,7 +5992,7 @@
           <p:cNvPr id="7" name="Rectangle 6">
             <a:extLst>
               <a:ext uri="{FF2B5EF4-FFF2-40B4-BE49-F238E27FC236}">
-                <a16:creationId xmlns:a16="http://schemas.microsoft.com/office/drawing/2014/main" id="{62DAB98C-AF8E-42BE-8A72-D113CBCF80B9}"/>
+                <a16:creationId xmlns:a16="http://schemas.microsoft.com/office/drawing/2014/main" id="{6DEA5E17-1DED-4E99-A8B9-1672AD49990E}"/>
               </a:ext>
             </a:extLst>
           </p:cNvPr>
@@ -6032,7 +6032,7 @@
           <p:cNvPr id="8" name="Rectangle 7">
             <a:extLst>
               <a:ext uri="{FF2B5EF4-FFF2-40B4-BE49-F238E27FC236}">
-                <a16:creationId xmlns:a16="http://schemas.microsoft.com/office/drawing/2014/main" id="{F7AD2D69-77BC-4EDA-8F89-18DFD7E13089}"/>
+                <a16:creationId xmlns:a16="http://schemas.microsoft.com/office/drawing/2014/main" id="{E99D4AB8-3576-4BF6-87F2-74361EA1D8F7}"/>
               </a:ext>
             </a:extLst>
           </p:cNvPr>
@@ -6105,7 +6105,7 @@
           <p:cNvPr id="9" name="Rounded Rectangle 8">
             <a:extLst>
               <a:ext uri="{FF2B5EF4-FFF2-40B4-BE49-F238E27FC236}">
-                <a16:creationId xmlns:a16="http://schemas.microsoft.com/office/drawing/2014/main" id="{13F33523-382D-4588-8EDC-A527AFF4FBB9}"/>
+                <a16:creationId xmlns:a16="http://schemas.microsoft.com/office/drawing/2014/main" id="{9BAA7DC2-6A53-4B71-86D4-686B68C048A0}"/>
               </a:ext>
             </a:extLst>
           </p:cNvPr>
@@ -6171,7 +6171,7 @@
           <p:cNvPr id="11" name="Rounded Rectangle 10">
             <a:extLst>
               <a:ext uri="{FF2B5EF4-FFF2-40B4-BE49-F238E27FC236}">
-                <a16:creationId xmlns:a16="http://schemas.microsoft.com/office/drawing/2014/main" id="{11FD2D1A-7507-437C-8997-0926BEB0417B}"/>
+                <a16:creationId xmlns:a16="http://schemas.microsoft.com/office/drawing/2014/main" id="{77FE3062-DBEF-436C-B97A-C14E87C5206B}"/>
               </a:ext>
             </a:extLst>
           </p:cNvPr>
@@ -6237,7 +6237,7 @@
           <p:cNvPr id="13" name="Rounded Rectangle 12">
             <a:extLst>
               <a:ext uri="{FF2B5EF4-FFF2-40B4-BE49-F238E27FC236}">
-                <a16:creationId xmlns:a16="http://schemas.microsoft.com/office/drawing/2014/main" id="{B5D0DEFD-8056-4060-A23E-DCDEC2B6FEBC}"/>
+                <a16:creationId xmlns:a16="http://schemas.microsoft.com/office/drawing/2014/main" id="{AA875BFC-F62C-4C2E-A408-06B56D7BE6AD}"/>
               </a:ext>
             </a:extLst>
           </p:cNvPr>
@@ -6279,7 +6279,7 @@
           <p:cNvPr id="14" name="Rectangle 13">
             <a:extLst>
               <a:ext uri="{FF2B5EF4-FFF2-40B4-BE49-F238E27FC236}">
-                <a16:creationId xmlns:a16="http://schemas.microsoft.com/office/drawing/2014/main" id="{34F8F8FC-510E-41D3-BEA3-6A6CAC39DAD5}"/>
+                <a16:creationId xmlns:a16="http://schemas.microsoft.com/office/drawing/2014/main" id="{E9AB5BA9-E7A0-44B8-8CF9-D684A23579E2}"/>
               </a:ext>
             </a:extLst>
           </p:cNvPr>
@@ -6763,7 +6763,7 @@
           <p:cNvPr id="4" name="Rounded Rectangle 3">
             <a:extLst>
               <a:ext uri="{FF2B5EF4-FFF2-40B4-BE49-F238E27FC236}">
-                <a16:creationId xmlns:a16="http://schemas.microsoft.com/office/drawing/2014/main" id="{7F73BC63-2B07-4DC0-AFAB-7BD27815B0B8}"/>
+                <a16:creationId xmlns:a16="http://schemas.microsoft.com/office/drawing/2014/main" id="{0917426A-F966-42C6-9C13-11694049DB53}"/>
               </a:ext>
             </a:extLst>
           </p:cNvPr>
@@ -6829,7 +6829,7 @@
           <p:cNvPr id="6" name="Rounded Rectangle 5">
             <a:extLst>
               <a:ext uri="{FF2B5EF4-FFF2-40B4-BE49-F238E27FC236}">
-                <a16:creationId xmlns:a16="http://schemas.microsoft.com/office/drawing/2014/main" id="{B3D48685-D400-4977-AB16-250FE05F7A9D}"/>
+                <a16:creationId xmlns:a16="http://schemas.microsoft.com/office/drawing/2014/main" id="{993A5729-2DBC-4C05-8873-26C4974EBDCB}"/>
               </a:ext>
             </a:extLst>
           </p:cNvPr>
@@ -6871,7 +6871,7 @@
           <p:cNvPr id="7" name="Rectangle 6">
             <a:extLst>
               <a:ext uri="{FF2B5EF4-FFF2-40B4-BE49-F238E27FC236}">
-                <a16:creationId xmlns:a16="http://schemas.microsoft.com/office/drawing/2014/main" id="{7C23BA79-8918-41B5-B9CF-FC8FD5167DB3}"/>
+                <a16:creationId xmlns:a16="http://schemas.microsoft.com/office/drawing/2014/main" id="{1ECE6D09-8698-4331-89F3-ED8BBF53AEFE}"/>
               </a:ext>
             </a:extLst>
           </p:cNvPr>
@@ -6933,7 +6933,7 @@
           <p:cNvPr id="8" name="Rounded Rectangle 7">
             <a:extLst>
               <a:ext uri="{FF2B5EF4-FFF2-40B4-BE49-F238E27FC236}">
-                <a16:creationId xmlns:a16="http://schemas.microsoft.com/office/drawing/2014/main" id="{43CA64C9-ECC5-4F61-978A-4976A87719A2}"/>
+                <a16:creationId xmlns:a16="http://schemas.microsoft.com/office/drawing/2014/main" id="{08BC1510-2D23-40C2-9A8C-45F903658CC6}"/>
               </a:ext>
             </a:extLst>
           </p:cNvPr>
@@ -6975,7 +6975,7 @@
           <p:cNvPr id="9" name="Rectangle 8">
             <a:extLst>
               <a:ext uri="{FF2B5EF4-FFF2-40B4-BE49-F238E27FC236}">
-                <a16:creationId xmlns:a16="http://schemas.microsoft.com/office/drawing/2014/main" id="{C5C8CA68-C7FA-45DB-9334-5057F5A174FA}"/>
+                <a16:creationId xmlns:a16="http://schemas.microsoft.com/office/drawing/2014/main" id="{A0CD4B93-2C96-42C7-89EF-2610DF10808D}"/>
               </a:ext>
             </a:extLst>
           </p:cNvPr>
@@ -7064,7 +7064,7 @@
           <p:cNvPr id="10" name="Rectangle 9">
             <a:extLst>
               <a:ext uri="{FF2B5EF4-FFF2-40B4-BE49-F238E27FC236}">
-                <a16:creationId xmlns:a16="http://schemas.microsoft.com/office/drawing/2014/main" id="{3F76FC5B-C359-490C-9465-0A15A9D37864}"/>
+                <a16:creationId xmlns:a16="http://schemas.microsoft.com/office/drawing/2014/main" id="{925F015E-3C71-4651-9F92-4739E6B50B04}"/>
               </a:ext>
             </a:extLst>
           </p:cNvPr>
@@ -7104,7 +7104,7 @@
           <p:cNvPr id="11" name="Rectangle 10">
             <a:extLst>
               <a:ext uri="{FF2B5EF4-FFF2-40B4-BE49-F238E27FC236}">
-                <a16:creationId xmlns:a16="http://schemas.microsoft.com/office/drawing/2014/main" id="{55A326A9-1925-4416-B3CC-BB4B52C1BB45}"/>
+                <a16:creationId xmlns:a16="http://schemas.microsoft.com/office/drawing/2014/main" id="{B2CE3884-1CAE-4A20-BF01-B79DDD309CC8}"/>
               </a:ext>
             </a:extLst>
           </p:cNvPr>
@@ -7177,7 +7177,7 @@
           <p:cNvPr id="12" name="Rectangle 11">
             <a:extLst>
               <a:ext uri="{FF2B5EF4-FFF2-40B4-BE49-F238E27FC236}">
-                <a16:creationId xmlns:a16="http://schemas.microsoft.com/office/drawing/2014/main" id="{3EF8F6BA-A4C1-48A9-9F8F-4170C38CB8F6}"/>
+                <a16:creationId xmlns:a16="http://schemas.microsoft.com/office/drawing/2014/main" id="{A20F7DEE-372C-4C20-85AC-F449420C6317}"/>
               </a:ext>
             </a:extLst>
           </p:cNvPr>
@@ -7217,7 +7217,7 @@
           <p:cNvPr id="13" name="Rectangle 12">
             <a:extLst>
               <a:ext uri="{FF2B5EF4-FFF2-40B4-BE49-F238E27FC236}">
-                <a16:creationId xmlns:a16="http://schemas.microsoft.com/office/drawing/2014/main" id="{76AEFC66-9AD9-4079-A6DE-EA10BB2BBA4B}"/>
+                <a16:creationId xmlns:a16="http://schemas.microsoft.com/office/drawing/2014/main" id="{9745E85A-CD3D-413F-98F5-11D4AC34A478}"/>
               </a:ext>
             </a:extLst>
           </p:cNvPr>
@@ -7301,6 +7301,14 @@
 <file path=ppt/slides/slide5.xml><?xml version="1.0" encoding="utf-8"?>
 <p:sld xmlns:a="http://schemas.openxmlformats.org/drawingml/2006/main" xmlns:r="http://schemas.openxmlformats.org/officeDocument/2006/relationships" xmlns:p="http://schemas.openxmlformats.org/presentationml/2006/main">
   <p:cSld>
+    <p:bg>
+      <p:bgPr>
+        <a:solidFill>
+          <a:srgbClr val="F8FBFA"/>
+        </a:solidFill>
+        <a:effectLst/>
+      </p:bgPr>
+    </p:bg>
     <p:spTree>
       <p:nvGrpSpPr>
         <p:cNvPr id="1" name=""/>
@@ -7331,21 +7339,42 @@
             <p:ph type="title"/>
           </p:nvPr>
         </p:nvSpPr>
-        <p:spPr/>
-        <p:txBody>
-          <a:bodyPr/>
-          <a:lstStyle/>
-          <a:p>
-            <a:pPr>
-              <a:buNone/>
-              <a:defRPr sz="3200">
-                <a:solidFill>
-                  <a:srgbClr val="1F6FEB"/>
-                </a:solidFill>
+        <p:spPr>
+          <a:xfrm>
+            <a:off x="609600" y="419100"/>
+            <a:ext cx="10934700" cy="781050"/>
+          </a:xfrm>
+        </p:spPr>
+        <p:txBody>
+          <a:bodyPr wrap="square" lIns="0" tIns="0" rIns="0" bIns="0" anchor="ctr">
+            <a:normAutofit/>
+          </a:bodyPr>
+          <a:lstStyle/>
+          <a:p>
+            <a:pPr marL="0" indent="0" algn="l">
+              <a:spcAft>
+                <a:spcPts val="0"/>
+              </a:spcAft>
+              <a:buNone/>
+              <a:defRPr sz="3600" b="1">
+                <a:solidFill>
+                  <a:srgbClr val="132925"/>
+                </a:solidFill>
+                <a:latin typeface="Aptos Display"/>
+                <a:ea typeface="Aptos Display"/>
+                <a:cs typeface="Aptos Display"/>
               </a:defRPr>
             </a:pPr>
             <a:r>
-              <a:t>Qwen Cloud Integration</a:t>
+              <a:rPr sz="3600" b="1" i="0">
+                <a:solidFill>
+                  <a:srgbClr val="132925"/>
+                </a:solidFill>
+                <a:latin typeface="Aptos Display"/>
+                <a:ea typeface="Aptos Display"/>
+                <a:cs typeface="Aptos Display"/>
+              </a:rPr>
+              <a:t>Qwen handles the uncertain work</a:t>
             </a:r>
           </a:p>
         </p:txBody>
@@ -7366,60 +7395,1114 @@
             <p:ph idx="1"/>
           </p:nvPr>
         </p:nvSpPr>
-        <p:spPr/>
-        <p:txBody>
-          <a:bodyPr wrap="square"/>
-          <a:lstStyle/>
-          <a:p>
-            <a:pPr>
-              <a:buNone/>
-            </a:pPr>
-            <a:r>
-              <a:rPr sz="1800">
-                <a:solidFill>
-                  <a:srgbClr val="222222"/>
-                </a:solidFill>
-              </a:rPr>
-              <a:t>Calls Qwen Cloud through Alibaba Cloud Model Studio's OpenAI-compatible chat endpoint — qwen-plus for text, qwen-vl-plus for shelf-photo vision.</a:t>
-            </a:r>
-          </a:p>
-          <a:p>
-            <a:pPr>
-              <a:buNone/>
-            </a:pPr>
-            <a:r>
-              <a:rPr sz="1800">
-                <a:solidFill>
-                  <a:srgbClr val="222222"/>
-                </a:solidFill>
-              </a:rPr>
-              <a:t>Six workflow steps are Qwen-driven: recall extraction, inventory-match reasoning, risk classification, customer-notice drafting, shelf-photo interpretation, and the management briefing.</a:t>
-            </a:r>
-          </a:p>
-          <a:p>
-            <a:pPr>
-              <a:buNone/>
-            </a:pPr>
-            <a:r>
-              <a:rPr sz="1800">
-                <a:solidFill>
-                  <a:srgbClr val="222222"/>
-                </a:solidFill>
-              </a:rPr>
-              <a:t>Every Qwen response is validated against a Pydantic schema and repaired to a deterministic fallback on any failure, so the workflow never breaks.</a:t>
-            </a:r>
-          </a:p>
-          <a:p>
-            <a:pPr>
-              <a:buNone/>
-            </a:pPr>
-            <a:r>
-              <a:rPr sz="1800">
-                <a:solidFill>
-                  <a:srgbClr val="222222"/>
-                </a:solidFill>
-              </a:rPr>
-              <a:t>Two runtime modes: live (QWEN_API_KEY configured) and demo-fallback (deterministic outputs, used for reliable tests and demos without credentials).</a:t>
+        <p:spPr>
+          <a:xfrm>
+            <a:off x="685800" y="1504950"/>
+            <a:ext cx="4876800" cy="4762500"/>
+          </a:xfrm>
+        </p:spPr>
+        <p:txBody>
+          <a:bodyPr wrap="square" lIns="0" tIns="0" rIns="76200" bIns="0" anchor="t">
+            <a:normAutofit/>
+          </a:bodyPr>
+          <a:lstStyle/>
+          <a:p>
+            <a:pPr marL="0" indent="0" algn="l">
+              <a:spcAft>
+                <a:spcPts val="26"/>
+              </a:spcAft>
+              <a:buNone/>
+              <a:defRPr sz="1500" b="0">
+                <a:solidFill>
+                  <a:srgbClr val="132925"/>
+                </a:solidFill>
+                <a:latin typeface="Aptos"/>
+                <a:ea typeface="Aptos"/>
+                <a:cs typeface="Aptos"/>
+              </a:defRPr>
+            </a:pPr>
+            <a:r>
+              <a:rPr sz="1800" b="1" i="0">
+                <a:solidFill>
+                  <a:srgbClr val="132925"/>
+                </a:solidFill>
+                <a:latin typeface="Aptos"/>
+                <a:ea typeface="Aptos"/>
+                <a:cs typeface="Aptos"/>
+              </a:rPr>
+              <a:t>Qwen reasons where literal rules are not enough.</a:t>
+            </a:r>
+          </a:p>
+          <a:p>
+            <a:pPr marL="0" indent="0" algn="l">
+              <a:spcAft>
+                <a:spcPts val="14"/>
+              </a:spcAft>
+              <a:buNone/>
+              <a:defRPr sz="1500" b="0">
+                <a:solidFill>
+                  <a:srgbClr val="132925"/>
+                </a:solidFill>
+                <a:latin typeface="Aptos"/>
+                <a:ea typeface="Aptos"/>
+                <a:cs typeface="Aptos"/>
+              </a:defRPr>
+            </a:pPr>
+            <a:r>
+              <a:rPr sz="1125" b="1" i="0">
+                <a:solidFill>
+                  <a:srgbClr val="087C72"/>
+                </a:solidFill>
+                <a:latin typeface="Aptos"/>
+                <a:ea typeface="Aptos"/>
+                <a:cs typeface="Aptos"/>
+              </a:rPr>
+              <a:t>EXTRACT</a:t>
+            </a:r>
+            <a:r>
+              <a:rPr sz="1500" b="0" i="0">
+                <a:solidFill>
+                  <a:srgbClr val="132925"/>
+                </a:solidFill>
+                <a:latin typeface="Aptos"/>
+                <a:ea typeface="Aptos"/>
+                <a:cs typeface="Aptos"/>
+              </a:rPr>
+              <a:t>  Text and rendered-page recall evidence</a:t>
+            </a:r>
+          </a:p>
+          <a:p>
+            <a:pPr marL="0" indent="0" algn="l">
+              <a:spcAft>
+                <a:spcPts val="14"/>
+              </a:spcAft>
+              <a:buNone/>
+              <a:defRPr sz="1500" b="0">
+                <a:solidFill>
+                  <a:srgbClr val="132925"/>
+                </a:solidFill>
+                <a:latin typeface="Aptos"/>
+                <a:ea typeface="Aptos"/>
+                <a:cs typeface="Aptos"/>
+              </a:defRPr>
+            </a:pPr>
+            <a:r>
+              <a:rPr sz="1125" b="1" i="0">
+                <a:solidFill>
+                  <a:srgbClr val="087C72"/>
+                </a:solidFill>
+                <a:latin typeface="Aptos"/>
+                <a:ea typeface="Aptos"/>
+                <a:cs typeface="Aptos"/>
+              </a:rPr>
+              <a:t>SEE</a:t>
+            </a:r>
+            <a:r>
+              <a:rPr sz="1500" b="0" i="0">
+                <a:solidFill>
+                  <a:srgbClr val="132925"/>
+                </a:solidFill>
+                <a:latin typeface="Aptos"/>
+                <a:ea typeface="Aptos"/>
+                <a:cs typeface="Aptos"/>
+              </a:rPr>
+              <a:t>  Shelf-image interpretation</a:t>
+            </a:r>
+          </a:p>
+          <a:p>
+            <a:pPr marL="0" indent="0" algn="l">
+              <a:spcAft>
+                <a:spcPts val="14"/>
+              </a:spcAft>
+              <a:buNone/>
+              <a:defRPr sz="1500" b="0">
+                <a:solidFill>
+                  <a:srgbClr val="132925"/>
+                </a:solidFill>
+                <a:latin typeface="Aptos"/>
+                <a:ea typeface="Aptos"/>
+                <a:cs typeface="Aptos"/>
+              </a:defRPr>
+            </a:pPr>
+            <a:r>
+              <a:rPr sz="1125" b="1" i="0">
+                <a:solidFill>
+                  <a:srgbClr val="087C72"/>
+                </a:solidFill>
+                <a:latin typeface="Aptos"/>
+                <a:ea typeface="Aptos"/>
+                <a:cs typeface="Aptos"/>
+              </a:rPr>
+              <a:t>MATCH</a:t>
+            </a:r>
+            <a:r>
+              <a:rPr sz="1500" b="0" i="0">
+                <a:solidFill>
+                  <a:srgbClr val="132925"/>
+                </a:solidFill>
+                <a:latin typeface="Aptos"/>
+                <a:ea typeface="Aptos"/>
+                <a:cs typeface="Aptos"/>
+              </a:rPr>
+              <a:t>  Inventory reasoning across imperfect rows</a:t>
+            </a:r>
+          </a:p>
+          <a:p>
+            <a:pPr marL="0" indent="0" algn="l">
+              <a:spcAft>
+                <a:spcPts val="14"/>
+              </a:spcAft>
+              <a:buNone/>
+              <a:defRPr sz="1500" b="0">
+                <a:solidFill>
+                  <a:srgbClr val="132925"/>
+                </a:solidFill>
+                <a:latin typeface="Aptos"/>
+                <a:ea typeface="Aptos"/>
+                <a:cs typeface="Aptos"/>
+              </a:defRPr>
+            </a:pPr>
+            <a:r>
+              <a:rPr sz="1125" b="1" i="0">
+                <a:solidFill>
+                  <a:srgbClr val="087C72"/>
+                </a:solidFill>
+                <a:latin typeface="Aptos"/>
+                <a:ea typeface="Aptos"/>
+                <a:cs typeface="Aptos"/>
+              </a:rPr>
+              <a:t>CLASSIFY</a:t>
+            </a:r>
+            <a:r>
+              <a:rPr sz="1500" b="0" i="0">
+                <a:solidFill>
+                  <a:srgbClr val="132925"/>
+                </a:solidFill>
+                <a:latin typeface="Aptos"/>
+                <a:ea typeface="Aptos"/>
+                <a:cs typeface="Aptos"/>
+              </a:rPr>
+              <a:t>  Operational risk</a:t>
+            </a:r>
+          </a:p>
+          <a:p>
+            <a:pPr marL="0" indent="0" algn="l">
+              <a:spcAft>
+                <a:spcPts val="14"/>
+              </a:spcAft>
+              <a:buNone/>
+              <a:defRPr sz="1500" b="0">
+                <a:solidFill>
+                  <a:srgbClr val="132925"/>
+                </a:solidFill>
+                <a:latin typeface="Aptos"/>
+                <a:ea typeface="Aptos"/>
+                <a:cs typeface="Aptos"/>
+              </a:defRPr>
+            </a:pPr>
+            <a:r>
+              <a:rPr sz="1125" b="1" i="0">
+                <a:solidFill>
+                  <a:srgbClr val="087C72"/>
+                </a:solidFill>
+                <a:latin typeface="Aptos"/>
+                <a:ea typeface="Aptos"/>
+                <a:cs typeface="Aptos"/>
+              </a:rPr>
+              <a:t>WRITE</a:t>
+            </a:r>
+            <a:r>
+              <a:rPr sz="1500" b="0" i="0">
+                <a:solidFill>
+                  <a:srgbClr val="132925"/>
+                </a:solidFill>
+                <a:latin typeface="Aptos"/>
+                <a:ea typeface="Aptos"/>
+                <a:cs typeface="Aptos"/>
+              </a:rPr>
+              <a:t>  Customer communication</a:t>
+            </a:r>
+          </a:p>
+          <a:p>
+            <a:pPr marL="0" indent="0" algn="l">
+              <a:spcAft>
+                <a:spcPts val="14"/>
+              </a:spcAft>
+              <a:buNone/>
+              <a:defRPr sz="1500" b="0">
+                <a:solidFill>
+                  <a:srgbClr val="132925"/>
+                </a:solidFill>
+                <a:latin typeface="Aptos"/>
+                <a:ea typeface="Aptos"/>
+                <a:cs typeface="Aptos"/>
+              </a:defRPr>
+            </a:pPr>
+            <a:r>
+              <a:rPr sz="1125" b="1" i="0">
+                <a:solidFill>
+                  <a:srgbClr val="087C72"/>
+                </a:solidFill>
+                <a:latin typeface="Aptos"/>
+                <a:ea typeface="Aptos"/>
+                <a:cs typeface="Aptos"/>
+              </a:rPr>
+              <a:t>BRIEF</a:t>
+            </a:r>
+            <a:r>
+              <a:rPr sz="1500" b="0" i="0">
+                <a:solidFill>
+                  <a:srgbClr val="132925"/>
+                </a:solidFill>
+                <a:latin typeface="Aptos"/>
+                <a:ea typeface="Aptos"/>
+                <a:cs typeface="Aptos"/>
+              </a:rPr>
+              <a:t>  Management decision summary</a:t>
+            </a:r>
+          </a:p>
+        </p:txBody>
+      </p:sp>
+      <p:sp>
+        <p:nvSpPr>
+          <p:cNvPr id="4" name="Rectangle 3">
+            <a:extLst>
+              <a:ext uri="{FF2B5EF4-FFF2-40B4-BE49-F238E27FC236}">
+                <a16:creationId xmlns:a16="http://schemas.microsoft.com/office/drawing/2014/main" id="{C8584D73-AD4A-4E85-A0B5-E18B7830F84C}"/>
+              </a:ext>
+            </a:extLst>
+          </p:cNvPr>
+          <p:cNvSpPr>
+            <a:spLocks noGrp="1"/>
+          </p:cNvSpPr>
+          <p:nvPr/>
+        </p:nvSpPr>
+        <p:spPr>
+          <a:xfrm>
+            <a:off x="6400800" y="1581150"/>
+            <a:ext cx="4381500" cy="457200"/>
+          </a:xfrm>
+          <a:prstGeom prst="rect">
+            <a:avLst/>
+          </a:prstGeom>
+          <a:noFill/>
+          <a:ln w="0">
+            <a:noFill/>
+            <a:prstDash val="solid"/>
+          </a:ln>
+        </p:spPr>
+        <p:txBody>
+          <a:bodyPr wrap="square" lIns="0" tIns="0" rIns="0" bIns="0" anchor="t">
+            <a:normAutofit/>
+          </a:bodyPr>
+          <a:lstStyle/>
+          <a:p>
+            <a:pPr marL="0" indent="0" algn="l">
+              <a:spcAft>
+                <a:spcPts val="0"/>
+              </a:spcAft>
+              <a:buNone/>
+              <a:defRPr sz="2025" b="0">
+                <a:solidFill>
+                  <a:srgbClr val="132925"/>
+                </a:solidFill>
+                <a:latin typeface="Aptos"/>
+                <a:ea typeface="Aptos"/>
+                <a:cs typeface="Aptos"/>
+              </a:defRPr>
+            </a:pPr>
+            <a:r>
+              <a:rPr sz="2025" b="1" i="0">
+                <a:solidFill>
+                  <a:srgbClr val="0B3D38"/>
+                </a:solidFill>
+                <a:latin typeface="Aptos"/>
+                <a:ea typeface="Aptos"/>
+                <a:cs typeface="Aptos"/>
+              </a:rPr>
+              <a:t>Typed control</a:t>
+            </a:r>
+          </a:p>
+        </p:txBody>
+      </p:sp>
+      <p:sp>
+        <p:nvSpPr>
+          <p:cNvPr id="5" name="Rectangle 4">
+            <a:extLst>
+              <a:ext uri="{FF2B5EF4-FFF2-40B4-BE49-F238E27FC236}">
+                <a16:creationId xmlns:a16="http://schemas.microsoft.com/office/drawing/2014/main" id="{49DB38AB-AB7C-4A4F-A99D-4E2FEA9214AB}"/>
+              </a:ext>
+            </a:extLst>
+          </p:cNvPr>
+          <p:cNvSpPr>
+            <a:spLocks noGrp="1"/>
+          </p:cNvSpPr>
+          <p:nvPr/>
+        </p:nvSpPr>
+        <p:spPr>
+          <a:xfrm>
+            <a:off x="6400800" y="2314575"/>
+            <a:ext cx="304800" cy="19050"/>
+          </a:xfrm>
+          <a:prstGeom prst="rect">
+            <a:avLst/>
+          </a:prstGeom>
+          <a:solidFill>
+            <a:srgbClr val="087C72"/>
+          </a:solidFill>
+          <a:ln w="0">
+            <a:solidFill>
+              <a:srgbClr val="087C72"/>
+            </a:solidFill>
+            <a:prstDash val="solid"/>
+          </a:ln>
+        </p:spPr>
+        <p:txBody>
+          <a:bodyPr/>
+          <a:lstStyle/>
+          <a:p>
+            <a:endParaRPr lang="en-US"/>
+          </a:p>
+        </p:txBody>
+      </p:sp>
+      <p:sp>
+        <p:nvSpPr>
+          <p:cNvPr id="6" name="Rectangle 5">
+            <a:extLst>
+              <a:ext uri="{FF2B5EF4-FFF2-40B4-BE49-F238E27FC236}">
+                <a16:creationId xmlns:a16="http://schemas.microsoft.com/office/drawing/2014/main" id="{E3DA5237-1074-41E6-BEA6-93001745959B}"/>
+              </a:ext>
+            </a:extLst>
+          </p:cNvPr>
+          <p:cNvSpPr>
+            <a:spLocks noGrp="1"/>
+          </p:cNvSpPr>
+          <p:nvPr/>
+        </p:nvSpPr>
+        <p:spPr>
+          <a:xfrm>
+            <a:off x="6819900" y="2247900"/>
+            <a:ext cx="4095750" cy="323850"/>
+          </a:xfrm>
+          <a:prstGeom prst="rect">
+            <a:avLst/>
+          </a:prstGeom>
+          <a:noFill/>
+          <a:ln w="0">
+            <a:noFill/>
+            <a:prstDash val="solid"/>
+          </a:ln>
+        </p:spPr>
+        <p:txBody>
+          <a:bodyPr wrap="square" lIns="0" tIns="0" rIns="0" bIns="0" anchor="ctr">
+            <a:normAutofit/>
+          </a:bodyPr>
+          <a:lstStyle/>
+          <a:p>
+            <a:pPr marL="0" indent="0" algn="l">
+              <a:spcAft>
+                <a:spcPts val="0"/>
+              </a:spcAft>
+              <a:buNone/>
+              <a:defRPr sz="1500" b="0">
+                <a:solidFill>
+                  <a:srgbClr val="132925"/>
+                </a:solidFill>
+                <a:latin typeface="Aptos"/>
+                <a:ea typeface="Aptos"/>
+                <a:cs typeface="Aptos"/>
+              </a:defRPr>
+            </a:pPr>
+            <a:r>
+              <a:rPr sz="1125" b="1" i="0">
+                <a:solidFill>
+                  <a:srgbClr val="087C72"/>
+                </a:solidFill>
+                <a:latin typeface="Aptos"/>
+                <a:ea typeface="Aptos"/>
+                <a:cs typeface="Aptos"/>
+              </a:rPr>
+              <a:t>01</a:t>
+            </a:r>
+            <a:r>
+              <a:rPr sz="1500" b="0" i="0">
+                <a:solidFill>
+                  <a:srgbClr val="132925"/>
+                </a:solidFill>
+                <a:latin typeface="Aptos"/>
+                <a:ea typeface="Aptos"/>
+                <a:cs typeface="Aptos"/>
+              </a:rPr>
+              <a:t>   Structured JSON requests</a:t>
+            </a:r>
+          </a:p>
+        </p:txBody>
+      </p:sp>
+      <p:sp>
+        <p:nvSpPr>
+          <p:cNvPr id="7" name="Rectangle 6">
+            <a:extLst>
+              <a:ext uri="{FF2B5EF4-FFF2-40B4-BE49-F238E27FC236}">
+                <a16:creationId xmlns:a16="http://schemas.microsoft.com/office/drawing/2014/main" id="{EFC9E596-08BE-4DF3-85FA-17C060743901}"/>
+              </a:ext>
+            </a:extLst>
+          </p:cNvPr>
+          <p:cNvSpPr>
+            <a:spLocks noGrp="1"/>
+          </p:cNvSpPr>
+          <p:nvPr/>
+        </p:nvSpPr>
+        <p:spPr>
+          <a:xfrm>
+            <a:off x="6400800" y="2828925"/>
+            <a:ext cx="304800" cy="19050"/>
+          </a:xfrm>
+          <a:prstGeom prst="rect">
+            <a:avLst/>
+          </a:prstGeom>
+          <a:solidFill>
+            <a:srgbClr val="087C72"/>
+          </a:solidFill>
+          <a:ln w="0">
+            <a:solidFill>
+              <a:srgbClr val="087C72"/>
+            </a:solidFill>
+            <a:prstDash val="solid"/>
+          </a:ln>
+        </p:spPr>
+        <p:txBody>
+          <a:bodyPr/>
+          <a:lstStyle/>
+          <a:p>
+            <a:endParaRPr lang="en-US"/>
+          </a:p>
+        </p:txBody>
+      </p:sp>
+      <p:sp>
+        <p:nvSpPr>
+          <p:cNvPr id="8" name="Rectangle 7">
+            <a:extLst>
+              <a:ext uri="{FF2B5EF4-FFF2-40B4-BE49-F238E27FC236}">
+                <a16:creationId xmlns:a16="http://schemas.microsoft.com/office/drawing/2014/main" id="{9D79E248-48DE-4726-8F29-A7B904595117}"/>
+              </a:ext>
+            </a:extLst>
+          </p:cNvPr>
+          <p:cNvSpPr>
+            <a:spLocks noGrp="1"/>
+          </p:cNvSpPr>
+          <p:nvPr/>
+        </p:nvSpPr>
+        <p:spPr>
+          <a:xfrm>
+            <a:off x="6819900" y="2762250"/>
+            <a:ext cx="4095750" cy="323850"/>
+          </a:xfrm>
+          <a:prstGeom prst="rect">
+            <a:avLst/>
+          </a:prstGeom>
+          <a:noFill/>
+          <a:ln w="0">
+            <a:noFill/>
+            <a:prstDash val="solid"/>
+          </a:ln>
+        </p:spPr>
+        <p:txBody>
+          <a:bodyPr wrap="square" lIns="0" tIns="0" rIns="0" bIns="0" anchor="ctr">
+            <a:normAutofit/>
+          </a:bodyPr>
+          <a:lstStyle/>
+          <a:p>
+            <a:pPr marL="0" indent="0" algn="l">
+              <a:spcAft>
+                <a:spcPts val="0"/>
+              </a:spcAft>
+              <a:buNone/>
+              <a:defRPr sz="1500" b="0">
+                <a:solidFill>
+                  <a:srgbClr val="132925"/>
+                </a:solidFill>
+                <a:latin typeface="Aptos"/>
+                <a:ea typeface="Aptos"/>
+                <a:cs typeface="Aptos"/>
+              </a:defRPr>
+            </a:pPr>
+            <a:r>
+              <a:rPr sz="1125" b="1" i="0">
+                <a:solidFill>
+                  <a:srgbClr val="087C72"/>
+                </a:solidFill>
+                <a:latin typeface="Aptos"/>
+                <a:ea typeface="Aptos"/>
+                <a:cs typeface="Aptos"/>
+              </a:rPr>
+              <a:t>02</a:t>
+            </a:r>
+            <a:r>
+              <a:rPr sz="1500" b="0" i="0">
+                <a:solidFill>
+                  <a:srgbClr val="132925"/>
+                </a:solidFill>
+                <a:latin typeface="Aptos"/>
+                <a:ea typeface="Aptos"/>
+                <a:cs typeface="Aptos"/>
+              </a:rPr>
+              <a:t>   Pydantic validation</a:t>
+            </a:r>
+          </a:p>
+        </p:txBody>
+      </p:sp>
+      <p:sp>
+        <p:nvSpPr>
+          <p:cNvPr id="9" name="Rectangle 8">
+            <a:extLst>
+              <a:ext uri="{FF2B5EF4-FFF2-40B4-BE49-F238E27FC236}">
+                <a16:creationId xmlns:a16="http://schemas.microsoft.com/office/drawing/2014/main" id="{6D5F2987-D25E-4119-AAC8-8264DACC307B}"/>
+              </a:ext>
+            </a:extLst>
+          </p:cNvPr>
+          <p:cNvSpPr>
+            <a:spLocks noGrp="1"/>
+          </p:cNvSpPr>
+          <p:nvPr/>
+        </p:nvSpPr>
+        <p:spPr>
+          <a:xfrm>
+            <a:off x="6400800" y="3343275"/>
+            <a:ext cx="304800" cy="19050"/>
+          </a:xfrm>
+          <a:prstGeom prst="rect">
+            <a:avLst/>
+          </a:prstGeom>
+          <a:solidFill>
+            <a:srgbClr val="087C72"/>
+          </a:solidFill>
+          <a:ln w="0">
+            <a:solidFill>
+              <a:srgbClr val="087C72"/>
+            </a:solidFill>
+            <a:prstDash val="solid"/>
+          </a:ln>
+        </p:spPr>
+        <p:txBody>
+          <a:bodyPr/>
+          <a:lstStyle/>
+          <a:p>
+            <a:endParaRPr lang="en-US"/>
+          </a:p>
+        </p:txBody>
+      </p:sp>
+      <p:sp>
+        <p:nvSpPr>
+          <p:cNvPr id="10" name="Rectangle 9">
+            <a:extLst>
+              <a:ext uri="{FF2B5EF4-FFF2-40B4-BE49-F238E27FC236}">
+                <a16:creationId xmlns:a16="http://schemas.microsoft.com/office/drawing/2014/main" id="{C0B5066D-2CA3-4354-88FF-0FAA5F182691}"/>
+              </a:ext>
+            </a:extLst>
+          </p:cNvPr>
+          <p:cNvSpPr>
+            <a:spLocks noGrp="1"/>
+          </p:cNvSpPr>
+          <p:nvPr/>
+        </p:nvSpPr>
+        <p:spPr>
+          <a:xfrm>
+            <a:off x="6819900" y="3276600"/>
+            <a:ext cx="4095750" cy="323850"/>
+          </a:xfrm>
+          <a:prstGeom prst="rect">
+            <a:avLst/>
+          </a:prstGeom>
+          <a:noFill/>
+          <a:ln w="0">
+            <a:noFill/>
+            <a:prstDash val="solid"/>
+          </a:ln>
+        </p:spPr>
+        <p:txBody>
+          <a:bodyPr wrap="square" lIns="0" tIns="0" rIns="0" bIns="0" anchor="ctr">
+            <a:normAutofit/>
+          </a:bodyPr>
+          <a:lstStyle/>
+          <a:p>
+            <a:pPr marL="0" indent="0" algn="l">
+              <a:spcAft>
+                <a:spcPts val="0"/>
+              </a:spcAft>
+              <a:buNone/>
+              <a:defRPr sz="1500" b="0">
+                <a:solidFill>
+                  <a:srgbClr val="132925"/>
+                </a:solidFill>
+                <a:latin typeface="Aptos"/>
+                <a:ea typeface="Aptos"/>
+                <a:cs typeface="Aptos"/>
+              </a:defRPr>
+            </a:pPr>
+            <a:r>
+              <a:rPr sz="1125" b="1" i="0">
+                <a:solidFill>
+                  <a:srgbClr val="087C72"/>
+                </a:solidFill>
+                <a:latin typeface="Aptos"/>
+                <a:ea typeface="Aptos"/>
+                <a:cs typeface="Aptos"/>
+              </a:rPr>
+              <a:t>03</a:t>
+            </a:r>
+            <a:r>
+              <a:rPr sz="1500" b="0" i="0">
+                <a:solidFill>
+                  <a:srgbClr val="132925"/>
+                </a:solidFill>
+                <a:latin typeface="Aptos"/>
+                <a:ea typeface="Aptos"/>
+                <a:cs typeface="Aptos"/>
+              </a:rPr>
+              <a:t>   Explicit provider source</a:t>
+            </a:r>
+          </a:p>
+        </p:txBody>
+      </p:sp>
+      <p:sp>
+        <p:nvSpPr>
+          <p:cNvPr id="11" name="Rectangle 10">
+            <a:extLst>
+              <a:ext uri="{FF2B5EF4-FFF2-40B4-BE49-F238E27FC236}">
+                <a16:creationId xmlns:a16="http://schemas.microsoft.com/office/drawing/2014/main" id="{57DFB12F-8FDB-4B31-A927-13C6316248D5}"/>
+              </a:ext>
+            </a:extLst>
+          </p:cNvPr>
+          <p:cNvSpPr>
+            <a:spLocks noGrp="1"/>
+          </p:cNvSpPr>
+          <p:nvPr/>
+        </p:nvSpPr>
+        <p:spPr>
+          <a:xfrm>
+            <a:off x="6400800" y="3857625"/>
+            <a:ext cx="304800" cy="19050"/>
+          </a:xfrm>
+          <a:prstGeom prst="rect">
+            <a:avLst/>
+          </a:prstGeom>
+          <a:solidFill>
+            <a:srgbClr val="087C72"/>
+          </a:solidFill>
+          <a:ln w="0">
+            <a:solidFill>
+              <a:srgbClr val="087C72"/>
+            </a:solidFill>
+            <a:prstDash val="solid"/>
+          </a:ln>
+        </p:spPr>
+        <p:txBody>
+          <a:bodyPr/>
+          <a:lstStyle/>
+          <a:p>
+            <a:endParaRPr lang="en-US"/>
+          </a:p>
+        </p:txBody>
+      </p:sp>
+      <p:sp>
+        <p:nvSpPr>
+          <p:cNvPr id="12" name="Rectangle 11">
+            <a:extLst>
+              <a:ext uri="{FF2B5EF4-FFF2-40B4-BE49-F238E27FC236}">
+                <a16:creationId xmlns:a16="http://schemas.microsoft.com/office/drawing/2014/main" id="{5B0460DF-E78A-4095-BBE2-0CD3F0C79C0C}"/>
+              </a:ext>
+            </a:extLst>
+          </p:cNvPr>
+          <p:cNvSpPr>
+            <a:spLocks noGrp="1"/>
+          </p:cNvSpPr>
+          <p:nvPr/>
+        </p:nvSpPr>
+        <p:spPr>
+          <a:xfrm>
+            <a:off x="6819900" y="3790950"/>
+            <a:ext cx="4095750" cy="323850"/>
+          </a:xfrm>
+          <a:prstGeom prst="rect">
+            <a:avLst/>
+          </a:prstGeom>
+          <a:noFill/>
+          <a:ln w="0">
+            <a:noFill/>
+            <a:prstDash val="solid"/>
+          </a:ln>
+        </p:spPr>
+        <p:txBody>
+          <a:bodyPr wrap="square" lIns="0" tIns="0" rIns="0" bIns="0" anchor="ctr">
+            <a:normAutofit/>
+          </a:bodyPr>
+          <a:lstStyle/>
+          <a:p>
+            <a:pPr marL="0" indent="0" algn="l">
+              <a:spcAft>
+                <a:spcPts val="0"/>
+              </a:spcAft>
+              <a:buNone/>
+              <a:defRPr sz="1500" b="0">
+                <a:solidFill>
+                  <a:srgbClr val="132925"/>
+                </a:solidFill>
+                <a:latin typeface="Aptos"/>
+                <a:ea typeface="Aptos"/>
+                <a:cs typeface="Aptos"/>
+              </a:defRPr>
+            </a:pPr>
+            <a:r>
+              <a:rPr sz="1125" b="1" i="0">
+                <a:solidFill>
+                  <a:srgbClr val="087C72"/>
+                </a:solidFill>
+                <a:latin typeface="Aptos"/>
+                <a:ea typeface="Aptos"/>
+                <a:cs typeface="Aptos"/>
+              </a:rPr>
+              <a:t>04</a:t>
+            </a:r>
+            <a:r>
+              <a:rPr sz="1500" b="0" i="0">
+                <a:solidFill>
+                  <a:srgbClr val="132925"/>
+                </a:solidFill>
+                <a:latin typeface="Aptos"/>
+                <a:ea typeface="Aptos"/>
+                <a:cs typeface="Aptos"/>
+              </a:rPr>
+              <a:t>   Bounded retries</a:t>
+            </a:r>
+          </a:p>
+        </p:txBody>
+      </p:sp>
+      <p:sp>
+        <p:nvSpPr>
+          <p:cNvPr id="13" name="Rectangle 12">
+            <a:extLst>
+              <a:ext uri="{FF2B5EF4-FFF2-40B4-BE49-F238E27FC236}">
+                <a16:creationId xmlns:a16="http://schemas.microsoft.com/office/drawing/2014/main" id="{A39D5B80-1B5B-4286-9620-92C429A8B330}"/>
+              </a:ext>
+            </a:extLst>
+          </p:cNvPr>
+          <p:cNvSpPr>
+            <a:spLocks noGrp="1"/>
+          </p:cNvSpPr>
+          <p:nvPr/>
+        </p:nvSpPr>
+        <p:spPr>
+          <a:xfrm>
+            <a:off x="6400800" y="4371975"/>
+            <a:ext cx="304800" cy="19050"/>
+          </a:xfrm>
+          <a:prstGeom prst="rect">
+            <a:avLst/>
+          </a:prstGeom>
+          <a:solidFill>
+            <a:srgbClr val="087C72"/>
+          </a:solidFill>
+          <a:ln w="0">
+            <a:solidFill>
+              <a:srgbClr val="087C72"/>
+            </a:solidFill>
+            <a:prstDash val="solid"/>
+          </a:ln>
+        </p:spPr>
+        <p:txBody>
+          <a:bodyPr/>
+          <a:lstStyle/>
+          <a:p>
+            <a:endParaRPr lang="en-US"/>
+          </a:p>
+        </p:txBody>
+      </p:sp>
+      <p:sp>
+        <p:nvSpPr>
+          <p:cNvPr id="14" name="Rectangle 13">
+            <a:extLst>
+              <a:ext uri="{FF2B5EF4-FFF2-40B4-BE49-F238E27FC236}">
+                <a16:creationId xmlns:a16="http://schemas.microsoft.com/office/drawing/2014/main" id="{041887C9-0313-4101-90F4-BA7FF15B84C4}"/>
+              </a:ext>
+            </a:extLst>
+          </p:cNvPr>
+          <p:cNvSpPr>
+            <a:spLocks noGrp="1"/>
+          </p:cNvSpPr>
+          <p:nvPr/>
+        </p:nvSpPr>
+        <p:spPr>
+          <a:xfrm>
+            <a:off x="6819900" y="4305300"/>
+            <a:ext cx="4095750" cy="323850"/>
+          </a:xfrm>
+          <a:prstGeom prst="rect">
+            <a:avLst/>
+          </a:prstGeom>
+          <a:noFill/>
+          <a:ln w="0">
+            <a:noFill/>
+            <a:prstDash val="solid"/>
+          </a:ln>
+        </p:spPr>
+        <p:txBody>
+          <a:bodyPr wrap="square" lIns="0" tIns="0" rIns="0" bIns="0" anchor="ctr">
+            <a:normAutofit/>
+          </a:bodyPr>
+          <a:lstStyle/>
+          <a:p>
+            <a:pPr marL="0" indent="0" algn="l">
+              <a:spcAft>
+                <a:spcPts val="0"/>
+              </a:spcAft>
+              <a:buNone/>
+              <a:defRPr sz="1500" b="0">
+                <a:solidFill>
+                  <a:srgbClr val="132925"/>
+                </a:solidFill>
+                <a:latin typeface="Aptos"/>
+                <a:ea typeface="Aptos"/>
+                <a:cs typeface="Aptos"/>
+              </a:defRPr>
+            </a:pPr>
+            <a:r>
+              <a:rPr sz="1125" b="1" i="0">
+                <a:solidFill>
+                  <a:srgbClr val="087C72"/>
+                </a:solidFill>
+                <a:latin typeface="Aptos"/>
+                <a:ea typeface="Aptos"/>
+                <a:cs typeface="Aptos"/>
+              </a:rPr>
+              <a:t>05</a:t>
+            </a:r>
+            <a:r>
+              <a:rPr sz="1500" b="0" i="0">
+                <a:solidFill>
+                  <a:srgbClr val="132925"/>
+                </a:solidFill>
+                <a:latin typeface="Aptos"/>
+                <a:ea typeface="Aptos"/>
+                <a:cs typeface="Aptos"/>
+              </a:rPr>
+              <a:t>   Neutral or literal fallback</a:t>
+            </a:r>
+          </a:p>
+        </p:txBody>
+      </p:sp>
+      <p:sp>
+        <p:nvSpPr>
+          <p:cNvPr id="15" name="Rectangle 14">
+            <a:extLst>
+              <a:ext uri="{FF2B5EF4-FFF2-40B4-BE49-F238E27FC236}">
+                <a16:creationId xmlns:a16="http://schemas.microsoft.com/office/drawing/2014/main" id="{134E4B33-BAAC-4BC3-A75A-AC4EC8CE840B}"/>
+              </a:ext>
+            </a:extLst>
+          </p:cNvPr>
+          <p:cNvSpPr>
+            <a:spLocks noGrp="1"/>
+          </p:cNvSpPr>
+          <p:nvPr/>
+        </p:nvSpPr>
+        <p:spPr>
+          <a:xfrm>
+            <a:off x="6400800" y="4886325"/>
+            <a:ext cx="304800" cy="19050"/>
+          </a:xfrm>
+          <a:prstGeom prst="rect">
+            <a:avLst/>
+          </a:prstGeom>
+          <a:solidFill>
+            <a:srgbClr val="087C72"/>
+          </a:solidFill>
+          <a:ln w="0">
+            <a:solidFill>
+              <a:srgbClr val="087C72"/>
+            </a:solidFill>
+            <a:prstDash val="solid"/>
+          </a:ln>
+        </p:spPr>
+        <p:txBody>
+          <a:bodyPr/>
+          <a:lstStyle/>
+          <a:p>
+            <a:endParaRPr lang="en-US"/>
+          </a:p>
+        </p:txBody>
+      </p:sp>
+      <p:sp>
+        <p:nvSpPr>
+          <p:cNvPr id="16" name="Rectangle 15">
+            <a:extLst>
+              <a:ext uri="{FF2B5EF4-FFF2-40B4-BE49-F238E27FC236}">
+                <a16:creationId xmlns:a16="http://schemas.microsoft.com/office/drawing/2014/main" id="{BC703536-F208-4981-B203-65FEF62FB97A}"/>
+              </a:ext>
+            </a:extLst>
+          </p:cNvPr>
+          <p:cNvSpPr>
+            <a:spLocks noGrp="1"/>
+          </p:cNvSpPr>
+          <p:nvPr/>
+        </p:nvSpPr>
+        <p:spPr>
+          <a:xfrm>
+            <a:off x="6819900" y="4819650"/>
+            <a:ext cx="4095750" cy="323850"/>
+          </a:xfrm>
+          <a:prstGeom prst="rect">
+            <a:avLst/>
+          </a:prstGeom>
+          <a:noFill/>
+          <a:ln w="0">
+            <a:noFill/>
+            <a:prstDash val="solid"/>
+          </a:ln>
+        </p:spPr>
+        <p:txBody>
+          <a:bodyPr wrap="square" lIns="0" tIns="0" rIns="0" bIns="0" anchor="ctr">
+            <a:normAutofit/>
+          </a:bodyPr>
+          <a:lstStyle/>
+          <a:p>
+            <a:pPr marL="0" indent="0" algn="l">
+              <a:spcAft>
+                <a:spcPts val="0"/>
+              </a:spcAft>
+              <a:buNone/>
+              <a:defRPr sz="1500" b="0">
+                <a:solidFill>
+                  <a:srgbClr val="132925"/>
+                </a:solidFill>
+                <a:latin typeface="Aptos"/>
+                <a:ea typeface="Aptos"/>
+                <a:cs typeface="Aptos"/>
+              </a:defRPr>
+            </a:pPr>
+            <a:r>
+              <a:rPr sz="1125" b="1" i="0">
+                <a:solidFill>
+                  <a:srgbClr val="087C72"/>
+                </a:solidFill>
+                <a:latin typeface="Aptos"/>
+                <a:ea typeface="Aptos"/>
+                <a:cs typeface="Aptos"/>
+              </a:rPr>
+              <a:t>06</a:t>
+            </a:r>
+            <a:r>
+              <a:rPr sz="1500" b="0" i="0">
+                <a:solidFill>
+                  <a:srgbClr val="132925"/>
+                </a:solidFill>
+                <a:latin typeface="Aptos"/>
+                <a:ea typeface="Aptos"/>
+                <a:cs typeface="Aptos"/>
+              </a:rPr>
+              <a:t>   Reviewer escalation</a:t>
+            </a:r>
+          </a:p>
+        </p:txBody>
+      </p:sp>
+      <p:sp>
+        <p:nvSpPr>
+          <p:cNvPr id="17" name="Rounded Rectangle 16">
+            <a:extLst>
+              <a:ext uri="{FF2B5EF4-FFF2-40B4-BE49-F238E27FC236}">
+                <a16:creationId xmlns:a16="http://schemas.microsoft.com/office/drawing/2014/main" id="{C70B5286-C410-45B7-8366-7B2BDAF15EF1}"/>
+              </a:ext>
+            </a:extLst>
+          </p:cNvPr>
+          <p:cNvSpPr>
+            <a:spLocks noGrp="1"/>
+          </p:cNvSpPr>
+          <p:nvPr/>
+        </p:nvSpPr>
+        <p:spPr>
+          <a:xfrm>
+            <a:off x="6400800" y="5486400"/>
+            <a:ext cx="4762500" cy="647700"/>
+          </a:xfrm>
+          <a:prstGeom prst="roundRect">
+            <a:avLst>
+              <a:gd name="adj" fmla="val 8824"/>
+            </a:avLst>
+          </a:prstGeom>
+          <a:solidFill>
+            <a:srgbClr val="E6F3F1"/>
+          </a:solidFill>
+          <a:ln w="9525">
+            <a:solidFill>
+              <a:srgbClr val="B8DAD6"/>
+            </a:solidFill>
+            <a:prstDash val="solid"/>
+          </a:ln>
+        </p:spPr>
+        <p:txBody>
+          <a:bodyPr/>
+          <a:lstStyle/>
+          <a:p>
+            <a:endParaRPr lang="en-US"/>
+          </a:p>
+        </p:txBody>
+      </p:sp>
+      <p:sp>
+        <p:nvSpPr>
+          <p:cNvPr id="18" name="Rectangle 17">
+            <a:extLst>
+              <a:ext uri="{FF2B5EF4-FFF2-40B4-BE49-F238E27FC236}">
+                <a16:creationId xmlns:a16="http://schemas.microsoft.com/office/drawing/2014/main" id="{42095DF7-0447-4EA6-912C-3ECB67796EBD}"/>
+              </a:ext>
+            </a:extLst>
+          </p:cNvPr>
+          <p:cNvSpPr>
+            <a:spLocks noGrp="1"/>
+          </p:cNvSpPr>
+          <p:nvPr/>
+        </p:nvSpPr>
+        <p:spPr>
+          <a:xfrm>
+            <a:off x="6610350" y="5619750"/>
+            <a:ext cx="4343400" cy="381000"/>
+          </a:xfrm>
+          <a:prstGeom prst="rect">
+            <a:avLst/>
+          </a:prstGeom>
+          <a:noFill/>
+          <a:ln w="0">
+            <a:noFill/>
+            <a:prstDash val="solid"/>
+          </a:ln>
+        </p:spPr>
+        <p:txBody>
+          <a:bodyPr wrap="square" lIns="0" tIns="0" rIns="0" bIns="0" anchor="ctr">
+            <a:normAutofit fontScale="92593"/>
+          </a:bodyPr>
+          <a:lstStyle/>
+          <a:p>
+            <a:pPr marL="0" indent="0" algn="l">
+              <a:spcAft>
+                <a:spcPts val="0"/>
+              </a:spcAft>
+              <a:buNone/>
+              <a:defRPr sz="1350" b="0">
+                <a:solidFill>
+                  <a:srgbClr val="132925"/>
+                </a:solidFill>
+                <a:latin typeface="Aptos"/>
+                <a:ea typeface="Aptos"/>
+                <a:cs typeface="Aptos"/>
+              </a:defRPr>
+            </a:pPr>
+            <a:r>
+              <a:rPr sz="1350" b="1" i="0">
+                <a:solidFill>
+                  <a:srgbClr val="0B3D38"/>
+                </a:solidFill>
+                <a:latin typeface="Aptos"/>
+                <a:ea typeface="Aptos"/>
+                <a:cs typeface="Aptos"/>
+              </a:rPr>
+              <a:t>Qwen handles uncertainty. Typed systems decide what may enter the workflow.</a:t>
             </a:r>
           </a:p>
         </p:txBody>
@@ -7440,6 +8523,14 @@
 <file path=ppt/slides/slide6.xml><?xml version="1.0" encoding="utf-8"?>
 <p:sld xmlns:a="http://schemas.openxmlformats.org/drawingml/2006/main" xmlns:r="http://schemas.openxmlformats.org/officeDocument/2006/relationships" xmlns:p="http://schemas.openxmlformats.org/presentationml/2006/main">
   <p:cSld>
+    <p:bg>
+      <p:bgPr>
+        <a:solidFill>
+          <a:srgbClr val="F8FBFA"/>
+        </a:solidFill>
+        <a:effectLst/>
+      </p:bgPr>
+    </p:bg>
     <p:spTree>
       <p:nvGrpSpPr>
         <p:cNvPr id="1" name=""/>
@@ -7470,21 +8561,42 @@
             <p:ph type="title"/>
           </p:nvPr>
         </p:nvSpPr>
-        <p:spPr/>
-        <p:txBody>
-          <a:bodyPr/>
-          <a:lstStyle/>
-          <a:p>
-            <a:pPr>
-              <a:buNone/>
-              <a:defRPr sz="3200">
-                <a:solidFill>
-                  <a:srgbClr val="1F6FEB"/>
-                </a:solidFill>
+        <p:spPr>
+          <a:xfrm>
+            <a:off x="609600" y="419100"/>
+            <a:ext cx="10934700" cy="781050"/>
+          </a:xfrm>
+        </p:spPr>
+        <p:txBody>
+          <a:bodyPr wrap="square" lIns="0" tIns="0" rIns="0" bIns="0" anchor="ctr">
+            <a:normAutofit/>
+          </a:bodyPr>
+          <a:lstStyle/>
+          <a:p>
+            <a:pPr marL="0" indent="0" algn="l">
+              <a:spcAft>
+                <a:spcPts val="0"/>
+              </a:spcAft>
+              <a:buNone/>
+              <a:defRPr sz="3600" b="1">
+                <a:solidFill>
+                  <a:srgbClr val="132925"/>
+                </a:solidFill>
+                <a:latin typeface="Aptos Display"/>
+                <a:ea typeface="Aptos Display"/>
+                <a:cs typeface="Aptos Display"/>
               </a:defRPr>
             </a:pPr>
             <a:r>
-              <a:t>Agent Society — Nine Specialists, One DAG</a:t>
+              <a:rPr sz="3600" b="1" i="0">
+                <a:solidFill>
+                  <a:srgbClr val="132925"/>
+                </a:solidFill>
+                <a:latin typeface="Aptos Display"/>
+                <a:ea typeface="Aptos Display"/>
+                <a:cs typeface="Aptos Display"/>
+              </a:rPr>
+              <a:t>Nine specialists share one typed blackboard</a:t>
             </a:r>
           </a:p>
         </p:txBody>
@@ -7505,64 +8617,1707 @@
             <p:ph idx="1"/>
           </p:nvPr>
         </p:nvSpPr>
-        <p:spPr/>
-        <p:txBody>
-          <a:bodyPr wrap="square"/>
-          <a:lstStyle/>
-          <a:p>
-            <a:pPr>
-              <a:buNone/>
-            </a:pPr>
-            <a:r>
-              <a:rPr sz="1800">
-                <a:solidFill>
-                  <a:srgbClr val="222222"/>
-                </a:solidFill>
-              </a:rPr>
-              <a:t>Recall Intake -&gt; Document Extraction -&gt; Inventory Matching / Shelf Vision -&gt; Risk Scoring / Memory -&gt; Operations Task / Communications -&gt; Compliance Evidence.</a:t>
-            </a:r>
-          </a:p>
-          <a:p>
-            <a:pPr>
-              <a:buNone/>
-            </a:pPr>
-            <a:r>
-              <a:rPr sz="1800">
-                <a:solidFill>
-                  <a:srgbClr val="222222"/>
-                </a:solidFill>
-              </a:rPr>
-              <a:t>Independent specialists run inside the same wave instead of one after another — six parallel waves in total for nine agents.</a:t>
-            </a:r>
-          </a:p>
-          <a:p>
-            <a:pPr>
-              <a:buNone/>
-            </a:pPr>
-            <a:r>
-              <a:rPr sz="1800">
-                <a:solidFill>
-                  <a:srgbClr val="222222"/>
-                </a:solidFill>
-              </a:rPr>
-              <a:t>Each agent gets per-attempt retries, and a failing agent's downstream dependents are skipped cleanly rather than aborting the whole run.</a:t>
-            </a:r>
-          </a:p>
-          <a:p>
-            <a:pPr>
-              <a:buNone/>
-            </a:pPr>
-            <a:r>
-              <a:rPr sz="1800">
-                <a:solidFill>
-                  <a:srgbClr val="222222"/>
-                </a:solidFill>
-              </a:rPr>
-              <a:t>The orchestrator reconciles disagreement between Qwen's reasoning and the authoritative inventory ground truth before assembling the final analysis.</a:t>
-            </a:r>
-          </a:p>
-        </p:txBody>
-      </p:sp>
+        <p:spPr>
+          <a:xfrm>
+            <a:off x="685800" y="1504950"/>
+            <a:ext cx="3048000" cy="4724400"/>
+          </a:xfrm>
+        </p:spPr>
+        <p:txBody>
+          <a:bodyPr wrap="square" lIns="0" tIns="0" rIns="76200" bIns="0" anchor="t">
+            <a:normAutofit/>
+          </a:bodyPr>
+          <a:lstStyle/>
+          <a:p>
+            <a:pPr marL="0" indent="0" algn="l">
+              <a:spcAft>
+                <a:spcPts val="28"/>
+              </a:spcAft>
+              <a:buNone/>
+              <a:defRPr sz="1425" b="0">
+                <a:solidFill>
+                  <a:srgbClr val="132925"/>
+                </a:solidFill>
+                <a:latin typeface="Aptos"/>
+                <a:ea typeface="Aptos"/>
+                <a:cs typeface="Aptos"/>
+              </a:defRPr>
+            </a:pPr>
+            <a:r>
+              <a:rPr sz="1800" b="1" i="0">
+                <a:solidFill>
+                  <a:srgbClr val="132925"/>
+                </a:solidFill>
+                <a:latin typeface="Aptos"/>
+                <a:ea typeface="Aptos"/>
+                <a:cs typeface="Aptos"/>
+              </a:rPr>
+              <a:t>The Agent Society advances in six durable waves.</a:t>
+            </a:r>
+          </a:p>
+          <a:p>
+            <a:pPr marL="0" indent="0" algn="l">
+              <a:spcAft>
+                <a:spcPts val="16"/>
+              </a:spcAft>
+              <a:buNone/>
+              <a:defRPr sz="1425" b="0">
+                <a:solidFill>
+                  <a:srgbClr val="132925"/>
+                </a:solidFill>
+                <a:latin typeface="Aptos"/>
+                <a:ea typeface="Aptos"/>
+                <a:cs typeface="Aptos"/>
+              </a:defRPr>
+            </a:pPr>
+            <a:r>
+              <a:rPr sz="2850" b="1" i="0">
+                <a:solidFill>
+                  <a:srgbClr val="087C72"/>
+                </a:solidFill>
+                <a:latin typeface="Aptos"/>
+                <a:ea typeface="Aptos"/>
+                <a:cs typeface="Aptos"/>
+              </a:rPr>
+              <a:t>9</a:t>
+            </a:r>
+            <a:r>
+              <a:rPr sz="1425" b="0" i="0">
+                <a:solidFill>
+                  <a:srgbClr val="5B6F6A"/>
+                </a:solidFill>
+                <a:latin typeface="Aptos"/>
+                <a:ea typeface="Aptos"/>
+                <a:cs typeface="Aptos"/>
+              </a:rPr>
+              <a:t> specialist agents</a:t>
+            </a:r>
+          </a:p>
+          <a:p>
+            <a:pPr marL="0" indent="0" algn="l">
+              <a:spcAft>
+                <a:spcPts val="26"/>
+              </a:spcAft>
+              <a:buNone/>
+              <a:defRPr sz="1425" b="0">
+                <a:solidFill>
+                  <a:srgbClr val="132925"/>
+                </a:solidFill>
+                <a:latin typeface="Aptos"/>
+                <a:ea typeface="Aptos"/>
+                <a:cs typeface="Aptos"/>
+              </a:defRPr>
+            </a:pPr>
+            <a:r>
+              <a:rPr sz="2850" b="1" i="0">
+                <a:solidFill>
+                  <a:srgbClr val="0B3D38"/>
+                </a:solidFill>
+                <a:latin typeface="Aptos"/>
+                <a:ea typeface="Aptos"/>
+                <a:cs typeface="Aptos"/>
+              </a:rPr>
+              <a:t>6</a:t>
+            </a:r>
+            <a:r>
+              <a:rPr sz="1425" b="0" i="0">
+                <a:solidFill>
+                  <a:srgbClr val="5B6F6A"/>
+                </a:solidFill>
+                <a:latin typeface="Aptos"/>
+                <a:ea typeface="Aptos"/>
+                <a:cs typeface="Aptos"/>
+              </a:rPr>
+              <a:t> typed waves</a:t>
+            </a:r>
+          </a:p>
+          <a:p>
+            <a:pPr marL="0" indent="0" algn="l">
+              <a:spcAft>
+                <a:spcPts val="16"/>
+              </a:spcAft>
+              <a:buNone/>
+              <a:defRPr sz="1425" b="0">
+                <a:solidFill>
+                  <a:srgbClr val="132925"/>
+                </a:solidFill>
+                <a:latin typeface="Aptos"/>
+                <a:ea typeface="Aptos"/>
+                <a:cs typeface="Aptos"/>
+              </a:defRPr>
+            </a:pPr>
+            <a:r>
+              <a:rPr sz="1425" b="0" i="0">
+                <a:solidFill>
+                  <a:srgbClr val="132925"/>
+                </a:solidFill>
+                <a:latin typeface="Aptos"/>
+                <a:ea typeface="Aptos"/>
+                <a:cs typeface="Aptos"/>
+              </a:rPr>
+              <a:t>Independent specialists run in parallel inside a wave.</a:t>
+            </a:r>
+          </a:p>
+          <a:p>
+            <a:pPr marL="0" indent="0" algn="l">
+              <a:spcAft>
+                <a:spcPts val="16"/>
+              </a:spcAft>
+              <a:buNone/>
+              <a:defRPr sz="1425" b="0">
+                <a:solidFill>
+                  <a:srgbClr val="132925"/>
+                </a:solidFill>
+                <a:latin typeface="Aptos"/>
+                <a:ea typeface="Aptos"/>
+                <a:cs typeface="Aptos"/>
+              </a:defRPr>
+            </a:pPr>
+            <a:r>
+              <a:rPr sz="1425" b="0" i="0">
+                <a:solidFill>
+                  <a:srgbClr val="132925"/>
+                </a:solidFill>
+                <a:latin typeface="Aptos"/>
+                <a:ea typeface="Aptos"/>
+                <a:cs typeface="Aptos"/>
+              </a:rPr>
+              <a:t>Each wave writes a checkpoint before the next one begins.</a:t>
+            </a:r>
+          </a:p>
+          <a:p>
+            <a:pPr marL="0" indent="0" algn="l">
+              <a:spcAft>
+                <a:spcPts val="16"/>
+              </a:spcAft>
+              <a:buNone/>
+              <a:defRPr sz="1425" b="0">
+                <a:solidFill>
+                  <a:srgbClr val="132925"/>
+                </a:solidFill>
+                <a:latin typeface="Aptos"/>
+                <a:ea typeface="Aptos"/>
+                <a:cs typeface="Aptos"/>
+              </a:defRPr>
+            </a:pPr>
+            <a:r>
+              <a:rPr sz="1425" b="0" i="0">
+                <a:solidFill>
+                  <a:srgbClr val="132925"/>
+                </a:solidFill>
+                <a:latin typeface="Aptos"/>
+                <a:ea typeface="Aptos"/>
+                <a:cs typeface="Aptos"/>
+              </a:rPr>
+              <a:t>Failure skips only dependent work, preserving useful results.</a:t>
+            </a:r>
+          </a:p>
+        </p:txBody>
+      </p:sp>
+      <p:sp>
+        <p:nvSpPr>
+          <p:cNvPr id="4" name="Rectangle 3">
+            <a:extLst>
+              <a:ext uri="{FF2B5EF4-FFF2-40B4-BE49-F238E27FC236}">
+                <a16:creationId xmlns:a16="http://schemas.microsoft.com/office/drawing/2014/main" id="{29EEA03C-86AC-4A5B-B91F-F6A4015AA49C}"/>
+              </a:ext>
+            </a:extLst>
+          </p:cNvPr>
+          <p:cNvSpPr>
+            <a:spLocks noGrp="1"/>
+          </p:cNvSpPr>
+          <p:nvPr/>
+        </p:nvSpPr>
+        <p:spPr>
+          <a:xfrm>
+            <a:off x="4286250" y="1485900"/>
+            <a:ext cx="1028700" cy="228600"/>
+          </a:xfrm>
+          <a:prstGeom prst="rect">
+            <a:avLst/>
+          </a:prstGeom>
+          <a:noFill/>
+          <a:ln w="0">
+            <a:noFill/>
+            <a:prstDash val="solid"/>
+          </a:ln>
+        </p:spPr>
+        <p:txBody>
+          <a:bodyPr wrap="square" lIns="0" tIns="0" rIns="0" bIns="0" anchor="ctr">
+            <a:normAutofit/>
+          </a:bodyPr>
+          <a:lstStyle/>
+          <a:p>
+            <a:pPr marL="0" indent="0" algn="ctr">
+              <a:spcAft>
+                <a:spcPts val="0"/>
+              </a:spcAft>
+              <a:buNone/>
+              <a:defRPr sz="1050" b="1">
+                <a:solidFill>
+                  <a:srgbClr val="5B6F6A"/>
+                </a:solidFill>
+                <a:latin typeface="Aptos"/>
+                <a:ea typeface="Aptos"/>
+                <a:cs typeface="Aptos"/>
+              </a:defRPr>
+            </a:pPr>
+            <a:r>
+              <a:rPr sz="1050" b="1" i="0">
+                <a:solidFill>
+                  <a:srgbClr val="5B6F6A"/>
+                </a:solidFill>
+                <a:latin typeface="Aptos"/>
+                <a:ea typeface="Aptos"/>
+                <a:cs typeface="Aptos"/>
+              </a:rPr>
+              <a:t>W1</a:t>
+            </a:r>
+          </a:p>
+        </p:txBody>
+      </p:sp>
+      <p:sp>
+        <p:nvSpPr>
+          <p:cNvPr id="5" name="Rectangle 4">
+            <a:extLst>
+              <a:ext uri="{FF2B5EF4-FFF2-40B4-BE49-F238E27FC236}">
+                <a16:creationId xmlns:a16="http://schemas.microsoft.com/office/drawing/2014/main" id="{448B59A9-F171-4885-9112-2B2E44DEFC44}"/>
+              </a:ext>
+            </a:extLst>
+          </p:cNvPr>
+          <p:cNvSpPr>
+            <a:spLocks noGrp="1"/>
+          </p:cNvSpPr>
+          <p:nvPr/>
+        </p:nvSpPr>
+        <p:spPr>
+          <a:xfrm>
+            <a:off x="5467350" y="1485900"/>
+            <a:ext cx="1028700" cy="228600"/>
+          </a:xfrm>
+          <a:prstGeom prst="rect">
+            <a:avLst/>
+          </a:prstGeom>
+          <a:noFill/>
+          <a:ln w="0">
+            <a:noFill/>
+            <a:prstDash val="solid"/>
+          </a:ln>
+        </p:spPr>
+        <p:txBody>
+          <a:bodyPr wrap="square" lIns="0" tIns="0" rIns="0" bIns="0" anchor="ctr">
+            <a:normAutofit/>
+          </a:bodyPr>
+          <a:lstStyle/>
+          <a:p>
+            <a:pPr marL="0" indent="0" algn="ctr">
+              <a:spcAft>
+                <a:spcPts val="0"/>
+              </a:spcAft>
+              <a:buNone/>
+              <a:defRPr sz="1050" b="1">
+                <a:solidFill>
+                  <a:srgbClr val="5B6F6A"/>
+                </a:solidFill>
+                <a:latin typeface="Aptos"/>
+                <a:ea typeface="Aptos"/>
+                <a:cs typeface="Aptos"/>
+              </a:defRPr>
+            </a:pPr>
+            <a:r>
+              <a:rPr sz="1050" b="1" i="0">
+                <a:solidFill>
+                  <a:srgbClr val="5B6F6A"/>
+                </a:solidFill>
+                <a:latin typeface="Aptos"/>
+                <a:ea typeface="Aptos"/>
+                <a:cs typeface="Aptos"/>
+              </a:rPr>
+              <a:t>W2</a:t>
+            </a:r>
+          </a:p>
+        </p:txBody>
+      </p:sp>
+      <p:sp>
+        <p:nvSpPr>
+          <p:cNvPr id="6" name="Rectangle 5">
+            <a:extLst>
+              <a:ext uri="{FF2B5EF4-FFF2-40B4-BE49-F238E27FC236}">
+                <a16:creationId xmlns:a16="http://schemas.microsoft.com/office/drawing/2014/main" id="{076B9771-8E2F-43EF-93C9-7FF88C97696C}"/>
+              </a:ext>
+            </a:extLst>
+          </p:cNvPr>
+          <p:cNvSpPr>
+            <a:spLocks noGrp="1"/>
+          </p:cNvSpPr>
+          <p:nvPr/>
+        </p:nvSpPr>
+        <p:spPr>
+          <a:xfrm>
+            <a:off x="6648450" y="1485900"/>
+            <a:ext cx="1028700" cy="228600"/>
+          </a:xfrm>
+          <a:prstGeom prst="rect">
+            <a:avLst/>
+          </a:prstGeom>
+          <a:noFill/>
+          <a:ln w="0">
+            <a:noFill/>
+            <a:prstDash val="solid"/>
+          </a:ln>
+        </p:spPr>
+        <p:txBody>
+          <a:bodyPr wrap="square" lIns="0" tIns="0" rIns="0" bIns="0" anchor="ctr">
+            <a:normAutofit/>
+          </a:bodyPr>
+          <a:lstStyle/>
+          <a:p>
+            <a:pPr marL="0" indent="0" algn="ctr">
+              <a:spcAft>
+                <a:spcPts val="0"/>
+              </a:spcAft>
+              <a:buNone/>
+              <a:defRPr sz="1050" b="1">
+                <a:solidFill>
+                  <a:srgbClr val="5B6F6A"/>
+                </a:solidFill>
+                <a:latin typeface="Aptos"/>
+                <a:ea typeface="Aptos"/>
+                <a:cs typeface="Aptos"/>
+              </a:defRPr>
+            </a:pPr>
+            <a:r>
+              <a:rPr sz="1050" b="1" i="0">
+                <a:solidFill>
+                  <a:srgbClr val="5B6F6A"/>
+                </a:solidFill>
+                <a:latin typeface="Aptos"/>
+                <a:ea typeface="Aptos"/>
+                <a:cs typeface="Aptos"/>
+              </a:rPr>
+              <a:t>W3</a:t>
+            </a:r>
+          </a:p>
+        </p:txBody>
+      </p:sp>
+      <p:sp>
+        <p:nvSpPr>
+          <p:cNvPr id="7" name="Rectangle 6">
+            <a:extLst>
+              <a:ext uri="{FF2B5EF4-FFF2-40B4-BE49-F238E27FC236}">
+                <a16:creationId xmlns:a16="http://schemas.microsoft.com/office/drawing/2014/main" id="{D3A3C6BB-2617-4AF4-AD54-2BC1B55DA1E3}"/>
+              </a:ext>
+            </a:extLst>
+          </p:cNvPr>
+          <p:cNvSpPr>
+            <a:spLocks noGrp="1"/>
+          </p:cNvSpPr>
+          <p:nvPr/>
+        </p:nvSpPr>
+        <p:spPr>
+          <a:xfrm>
+            <a:off x="7829550" y="1485900"/>
+            <a:ext cx="1028700" cy="228600"/>
+          </a:xfrm>
+          <a:prstGeom prst="rect">
+            <a:avLst/>
+          </a:prstGeom>
+          <a:noFill/>
+          <a:ln w="0">
+            <a:noFill/>
+            <a:prstDash val="solid"/>
+          </a:ln>
+        </p:spPr>
+        <p:txBody>
+          <a:bodyPr wrap="square" lIns="0" tIns="0" rIns="0" bIns="0" anchor="ctr">
+            <a:normAutofit/>
+          </a:bodyPr>
+          <a:lstStyle/>
+          <a:p>
+            <a:pPr marL="0" indent="0" algn="ctr">
+              <a:spcAft>
+                <a:spcPts val="0"/>
+              </a:spcAft>
+              <a:buNone/>
+              <a:defRPr sz="1050" b="1">
+                <a:solidFill>
+                  <a:srgbClr val="5B6F6A"/>
+                </a:solidFill>
+                <a:latin typeface="Aptos"/>
+                <a:ea typeface="Aptos"/>
+                <a:cs typeface="Aptos"/>
+              </a:defRPr>
+            </a:pPr>
+            <a:r>
+              <a:rPr sz="1050" b="1" i="0">
+                <a:solidFill>
+                  <a:srgbClr val="5B6F6A"/>
+                </a:solidFill>
+                <a:latin typeface="Aptos"/>
+                <a:ea typeface="Aptos"/>
+                <a:cs typeface="Aptos"/>
+              </a:rPr>
+              <a:t>W4</a:t>
+            </a:r>
+          </a:p>
+        </p:txBody>
+      </p:sp>
+      <p:sp>
+        <p:nvSpPr>
+          <p:cNvPr id="8" name="Rectangle 7">
+            <a:extLst>
+              <a:ext uri="{FF2B5EF4-FFF2-40B4-BE49-F238E27FC236}">
+                <a16:creationId xmlns:a16="http://schemas.microsoft.com/office/drawing/2014/main" id="{F314FDCC-DD12-4E9F-88CE-E7F622534F4E}"/>
+              </a:ext>
+            </a:extLst>
+          </p:cNvPr>
+          <p:cNvSpPr>
+            <a:spLocks noGrp="1"/>
+          </p:cNvSpPr>
+          <p:nvPr/>
+        </p:nvSpPr>
+        <p:spPr>
+          <a:xfrm>
+            <a:off x="9010650" y="1485900"/>
+            <a:ext cx="1028700" cy="228600"/>
+          </a:xfrm>
+          <a:prstGeom prst="rect">
+            <a:avLst/>
+          </a:prstGeom>
+          <a:noFill/>
+          <a:ln w="0">
+            <a:noFill/>
+            <a:prstDash val="solid"/>
+          </a:ln>
+        </p:spPr>
+        <p:txBody>
+          <a:bodyPr wrap="square" lIns="0" tIns="0" rIns="0" bIns="0" anchor="ctr">
+            <a:normAutofit/>
+          </a:bodyPr>
+          <a:lstStyle/>
+          <a:p>
+            <a:pPr marL="0" indent="0" algn="ctr">
+              <a:spcAft>
+                <a:spcPts val="0"/>
+              </a:spcAft>
+              <a:buNone/>
+              <a:defRPr sz="1050" b="1">
+                <a:solidFill>
+                  <a:srgbClr val="5B6F6A"/>
+                </a:solidFill>
+                <a:latin typeface="Aptos"/>
+                <a:ea typeface="Aptos"/>
+                <a:cs typeface="Aptos"/>
+              </a:defRPr>
+            </a:pPr>
+            <a:r>
+              <a:rPr sz="1050" b="1" i="0">
+                <a:solidFill>
+                  <a:srgbClr val="5B6F6A"/>
+                </a:solidFill>
+                <a:latin typeface="Aptos"/>
+                <a:ea typeface="Aptos"/>
+                <a:cs typeface="Aptos"/>
+              </a:rPr>
+              <a:t>W5</a:t>
+            </a:r>
+          </a:p>
+        </p:txBody>
+      </p:sp>
+      <p:sp>
+        <p:nvSpPr>
+          <p:cNvPr id="9" name="Rectangle 8">
+            <a:extLst>
+              <a:ext uri="{FF2B5EF4-FFF2-40B4-BE49-F238E27FC236}">
+                <a16:creationId xmlns:a16="http://schemas.microsoft.com/office/drawing/2014/main" id="{16E2F162-5FD6-4800-837D-C4C22BBB3C7B}"/>
+              </a:ext>
+            </a:extLst>
+          </p:cNvPr>
+          <p:cNvSpPr>
+            <a:spLocks noGrp="1"/>
+          </p:cNvSpPr>
+          <p:nvPr/>
+        </p:nvSpPr>
+        <p:spPr>
+          <a:xfrm>
+            <a:off x="10306050" y="1485900"/>
+            <a:ext cx="1028700" cy="228600"/>
+          </a:xfrm>
+          <a:prstGeom prst="rect">
+            <a:avLst/>
+          </a:prstGeom>
+          <a:noFill/>
+          <a:ln w="0">
+            <a:noFill/>
+            <a:prstDash val="solid"/>
+          </a:ln>
+        </p:spPr>
+        <p:txBody>
+          <a:bodyPr wrap="square" lIns="0" tIns="0" rIns="0" bIns="0" anchor="ctr">
+            <a:normAutofit/>
+          </a:bodyPr>
+          <a:lstStyle/>
+          <a:p>
+            <a:pPr marL="0" indent="0" algn="ctr">
+              <a:spcAft>
+                <a:spcPts val="0"/>
+              </a:spcAft>
+              <a:buNone/>
+              <a:defRPr sz="1050" b="1">
+                <a:solidFill>
+                  <a:srgbClr val="5B6F6A"/>
+                </a:solidFill>
+                <a:latin typeface="Aptos"/>
+                <a:ea typeface="Aptos"/>
+                <a:cs typeface="Aptos"/>
+              </a:defRPr>
+            </a:pPr>
+            <a:r>
+              <a:rPr sz="1050" b="1" i="0">
+                <a:solidFill>
+                  <a:srgbClr val="5B6F6A"/>
+                </a:solidFill>
+                <a:latin typeface="Aptos"/>
+                <a:ea typeface="Aptos"/>
+                <a:cs typeface="Aptos"/>
+              </a:rPr>
+              <a:t>W6</a:t>
+            </a:r>
+          </a:p>
+        </p:txBody>
+      </p:sp>
+      <p:sp>
+        <p:nvSpPr>
+          <p:cNvPr id="10" name="Rounded Rectangle 9">
+            <a:extLst>
+              <a:ext uri="{FF2B5EF4-FFF2-40B4-BE49-F238E27FC236}">
+                <a16:creationId xmlns:a16="http://schemas.microsoft.com/office/drawing/2014/main" id="{68DCF7F5-881C-4FA9-BB53-654E0BF8E77A}"/>
+              </a:ext>
+            </a:extLst>
+          </p:cNvPr>
+          <p:cNvSpPr>
+            <a:spLocks noGrp="1"/>
+          </p:cNvSpPr>
+          <p:nvPr/>
+        </p:nvSpPr>
+        <p:spPr>
+          <a:xfrm>
+            <a:off x="4286250" y="2266950"/>
+            <a:ext cx="1028700" cy="628650"/>
+          </a:xfrm>
+          <a:prstGeom prst="roundRect">
+            <a:avLst>
+              <a:gd name="adj" fmla="val 9091"/>
+            </a:avLst>
+          </a:prstGeom>
+          <a:solidFill>
+            <a:srgbClr val="FFFFFF"/>
+          </a:solidFill>
+          <a:ln w="9525">
+            <a:solidFill>
+              <a:srgbClr val="087C72"/>
+            </a:solidFill>
+            <a:prstDash val="solid"/>
+          </a:ln>
+        </p:spPr>
+        <p:txBody>
+          <a:bodyPr wrap="square" lIns="57150" tIns="57150" rIns="57150" bIns="57150" anchor="ctr">
+            <a:normAutofit/>
+          </a:bodyPr>
+          <a:lstStyle/>
+          <a:p>
+            <a:pPr marL="0" indent="0" algn="ctr">
+              <a:spcAft>
+                <a:spcPts val="0"/>
+              </a:spcAft>
+              <a:buNone/>
+              <a:defRPr sz="1200" b="1">
+                <a:solidFill>
+                  <a:srgbClr val="132925"/>
+                </a:solidFill>
+                <a:latin typeface="Aptos"/>
+                <a:ea typeface="Aptos"/>
+                <a:cs typeface="Aptos"/>
+              </a:defRPr>
+            </a:pPr>
+            <a:r>
+              <a:rPr sz="1200" b="1" i="0">
+                <a:solidFill>
+                  <a:srgbClr val="132925"/>
+                </a:solidFill>
+                <a:latin typeface="Aptos"/>
+                <a:ea typeface="Aptos"/>
+                <a:cs typeface="Aptos"/>
+              </a:rPr>
+              <a:t>Recall
+Intake</a:t>
+            </a:r>
+          </a:p>
+        </p:txBody>
+      </p:sp>
+      <p:sp>
+        <p:nvSpPr>
+          <p:cNvPr id="11" name="Rounded Rectangle 10">
+            <a:extLst>
+              <a:ext uri="{FF2B5EF4-FFF2-40B4-BE49-F238E27FC236}">
+                <a16:creationId xmlns:a16="http://schemas.microsoft.com/office/drawing/2014/main" id="{4F83EC5C-7D46-4A2B-940C-CE3E71AB943D}"/>
+              </a:ext>
+            </a:extLst>
+          </p:cNvPr>
+          <p:cNvSpPr>
+            <a:spLocks noGrp="1"/>
+          </p:cNvSpPr>
+          <p:nvPr/>
+        </p:nvSpPr>
+        <p:spPr>
+          <a:xfrm>
+            <a:off x="5467350" y="2266950"/>
+            <a:ext cx="1028700" cy="628650"/>
+          </a:xfrm>
+          <a:prstGeom prst="roundRect">
+            <a:avLst>
+              <a:gd name="adj" fmla="val 9091"/>
+            </a:avLst>
+          </a:prstGeom>
+          <a:solidFill>
+            <a:srgbClr val="FFFFFF"/>
+          </a:solidFill>
+          <a:ln w="9525">
+            <a:solidFill>
+              <a:srgbClr val="087C72"/>
+            </a:solidFill>
+            <a:prstDash val="solid"/>
+          </a:ln>
+        </p:spPr>
+        <p:txBody>
+          <a:bodyPr wrap="square" lIns="57150" tIns="57150" rIns="57150" bIns="57150" anchor="ctr">
+            <a:normAutofit/>
+          </a:bodyPr>
+          <a:lstStyle/>
+          <a:p>
+            <a:pPr marL="0" indent="0" algn="ctr">
+              <a:spcAft>
+                <a:spcPts val="0"/>
+              </a:spcAft>
+              <a:buNone/>
+              <a:defRPr sz="1200" b="1">
+                <a:solidFill>
+                  <a:srgbClr val="132925"/>
+                </a:solidFill>
+                <a:latin typeface="Aptos"/>
+                <a:ea typeface="Aptos"/>
+                <a:cs typeface="Aptos"/>
+              </a:defRPr>
+            </a:pPr>
+            <a:r>
+              <a:rPr sz="1200" b="1" i="0">
+                <a:solidFill>
+                  <a:srgbClr val="132925"/>
+                </a:solidFill>
+                <a:latin typeface="Aptos"/>
+                <a:ea typeface="Aptos"/>
+                <a:cs typeface="Aptos"/>
+              </a:rPr>
+              <a:t>Document
+Extraction</a:t>
+            </a:r>
+          </a:p>
+        </p:txBody>
+      </p:sp>
+      <p:sp>
+        <p:nvSpPr>
+          <p:cNvPr id="12" name="Rounded Rectangle 11">
+            <a:extLst>
+              <a:ext uri="{FF2B5EF4-FFF2-40B4-BE49-F238E27FC236}">
+                <a16:creationId xmlns:a16="http://schemas.microsoft.com/office/drawing/2014/main" id="{AC608A92-6048-4570-87D8-8F47F9EA861D}"/>
+              </a:ext>
+            </a:extLst>
+          </p:cNvPr>
+          <p:cNvSpPr>
+            <a:spLocks noGrp="1"/>
+          </p:cNvSpPr>
+          <p:nvPr/>
+        </p:nvSpPr>
+        <p:spPr>
+          <a:xfrm>
+            <a:off x="6648450" y="1924050"/>
+            <a:ext cx="1028700" cy="552450"/>
+          </a:xfrm>
+          <a:prstGeom prst="roundRect">
+            <a:avLst>
+              <a:gd name="adj" fmla="val 10345"/>
+            </a:avLst>
+          </a:prstGeom>
+          <a:solidFill>
+            <a:srgbClr val="FFFFFF"/>
+          </a:solidFill>
+          <a:ln w="9525">
+            <a:solidFill>
+              <a:srgbClr val="087C72"/>
+            </a:solidFill>
+            <a:prstDash val="solid"/>
+          </a:ln>
+        </p:spPr>
+        <p:txBody>
+          <a:bodyPr wrap="square" lIns="57150" tIns="57150" rIns="57150" bIns="57150" anchor="ctr">
+            <a:normAutofit/>
+          </a:bodyPr>
+          <a:lstStyle/>
+          <a:p>
+            <a:pPr marL="0" indent="0" algn="ctr">
+              <a:spcAft>
+                <a:spcPts val="0"/>
+              </a:spcAft>
+              <a:buNone/>
+              <a:defRPr sz="1125" b="1">
+                <a:solidFill>
+                  <a:srgbClr val="132925"/>
+                </a:solidFill>
+                <a:latin typeface="Aptos"/>
+                <a:ea typeface="Aptos"/>
+                <a:cs typeface="Aptos"/>
+              </a:defRPr>
+            </a:pPr>
+            <a:r>
+              <a:rPr sz="1125" b="1" i="0">
+                <a:solidFill>
+                  <a:srgbClr val="132925"/>
+                </a:solidFill>
+                <a:latin typeface="Aptos"/>
+                <a:ea typeface="Aptos"/>
+                <a:cs typeface="Aptos"/>
+              </a:rPr>
+              <a:t>Inventory
+Matching</a:t>
+            </a:r>
+          </a:p>
+        </p:txBody>
+      </p:sp>
+      <p:sp>
+        <p:nvSpPr>
+          <p:cNvPr id="13" name="Rounded Rectangle 12">
+            <a:extLst>
+              <a:ext uri="{FF2B5EF4-FFF2-40B4-BE49-F238E27FC236}">
+                <a16:creationId xmlns:a16="http://schemas.microsoft.com/office/drawing/2014/main" id="{802F5D04-2040-4DD5-8D55-3F83CFD34CEA}"/>
+              </a:ext>
+            </a:extLst>
+          </p:cNvPr>
+          <p:cNvSpPr>
+            <a:spLocks noGrp="1"/>
+          </p:cNvSpPr>
+          <p:nvPr/>
+        </p:nvSpPr>
+        <p:spPr>
+          <a:xfrm>
+            <a:off x="6648450" y="2686050"/>
+            <a:ext cx="1028700" cy="552450"/>
+          </a:xfrm>
+          <a:prstGeom prst="roundRect">
+            <a:avLst>
+              <a:gd name="adj" fmla="val 10345"/>
+            </a:avLst>
+          </a:prstGeom>
+          <a:solidFill>
+            <a:srgbClr val="FFFFFF"/>
+          </a:solidFill>
+          <a:ln w="9525">
+            <a:solidFill>
+              <a:srgbClr val="C47A00"/>
+            </a:solidFill>
+            <a:prstDash val="solid"/>
+          </a:ln>
+        </p:spPr>
+        <p:txBody>
+          <a:bodyPr wrap="square" lIns="57150" tIns="57150" rIns="57150" bIns="57150" anchor="ctr">
+            <a:normAutofit/>
+          </a:bodyPr>
+          <a:lstStyle/>
+          <a:p>
+            <a:pPr marL="0" indent="0" algn="ctr">
+              <a:spcAft>
+                <a:spcPts val="0"/>
+              </a:spcAft>
+              <a:buNone/>
+              <a:defRPr sz="1125" b="1">
+                <a:solidFill>
+                  <a:srgbClr val="132925"/>
+                </a:solidFill>
+                <a:latin typeface="Aptos"/>
+                <a:ea typeface="Aptos"/>
+                <a:cs typeface="Aptos"/>
+              </a:defRPr>
+            </a:pPr>
+            <a:r>
+              <a:rPr sz="1125" b="1" i="0">
+                <a:solidFill>
+                  <a:srgbClr val="132925"/>
+                </a:solidFill>
+                <a:latin typeface="Aptos"/>
+                <a:ea typeface="Aptos"/>
+                <a:cs typeface="Aptos"/>
+              </a:rPr>
+              <a:t>Shelf
+Vision</a:t>
+            </a:r>
+          </a:p>
+        </p:txBody>
+      </p:sp>
+      <p:sp>
+        <p:nvSpPr>
+          <p:cNvPr id="14" name="Rounded Rectangle 13">
+            <a:extLst>
+              <a:ext uri="{FF2B5EF4-FFF2-40B4-BE49-F238E27FC236}">
+                <a16:creationId xmlns:a16="http://schemas.microsoft.com/office/drawing/2014/main" id="{3B2E78B3-8F8B-4049-BCAF-1E40DCFF6C12}"/>
+              </a:ext>
+            </a:extLst>
+          </p:cNvPr>
+          <p:cNvSpPr>
+            <a:spLocks noGrp="1"/>
+          </p:cNvSpPr>
+          <p:nvPr/>
+        </p:nvSpPr>
+        <p:spPr>
+          <a:xfrm>
+            <a:off x="7829550" y="1924050"/>
+            <a:ext cx="1028700" cy="552450"/>
+          </a:xfrm>
+          <a:prstGeom prst="roundRect">
+            <a:avLst>
+              <a:gd name="adj" fmla="val 10345"/>
+            </a:avLst>
+          </a:prstGeom>
+          <a:solidFill>
+            <a:srgbClr val="FFFFFF"/>
+          </a:solidFill>
+          <a:ln w="9525">
+            <a:solidFill>
+              <a:srgbClr val="B42318"/>
+            </a:solidFill>
+            <a:prstDash val="solid"/>
+          </a:ln>
+        </p:spPr>
+        <p:txBody>
+          <a:bodyPr wrap="square" lIns="57150" tIns="57150" rIns="57150" bIns="57150" anchor="ctr">
+            <a:normAutofit/>
+          </a:bodyPr>
+          <a:lstStyle/>
+          <a:p>
+            <a:pPr marL="0" indent="0" algn="ctr">
+              <a:spcAft>
+                <a:spcPts val="0"/>
+              </a:spcAft>
+              <a:buNone/>
+              <a:defRPr sz="1125" b="1">
+                <a:solidFill>
+                  <a:srgbClr val="132925"/>
+                </a:solidFill>
+                <a:latin typeface="Aptos"/>
+                <a:ea typeface="Aptos"/>
+                <a:cs typeface="Aptos"/>
+              </a:defRPr>
+            </a:pPr>
+            <a:r>
+              <a:rPr sz="1125" b="1" i="0">
+                <a:solidFill>
+                  <a:srgbClr val="132925"/>
+                </a:solidFill>
+                <a:latin typeface="Aptos"/>
+                <a:ea typeface="Aptos"/>
+                <a:cs typeface="Aptos"/>
+              </a:rPr>
+              <a:t>Risk
+Scoring</a:t>
+            </a:r>
+          </a:p>
+        </p:txBody>
+      </p:sp>
+      <p:sp>
+        <p:nvSpPr>
+          <p:cNvPr id="15" name="Rounded Rectangle 14">
+            <a:extLst>
+              <a:ext uri="{FF2B5EF4-FFF2-40B4-BE49-F238E27FC236}">
+                <a16:creationId xmlns:a16="http://schemas.microsoft.com/office/drawing/2014/main" id="{B664A8C3-2A39-4ADB-971F-CE6FB368DDDD}"/>
+              </a:ext>
+            </a:extLst>
+          </p:cNvPr>
+          <p:cNvSpPr>
+            <a:spLocks noGrp="1"/>
+          </p:cNvSpPr>
+          <p:nvPr/>
+        </p:nvSpPr>
+        <p:spPr>
+          <a:xfrm>
+            <a:off x="7829550" y="2686050"/>
+            <a:ext cx="1028700" cy="552450"/>
+          </a:xfrm>
+          <a:prstGeom prst="roundRect">
+            <a:avLst>
+              <a:gd name="adj" fmla="val 10345"/>
+            </a:avLst>
+          </a:prstGeom>
+          <a:solidFill>
+            <a:srgbClr val="FFFFFF"/>
+          </a:solidFill>
+          <a:ln w="9525">
+            <a:solidFill>
+              <a:srgbClr val="087C72"/>
+            </a:solidFill>
+            <a:prstDash val="solid"/>
+          </a:ln>
+        </p:spPr>
+        <p:txBody>
+          <a:bodyPr wrap="square" lIns="57150" tIns="57150" rIns="57150" bIns="57150" anchor="ctr">
+            <a:normAutofit/>
+          </a:bodyPr>
+          <a:lstStyle/>
+          <a:p>
+            <a:pPr marL="0" indent="0" algn="ctr">
+              <a:spcAft>
+                <a:spcPts val="0"/>
+              </a:spcAft>
+              <a:buNone/>
+              <a:defRPr sz="1125" b="1">
+                <a:solidFill>
+                  <a:srgbClr val="132925"/>
+                </a:solidFill>
+                <a:latin typeface="Aptos"/>
+                <a:ea typeface="Aptos"/>
+                <a:cs typeface="Aptos"/>
+              </a:defRPr>
+            </a:pPr>
+            <a:r>
+              <a:rPr sz="1125" b="1" i="0">
+                <a:solidFill>
+                  <a:srgbClr val="132925"/>
+                </a:solidFill>
+                <a:latin typeface="Aptos"/>
+                <a:ea typeface="Aptos"/>
+                <a:cs typeface="Aptos"/>
+              </a:rPr>
+              <a:t>Memory</a:t>
+            </a:r>
+          </a:p>
+        </p:txBody>
+      </p:sp>
+      <p:sp>
+        <p:nvSpPr>
+          <p:cNvPr id="16" name="Rounded Rectangle 15">
+            <a:extLst>
+              <a:ext uri="{FF2B5EF4-FFF2-40B4-BE49-F238E27FC236}">
+                <a16:creationId xmlns:a16="http://schemas.microsoft.com/office/drawing/2014/main" id="{0EC09146-F730-4511-B356-1196A87315C4}"/>
+              </a:ext>
+            </a:extLst>
+          </p:cNvPr>
+          <p:cNvSpPr>
+            <a:spLocks noGrp="1"/>
+          </p:cNvSpPr>
+          <p:nvPr/>
+        </p:nvSpPr>
+        <p:spPr>
+          <a:xfrm>
+            <a:off x="9010650" y="1924050"/>
+            <a:ext cx="1028700" cy="552450"/>
+          </a:xfrm>
+          <a:prstGeom prst="roundRect">
+            <a:avLst>
+              <a:gd name="adj" fmla="val 10345"/>
+            </a:avLst>
+          </a:prstGeom>
+          <a:solidFill>
+            <a:srgbClr val="FFFFFF"/>
+          </a:solidFill>
+          <a:ln w="9525">
+            <a:solidFill>
+              <a:srgbClr val="087C72"/>
+            </a:solidFill>
+            <a:prstDash val="solid"/>
+          </a:ln>
+        </p:spPr>
+        <p:txBody>
+          <a:bodyPr wrap="square" lIns="57150" tIns="57150" rIns="57150" bIns="57150" anchor="ctr">
+            <a:normAutofit/>
+          </a:bodyPr>
+          <a:lstStyle/>
+          <a:p>
+            <a:pPr marL="0" indent="0" algn="ctr">
+              <a:spcAft>
+                <a:spcPts val="0"/>
+              </a:spcAft>
+              <a:buNone/>
+              <a:defRPr sz="1125" b="1">
+                <a:solidFill>
+                  <a:srgbClr val="132925"/>
+                </a:solidFill>
+                <a:latin typeface="Aptos"/>
+                <a:ea typeface="Aptos"/>
+                <a:cs typeface="Aptos"/>
+              </a:defRPr>
+            </a:pPr>
+            <a:r>
+              <a:rPr sz="1125" b="1" i="0">
+                <a:solidFill>
+                  <a:srgbClr val="132925"/>
+                </a:solidFill>
+                <a:latin typeface="Aptos"/>
+                <a:ea typeface="Aptos"/>
+                <a:cs typeface="Aptos"/>
+              </a:rPr>
+              <a:t>Operations
+Task</a:t>
+            </a:r>
+          </a:p>
+        </p:txBody>
+      </p:sp>
+      <p:sp>
+        <p:nvSpPr>
+          <p:cNvPr id="17" name="Rounded Rectangle 16">
+            <a:extLst>
+              <a:ext uri="{FF2B5EF4-FFF2-40B4-BE49-F238E27FC236}">
+                <a16:creationId xmlns:a16="http://schemas.microsoft.com/office/drawing/2014/main" id="{34C5F984-1002-4636-8C3E-DD368301D16A}"/>
+              </a:ext>
+            </a:extLst>
+          </p:cNvPr>
+          <p:cNvSpPr>
+            <a:spLocks noGrp="1"/>
+          </p:cNvSpPr>
+          <p:nvPr/>
+        </p:nvSpPr>
+        <p:spPr>
+          <a:xfrm>
+            <a:off x="9010650" y="2686050"/>
+            <a:ext cx="1162050" cy="552450"/>
+          </a:xfrm>
+          <a:prstGeom prst="roundRect">
+            <a:avLst>
+              <a:gd name="adj" fmla="val 10345"/>
+            </a:avLst>
+          </a:prstGeom>
+          <a:solidFill>
+            <a:srgbClr val="FFFFFF"/>
+          </a:solidFill>
+          <a:ln w="9525">
+            <a:solidFill>
+              <a:srgbClr val="087C72"/>
+            </a:solidFill>
+            <a:prstDash val="solid"/>
+          </a:ln>
+        </p:spPr>
+        <p:txBody>
+          <a:bodyPr wrap="square" lIns="57150" tIns="57150" rIns="57150" bIns="57150" anchor="ctr">
+            <a:normAutofit/>
+          </a:bodyPr>
+          <a:lstStyle/>
+          <a:p>
+            <a:pPr marL="0" indent="0" algn="ctr">
+              <a:spcAft>
+                <a:spcPts val="0"/>
+              </a:spcAft>
+              <a:buNone/>
+              <a:defRPr sz="1050" b="1">
+                <a:solidFill>
+                  <a:srgbClr val="132925"/>
+                </a:solidFill>
+                <a:latin typeface="Aptos"/>
+                <a:ea typeface="Aptos"/>
+                <a:cs typeface="Aptos"/>
+              </a:defRPr>
+            </a:pPr>
+            <a:r>
+              <a:rPr sz="1050" b="1" i="0">
+                <a:solidFill>
+                  <a:srgbClr val="132925"/>
+                </a:solidFill>
+                <a:latin typeface="Aptos"/>
+                <a:ea typeface="Aptos"/>
+                <a:cs typeface="Aptos"/>
+              </a:rPr>
+              <a:t>Communications</a:t>
+            </a:r>
+          </a:p>
+        </p:txBody>
+      </p:sp>
+      <p:sp>
+        <p:nvSpPr>
+          <p:cNvPr id="18" name="Rounded Rectangle 17">
+            <a:extLst>
+              <a:ext uri="{FF2B5EF4-FFF2-40B4-BE49-F238E27FC236}">
+                <a16:creationId xmlns:a16="http://schemas.microsoft.com/office/drawing/2014/main" id="{8ADCE7A4-E669-4DB8-879D-3310E39878B7}"/>
+              </a:ext>
+            </a:extLst>
+          </p:cNvPr>
+          <p:cNvSpPr>
+            <a:spLocks noGrp="1"/>
+          </p:cNvSpPr>
+          <p:nvPr/>
+        </p:nvSpPr>
+        <p:spPr>
+          <a:xfrm>
+            <a:off x="10306050" y="2266950"/>
+            <a:ext cx="1028700" cy="628650"/>
+          </a:xfrm>
+          <a:prstGeom prst="roundRect">
+            <a:avLst>
+              <a:gd name="adj" fmla="val 9091"/>
+            </a:avLst>
+          </a:prstGeom>
+          <a:solidFill>
+            <a:srgbClr val="0B3D38"/>
+          </a:solidFill>
+          <a:ln w="9525">
+            <a:solidFill>
+              <a:srgbClr val="0B3D38"/>
+            </a:solidFill>
+            <a:prstDash val="solid"/>
+          </a:ln>
+        </p:spPr>
+        <p:txBody>
+          <a:bodyPr wrap="square" lIns="57150" tIns="57150" rIns="57150" bIns="57150" anchor="ctr">
+            <a:normAutofit/>
+          </a:bodyPr>
+          <a:lstStyle/>
+          <a:p>
+            <a:pPr marL="0" indent="0" algn="ctr">
+              <a:spcAft>
+                <a:spcPts val="0"/>
+              </a:spcAft>
+              <a:buNone/>
+              <a:defRPr sz="1125" b="1">
+                <a:solidFill>
+                  <a:srgbClr val="FFFFFF"/>
+                </a:solidFill>
+                <a:latin typeface="Aptos"/>
+                <a:ea typeface="Aptos"/>
+                <a:cs typeface="Aptos"/>
+              </a:defRPr>
+            </a:pPr>
+            <a:r>
+              <a:rPr sz="1125" b="1" i="0">
+                <a:solidFill>
+                  <a:srgbClr val="FFFFFF"/>
+                </a:solidFill>
+                <a:latin typeface="Aptos"/>
+                <a:ea typeface="Aptos"/>
+                <a:cs typeface="Aptos"/>
+              </a:rPr>
+              <a:t>Compliance
+Evidence</a:t>
+            </a:r>
+          </a:p>
+        </p:txBody>
+      </p:sp>
+      <p:cxnSp>
+        <p:nvCxnSpPr>
+          <p:cNvPr id="52" name="Straight Arrow Connector 51"/>
+          <p:cNvCxnSpPr>
+            <a:stCxn id="10" idx="3"/>
+            <a:endCxn id="11" idx="1"/>
+          </p:cNvCxnSpPr>
+          <p:nvPr/>
+        </p:nvCxnSpPr>
+        <p:spPr>
+          <a:xfrm>
+            <a:off x="5314950" y="2581275"/>
+            <a:ext cx="152400" cy="0"/>
+          </a:xfrm>
+          <a:prstGeom prst="straightConnector1">
+            <a:avLst/>
+          </a:prstGeom>
+          <a:ln w="19050">
+            <a:solidFill>
+              <a:srgbClr val="D6E3DF"/>
+            </a:solidFill>
+            <a:prstDash val="solid"/>
+            <a:headEnd type="none" w="med" len="med"/>
+            <a:tailEnd type="arrow" w="sm" len="sm"/>
+          </a:ln>
+        </p:spPr>
+      </p:cxnSp>
+      <p:cxnSp>
+        <p:nvCxnSpPr>
+          <p:cNvPr id="53" name="Elbow Connector 52"/>
+          <p:cNvCxnSpPr>
+            <a:stCxn id="11" idx="3"/>
+            <a:endCxn id="12" idx="1"/>
+          </p:cNvCxnSpPr>
+          <p:nvPr/>
+        </p:nvCxnSpPr>
+        <p:spPr>
+          <a:xfrm flipV="1">
+            <a:off x="6496050" y="2200275"/>
+            <a:ext cx="152400" cy="381000"/>
+          </a:xfrm>
+          <a:prstGeom prst="bentConnector3">
+            <a:avLst>
+              <a:gd name="adj1" fmla="val 50000"/>
+            </a:avLst>
+          </a:prstGeom>
+          <a:ln w="19050">
+            <a:solidFill>
+              <a:srgbClr val="D6E3DF"/>
+            </a:solidFill>
+            <a:prstDash val="solid"/>
+            <a:headEnd type="none" w="med" len="med"/>
+            <a:tailEnd type="arrow" w="sm" len="sm"/>
+          </a:ln>
+        </p:spPr>
+      </p:cxnSp>
+      <p:cxnSp>
+        <p:nvCxnSpPr>
+          <p:cNvPr id="54" name="Elbow Connector 53"/>
+          <p:cNvCxnSpPr>
+            <a:stCxn id="11" idx="3"/>
+            <a:endCxn id="13" idx="1"/>
+          </p:cNvCxnSpPr>
+          <p:nvPr/>
+        </p:nvCxnSpPr>
+        <p:spPr>
+          <a:xfrm>
+            <a:off x="6496050" y="2581275"/>
+            <a:ext cx="152400" cy="381000"/>
+          </a:xfrm>
+          <a:prstGeom prst="bentConnector3">
+            <a:avLst>
+              <a:gd name="adj1" fmla="val 50000"/>
+            </a:avLst>
+          </a:prstGeom>
+          <a:ln w="19050">
+            <a:solidFill>
+              <a:srgbClr val="D6E3DF"/>
+            </a:solidFill>
+            <a:prstDash val="solid"/>
+            <a:headEnd type="none" w="med" len="med"/>
+            <a:tailEnd type="arrow" w="sm" len="sm"/>
+          </a:ln>
+        </p:spPr>
+      </p:cxnSp>
+      <p:cxnSp>
+        <p:nvCxnSpPr>
+          <p:cNvPr id="55" name="Straight Arrow Connector 54"/>
+          <p:cNvCxnSpPr>
+            <a:stCxn id="12" idx="3"/>
+            <a:endCxn id="14" idx="1"/>
+          </p:cNvCxnSpPr>
+          <p:nvPr/>
+        </p:nvCxnSpPr>
+        <p:spPr>
+          <a:xfrm>
+            <a:off x="7677150" y="2200275"/>
+            <a:ext cx="152400" cy="0"/>
+          </a:xfrm>
+          <a:prstGeom prst="straightConnector1">
+            <a:avLst/>
+          </a:prstGeom>
+          <a:ln w="19050">
+            <a:solidFill>
+              <a:srgbClr val="D6E3DF"/>
+            </a:solidFill>
+            <a:prstDash val="solid"/>
+            <a:headEnd type="none" w="med" len="med"/>
+            <a:tailEnd type="arrow" w="sm" len="sm"/>
+          </a:ln>
+        </p:spPr>
+      </p:cxnSp>
+      <p:cxnSp>
+        <p:nvCxnSpPr>
+          <p:cNvPr id="56" name="Elbow Connector 55"/>
+          <p:cNvCxnSpPr>
+            <a:stCxn id="12" idx="3"/>
+            <a:endCxn id="15" idx="1"/>
+          </p:cNvCxnSpPr>
+          <p:nvPr/>
+        </p:nvCxnSpPr>
+        <p:spPr>
+          <a:xfrm>
+            <a:off x="7677150" y="2200275"/>
+            <a:ext cx="152400" cy="762000"/>
+          </a:xfrm>
+          <a:prstGeom prst="bentConnector3">
+            <a:avLst>
+              <a:gd name="adj1" fmla="val 50000"/>
+            </a:avLst>
+          </a:prstGeom>
+          <a:ln w="19050">
+            <a:solidFill>
+              <a:srgbClr val="D6E3DF"/>
+            </a:solidFill>
+            <a:prstDash val="solid"/>
+            <a:headEnd type="none" w="med" len="med"/>
+            <a:tailEnd type="arrow" w="sm" len="sm"/>
+          </a:ln>
+        </p:spPr>
+      </p:cxnSp>
+      <p:cxnSp>
+        <p:nvCxnSpPr>
+          <p:cNvPr id="57" name="Elbow Connector 56"/>
+          <p:cNvCxnSpPr>
+            <a:stCxn id="13" idx="3"/>
+            <a:endCxn id="14" idx="1"/>
+          </p:cNvCxnSpPr>
+          <p:nvPr/>
+        </p:nvCxnSpPr>
+        <p:spPr>
+          <a:xfrm flipV="1">
+            <a:off x="7677150" y="2200275"/>
+            <a:ext cx="152400" cy="762000"/>
+          </a:xfrm>
+          <a:prstGeom prst="bentConnector3">
+            <a:avLst>
+              <a:gd name="adj1" fmla="val 50000"/>
+            </a:avLst>
+          </a:prstGeom>
+          <a:ln w="19050">
+            <a:solidFill>
+              <a:srgbClr val="D7B56D"/>
+            </a:solidFill>
+            <a:prstDash val="solid"/>
+            <a:headEnd type="none" w="med" len="med"/>
+            <a:tailEnd type="arrow" w="sm" len="sm"/>
+          </a:ln>
+        </p:spPr>
+      </p:cxnSp>
+      <p:cxnSp>
+        <p:nvCxnSpPr>
+          <p:cNvPr id="58" name="Straight Arrow Connector 57"/>
+          <p:cNvCxnSpPr>
+            <a:stCxn id="14" idx="3"/>
+            <a:endCxn id="16" idx="1"/>
+          </p:cNvCxnSpPr>
+          <p:nvPr/>
+        </p:nvCxnSpPr>
+        <p:spPr>
+          <a:xfrm>
+            <a:off x="8858250" y="2200275"/>
+            <a:ext cx="152400" cy="0"/>
+          </a:xfrm>
+          <a:prstGeom prst="straightConnector1">
+            <a:avLst/>
+          </a:prstGeom>
+          <a:ln w="19050">
+            <a:solidFill>
+              <a:srgbClr val="D6E3DF"/>
+            </a:solidFill>
+            <a:prstDash val="solid"/>
+            <a:headEnd type="none" w="med" len="med"/>
+            <a:tailEnd type="arrow" w="sm" len="sm"/>
+          </a:ln>
+        </p:spPr>
+      </p:cxnSp>
+      <p:cxnSp>
+        <p:nvCxnSpPr>
+          <p:cNvPr id="59" name="Elbow Connector 58"/>
+          <p:cNvCxnSpPr>
+            <a:stCxn id="14" idx="3"/>
+            <a:endCxn id="17" idx="1"/>
+          </p:cNvCxnSpPr>
+          <p:nvPr/>
+        </p:nvCxnSpPr>
+        <p:spPr>
+          <a:xfrm>
+            <a:off x="8858250" y="2200275"/>
+            <a:ext cx="152400" cy="762000"/>
+          </a:xfrm>
+          <a:prstGeom prst="bentConnector3">
+            <a:avLst>
+              <a:gd name="adj1" fmla="val 50000"/>
+            </a:avLst>
+          </a:prstGeom>
+          <a:ln w="19050">
+            <a:solidFill>
+              <a:srgbClr val="D6E3DF"/>
+            </a:solidFill>
+            <a:prstDash val="solid"/>
+            <a:headEnd type="none" w="med" len="med"/>
+            <a:tailEnd type="arrow" w="sm" len="sm"/>
+          </a:ln>
+        </p:spPr>
+      </p:cxnSp>
+      <p:cxnSp>
+        <p:nvCxnSpPr>
+          <p:cNvPr id="60" name="Elbow Connector 59"/>
+          <p:cNvCxnSpPr>
+            <a:stCxn id="15" idx="3"/>
+            <a:endCxn id="16" idx="1"/>
+          </p:cNvCxnSpPr>
+          <p:nvPr/>
+        </p:nvCxnSpPr>
+        <p:spPr>
+          <a:xfrm flipV="1">
+            <a:off x="8858250" y="2200275"/>
+            <a:ext cx="152400" cy="762000"/>
+          </a:xfrm>
+          <a:prstGeom prst="bentConnector3">
+            <a:avLst>
+              <a:gd name="adj1" fmla="val 50000"/>
+            </a:avLst>
+          </a:prstGeom>
+          <a:ln w="19050">
+            <a:solidFill>
+              <a:srgbClr val="D6E3DF"/>
+            </a:solidFill>
+            <a:prstDash val="solid"/>
+            <a:headEnd type="none" w="med" len="med"/>
+            <a:tailEnd type="arrow" w="sm" len="sm"/>
+          </a:ln>
+        </p:spPr>
+      </p:cxnSp>
+      <p:cxnSp>
+        <p:nvCxnSpPr>
+          <p:cNvPr id="61" name="Straight Arrow Connector 60"/>
+          <p:cNvCxnSpPr>
+            <a:stCxn id="15" idx="3"/>
+            <a:endCxn id="17" idx="1"/>
+          </p:cNvCxnSpPr>
+          <p:nvPr/>
+        </p:nvCxnSpPr>
+        <p:spPr>
+          <a:xfrm>
+            <a:off x="8858250" y="2962275"/>
+            <a:ext cx="152400" cy="0"/>
+          </a:xfrm>
+          <a:prstGeom prst="straightConnector1">
+            <a:avLst/>
+          </a:prstGeom>
+          <a:ln w="19050">
+            <a:solidFill>
+              <a:srgbClr val="D6E3DF"/>
+            </a:solidFill>
+            <a:prstDash val="solid"/>
+            <a:headEnd type="none" w="med" len="med"/>
+            <a:tailEnd type="arrow" w="sm" len="sm"/>
+          </a:ln>
+        </p:spPr>
+      </p:cxnSp>
+      <p:cxnSp>
+        <p:nvCxnSpPr>
+          <p:cNvPr id="62" name="Elbow Connector 61"/>
+          <p:cNvCxnSpPr>
+            <a:stCxn id="16" idx="3"/>
+            <a:endCxn id="18" idx="1"/>
+          </p:cNvCxnSpPr>
+          <p:nvPr/>
+        </p:nvCxnSpPr>
+        <p:spPr>
+          <a:xfrm>
+            <a:off x="10039350" y="2200275"/>
+            <a:ext cx="266700" cy="381000"/>
+          </a:xfrm>
+          <a:prstGeom prst="bentConnector3">
+            <a:avLst>
+              <a:gd name="adj1" fmla="val 50000"/>
+            </a:avLst>
+          </a:prstGeom>
+          <a:ln w="19050">
+            <a:solidFill>
+              <a:srgbClr val="D6E3DF"/>
+            </a:solidFill>
+            <a:prstDash val="solid"/>
+            <a:headEnd type="none" w="med" len="med"/>
+            <a:tailEnd type="arrow" w="sm" len="sm"/>
+          </a:ln>
+        </p:spPr>
+      </p:cxnSp>
+      <p:cxnSp>
+        <p:nvCxnSpPr>
+          <p:cNvPr id="63" name="Elbow Connector 62"/>
+          <p:cNvCxnSpPr>
+            <a:stCxn id="17" idx="3"/>
+            <a:endCxn id="18" idx="1"/>
+          </p:cNvCxnSpPr>
+          <p:nvPr/>
+        </p:nvCxnSpPr>
+        <p:spPr>
+          <a:xfrm flipV="1">
+            <a:off x="10172700" y="2581275"/>
+            <a:ext cx="133350" cy="381000"/>
+          </a:xfrm>
+          <a:prstGeom prst="bentConnector3">
+            <a:avLst>
+              <a:gd name="adj1" fmla="val 50000"/>
+            </a:avLst>
+          </a:prstGeom>
+          <a:ln w="19050">
+            <a:solidFill>
+              <a:srgbClr val="D6E3DF"/>
+            </a:solidFill>
+            <a:prstDash val="solid"/>
+            <a:headEnd type="none" w="med" len="med"/>
+            <a:tailEnd type="arrow" w="sm" len="sm"/>
+          </a:ln>
+        </p:spPr>
+      </p:cxnSp>
+      <p:sp>
+        <p:nvSpPr>
+          <p:cNvPr id="31" name="Rounded Rectangle 30">
+            <a:extLst>
+              <a:ext uri="{FF2B5EF4-FFF2-40B4-BE49-F238E27FC236}">
+                <a16:creationId xmlns:a16="http://schemas.microsoft.com/office/drawing/2014/main" id="{2C39C159-3EA0-4B5C-A6D5-3C34CEB85E64}"/>
+              </a:ext>
+            </a:extLst>
+          </p:cNvPr>
+          <p:cNvSpPr>
+            <a:spLocks noGrp="1"/>
+          </p:cNvSpPr>
+          <p:nvPr/>
+        </p:nvSpPr>
+        <p:spPr>
+          <a:xfrm>
+            <a:off x="4286250" y="3543300"/>
+            <a:ext cx="1866900" cy="285750"/>
+          </a:xfrm>
+          <a:prstGeom prst="roundRect">
+            <a:avLst>
+              <a:gd name="adj" fmla="val 20000"/>
+            </a:avLst>
+          </a:prstGeom>
+          <a:solidFill>
+            <a:srgbClr val="E6F3F1"/>
+          </a:solidFill>
+          <a:ln w="9525">
+            <a:solidFill>
+              <a:srgbClr val="E6F3F1"/>
+            </a:solidFill>
+            <a:prstDash val="solid"/>
+          </a:ln>
+        </p:spPr>
+        <p:txBody>
+          <a:bodyPr/>
+          <a:lstStyle/>
+          <a:p>
+            <a:endParaRPr lang="en-US"/>
+          </a:p>
+        </p:txBody>
+      </p:sp>
+      <p:sp>
+        <p:nvSpPr>
+          <p:cNvPr id="32" name="Rectangle 31">
+            <a:extLst>
+              <a:ext uri="{FF2B5EF4-FFF2-40B4-BE49-F238E27FC236}">
+                <a16:creationId xmlns:a16="http://schemas.microsoft.com/office/drawing/2014/main" id="{17953843-179C-45F6-B613-B7637671B7FF}"/>
+              </a:ext>
+            </a:extLst>
+          </p:cNvPr>
+          <p:cNvSpPr>
+            <a:spLocks noGrp="1"/>
+          </p:cNvSpPr>
+          <p:nvPr/>
+        </p:nvSpPr>
+        <p:spPr>
+          <a:xfrm>
+            <a:off x="4362450" y="3571875"/>
+            <a:ext cx="1714500" cy="228600"/>
+          </a:xfrm>
+          <a:prstGeom prst="rect">
+            <a:avLst/>
+          </a:prstGeom>
+          <a:noFill/>
+          <a:ln w="0">
+            <a:noFill/>
+            <a:prstDash val="solid"/>
+          </a:ln>
+        </p:spPr>
+        <p:txBody>
+          <a:bodyPr wrap="square" lIns="0" tIns="0" rIns="0" bIns="0" anchor="ctr">
+            <a:normAutofit/>
+          </a:bodyPr>
+          <a:lstStyle/>
+          <a:p>
+            <a:pPr marL="0" indent="0" algn="ctr">
+              <a:spcAft>
+                <a:spcPts val="0"/>
+              </a:spcAft>
+              <a:buNone/>
+              <a:defRPr sz="975" b="1">
+                <a:solidFill>
+                  <a:srgbClr val="087C72"/>
+                </a:solidFill>
+                <a:latin typeface="Aptos"/>
+                <a:ea typeface="Aptos"/>
+                <a:cs typeface="Aptos"/>
+              </a:defRPr>
+            </a:pPr>
+            <a:r>
+              <a:rPr sz="975" b="1" i="0">
+                <a:solidFill>
+                  <a:srgbClr val="087C72"/>
+                </a:solidFill>
+                <a:latin typeface="Aptos"/>
+                <a:ea typeface="Aptos"/>
+                <a:cs typeface="Aptos"/>
+              </a:rPr>
+              <a:t>REAL MISSION CONTROL</a:t>
+            </a:r>
+          </a:p>
+        </p:txBody>
+      </p:sp>
+      <p:sp>
+        <p:nvSpPr>
+          <p:cNvPr id="33" name="Rounded Rectangle 32">
+            <a:extLst>
+              <a:ext uri="{FF2B5EF4-FFF2-40B4-BE49-F238E27FC236}">
+                <a16:creationId xmlns:a16="http://schemas.microsoft.com/office/drawing/2014/main" id="{EEBAE474-9FED-4BF3-A4E5-AFD77D68A122}"/>
+              </a:ext>
+            </a:extLst>
+          </p:cNvPr>
+          <p:cNvSpPr>
+            <a:spLocks noGrp="1"/>
+          </p:cNvSpPr>
+          <p:nvPr/>
+        </p:nvSpPr>
+        <p:spPr>
+          <a:xfrm>
+            <a:off x="4267200" y="3981450"/>
+            <a:ext cx="6972300" cy="2152650"/>
+          </a:xfrm>
+          <a:prstGeom prst="roundRect">
+            <a:avLst>
+              <a:gd name="adj" fmla="val 2655"/>
+            </a:avLst>
+          </a:prstGeom>
+          <a:solidFill>
+            <a:srgbClr val="FFFFFF"/>
+          </a:solidFill>
+          <a:ln w="9525">
+            <a:solidFill>
+              <a:srgbClr val="D6E3DF"/>
+            </a:solidFill>
+            <a:prstDash val="solid"/>
+          </a:ln>
+        </p:spPr>
+        <p:txBody>
+          <a:bodyPr/>
+          <a:lstStyle/>
+          <a:p>
+            <a:endParaRPr lang="en-US"/>
+          </a:p>
+        </p:txBody>
+      </p:sp>
+      <p:pic>
+        <p:nvPicPr>
+          <p:cNvPr id="67" name="Picture 66"/>
+          <p:cNvPicPr>
+            <a:picLocks noChangeAspect="1"/>
+          </p:cNvPicPr>
+          <p:nvPr/>
+        </p:nvPicPr>
+        <p:blipFill>
+          <a:blip r:embed="rId3"/>
+          <a:srcRect t="32652" b="32652"/>
+          <a:stretch>
+            <a:fillRect/>
+          </a:stretch>
+        </p:blipFill>
+        <p:spPr>
+          <a:xfrm>
+            <a:off x="4286250" y="4000500"/>
+            <a:ext cx="6934200" cy="2114550"/>
+          </a:xfrm>
+          <a:prstGeom prst="roundRect">
+            <a:avLst>
+              <a:gd name="adj" fmla="val 2703"/>
+            </a:avLst>
+          </a:prstGeom>
+        </p:spPr>
+      </p:pic>
     </p:spTree>
     <p:extLst>
       <p:ext uri="{BB962C8B-B14F-4D97-AF65-F5344CB8AC3E}">
@@ -7579,6 +10334,14 @@
 <file path=ppt/slides/slide7.xml><?xml version="1.0" encoding="utf-8"?>
 <p:sld xmlns:a="http://schemas.openxmlformats.org/drawingml/2006/main" xmlns:r="http://schemas.openxmlformats.org/officeDocument/2006/relationships" xmlns:p="http://schemas.openxmlformats.org/presentationml/2006/main">
   <p:cSld>
+    <p:bg>
+      <p:bgPr>
+        <a:solidFill>
+          <a:srgbClr val="F8FBFA"/>
+        </a:solidFill>
+        <a:effectLst/>
+      </p:bgPr>
+    </p:bg>
     <p:spTree>
       <p:nvGrpSpPr>
         <p:cNvPr id="1" name=""/>
@@ -7609,21 +10372,42 @@
             <p:ph type="title"/>
           </p:nvPr>
         </p:nvSpPr>
-        <p:spPr/>
-        <p:txBody>
-          <a:bodyPr/>
-          <a:lstStyle/>
-          <a:p>
-            <a:pPr>
-              <a:buNone/>
-              <a:defRPr sz="3200">
-                <a:solidFill>
-                  <a:srgbClr val="1F6FEB"/>
-                </a:solidFill>
+        <p:spPr>
+          <a:xfrm>
+            <a:off x="609600" y="419100"/>
+            <a:ext cx="10934700" cy="781050"/>
+          </a:xfrm>
+        </p:spPr>
+        <p:txBody>
+          <a:bodyPr wrap="square" lIns="0" tIns="0" rIns="0" bIns="0" anchor="ctr">
+            <a:normAutofit/>
+          </a:bodyPr>
+          <a:lstStyle/>
+          <a:p>
+            <a:pPr marL="0" indent="0" algn="l">
+              <a:spcAft>
+                <a:spcPts val="0"/>
+              </a:spcAft>
+              <a:buNone/>
+              <a:defRPr sz="3600" b="1">
+                <a:solidFill>
+                  <a:srgbClr val="132925"/>
+                </a:solidFill>
+                <a:latin typeface="Aptos Display"/>
+                <a:ea typeface="Aptos Display"/>
+                <a:cs typeface="Aptos Display"/>
               </a:defRPr>
             </a:pPr>
             <a:r>
-              <a:t>Durable Mission Control</a:t>
+              <a:rPr sz="3600" b="1" i="0">
+                <a:solidFill>
+                  <a:srgbClr val="132925"/>
+                </a:solidFill>
+                <a:latin typeface="Aptos Display"/>
+                <a:ea typeface="Aptos Display"/>
+                <a:cs typeface="Aptos Display"/>
+              </a:rPr>
+              <a:t>Every event survives before it appears</a:t>
             </a:r>
           </a:p>
         </p:txBody>
@@ -7644,60 +10428,1258 @@
             <p:ph idx="1"/>
           </p:nvPr>
         </p:nvSpPr>
-        <p:spPr/>
-        <p:txBody>
-          <a:bodyPr wrap="square"/>
-          <a:lstStyle/>
-          <a:p>
-            <a:pPr>
-              <a:buNone/>
-            </a:pPr>
-            <a:r>
-              <a:rPr sz="1800">
-                <a:solidFill>
-                  <a:srgbClr val="222222"/>
-                </a:solidFill>
-              </a:rPr>
-              <a:t>A newly built durable-orchestration layer: SQLite-backed run and event repository, resumable Orchestrator.run(recovery=...) API, and a rebuilt Mission Control dashboard.</a:t>
-            </a:r>
-          </a:p>
-          <a:p>
-            <a:pPr>
-              <a:buNone/>
-            </a:pPr>
-            <a:r>
-              <a:rPr sz="1800">
-                <a:solidFill>
-                  <a:srgbClr val="222222"/>
-                </a:solidFill>
-              </a:rPr>
-              <a:t>Every completed wave persists a typed checkpoint (blackboard state + agent results) before moving on.</a:t>
-            </a:r>
-          </a:p>
-          <a:p>
-            <a:pPr>
-              <a:buNone/>
-            </a:pPr>
-            <a:r>
-              <a:rPr sz="1800">
-                <a:solidFill>
-                  <a:srgbClr val="222222"/>
-                </a:solidFill>
-              </a:rPr>
-              <a:t>A run that crashes mid-way resumes from its last wave checkpoint instead of restarting from agent one.</a:t>
-            </a:r>
-          </a:p>
-          <a:p>
-            <a:pPr>
-              <a:buNone/>
-            </a:pPr>
-            <a:r>
-              <a:rPr sz="1800">
-                <a:solidFill>
-                  <a:srgbClr val="222222"/>
-                </a:solidFill>
-              </a:rPr>
-              <a:t>The dashboard subscribes to a replayable SSE stream — refreshing or reconnecting resumes the same run rather than starting a new one.</a:t>
+        <p:spPr>
+          <a:xfrm>
+            <a:off x="685800" y="1504950"/>
+            <a:ext cx="3105150" cy="4724400"/>
+          </a:xfrm>
+        </p:spPr>
+        <p:txBody>
+          <a:bodyPr wrap="square" lIns="0" tIns="0" rIns="76200" bIns="0" anchor="t">
+            <a:normAutofit/>
+          </a:bodyPr>
+          <a:lstStyle/>
+          <a:p>
+            <a:pPr marL="0" indent="0" algn="l">
+              <a:spcAft>
+                <a:spcPts val="26"/>
+              </a:spcAft>
+              <a:buNone/>
+              <a:defRPr sz="1350" b="0">
+                <a:solidFill>
+                  <a:srgbClr val="132925"/>
+                </a:solidFill>
+                <a:latin typeface="Aptos"/>
+                <a:ea typeface="Aptos"/>
+                <a:cs typeface="Aptos"/>
+              </a:defRPr>
+            </a:pPr>
+            <a:r>
+              <a:rPr sz="1725" b="1" i="0">
+                <a:solidFill>
+                  <a:srgbClr val="132925"/>
+                </a:solidFill>
+                <a:latin typeface="Aptos"/>
+                <a:ea typeface="Aptos"/>
+                <a:cs typeface="Aptos"/>
+              </a:rPr>
+              <a:t>Durability is split by responsibility, not hidden in one database box.</a:t>
+            </a:r>
+          </a:p>
+          <a:p>
+            <a:pPr marL="0" indent="0" algn="l">
+              <a:spcAft>
+                <a:spcPts val="15"/>
+              </a:spcAft>
+              <a:buNone/>
+              <a:defRPr sz="1350" b="0">
+                <a:solidFill>
+                  <a:srgbClr val="132925"/>
+                </a:solidFill>
+                <a:latin typeface="Aptos"/>
+                <a:ea typeface="Aptos"/>
+                <a:cs typeface="Aptos"/>
+              </a:defRPr>
+            </a:pPr>
+            <a:r>
+              <a:rPr sz="1050" b="1" i="0">
+                <a:solidFill>
+                  <a:srgbClr val="087C72"/>
+                </a:solidFill>
+                <a:latin typeface="Aptos"/>
+                <a:ea typeface="Aptos"/>
+                <a:cs typeface="Aptos"/>
+              </a:rPr>
+              <a:t>IDEMPOTENT</a:t>
+            </a:r>
+            <a:r>
+              <a:rPr sz="1350" b="0" i="0">
+                <a:solidFill>
+                  <a:srgbClr val="132925"/>
+                </a:solidFill>
+                <a:latin typeface="Aptos"/>
+                <a:ea typeface="Aptos"/>
+                <a:cs typeface="Aptos"/>
+              </a:rPr>
+              <a:t>  Request UUIDs prevent duplicate runs.</a:t>
+            </a:r>
+          </a:p>
+          <a:p>
+            <a:pPr marL="0" indent="0" algn="l">
+              <a:spcAft>
+                <a:spcPts val="15"/>
+              </a:spcAft>
+              <a:buNone/>
+              <a:defRPr sz="1350" b="0">
+                <a:solidFill>
+                  <a:srgbClr val="132925"/>
+                </a:solidFill>
+                <a:latin typeface="Aptos"/>
+                <a:ea typeface="Aptos"/>
+                <a:cs typeface="Aptos"/>
+              </a:defRPr>
+            </a:pPr>
+            <a:r>
+              <a:rPr sz="1050" b="1" i="0">
+                <a:solidFill>
+                  <a:srgbClr val="087C72"/>
+                </a:solidFill>
+                <a:latin typeface="Aptos"/>
+                <a:ea typeface="Aptos"/>
+                <a:cs typeface="Aptos"/>
+              </a:rPr>
+              <a:t>ORDERED</a:t>
+            </a:r>
+            <a:r>
+              <a:rPr sz="1350" b="0" i="0">
+                <a:solidFill>
+                  <a:srgbClr val="132925"/>
+                </a:solidFill>
+                <a:latin typeface="Aptos"/>
+                <a:ea typeface="Aptos"/>
+                <a:cs typeface="Aptos"/>
+              </a:rPr>
+              <a:t>  Events persist before SSE publishes.</a:t>
+            </a:r>
+          </a:p>
+          <a:p>
+            <a:pPr marL="0" indent="0" algn="l">
+              <a:spcAft>
+                <a:spcPts val="15"/>
+              </a:spcAft>
+              <a:buNone/>
+              <a:defRPr sz="1350" b="0">
+                <a:solidFill>
+                  <a:srgbClr val="132925"/>
+                </a:solidFill>
+                <a:latin typeface="Aptos"/>
+                <a:ea typeface="Aptos"/>
+                <a:cs typeface="Aptos"/>
+              </a:defRPr>
+            </a:pPr>
+            <a:r>
+              <a:rPr sz="1050" b="1" i="0">
+                <a:solidFill>
+                  <a:srgbClr val="087C72"/>
+                </a:solidFill>
+                <a:latin typeface="Aptos"/>
+                <a:ea typeface="Aptos"/>
+                <a:cs typeface="Aptos"/>
+              </a:rPr>
+              <a:t>REPLAYABLE</a:t>
+            </a:r>
+            <a:r>
+              <a:rPr sz="1350" b="0" i="0">
+                <a:solidFill>
+                  <a:srgbClr val="132925"/>
+                </a:solidFill>
+                <a:latin typeface="Aptos"/>
+                <a:ea typeface="Aptos"/>
+                <a:cs typeface="Aptos"/>
+              </a:rPr>
+              <a:t>  Refresh resumes ordered history.</a:t>
+            </a:r>
+          </a:p>
+          <a:p>
+            <a:pPr marL="0" indent="0" algn="l">
+              <a:spcAft>
+                <a:spcPts val="15"/>
+              </a:spcAft>
+              <a:buNone/>
+              <a:defRPr sz="1350" b="0">
+                <a:solidFill>
+                  <a:srgbClr val="132925"/>
+                </a:solidFill>
+                <a:latin typeface="Aptos"/>
+                <a:ea typeface="Aptos"/>
+                <a:cs typeface="Aptos"/>
+              </a:defRPr>
+            </a:pPr>
+            <a:r>
+              <a:rPr sz="1050" b="1" i="0">
+                <a:solidFill>
+                  <a:srgbClr val="087C72"/>
+                </a:solidFill>
+                <a:latin typeface="Aptos"/>
+                <a:ea typeface="Aptos"/>
+                <a:cs typeface="Aptos"/>
+              </a:rPr>
+              <a:t>RESUMABLE</a:t>
+            </a:r>
+            <a:r>
+              <a:rPr sz="1350" b="0" i="0">
+                <a:solidFill>
+                  <a:srgbClr val="132925"/>
+                </a:solidFill>
+                <a:latin typeface="Aptos"/>
+                <a:ea typeface="Aptos"/>
+                <a:cs typeface="Aptos"/>
+              </a:rPr>
+              <a:t>  Typed wave checkpoints restart safely.</a:t>
+            </a:r>
+          </a:p>
+          <a:p>
+            <a:pPr marL="0" indent="0" algn="l">
+              <a:spcAft>
+                <a:spcPts val="15"/>
+              </a:spcAft>
+              <a:buNone/>
+              <a:defRPr sz="1350" b="0">
+                <a:solidFill>
+                  <a:srgbClr val="132925"/>
+                </a:solidFill>
+                <a:latin typeface="Aptos"/>
+                <a:ea typeface="Aptos"/>
+                <a:cs typeface="Aptos"/>
+              </a:defRPr>
+            </a:pPr>
+            <a:r>
+              <a:rPr sz="1050" b="1" i="0">
+                <a:solidFill>
+                  <a:srgbClr val="087C72"/>
+                </a:solidFill>
+                <a:latin typeface="Aptos"/>
+                <a:ea typeface="Aptos"/>
+                <a:cs typeface="Aptos"/>
+              </a:rPr>
+              <a:t>RECOVERED</a:t>
+            </a:r>
+            <a:r>
+              <a:rPr sz="1350" b="0" i="0">
+                <a:solidFill>
+                  <a:srgbClr val="132925"/>
+                </a:solidFill>
+                <a:latin typeface="Aptos"/>
+                <a:ea typeface="Aptos"/>
+                <a:cs typeface="Aptos"/>
+              </a:rPr>
+              <a:t>  Startup repairs non-terminal work.</a:t>
+            </a:r>
+          </a:p>
+        </p:txBody>
+      </p:sp>
+      <p:sp>
+        <p:nvSpPr>
+          <p:cNvPr id="4" name="Rounded Rectangle 3">
+            <a:extLst>
+              <a:ext uri="{FF2B5EF4-FFF2-40B4-BE49-F238E27FC236}">
+                <a16:creationId xmlns:a16="http://schemas.microsoft.com/office/drawing/2014/main" id="{926D0B11-8DB3-41CB-9F56-FD61FE522E43}"/>
+              </a:ext>
+            </a:extLst>
+          </p:cNvPr>
+          <p:cNvSpPr>
+            <a:spLocks noGrp="1"/>
+          </p:cNvSpPr>
+          <p:nvPr/>
+        </p:nvSpPr>
+        <p:spPr>
+          <a:xfrm>
+            <a:off x="4400550" y="1809750"/>
+            <a:ext cx="1257300" cy="552450"/>
+          </a:xfrm>
+          <a:prstGeom prst="roundRect">
+            <a:avLst>
+              <a:gd name="adj" fmla="val 10345"/>
+            </a:avLst>
+          </a:prstGeom>
+          <a:solidFill>
+            <a:srgbClr val="FFFFFF"/>
+          </a:solidFill>
+          <a:ln w="9525">
+            <a:solidFill>
+              <a:srgbClr val="087C72"/>
+            </a:solidFill>
+            <a:prstDash val="solid"/>
+          </a:ln>
+        </p:spPr>
+        <p:txBody>
+          <a:bodyPr wrap="square" lIns="57150" tIns="57150" rIns="57150" bIns="57150" anchor="ctr">
+            <a:normAutofit/>
+          </a:bodyPr>
+          <a:lstStyle/>
+          <a:p>
+            <a:pPr marL="0" indent="0" algn="ctr">
+              <a:spcAft>
+                <a:spcPts val="0"/>
+              </a:spcAft>
+              <a:buNone/>
+              <a:defRPr sz="1200" b="1">
+                <a:solidFill>
+                  <a:srgbClr val="132925"/>
+                </a:solidFill>
+                <a:latin typeface="Aptos"/>
+                <a:ea typeface="Aptos"/>
+                <a:cs typeface="Aptos"/>
+              </a:defRPr>
+            </a:pPr>
+            <a:r>
+              <a:rPr sz="1200" b="1" i="0">
+                <a:solidFill>
+                  <a:srgbClr val="132925"/>
+                </a:solidFill>
+                <a:latin typeface="Aptos"/>
+                <a:ea typeface="Aptos"/>
+                <a:cs typeface="Aptos"/>
+              </a:rPr>
+              <a:t>Intake API</a:t>
+            </a:r>
+          </a:p>
+        </p:txBody>
+      </p:sp>
+      <p:sp>
+        <p:nvSpPr>
+          <p:cNvPr id="5" name="Rounded Rectangle 4">
+            <a:extLst>
+              <a:ext uri="{FF2B5EF4-FFF2-40B4-BE49-F238E27FC236}">
+                <a16:creationId xmlns:a16="http://schemas.microsoft.com/office/drawing/2014/main" id="{75D6BDBC-8361-49D4-86B4-A907B184369B}"/>
+              </a:ext>
+            </a:extLst>
+          </p:cNvPr>
+          <p:cNvSpPr>
+            <a:spLocks noGrp="1"/>
+          </p:cNvSpPr>
+          <p:nvPr/>
+        </p:nvSpPr>
+        <p:spPr>
+          <a:xfrm>
+            <a:off x="6210300" y="1733550"/>
+            <a:ext cx="1352550" cy="704850"/>
+          </a:xfrm>
+          <a:prstGeom prst="roundRect">
+            <a:avLst>
+              <a:gd name="adj" fmla="val 8108"/>
+            </a:avLst>
+          </a:prstGeom>
+          <a:solidFill>
+            <a:srgbClr val="0B3D38"/>
+          </a:solidFill>
+          <a:ln w="9525">
+            <a:solidFill>
+              <a:srgbClr val="0B3D38"/>
+            </a:solidFill>
+            <a:prstDash val="solid"/>
+          </a:ln>
+        </p:spPr>
+        <p:txBody>
+          <a:bodyPr wrap="square" lIns="57150" tIns="57150" rIns="57150" bIns="57150" anchor="ctr">
+            <a:normAutofit/>
+          </a:bodyPr>
+          <a:lstStyle/>
+          <a:p>
+            <a:pPr marL="0" indent="0" algn="ctr">
+              <a:spcAft>
+                <a:spcPts val="0"/>
+              </a:spcAft>
+              <a:buNone/>
+              <a:defRPr sz="1200" b="1">
+                <a:solidFill>
+                  <a:srgbClr val="FFFFFF"/>
+                </a:solidFill>
+                <a:latin typeface="Aptos"/>
+                <a:ea typeface="Aptos"/>
+                <a:cs typeface="Aptos"/>
+              </a:defRPr>
+            </a:pPr>
+            <a:r>
+              <a:rPr sz="1200" b="1" i="0">
+                <a:solidFill>
+                  <a:srgbClr val="FFFFFF"/>
+                </a:solidFill>
+                <a:latin typeface="Aptos"/>
+                <a:ea typeface="Aptos"/>
+                <a:cs typeface="Aptos"/>
+              </a:rPr>
+              <a:t>Agent
+Orchestrator</a:t>
+            </a:r>
+          </a:p>
+        </p:txBody>
+      </p:sp>
+      <p:sp>
+        <p:nvSpPr>
+          <p:cNvPr id="6" name="Rounded Rectangle 5">
+            <a:extLst>
+              <a:ext uri="{FF2B5EF4-FFF2-40B4-BE49-F238E27FC236}">
+                <a16:creationId xmlns:a16="http://schemas.microsoft.com/office/drawing/2014/main" id="{2DC5CCE1-177D-45E5-BA48-28C71FFB0248}"/>
+              </a:ext>
+            </a:extLst>
+          </p:cNvPr>
+          <p:cNvSpPr>
+            <a:spLocks noGrp="1"/>
+          </p:cNvSpPr>
+          <p:nvPr/>
+        </p:nvSpPr>
+        <p:spPr>
+          <a:xfrm>
+            <a:off x="8115300" y="1733550"/>
+            <a:ext cx="1352550" cy="704850"/>
+          </a:xfrm>
+          <a:prstGeom prst="roundRect">
+            <a:avLst>
+              <a:gd name="adj" fmla="val 8108"/>
+            </a:avLst>
+          </a:prstGeom>
+          <a:solidFill>
+            <a:srgbClr val="FFFFFF"/>
+          </a:solidFill>
+          <a:ln w="9525">
+            <a:solidFill>
+              <a:srgbClr val="087C72"/>
+            </a:solidFill>
+            <a:prstDash val="solid"/>
+          </a:ln>
+        </p:spPr>
+        <p:txBody>
+          <a:bodyPr wrap="square" lIns="57150" tIns="57150" rIns="57150" bIns="57150" anchor="ctr">
+            <a:normAutofit/>
+          </a:bodyPr>
+          <a:lstStyle/>
+          <a:p>
+            <a:pPr marL="0" indent="0" algn="ctr">
+              <a:spcAft>
+                <a:spcPts val="0"/>
+              </a:spcAft>
+              <a:buNone/>
+              <a:defRPr sz="1200" b="1">
+                <a:solidFill>
+                  <a:srgbClr val="132925"/>
+                </a:solidFill>
+                <a:latin typeface="Aptos"/>
+                <a:ea typeface="Aptos"/>
+                <a:cs typeface="Aptos"/>
+              </a:defRPr>
+            </a:pPr>
+            <a:r>
+              <a:rPr sz="1200" b="1" i="0">
+                <a:solidFill>
+                  <a:srgbClr val="132925"/>
+                </a:solidFill>
+                <a:latin typeface="Aptos"/>
+                <a:ea typeface="Aptos"/>
+                <a:cs typeface="Aptos"/>
+              </a:rPr>
+              <a:t>Ordered
+SSE stream</a:t>
+            </a:r>
+          </a:p>
+        </p:txBody>
+      </p:sp>
+      <p:sp>
+        <p:nvSpPr>
+          <p:cNvPr id="7" name="Rounded Rectangle 6">
+            <a:extLst>
+              <a:ext uri="{FF2B5EF4-FFF2-40B4-BE49-F238E27FC236}">
+                <a16:creationId xmlns:a16="http://schemas.microsoft.com/office/drawing/2014/main" id="{BF40EC12-658B-4625-9587-CF4334D7441B}"/>
+              </a:ext>
+            </a:extLst>
+          </p:cNvPr>
+          <p:cNvSpPr>
+            <a:spLocks noGrp="1"/>
+          </p:cNvSpPr>
+          <p:nvPr/>
+        </p:nvSpPr>
+        <p:spPr>
+          <a:xfrm>
+            <a:off x="10020300" y="1733550"/>
+            <a:ext cx="1352550" cy="704850"/>
+          </a:xfrm>
+          <a:prstGeom prst="roundRect">
+            <a:avLst>
+              <a:gd name="adj" fmla="val 8108"/>
+            </a:avLst>
+          </a:prstGeom>
+          <a:solidFill>
+            <a:srgbClr val="FFFFFF"/>
+          </a:solidFill>
+          <a:ln w="9525">
+            <a:solidFill>
+              <a:srgbClr val="087C72"/>
+            </a:solidFill>
+            <a:prstDash val="solid"/>
+          </a:ln>
+        </p:spPr>
+        <p:txBody>
+          <a:bodyPr wrap="square" lIns="57150" tIns="57150" rIns="57150" bIns="57150" anchor="ctr">
+            <a:normAutofit/>
+          </a:bodyPr>
+          <a:lstStyle/>
+          <a:p>
+            <a:pPr marL="0" indent="0" algn="ctr">
+              <a:spcAft>
+                <a:spcPts val="0"/>
+              </a:spcAft>
+              <a:buNone/>
+              <a:defRPr sz="1200" b="1">
+                <a:solidFill>
+                  <a:srgbClr val="132925"/>
+                </a:solidFill>
+                <a:latin typeface="Aptos"/>
+                <a:ea typeface="Aptos"/>
+                <a:cs typeface="Aptos"/>
+              </a:defRPr>
+            </a:pPr>
+            <a:r>
+              <a:rPr sz="1200" b="1" i="0">
+                <a:solidFill>
+                  <a:srgbClr val="132925"/>
+                </a:solidFill>
+                <a:latin typeface="Aptos"/>
+                <a:ea typeface="Aptos"/>
+                <a:cs typeface="Aptos"/>
+              </a:rPr>
+              <a:t>Mission
+Control</a:t>
+            </a:r>
+          </a:p>
+        </p:txBody>
+      </p:sp>
+      <p:cxnSp>
+        <p:nvCxnSpPr>
+          <p:cNvPr id="28" name="Straight Arrow Connector 27"/>
+          <p:cNvCxnSpPr>
+            <a:stCxn id="4" idx="3"/>
+            <a:endCxn id="5" idx="1"/>
+          </p:cNvCxnSpPr>
+          <p:nvPr/>
+        </p:nvCxnSpPr>
+        <p:spPr>
+          <a:xfrm>
+            <a:off x="5657850" y="2085975"/>
+            <a:ext cx="552450" cy="0"/>
+          </a:xfrm>
+          <a:prstGeom prst="straightConnector1">
+            <a:avLst/>
+          </a:prstGeom>
+          <a:ln w="19050">
+            <a:solidFill>
+              <a:srgbClr val="D6E3DF"/>
+            </a:solidFill>
+            <a:prstDash val="solid"/>
+            <a:headEnd type="none" w="med" len="med"/>
+            <a:tailEnd type="arrow" w="sm" len="sm"/>
+          </a:ln>
+        </p:spPr>
+      </p:cxnSp>
+      <p:cxnSp>
+        <p:nvCxnSpPr>
+          <p:cNvPr id="29" name="Straight Arrow Connector 28"/>
+          <p:cNvCxnSpPr>
+            <a:stCxn id="5" idx="3"/>
+            <a:endCxn id="6" idx="1"/>
+          </p:cNvCxnSpPr>
+          <p:nvPr/>
+        </p:nvCxnSpPr>
+        <p:spPr>
+          <a:xfrm>
+            <a:off x="7562850" y="2085975"/>
+            <a:ext cx="552450" cy="0"/>
+          </a:xfrm>
+          <a:prstGeom prst="straightConnector1">
+            <a:avLst/>
+          </a:prstGeom>
+          <a:ln w="19050">
+            <a:solidFill>
+              <a:srgbClr val="D6E3DF"/>
+            </a:solidFill>
+            <a:prstDash val="solid"/>
+            <a:headEnd type="none" w="med" len="med"/>
+            <a:tailEnd type="arrow" w="sm" len="sm"/>
+          </a:ln>
+        </p:spPr>
+      </p:cxnSp>
+      <p:cxnSp>
+        <p:nvCxnSpPr>
+          <p:cNvPr id="30" name="Straight Arrow Connector 29"/>
+          <p:cNvCxnSpPr>
+            <a:stCxn id="6" idx="3"/>
+            <a:endCxn id="7" idx="1"/>
+          </p:cNvCxnSpPr>
+          <p:nvPr/>
+        </p:nvCxnSpPr>
+        <p:spPr>
+          <a:xfrm>
+            <a:off x="9467850" y="2085975"/>
+            <a:ext cx="552450" cy="0"/>
+          </a:xfrm>
+          <a:prstGeom prst="straightConnector1">
+            <a:avLst/>
+          </a:prstGeom>
+          <a:ln w="19050">
+            <a:solidFill>
+              <a:srgbClr val="D6E3DF"/>
+            </a:solidFill>
+            <a:prstDash val="solid"/>
+            <a:headEnd type="none" w="med" len="med"/>
+            <a:tailEnd type="arrow" w="sm" len="sm"/>
+          </a:ln>
+        </p:spPr>
+      </p:cxnSp>
+      <p:sp>
+        <p:nvSpPr>
+          <p:cNvPr id="11" name="Rectangle 10">
+            <a:extLst>
+              <a:ext uri="{FF2B5EF4-FFF2-40B4-BE49-F238E27FC236}">
+                <a16:creationId xmlns:a16="http://schemas.microsoft.com/office/drawing/2014/main" id="{A70AC137-056C-4AF0-9D66-21E634B4884F}"/>
+              </a:ext>
+            </a:extLst>
+          </p:cNvPr>
+          <p:cNvSpPr>
+            <a:spLocks noGrp="1"/>
+          </p:cNvSpPr>
+          <p:nvPr/>
+        </p:nvSpPr>
+        <p:spPr>
+          <a:xfrm>
+            <a:off x="7715250" y="1352550"/>
+            <a:ext cx="2152650" cy="247650"/>
+          </a:xfrm>
+          <a:prstGeom prst="rect">
+            <a:avLst/>
+          </a:prstGeom>
+          <a:noFill/>
+          <a:ln w="0">
+            <a:noFill/>
+            <a:prstDash val="solid"/>
+          </a:ln>
+        </p:spPr>
+        <p:txBody>
+          <a:bodyPr wrap="square" lIns="0" tIns="0" rIns="0" bIns="0" anchor="ctr">
+            <a:normAutofit/>
+          </a:bodyPr>
+          <a:lstStyle/>
+          <a:p>
+            <a:pPr marL="0" indent="0" algn="ctr">
+              <a:spcAft>
+                <a:spcPts val="0"/>
+              </a:spcAft>
+              <a:buNone/>
+              <a:defRPr sz="975" b="1">
+                <a:solidFill>
+                  <a:srgbClr val="087C72"/>
+                </a:solidFill>
+                <a:latin typeface="Aptos"/>
+                <a:ea typeface="Aptos"/>
+                <a:cs typeface="Aptos"/>
+              </a:defRPr>
+            </a:pPr>
+            <a:r>
+              <a:rPr sz="975" b="1" i="0">
+                <a:solidFill>
+                  <a:srgbClr val="087C72"/>
+                </a:solidFill>
+                <a:latin typeface="Aptos"/>
+                <a:ea typeface="Aptos"/>
+                <a:cs typeface="Aptos"/>
+              </a:rPr>
+              <a:t>PERSIST BEFORE PUBLISH</a:t>
+            </a:r>
+          </a:p>
+        </p:txBody>
+      </p:sp>
+      <p:sp>
+        <p:nvSpPr>
+          <p:cNvPr id="12" name="Rounded Rectangle 11">
+            <a:extLst>
+              <a:ext uri="{FF2B5EF4-FFF2-40B4-BE49-F238E27FC236}">
+                <a16:creationId xmlns:a16="http://schemas.microsoft.com/office/drawing/2014/main" id="{77156681-EB9F-49FE-9F27-4CAC03995782}"/>
+              </a:ext>
+            </a:extLst>
+          </p:cNvPr>
+          <p:cNvSpPr>
+            <a:spLocks noGrp="1"/>
+          </p:cNvSpPr>
+          <p:nvPr/>
+        </p:nvSpPr>
+        <p:spPr>
+          <a:xfrm>
+            <a:off x="4324350" y="3600450"/>
+            <a:ext cx="1600200" cy="1123950"/>
+          </a:xfrm>
+          <a:prstGeom prst="roundRect">
+            <a:avLst>
+              <a:gd name="adj" fmla="val 5085"/>
+            </a:avLst>
+          </a:prstGeom>
+          <a:solidFill>
+            <a:srgbClr val="FFFFFF"/>
+          </a:solidFill>
+          <a:ln w="19050">
+            <a:solidFill>
+              <a:srgbClr val="087C72"/>
+            </a:solidFill>
+            <a:prstDash val="solid"/>
+          </a:ln>
+        </p:spPr>
+        <p:txBody>
+          <a:bodyPr wrap="square" lIns="95250" tIns="95250" rIns="95250" bIns="95250" anchor="ctr">
+            <a:normAutofit/>
+          </a:bodyPr>
+          <a:lstStyle/>
+          <a:p>
+            <a:pPr marL="0" indent="0" algn="ctr">
+              <a:spcAft>
+                <a:spcPts val="10"/>
+              </a:spcAft>
+              <a:buNone/>
+              <a:defRPr sz="1125" b="0">
+                <a:solidFill>
+                  <a:srgbClr val="132925"/>
+                </a:solidFill>
+                <a:latin typeface="Aptos"/>
+                <a:ea typeface="Aptos"/>
+                <a:cs typeface="Aptos"/>
+              </a:defRPr>
+            </a:pPr>
+            <a:r>
+              <a:rPr sz="1350" b="1" i="0">
+                <a:solidFill>
+                  <a:srgbClr val="132925"/>
+                </a:solidFill>
+                <a:latin typeface="Aptos"/>
+                <a:ea typeface="Aptos"/>
+                <a:cs typeface="Aptos"/>
+              </a:rPr>
+              <a:t>Intake store</a:t>
+            </a:r>
+          </a:p>
+          <a:p>
+            <a:pPr marL="0" indent="0" algn="ctr">
+              <a:spcAft>
+                <a:spcPts val="0"/>
+              </a:spcAft>
+              <a:buNone/>
+              <a:defRPr sz="1125" b="0">
+                <a:solidFill>
+                  <a:srgbClr val="132925"/>
+                </a:solidFill>
+                <a:latin typeface="Aptos"/>
+                <a:ea typeface="Aptos"/>
+                <a:cs typeface="Aptos"/>
+              </a:defRPr>
+            </a:pPr>
+            <a:r>
+              <a:rPr sz="1125" b="0" i="0">
+                <a:solidFill>
+                  <a:srgbClr val="5B6F6A"/>
+                </a:solidFill>
+                <a:latin typeface="Aptos"/>
+                <a:ea typeface="Aptos"/>
+                <a:cs typeface="Aptos"/>
+              </a:rPr>
+              <a:t>Lifecycle + confirmed snapshots</a:t>
+            </a:r>
+          </a:p>
+        </p:txBody>
+      </p:sp>
+      <p:sp>
+        <p:nvSpPr>
+          <p:cNvPr id="13" name="Rounded Rectangle 12">
+            <a:extLst>
+              <a:ext uri="{FF2B5EF4-FFF2-40B4-BE49-F238E27FC236}">
+                <a16:creationId xmlns:a16="http://schemas.microsoft.com/office/drawing/2014/main" id="{074178AE-4EDB-4CCF-B658-3DEA4F6C394B}"/>
+              </a:ext>
+            </a:extLst>
+          </p:cNvPr>
+          <p:cNvSpPr>
+            <a:spLocks noGrp="1"/>
+          </p:cNvSpPr>
+          <p:nvPr/>
+        </p:nvSpPr>
+        <p:spPr>
+          <a:xfrm>
+            <a:off x="6096000" y="3600450"/>
+            <a:ext cx="1600200" cy="1123950"/>
+          </a:xfrm>
+          <a:prstGeom prst="roundRect">
+            <a:avLst>
+              <a:gd name="adj" fmla="val 5085"/>
+            </a:avLst>
+          </a:prstGeom>
+          <a:solidFill>
+            <a:srgbClr val="FFFFFF"/>
+          </a:solidFill>
+          <a:ln w="19050">
+            <a:solidFill>
+              <a:srgbClr val="C47A00"/>
+            </a:solidFill>
+            <a:prstDash val="solid"/>
+          </a:ln>
+        </p:spPr>
+        <p:txBody>
+          <a:bodyPr wrap="square" lIns="95250" tIns="95250" rIns="95250" bIns="95250" anchor="ctr">
+            <a:normAutofit/>
+          </a:bodyPr>
+          <a:lstStyle/>
+          <a:p>
+            <a:pPr marL="0" indent="0" algn="ctr">
+              <a:spcAft>
+                <a:spcPts val="10"/>
+              </a:spcAft>
+              <a:buNone/>
+              <a:defRPr sz="1125" b="0">
+                <a:solidFill>
+                  <a:srgbClr val="132925"/>
+                </a:solidFill>
+                <a:latin typeface="Aptos"/>
+                <a:ea typeface="Aptos"/>
+                <a:cs typeface="Aptos"/>
+              </a:defRPr>
+            </a:pPr>
+            <a:r>
+              <a:rPr sz="1350" b="1" i="0">
+                <a:solidFill>
+                  <a:srgbClr val="132925"/>
+                </a:solidFill>
+                <a:latin typeface="Aptos"/>
+                <a:ea typeface="Aptos"/>
+                <a:cs typeface="Aptos"/>
+              </a:rPr>
+              <a:t>Artifact files</a:t>
+            </a:r>
+          </a:p>
+          <a:p>
+            <a:pPr marL="0" indent="0" algn="ctr">
+              <a:spcAft>
+                <a:spcPts val="0"/>
+              </a:spcAft>
+              <a:buNone/>
+              <a:defRPr sz="1125" b="0">
+                <a:solidFill>
+                  <a:srgbClr val="132925"/>
+                </a:solidFill>
+                <a:latin typeface="Aptos"/>
+                <a:ea typeface="Aptos"/>
+                <a:cs typeface="Aptos"/>
+              </a:defRPr>
+            </a:pPr>
+            <a:r>
+              <a:rPr sz="1125" b="0" i="0">
+                <a:solidFill>
+                  <a:srgbClr val="5B6F6A"/>
+                </a:solidFill>
+                <a:latin typeface="Aptos"/>
+                <a:ea typeface="Aptos"/>
+                <a:cs typeface="Aptos"/>
+              </a:rPr>
+              <a:t>Immutable uploaded evidence</a:t>
+            </a:r>
+          </a:p>
+        </p:txBody>
+      </p:sp>
+      <p:sp>
+        <p:nvSpPr>
+          <p:cNvPr id="14" name="Rounded Rectangle 13">
+            <a:extLst>
+              <a:ext uri="{FF2B5EF4-FFF2-40B4-BE49-F238E27FC236}">
+                <a16:creationId xmlns:a16="http://schemas.microsoft.com/office/drawing/2014/main" id="{03FA926D-8DF7-4C91-894D-6ACB2275098C}"/>
+              </a:ext>
+            </a:extLst>
+          </p:cNvPr>
+          <p:cNvSpPr>
+            <a:spLocks noGrp="1"/>
+          </p:cNvSpPr>
+          <p:nvPr/>
+        </p:nvSpPr>
+        <p:spPr>
+          <a:xfrm>
+            <a:off x="7867650" y="3600450"/>
+            <a:ext cx="1600200" cy="1123950"/>
+          </a:xfrm>
+          <a:prstGeom prst="roundRect">
+            <a:avLst>
+              <a:gd name="adj" fmla="val 5085"/>
+            </a:avLst>
+          </a:prstGeom>
+          <a:solidFill>
+            <a:srgbClr val="FFFFFF"/>
+          </a:solidFill>
+          <a:ln w="19050">
+            <a:solidFill>
+              <a:srgbClr val="087C72"/>
+            </a:solidFill>
+            <a:prstDash val="solid"/>
+          </a:ln>
+        </p:spPr>
+        <p:txBody>
+          <a:bodyPr wrap="square" lIns="95250" tIns="95250" rIns="95250" bIns="95250" anchor="ctr">
+            <a:normAutofit/>
+          </a:bodyPr>
+          <a:lstStyle/>
+          <a:p>
+            <a:pPr marL="0" indent="0" algn="ctr">
+              <a:spcAft>
+                <a:spcPts val="10"/>
+              </a:spcAft>
+              <a:buNone/>
+              <a:defRPr sz="1125" b="0">
+                <a:solidFill>
+                  <a:srgbClr val="132925"/>
+                </a:solidFill>
+                <a:latin typeface="Aptos"/>
+                <a:ea typeface="Aptos"/>
+                <a:cs typeface="Aptos"/>
+              </a:defRPr>
+            </a:pPr>
+            <a:r>
+              <a:rPr sz="1350" b="1" i="0">
+                <a:solidFill>
+                  <a:srgbClr val="132925"/>
+                </a:solidFill>
+                <a:latin typeface="Aptos"/>
+                <a:ea typeface="Aptos"/>
+                <a:cs typeface="Aptos"/>
+              </a:rPr>
+              <a:t>Run + event store</a:t>
+            </a:r>
+          </a:p>
+          <a:p>
+            <a:pPr marL="0" indent="0" algn="ctr">
+              <a:spcAft>
+                <a:spcPts val="0"/>
+              </a:spcAft>
+              <a:buNone/>
+              <a:defRPr sz="1125" b="0">
+                <a:solidFill>
+                  <a:srgbClr val="132925"/>
+                </a:solidFill>
+                <a:latin typeface="Aptos"/>
+                <a:ea typeface="Aptos"/>
+                <a:cs typeface="Aptos"/>
+              </a:defRPr>
+            </a:pPr>
+            <a:r>
+              <a:rPr sz="1125" b="0" i="0">
+                <a:solidFill>
+                  <a:srgbClr val="5B6F6A"/>
+                </a:solidFill>
+                <a:latin typeface="Aptos"/>
+                <a:ea typeface="Aptos"/>
+                <a:cs typeface="Aptos"/>
+              </a:rPr>
+              <a:t>Events + wave checkpoints</a:t>
+            </a:r>
+          </a:p>
+        </p:txBody>
+      </p:sp>
+      <p:sp>
+        <p:nvSpPr>
+          <p:cNvPr id="15" name="Rounded Rectangle 14">
+            <a:extLst>
+              <a:ext uri="{FF2B5EF4-FFF2-40B4-BE49-F238E27FC236}">
+                <a16:creationId xmlns:a16="http://schemas.microsoft.com/office/drawing/2014/main" id="{08E7F768-7919-4B4D-BF81-AD98246DAF23}"/>
+              </a:ext>
+            </a:extLst>
+          </p:cNvPr>
+          <p:cNvSpPr>
+            <a:spLocks noGrp="1"/>
+          </p:cNvSpPr>
+          <p:nvPr/>
+        </p:nvSpPr>
+        <p:spPr>
+          <a:xfrm>
+            <a:off x="9639300" y="3600450"/>
+            <a:ext cx="1600200" cy="1123950"/>
+          </a:xfrm>
+          <a:prstGeom prst="roundRect">
+            <a:avLst>
+              <a:gd name="adj" fmla="val 5085"/>
+            </a:avLst>
+          </a:prstGeom>
+          <a:solidFill>
+            <a:srgbClr val="FFFFFF"/>
+          </a:solidFill>
+          <a:ln w="19050">
+            <a:solidFill>
+              <a:srgbClr val="B42318"/>
+            </a:solidFill>
+            <a:prstDash val="solid"/>
+          </a:ln>
+        </p:spPr>
+        <p:txBody>
+          <a:bodyPr wrap="square" lIns="95250" tIns="95250" rIns="95250" bIns="95250" anchor="ctr">
+            <a:normAutofit/>
+          </a:bodyPr>
+          <a:lstStyle/>
+          <a:p>
+            <a:pPr marL="0" indent="0" algn="ctr">
+              <a:spcAft>
+                <a:spcPts val="10"/>
+              </a:spcAft>
+              <a:buNone/>
+              <a:defRPr sz="1125" b="0">
+                <a:solidFill>
+                  <a:srgbClr val="132925"/>
+                </a:solidFill>
+                <a:latin typeface="Aptos"/>
+                <a:ea typeface="Aptos"/>
+                <a:cs typeface="Aptos"/>
+              </a:defRPr>
+            </a:pPr>
+            <a:r>
+              <a:rPr sz="1350" b="1" i="0">
+                <a:solidFill>
+                  <a:srgbClr val="132925"/>
+                </a:solidFill>
+                <a:latin typeface="Aptos"/>
+                <a:ea typeface="Aptos"/>
+                <a:cs typeface="Aptos"/>
+              </a:rPr>
+              <a:t>Memory + review</a:t>
+            </a:r>
+          </a:p>
+          <a:p>
+            <a:pPr marL="0" indent="0" algn="ctr">
+              <a:spcAft>
+                <a:spcPts val="0"/>
+              </a:spcAft>
+              <a:buNone/>
+              <a:defRPr sz="1125" b="0">
+                <a:solidFill>
+                  <a:srgbClr val="132925"/>
+                </a:solidFill>
+                <a:latin typeface="Aptos"/>
+                <a:ea typeface="Aptos"/>
+                <a:cs typeface="Aptos"/>
+              </a:defRPr>
+            </a:pPr>
+            <a:r>
+              <a:rPr sz="1125" b="0" i="0">
+                <a:solidFill>
+                  <a:srgbClr val="5B6F6A"/>
+                </a:solidFill>
+                <a:latin typeface="Aptos"/>
+                <a:ea typeface="Aptos"/>
+                <a:cs typeface="Aptos"/>
+              </a:rPr>
+              <a:t>Decision and reviewer ledgers</a:t>
+            </a:r>
+          </a:p>
+        </p:txBody>
+      </p:sp>
+      <p:cxnSp>
+        <p:nvCxnSpPr>
+          <p:cNvPr id="36" name="Elbow Connector 35"/>
+          <p:cNvCxnSpPr>
+            <a:stCxn id="4" idx="2"/>
+            <a:endCxn id="12" idx="0"/>
+          </p:cNvCxnSpPr>
+          <p:nvPr/>
+        </p:nvCxnSpPr>
+        <p:spPr>
+          <a:xfrm>
+            <a:off x="5029200" y="2362200"/>
+            <a:ext cx="95250" cy="1238250"/>
+          </a:xfrm>
+          <a:prstGeom prst="bentConnector4">
+            <a:avLst>
+              <a:gd name="adj1" fmla="val 0"/>
+              <a:gd name="adj2" fmla="val 50000"/>
+            </a:avLst>
+          </a:prstGeom>
+          <a:ln w="19050">
+            <a:solidFill>
+              <a:srgbClr val="D6E3DF"/>
+            </a:solidFill>
+            <a:prstDash val="solid"/>
+            <a:headEnd type="none" w="med" len="med"/>
+            <a:tailEnd type="none" w="med" len="med"/>
+          </a:ln>
+        </p:spPr>
+      </p:cxnSp>
+      <p:cxnSp>
+        <p:nvCxnSpPr>
+          <p:cNvPr id="37" name="Elbow Connector 36"/>
+          <p:cNvCxnSpPr>
+            <a:stCxn id="4" idx="2"/>
+            <a:endCxn id="13" idx="0"/>
+          </p:cNvCxnSpPr>
+          <p:nvPr/>
+        </p:nvCxnSpPr>
+        <p:spPr>
+          <a:xfrm>
+            <a:off x="5029200" y="2362200"/>
+            <a:ext cx="1866900" cy="1238250"/>
+          </a:xfrm>
+          <a:prstGeom prst="bentConnector4">
+            <a:avLst>
+              <a:gd name="adj1" fmla="val 0"/>
+              <a:gd name="adj2" fmla="val 50000"/>
+            </a:avLst>
+          </a:prstGeom>
+          <a:ln w="19050">
+            <a:solidFill>
+              <a:srgbClr val="D7B56D"/>
+            </a:solidFill>
+            <a:prstDash val="solid"/>
+            <a:headEnd type="none" w="med" len="med"/>
+            <a:tailEnd type="none" w="med" len="med"/>
+          </a:ln>
+        </p:spPr>
+      </p:cxnSp>
+      <p:cxnSp>
+        <p:nvCxnSpPr>
+          <p:cNvPr id="38" name="Elbow Connector 37"/>
+          <p:cNvCxnSpPr>
+            <a:stCxn id="5" idx="2"/>
+            <a:endCxn id="14" idx="0"/>
+          </p:cNvCxnSpPr>
+          <p:nvPr/>
+        </p:nvCxnSpPr>
+        <p:spPr>
+          <a:xfrm>
+            <a:off x="6886575" y="2438400"/>
+            <a:ext cx="1781175" cy="1162050"/>
+          </a:xfrm>
+          <a:prstGeom prst="bentConnector4">
+            <a:avLst>
+              <a:gd name="adj1" fmla="val 0"/>
+              <a:gd name="adj2" fmla="val 50000"/>
+            </a:avLst>
+          </a:prstGeom>
+          <a:ln w="19050">
+            <a:solidFill>
+              <a:srgbClr val="D6E3DF"/>
+            </a:solidFill>
+            <a:prstDash val="solid"/>
+            <a:headEnd type="none" w="med" len="med"/>
+            <a:tailEnd type="none" w="med" len="med"/>
+          </a:ln>
+        </p:spPr>
+      </p:cxnSp>
+      <p:cxnSp>
+        <p:nvCxnSpPr>
+          <p:cNvPr id="39" name="Elbow Connector 38"/>
+          <p:cNvCxnSpPr>
+            <a:stCxn id="5" idx="2"/>
+            <a:endCxn id="15" idx="0"/>
+          </p:cNvCxnSpPr>
+          <p:nvPr/>
+        </p:nvCxnSpPr>
+        <p:spPr>
+          <a:xfrm>
+            <a:off x="6886575" y="2438400"/>
+            <a:ext cx="3552825" cy="1162050"/>
+          </a:xfrm>
+          <a:prstGeom prst="bentConnector4">
+            <a:avLst>
+              <a:gd name="adj1" fmla="val 0"/>
+              <a:gd name="adj2" fmla="val 50000"/>
+            </a:avLst>
+          </a:prstGeom>
+          <a:ln w="19050">
+            <a:solidFill>
+              <a:srgbClr val="D9A39E"/>
+            </a:solidFill>
+            <a:prstDash val="solid"/>
+            <a:headEnd type="none" w="med" len="med"/>
+            <a:tailEnd type="none" w="med" len="med"/>
+          </a:ln>
+        </p:spPr>
+      </p:cxnSp>
+      <p:sp>
+        <p:nvSpPr>
+          <p:cNvPr id="20" name="Rounded Rectangle 19">
+            <a:extLst>
+              <a:ext uri="{FF2B5EF4-FFF2-40B4-BE49-F238E27FC236}">
+                <a16:creationId xmlns:a16="http://schemas.microsoft.com/office/drawing/2014/main" id="{45AFE64D-26AC-4552-9D2E-942A2126A0C8}"/>
+              </a:ext>
+            </a:extLst>
+          </p:cNvPr>
+          <p:cNvSpPr>
+            <a:spLocks noGrp="1"/>
+          </p:cNvSpPr>
+          <p:nvPr/>
+        </p:nvSpPr>
+        <p:spPr>
+          <a:xfrm>
+            <a:off x="4324350" y="5105400"/>
+            <a:ext cx="6915150" cy="704850"/>
+          </a:xfrm>
+          <a:prstGeom prst="roundRect">
+            <a:avLst>
+              <a:gd name="adj" fmla="val 8108"/>
+            </a:avLst>
+          </a:prstGeom>
+          <a:solidFill>
+            <a:srgbClr val="FFF3D6"/>
+          </a:solidFill>
+          <a:ln w="9525">
+            <a:solidFill>
+              <a:srgbClr val="EACB88"/>
+            </a:solidFill>
+            <a:prstDash val="solid"/>
+          </a:ln>
+        </p:spPr>
+      </p:sp>
+      <p:sp>
+        <p:nvSpPr>
+          <p:cNvPr id="21" name="Rectangle 20">
+            <a:extLst>
+              <a:ext uri="{FF2B5EF4-FFF2-40B4-BE49-F238E27FC236}">
+                <a16:creationId xmlns:a16="http://schemas.microsoft.com/office/drawing/2014/main" id="{2E893F84-4BFD-46E4-84E4-1F7E4BEF04CE}"/>
+              </a:ext>
+            </a:extLst>
+          </p:cNvPr>
+          <p:cNvSpPr>
+            <a:spLocks noGrp="1"/>
+          </p:cNvSpPr>
+          <p:nvPr/>
+        </p:nvSpPr>
+        <p:spPr>
+          <a:xfrm>
+            <a:off x="4552950" y="5257800"/>
+            <a:ext cx="6457950" cy="400050"/>
+          </a:xfrm>
+          <a:prstGeom prst="rect">
+            <a:avLst/>
+          </a:prstGeom>
+          <a:noFill/>
+          <a:ln w="0">
+            <a:noFill/>
+            <a:prstDash val="solid"/>
+          </a:ln>
+        </p:spPr>
+        <p:txBody>
+          <a:bodyPr wrap="square" lIns="0" tIns="0" rIns="0" bIns="0" anchor="ctr">
+            <a:normAutofit fontScale="94595"/>
+          </a:bodyPr>
+          <a:lstStyle/>
+          <a:p>
+            <a:pPr marL="0" indent="0" algn="l">
+              <a:spcAft>
+                <a:spcPts val="0"/>
+              </a:spcAft>
+              <a:buNone/>
+              <a:defRPr sz="1200" b="0">
+                <a:solidFill>
+                  <a:srgbClr val="132925"/>
+                </a:solidFill>
+                <a:latin typeface="Aptos"/>
+                <a:ea typeface="Aptos"/>
+                <a:cs typeface="Aptos"/>
+              </a:defRPr>
+            </a:pPr>
+            <a:r>
+              <a:rPr sz="1575" b="1" i="0">
+                <a:solidFill>
+                  <a:srgbClr val="132925"/>
+                </a:solidFill>
+                <a:latin typeface="Aptos"/>
+                <a:ea typeface="Aptos"/>
+                <a:cs typeface="Aptos"/>
+              </a:rPr>
+              <a:t>Current SQLite lifecycle: one API replica</a:t>
+            </a:r>
+            <a:r>
+              <a:rPr sz="1200" b="0" i="0">
+                <a:solidFill>
+                  <a:srgbClr val="5B6F6A"/>
+                </a:solidFill>
+                <a:latin typeface="Aptos"/>
+                <a:ea typeface="Aptos"/>
+                <a:cs typeface="Aptos"/>
+              </a:rPr>
+              <a:t>   Honest scope today; repositories preserve a clean path to distributed storage.</a:t>
             </a:r>
           </a:p>
         </p:txBody>

--- a/docs/presentation/batchhelm-ai-hackathon-deck.pptx
+++ b/docs/presentation/batchhelm-ai-hackathon-deck.pptx
@@ -117,6 +117,245 @@
     </a:lvl9pPr>
   </p:defaultTextStyle>
 </p:presentation>
+</file>
+
+<file path=ppt/charts/chart1.xml><?xml version="1.0" encoding="utf-8"?>
+<c:chartSpace xmlns:c="http://schemas.openxmlformats.org/drawingml/2006/chart" xmlns:a="http://schemas.openxmlformats.org/drawingml/2006/main" xmlns:r="http://schemas.openxmlformats.org/officeDocument/2006/relationships" xmlns:c16r2="http://schemas.microsoft.com/office/drawing/2015/06/chart">
+  <c:date1904 val="1"/>
+  <c:lang val="en-GB"/>
+  <c:roundedCorners val="1"/>
+  <c:style val="2"/>
+  <c:chart>
+    <c:title>
+      <c:tx>
+        <c:rich>
+          <a:bodyPr/>
+          <a:lstStyle/>
+          <a:p>
+            <a:r>
+              <a:rPr sz="2400" b="1">
+                <a:solidFill>
+                  <a:srgbClr val="132925"/>
+                </a:solidFill>
+              </a:rPr>
+              <a:t>Mean end-to-end latency (ms)</a:t>
+            </a:r>
+          </a:p>
+        </c:rich>
+      </c:tx>
+      <c:overlay val="0"/>
+    </c:title>
+    <c:autoTitleDeleted val="0"/>
+    <c:plotArea>
+      <c:layout/>
+      <c:barChart>
+        <c:barDir val="bar"/>
+        <c:grouping val="clustered"/>
+        <c:varyColors val="1"/>
+        <c:ser>
+          <c:idx val="0"/>
+          <c:order val="0"/>
+          <c:tx>
+            <c:v>Latency</c:v>
+          </c:tx>
+          <c:spPr>
+            <a:solidFill>
+              <a:srgbClr val="087C72"/>
+            </a:solidFill>
+          </c:spPr>
+          <c:invertIfNegative val="1"/>
+          <c:dPt>
+            <c:idx val="0"/>
+            <c:invertIfNegative val="1"/>
+            <c:bubble3D val="0"/>
+            <c:extLst>
+              <c:ext xmlns:c16="http://schemas.microsoft.com/office/drawing/2014/chart" uri="{C3380CC4-5D6E-409C-BE32-E72D297353CC}">
+                <c16:uniqueId val="{00000001-8997-4E42-8069-F59BA6D05713}"/>
+              </c:ext>
+            </c:extLst>
+          </c:dPt>
+          <c:dPt>
+            <c:idx val="1"/>
+            <c:invertIfNegative val="1"/>
+            <c:bubble3D val="0"/>
+            <c:spPr>
+              <a:solidFill>
+                <a:srgbClr val="94A8A3"/>
+              </a:solidFill>
+            </c:spPr>
+            <c:extLst>
+              <c:ext xmlns:c16="http://schemas.microsoft.com/office/drawing/2014/chart" uri="{C3380CC4-5D6E-409C-BE32-E72D297353CC}">
+                <c16:uniqueId val="{00000003-8997-4E42-8069-F59BA6D05713}"/>
+              </c:ext>
+            </c:extLst>
+          </c:dPt>
+          <c:dLbls>
+            <c:spPr>
+              <a:noFill/>
+              <a:ln>
+                <a:noFill/>
+              </a:ln>
+              <a:effectLst/>
+            </c:spPr>
+            <c:showLegendKey val="1"/>
+            <c:showVal val="1"/>
+            <c:showCatName val="1"/>
+            <c:showSerName val="1"/>
+            <c:showPercent val="1"/>
+            <c:showBubbleSize val="1"/>
+            <c:showLeaderLines val="0"/>
+            <c:extLst>
+              <c:ext xmlns:c15="http://schemas.microsoft.com/office/drawing/2012/chart" uri="{CE6537A1-D6FC-4f65-9D91-7224C49458BB}">
+                <c15:showLeaderLines val="0"/>
+              </c:ext>
+            </c:extLst>
+          </c:dLbls>
+          <c:cat>
+            <c:strLit>
+              <c:ptCount val="2"/>
+              <c:pt idx="0">
+                <c:v>Agent Society DAG</c:v>
+              </c:pt>
+              <c:pt idx="1">
+                <c:v>Sequential baseline</c:v>
+              </c:pt>
+            </c:strLit>
+          </c:cat>
+          <c:val>
+            <c:numLit>
+              <c:formatCode>General</c:formatCode>
+              <c:ptCount val="2"/>
+              <c:pt idx="0">
+                <c:v>1095.3</c:v>
+              </c:pt>
+              <c:pt idx="1">
+                <c:v>1633.9</c:v>
+              </c:pt>
+            </c:numLit>
+          </c:val>
+          <c:extLst>
+            <c:ext xmlns:c14="http://schemas.microsoft.com/office/drawing/2007/8/2/chart" uri="{6F2FDCE9-48DA-4B69-8628-5D25D57E5C99}">
+              <c14:invertSolidFillFmt>
+                <c14:spPr xmlns:c14="http://schemas.microsoft.com/office/drawing/2007/8/2/chart">
+                  <a:solidFill>
+                    <a:srgbClr val="FFFFFF"/>
+                  </a:solidFill>
+                </c14:spPr>
+              </c14:invertSolidFillFmt>
+            </c:ext>
+            <c:ext xmlns:c16="http://schemas.microsoft.com/office/drawing/2014/chart" uri="{C3380CC4-5D6E-409C-BE32-E72D297353CC}">
+              <c16:uniqueId val="{00000004-8997-4E42-8069-F59BA6D05713}"/>
+            </c:ext>
+          </c:extLst>
+        </c:ser>
+        <c:dLbls>
+          <c:dLblPos val="outEnd"/>
+          <c:showLegendKey val="1"/>
+          <c:showVal val="1"/>
+          <c:showCatName val="1"/>
+          <c:showSerName val="1"/>
+          <c:showPercent val="1"/>
+          <c:showBubbleSize val="1"/>
+        </c:dLbls>
+        <c:gapWidth val="42"/>
+        <c:axId val="48650112"/>
+        <c:axId val="48672768"/>
+      </c:barChart>
+      <c:catAx>
+        <c:axId val="48650112"/>
+        <c:scaling>
+          <c:orientation val="minMax"/>
+        </c:scaling>
+        <c:delete val="0"/>
+        <c:axPos val="l"/>
+        <c:numFmt formatCode="General" sourceLinked="1"/>
+        <c:majorTickMark val="none"/>
+        <c:minorTickMark val="none"/>
+        <c:tickLblPos val="none"/>
+        <c:spPr>
+          <a:ln w="9525">
+            <a:solidFill>
+              <a:srgbClr val="D4D4D4"/>
+            </a:solidFill>
+            <a:prstDash val="solid"/>
+          </a:ln>
+        </c:spPr>
+        <c:txPr>
+          <a:bodyPr anchorCtr="1"/>
+          <a:lstStyle/>
+          <a:p>
+            <a:pPr>
+              <a:defRPr sz="1650">
+                <a:solidFill>
+                  <a:srgbClr val="132925"/>
+                </a:solidFill>
+              </a:defRPr>
+            </a:pPr>
+            <a:endParaRPr lang="en-US"/>
+          </a:p>
+        </c:txPr>
+        <c:crossAx val="48672768"/>
+        <c:crosses val="autoZero"/>
+        <c:auto val="1"/>
+        <c:lblAlgn val="ctr"/>
+        <c:lblOffset val="100"/>
+        <c:noMultiLvlLbl val="0"/>
+      </c:catAx>
+      <c:valAx>
+        <c:axId val="48672768"/>
+        <c:scaling>
+          <c:orientation val="minMax"/>
+        </c:scaling>
+        <c:delete val="0"/>
+        <c:axPos val="b"/>
+        <c:numFmt formatCode="General" sourceLinked="1"/>
+        <c:majorTickMark val="none"/>
+        <c:minorTickMark val="none"/>
+        <c:tickLblPos val="nextTo"/>
+        <c:spPr>
+          <a:ln w="0">
+            <a:noFill/>
+            <a:prstDash val="solid"/>
+          </a:ln>
+        </c:spPr>
+        <c:txPr>
+          <a:bodyPr anchorCtr="1"/>
+          <a:lstStyle/>
+          <a:p>
+            <a:pPr>
+              <a:defRPr sz="1650">
+                <a:solidFill>
+                  <a:srgbClr val="132925"/>
+                </a:solidFill>
+              </a:defRPr>
+            </a:pPr>
+            <a:endParaRPr lang="en-US"/>
+          </a:p>
+        </c:txPr>
+        <c:crossAx val="48650112"/>
+        <c:crosses val="autoZero"/>
+        <c:crossBetween val="between"/>
+      </c:valAx>
+      <c:spPr>
+        <a:noFill/>
+        <a:ln w="0">
+          <a:noFill/>
+          <a:prstDash val="solid"/>
+        </a:ln>
+      </c:spPr>
+    </c:plotArea>
+    <c:plotVisOnly val="1"/>
+    <c:dispBlanksAs val="zero"/>
+    <c:showDLblsOverMax val="1"/>
+  </c:chart>
+  <c:spPr>
+    <a:noFill/>
+    <a:ln w="0">
+      <a:noFill/>
+      <a:prstDash val="solid"/>
+    </a:ln>
+  </c:spPr>
+</c:chartSpace>
 </file>
 
 <file path=ppt/notesMasters/notesMaster1.xml><?xml version="1.0" encoding="utf-8"?>
@@ -4390,7 +4629,7 @@
         </p:spPr>
         <p:txBody>
           <a:bodyPr wrap="square" lIns="0" tIns="0" rIns="0" bIns="0" anchor="ctr">
-            <a:normAutofit/>
+            <a:noAutofit/>
           </a:bodyPr>
           <a:lstStyle/>
           <a:p>
@@ -4446,7 +4685,7 @@
         </p:spPr>
         <p:txBody>
           <a:bodyPr wrap="square" lIns="0" tIns="0" rIns="76200" bIns="0" anchor="t">
-            <a:normAutofit/>
+            <a:noAutofit/>
           </a:bodyPr>
           <a:lstStyle/>
           <a:p>
@@ -4492,7 +4731,7 @@
               </a:defRPr>
             </a:pPr>
             <a:r>
-              <a:rPr sz="1575" b="0" i="0">
+              <a:rPr sz="1650" b="0" i="0">
                 <a:solidFill>
                   <a:srgbClr val="D6E3DF"/>
                 </a:solidFill>
@@ -4519,7 +4758,7 @@
               </a:defRPr>
             </a:pPr>
             <a:r>
-              <a:rPr sz="1275" b="1" i="0">
+              <a:rPr sz="1650" b="1" i="0">
                 <a:solidFill>
                   <a:srgbClr val="A9D8D3"/>
                 </a:solidFill>
@@ -4546,7 +4785,7 @@
               </a:defRPr>
             </a:pPr>
             <a:r>
-              <a:rPr sz="1275" b="0" i="0">
+              <a:rPr sz="1650" b="0" i="0">
                 <a:solidFill>
                   <a:srgbClr val="FFFFFF"/>
                 </a:solidFill>
@@ -4556,54 +4795,12 @@
               </a:rPr>
               <a:t>Ankit Ranjan</a:t>
             </a:r>
-          </a:p>
-        </p:txBody>
-      </p:sp>
-      <p:sp>
-        <p:nvSpPr>
-          <p:cNvPr id="4" name="Rounded Rectangle 3">
-            <a:extLst>
-              <a:ext uri="{FF2B5EF4-FFF2-40B4-BE49-F238E27FC236}">
-                <a16:creationId xmlns:a16="http://schemas.microsoft.com/office/drawing/2014/main" id="{5E9C2518-2735-404A-8D1B-F550CF62E5B8}"/>
-              </a:ext>
-            </a:extLst>
-          </p:cNvPr>
-          <p:cNvSpPr>
-            <a:spLocks noGrp="1"/>
-          </p:cNvSpPr>
-          <p:nvPr/>
-        </p:nvSpPr>
-        <p:spPr>
-          <a:xfrm>
-            <a:off x="4743450" y="571500"/>
-            <a:ext cx="6781800" cy="5715000"/>
-          </a:xfrm>
-          <a:prstGeom prst="roundRect">
-            <a:avLst>
-              <a:gd name="adj" fmla="val 1000"/>
-            </a:avLst>
-          </a:prstGeom>
-          <a:solidFill>
-            <a:srgbClr val="FFFFFF"/>
-          </a:solidFill>
-          <a:ln w="9525">
-            <a:solidFill>
-              <a:srgbClr val="2C625D"/>
-            </a:solidFill>
-            <a:prstDash val="solid"/>
-          </a:ln>
-        </p:spPr>
-        <p:txBody>
-          <a:bodyPr/>
-          <a:lstStyle/>
-          <a:p>
-            <a:endParaRPr lang="en-US"/>
           </a:p>
         </p:txBody>
       </p:sp>
       <p:pic>
         <p:nvPicPr>
-          <p:cNvPr id="9" name="Picture 8"/>
+          <p:cNvPr id="7" name="Picture 6"/>
           <p:cNvPicPr>
             <a:picLocks noChangeAspect="1"/>
           </p:cNvPicPr>
@@ -4644,6 +4841,14 @@
 <file path=ppt/slides/slide10.xml><?xml version="1.0" encoding="utf-8"?>
 <p:sld xmlns:a="http://schemas.openxmlformats.org/drawingml/2006/main" xmlns:r="http://schemas.openxmlformats.org/officeDocument/2006/relationships" xmlns:p="http://schemas.openxmlformats.org/presentationml/2006/main">
   <p:cSld>
+    <p:bg>
+      <p:bgPr>
+        <a:solidFill>
+          <a:srgbClr val="0B3D38"/>
+        </a:solidFill>
+        <a:effectLst/>
+      </p:bgPr>
+    </p:bg>
     <p:spTree>
       <p:nvGrpSpPr>
         <p:cNvPr id="1" name=""/>
@@ -4674,21 +4879,42 @@
             <p:ph type="title"/>
           </p:nvPr>
         </p:nvSpPr>
-        <p:spPr/>
-        <p:txBody>
-          <a:bodyPr/>
-          <a:lstStyle/>
-          <a:p>
-            <a:pPr>
-              <a:buNone/>
-              <a:defRPr sz="3200">
-                <a:solidFill>
-                  <a:srgbClr val="1F6FEB"/>
-                </a:solidFill>
-              </a:defRPr>
-            </a:pPr>
-            <a:r>
-              <a:t>Demo &amp; Links</a:t>
+        <p:spPr>
+          <a:xfrm>
+            <a:off x="609600" y="476250"/>
+            <a:ext cx="10934700" cy="781050"/>
+          </a:xfrm>
+        </p:spPr>
+        <p:txBody>
+          <a:bodyPr wrap="square" lIns="0" tIns="0" rIns="0" bIns="0" anchor="ctr">
+            <a:noAutofit/>
+          </a:bodyPr>
+          <a:lstStyle/>
+          <a:p>
+            <a:pPr marL="0" indent="0" algn="l">
+              <a:spcAft>
+                <a:spcPts val="0"/>
+              </a:spcAft>
+              <a:buNone/>
+              <a:defRPr sz="3600" b="1">
+                <a:solidFill>
+                  <a:srgbClr val="FFFFFF"/>
+                </a:solidFill>
+                <a:latin typeface="Aptos Display"/>
+                <a:ea typeface="Aptos Display"/>
+                <a:cs typeface="Aptos Display"/>
+              </a:defRPr>
+            </a:pPr>
+            <a:r>
+              <a:rPr sz="3600" b="1" i="0">
+                <a:solidFill>
+                  <a:srgbClr val="FFFFFF"/>
+                </a:solidFill>
+                <a:latin typeface="Aptos Display"/>
+                <a:ea typeface="Aptos Display"/>
+                <a:cs typeface="Aptos Display"/>
+              </a:rPr>
+              <a:t>Built for the path from notice to audit</a:t>
             </a:r>
           </a:p>
         </p:txBody>
@@ -4709,86 +4935,1302 @@
             <p:ph idx="1"/>
           </p:nvPr>
         </p:nvSpPr>
-        <p:spPr/>
-        <p:txBody>
-          <a:bodyPr wrap="square"/>
-          <a:lstStyle/>
-          <a:p>
-            <a:pPr>
-              <a:buNone/>
-            </a:pPr>
-            <a:r>
-              <a:rPr sz="1800">
-                <a:solidFill>
-                  <a:srgbClr val="222222"/>
-                </a:solidFill>
-              </a:rPr>
-              <a:t>Repository: github.com/ankitranjan-dsai/batchhelm-ai (MIT license)</a:t>
-            </a:r>
-          </a:p>
-          <a:p>
-            <a:pPr>
-              <a:buNone/>
-            </a:pPr>
-            <a:r>
-              <a:rPr sz="1800">
-                <a:solidFill>
-                  <a:srgbClr val="222222"/>
-                </a:solidFill>
-              </a:rPr>
-              <a:t>Architecture: docs/architecture.md   ·   Qwen integration: docs/qwen-integration.md</a:t>
-            </a:r>
-          </a:p>
-          <a:p>
-            <a:pPr>
-              <a:buNone/>
-            </a:pPr>
-            <a:r>
-              <a:rPr sz="1800">
-                <a:solidFill>
-                  <a:srgbClr val="222222"/>
-                </a:solidFill>
-              </a:rPr>
-              <a:t>Sample evidence packet: docs/sample-evidence-packet.md   ·   Sample walkthrough: docs/sample-incident-walkthrough.md</a:t>
-            </a:r>
-          </a:p>
-          <a:p>
-            <a:pPr>
-              <a:buNone/>
-            </a:pPr>
-            <a:r>
-              <a:rPr sz="1800">
-                <a:solidFill>
-                  <a:srgbClr val="222222"/>
-                </a:solidFill>
-              </a:rPr>
-              <a:t>Benchmark report: docs/benchmarks/agent-society-vs-single-agent.md</a:t>
-            </a:r>
-          </a:p>
-          <a:p>
-            <a:pPr>
-              <a:buNone/>
-            </a:pPr>
-            <a:r>
-              <a:rPr sz="1800">
-                <a:solidFill>
-                  <a:srgbClr val="222222"/>
-                </a:solidFill>
-              </a:rPr>
-              <a:t>Demo script: docs/demo-script.md</a:t>
-            </a:r>
-          </a:p>
-          <a:p>
-            <a:pPr>
-              <a:buNone/>
-            </a:pPr>
-            <a:r>
-              <a:rPr sz="1800">
-                <a:solidFill>
-                  <a:srgbClr val="222222"/>
-                </a:solidFill>
-              </a:rPr>
-              <a:t>Live deployment URL and demo video: in progress — tracked in docs/submission-checklist.md</a:t>
+        <p:spPr>
+          <a:xfrm>
+            <a:off x="685800" y="1562100"/>
+            <a:ext cx="4457700" cy="4381500"/>
+          </a:xfrm>
+        </p:spPr>
+        <p:txBody>
+          <a:bodyPr wrap="square" lIns="0" tIns="0" rIns="76200" bIns="0" anchor="t">
+            <a:noAutofit/>
+          </a:bodyPr>
+          <a:lstStyle/>
+          <a:p>
+            <a:pPr marL="0" indent="0" algn="l">
+              <a:spcAft>
+                <a:spcPts val="18"/>
+              </a:spcAft>
+              <a:buNone/>
+              <a:defRPr sz="1425" b="0">
+                <a:solidFill>
+                  <a:srgbClr val="FFFFFF"/>
+                </a:solidFill>
+                <a:latin typeface="Aptos"/>
+                <a:ea typeface="Aptos"/>
+                <a:cs typeface="Aptos"/>
+              </a:defRPr>
+            </a:pPr>
+            <a:r>
+              <a:rPr sz="1725" b="1" i="0">
+                <a:solidFill>
+                  <a:srgbClr val="FFFFFF"/>
+                </a:solidFill>
+                <a:latin typeface="Aptos"/>
+                <a:ea typeface="Aptos"/>
+                <a:cs typeface="Aptos"/>
+              </a:rPr>
+              <a:t>github.com/ankitranjan-dsai/batchhelm-ai</a:t>
+            </a:r>
+          </a:p>
+          <a:p>
+            <a:pPr marL="0" indent="0" algn="l">
+              <a:spcAft>
+                <a:spcPts val="34"/>
+              </a:spcAft>
+              <a:buNone/>
+              <a:defRPr sz="1425" b="0">
+                <a:solidFill>
+                  <a:srgbClr val="FFFFFF"/>
+                </a:solidFill>
+                <a:latin typeface="Aptos"/>
+                <a:ea typeface="Aptos"/>
+                <a:cs typeface="Aptos"/>
+              </a:defRPr>
+            </a:pPr>
+            <a:r>
+              <a:rPr sz="1650" b="0" i="0">
+                <a:solidFill>
+                  <a:srgbClr val="D6E3DF"/>
+                </a:solidFill>
+                <a:latin typeface="Aptos"/>
+                <a:ea typeface="Aptos"/>
+                <a:cs typeface="Aptos"/>
+              </a:rPr>
+              <a:t>MIT license</a:t>
+            </a:r>
+          </a:p>
+          <a:p>
+            <a:pPr marL="0" indent="0" algn="l">
+              <a:spcAft>
+                <a:spcPts val="8"/>
+              </a:spcAft>
+              <a:buNone/>
+              <a:defRPr sz="1425" b="0">
+                <a:solidFill>
+                  <a:srgbClr val="FFFFFF"/>
+                </a:solidFill>
+                <a:latin typeface="Aptos"/>
+                <a:ea typeface="Aptos"/>
+                <a:cs typeface="Aptos"/>
+              </a:defRPr>
+            </a:pPr>
+            <a:r>
+              <a:rPr sz="2100" b="1" i="0">
+                <a:solidFill>
+                  <a:srgbClr val="FFFFFF"/>
+                </a:solidFill>
+                <a:latin typeface="Aptos"/>
+                <a:ea typeface="Aptos"/>
+                <a:cs typeface="Aptos"/>
+              </a:rPr>
+              <a:t>Open the repository.</a:t>
+            </a:r>
+          </a:p>
+          <a:p>
+            <a:pPr marL="0" indent="0" algn="l">
+              <a:spcAft>
+                <a:spcPts val="8"/>
+              </a:spcAft>
+              <a:buNone/>
+              <a:defRPr sz="1425" b="0">
+                <a:solidFill>
+                  <a:srgbClr val="FFFFFF"/>
+                </a:solidFill>
+                <a:latin typeface="Aptos"/>
+                <a:ea typeface="Aptos"/>
+                <a:cs typeface="Aptos"/>
+              </a:defRPr>
+            </a:pPr>
+            <a:r>
+              <a:rPr sz="2100" b="1" i="0">
+                <a:solidFill>
+                  <a:srgbClr val="FFFFFF"/>
+                </a:solidFill>
+                <a:latin typeface="Aptos"/>
+                <a:ea typeface="Aptos"/>
+                <a:cs typeface="Aptos"/>
+              </a:rPr>
+              <a:t>Run the synthetic recall.</a:t>
+            </a:r>
+          </a:p>
+          <a:p>
+            <a:pPr marL="0" indent="0" algn="l">
+              <a:spcAft>
+                <a:spcPts val="44"/>
+              </a:spcAft>
+              <a:buNone/>
+              <a:defRPr sz="1425" b="0">
+                <a:solidFill>
+                  <a:srgbClr val="FFFFFF"/>
+                </a:solidFill>
+                <a:latin typeface="Aptos"/>
+                <a:ea typeface="Aptos"/>
+                <a:cs typeface="Aptos"/>
+              </a:defRPr>
+            </a:pPr>
+            <a:r>
+              <a:rPr sz="2100" b="1" i="0">
+                <a:solidFill>
+                  <a:srgbClr val="FFFFFF"/>
+                </a:solidFill>
+                <a:latin typeface="Aptos"/>
+                <a:ea typeface="Aptos"/>
+                <a:cs typeface="Aptos"/>
+              </a:rPr>
+              <a:t>Inspect every decision.</a:t>
+            </a:r>
+          </a:p>
+          <a:p>
+            <a:pPr marL="0" indent="0" algn="l">
+              <a:spcAft>
+                <a:spcPts val="12"/>
+              </a:spcAft>
+              <a:buNone/>
+              <a:defRPr sz="1425" b="0">
+                <a:solidFill>
+                  <a:srgbClr val="FFFFFF"/>
+                </a:solidFill>
+                <a:latin typeface="Aptos"/>
+                <a:ea typeface="Aptos"/>
+                <a:cs typeface="Aptos"/>
+              </a:defRPr>
+            </a:pPr>
+            <a:r>
+              <a:rPr sz="1650" b="1" i="0">
+                <a:solidFill>
+                  <a:srgbClr val="A9D8D3"/>
+                </a:solidFill>
+                <a:latin typeface="Aptos"/>
+                <a:ea typeface="Aptos"/>
+                <a:cs typeface="Aptos"/>
+              </a:rPr>
+              <a:t>Ankit Ranjan</a:t>
+            </a:r>
+          </a:p>
+        </p:txBody>
+      </p:sp>
+      <p:sp>
+        <p:nvSpPr>
+          <p:cNvPr id="4" name="Rectangle 3">
+            <a:extLst>
+              <a:ext uri="{FF2B5EF4-FFF2-40B4-BE49-F238E27FC236}">
+                <a16:creationId xmlns:a16="http://schemas.microsoft.com/office/drawing/2014/main" id="{AD11EF32-22DB-471F-8E19-59ABCD271679}"/>
+              </a:ext>
+            </a:extLst>
+          </p:cNvPr>
+          <p:cNvSpPr>
+            <a:spLocks noGrp="1"/>
+          </p:cNvSpPr>
+          <p:nvPr/>
+        </p:nvSpPr>
+        <p:spPr>
+          <a:xfrm>
+            <a:off x="5981700" y="1524000"/>
+            <a:ext cx="4000500" cy="419100"/>
+          </a:xfrm>
+          <a:prstGeom prst="rect">
+            <a:avLst/>
+          </a:prstGeom>
+          <a:noFill/>
+          <a:ln w="0">
+            <a:noFill/>
+            <a:prstDash val="solid"/>
+          </a:ln>
+        </p:spPr>
+        <p:txBody>
+          <a:bodyPr wrap="square" lIns="0" tIns="0" rIns="0" bIns="0" anchor="t">
+            <a:noAutofit/>
+          </a:bodyPr>
+          <a:lstStyle/>
+          <a:p>
+            <a:pPr marL="0" indent="0" algn="l">
+              <a:spcAft>
+                <a:spcPts val="0"/>
+              </a:spcAft>
+              <a:buNone/>
+              <a:defRPr sz="2400" b="1">
+                <a:solidFill>
+                  <a:srgbClr val="A9D8D3"/>
+                </a:solidFill>
+                <a:latin typeface="Aptos"/>
+                <a:ea typeface="Aptos"/>
+                <a:cs typeface="Aptos"/>
+              </a:defRPr>
+            </a:pPr>
+            <a:r>
+              <a:rPr sz="2400" b="1" i="0">
+                <a:solidFill>
+                  <a:srgbClr val="A9D8D3"/>
+                </a:solidFill>
+                <a:latin typeface="Aptos"/>
+                <a:ea typeface="Aptos"/>
+                <a:cs typeface="Aptos"/>
+              </a:rPr>
+              <a:t>GREEN CI ON MAIN</a:t>
+            </a:r>
+          </a:p>
+        </p:txBody>
+      </p:sp>
+      <p:sp>
+        <p:nvSpPr>
+          <p:cNvPr id="5" name="Rounded Rectangle 4">
+            <a:extLst>
+              <a:ext uri="{FF2B5EF4-FFF2-40B4-BE49-F238E27FC236}">
+                <a16:creationId xmlns:a16="http://schemas.microsoft.com/office/drawing/2014/main" id="{5592B7DF-7990-42AC-A259-97D9875164D1}"/>
+              </a:ext>
+            </a:extLst>
+          </p:cNvPr>
+          <p:cNvSpPr>
+            <a:spLocks noGrp="1"/>
+          </p:cNvSpPr>
+          <p:nvPr/>
+        </p:nvSpPr>
+        <p:spPr>
+          <a:xfrm>
+            <a:off x="5981700" y="2057400"/>
+            <a:ext cx="2381250" cy="361950"/>
+          </a:xfrm>
+          <a:prstGeom prst="roundRect">
+            <a:avLst>
+              <a:gd name="adj" fmla="val 15789"/>
+            </a:avLst>
+          </a:prstGeom>
+          <a:solidFill>
+            <a:srgbClr val="E4F4EA"/>
+          </a:solidFill>
+          <a:ln w="9525">
+            <a:solidFill>
+              <a:srgbClr val="9FD0B1"/>
+            </a:solidFill>
+            <a:prstDash val="solid"/>
+          </a:ln>
+        </p:spPr>
+      </p:sp>
+      <p:sp>
+        <p:nvSpPr>
+          <p:cNvPr id="6" name="Rectangle 5">
+            <a:extLst>
+              <a:ext uri="{FF2B5EF4-FFF2-40B4-BE49-F238E27FC236}">
+                <a16:creationId xmlns:a16="http://schemas.microsoft.com/office/drawing/2014/main" id="{4F69448F-0A7E-430F-AE57-528EE3561C05}"/>
+              </a:ext>
+            </a:extLst>
+          </p:cNvPr>
+          <p:cNvSpPr>
+            <a:spLocks noGrp="1"/>
+          </p:cNvSpPr>
+          <p:nvPr/>
+        </p:nvSpPr>
+        <p:spPr>
+          <a:xfrm>
+            <a:off x="6057900" y="2085975"/>
+            <a:ext cx="2228850" cy="304800"/>
+          </a:xfrm>
+          <a:prstGeom prst="rect">
+            <a:avLst/>
+          </a:prstGeom>
+          <a:noFill/>
+          <a:ln w="0">
+            <a:noFill/>
+            <a:prstDash val="solid"/>
+          </a:ln>
+        </p:spPr>
+        <p:txBody>
+          <a:bodyPr wrap="square" lIns="0" tIns="0" rIns="0" bIns="0" anchor="ctr">
+            <a:noAutofit/>
+          </a:bodyPr>
+          <a:lstStyle/>
+          <a:p>
+            <a:pPr marL="0" indent="0" algn="ctr">
+              <a:spcAft>
+                <a:spcPts val="0"/>
+              </a:spcAft>
+              <a:buNone/>
+              <a:defRPr sz="1200" b="1">
+                <a:solidFill>
+                  <a:srgbClr val="1D7A4E"/>
+                </a:solidFill>
+                <a:latin typeface="Aptos"/>
+                <a:ea typeface="Aptos"/>
+                <a:cs typeface="Aptos"/>
+              </a:defRPr>
+            </a:pPr>
+            <a:r>
+              <a:rPr sz="1650" b="1" i="0">
+                <a:solidFill>
+                  <a:srgbClr val="1D7A4E"/>
+                </a:solidFill>
+                <a:latin typeface="Aptos"/>
+                <a:ea typeface="Aptos"/>
+                <a:cs typeface="Aptos"/>
+              </a:rPr>
+              <a:t>✓  Backend</a:t>
+            </a:r>
+          </a:p>
+        </p:txBody>
+      </p:sp>
+      <p:sp>
+        <p:nvSpPr>
+          <p:cNvPr id="7" name="Rounded Rectangle 6">
+            <a:extLst>
+              <a:ext uri="{FF2B5EF4-FFF2-40B4-BE49-F238E27FC236}">
+                <a16:creationId xmlns:a16="http://schemas.microsoft.com/office/drawing/2014/main" id="{852C9982-CC9F-4022-8A37-89029430A0AA}"/>
+              </a:ext>
+            </a:extLst>
+          </p:cNvPr>
+          <p:cNvSpPr>
+            <a:spLocks noGrp="1"/>
+          </p:cNvSpPr>
+          <p:nvPr/>
+        </p:nvSpPr>
+        <p:spPr>
+          <a:xfrm>
+            <a:off x="8629650" y="2057400"/>
+            <a:ext cx="2381250" cy="361950"/>
+          </a:xfrm>
+          <a:prstGeom prst="roundRect">
+            <a:avLst>
+              <a:gd name="adj" fmla="val 15789"/>
+            </a:avLst>
+          </a:prstGeom>
+          <a:solidFill>
+            <a:srgbClr val="E4F4EA"/>
+          </a:solidFill>
+          <a:ln w="9525">
+            <a:solidFill>
+              <a:srgbClr val="9FD0B1"/>
+            </a:solidFill>
+            <a:prstDash val="solid"/>
+          </a:ln>
+        </p:spPr>
+      </p:sp>
+      <p:sp>
+        <p:nvSpPr>
+          <p:cNvPr id="8" name="Rectangle 7">
+            <a:extLst>
+              <a:ext uri="{FF2B5EF4-FFF2-40B4-BE49-F238E27FC236}">
+                <a16:creationId xmlns:a16="http://schemas.microsoft.com/office/drawing/2014/main" id="{40ED6D34-9CB4-40D2-B858-95CD5D3FFC84}"/>
+              </a:ext>
+            </a:extLst>
+          </p:cNvPr>
+          <p:cNvSpPr>
+            <a:spLocks noGrp="1"/>
+          </p:cNvSpPr>
+          <p:nvPr/>
+        </p:nvSpPr>
+        <p:spPr>
+          <a:xfrm>
+            <a:off x="8705850" y="2085975"/>
+            <a:ext cx="2228850" cy="304800"/>
+          </a:xfrm>
+          <a:prstGeom prst="rect">
+            <a:avLst/>
+          </a:prstGeom>
+          <a:noFill/>
+          <a:ln w="0">
+            <a:noFill/>
+            <a:prstDash val="solid"/>
+          </a:ln>
+        </p:spPr>
+        <p:txBody>
+          <a:bodyPr wrap="square" lIns="0" tIns="0" rIns="0" bIns="0" anchor="ctr">
+            <a:noAutofit/>
+          </a:bodyPr>
+          <a:lstStyle/>
+          <a:p>
+            <a:pPr marL="0" indent="0" algn="ctr">
+              <a:spcAft>
+                <a:spcPts val="0"/>
+              </a:spcAft>
+              <a:buNone/>
+              <a:defRPr sz="1200" b="1">
+                <a:solidFill>
+                  <a:srgbClr val="1D7A4E"/>
+                </a:solidFill>
+                <a:latin typeface="Aptos"/>
+                <a:ea typeface="Aptos"/>
+                <a:cs typeface="Aptos"/>
+              </a:defRPr>
+            </a:pPr>
+            <a:r>
+              <a:rPr sz="1650" b="1" i="0">
+                <a:solidFill>
+                  <a:srgbClr val="1D7A4E"/>
+                </a:solidFill>
+                <a:latin typeface="Aptos"/>
+                <a:ea typeface="Aptos"/>
+                <a:cs typeface="Aptos"/>
+              </a:rPr>
+              <a:t>✓  Frontend</a:t>
+            </a:r>
+          </a:p>
+        </p:txBody>
+      </p:sp>
+      <p:sp>
+        <p:nvSpPr>
+          <p:cNvPr id="9" name="Rounded Rectangle 8">
+            <a:extLst>
+              <a:ext uri="{FF2B5EF4-FFF2-40B4-BE49-F238E27FC236}">
+                <a16:creationId xmlns:a16="http://schemas.microsoft.com/office/drawing/2014/main" id="{AAB5EEAA-E393-4890-9493-51122F86E9E0}"/>
+              </a:ext>
+            </a:extLst>
+          </p:cNvPr>
+          <p:cNvSpPr>
+            <a:spLocks noGrp="1"/>
+          </p:cNvSpPr>
+          <p:nvPr/>
+        </p:nvSpPr>
+        <p:spPr>
+          <a:xfrm>
+            <a:off x="5981700" y="2552700"/>
+            <a:ext cx="2381250" cy="361950"/>
+          </a:xfrm>
+          <a:prstGeom prst="roundRect">
+            <a:avLst>
+              <a:gd name="adj" fmla="val 15789"/>
+            </a:avLst>
+          </a:prstGeom>
+          <a:solidFill>
+            <a:srgbClr val="E4F4EA"/>
+          </a:solidFill>
+          <a:ln w="9525">
+            <a:solidFill>
+              <a:srgbClr val="9FD0B1"/>
+            </a:solidFill>
+            <a:prstDash val="solid"/>
+          </a:ln>
+        </p:spPr>
+      </p:sp>
+      <p:sp>
+        <p:nvSpPr>
+          <p:cNvPr id="10" name="Rectangle 9">
+            <a:extLst>
+              <a:ext uri="{FF2B5EF4-FFF2-40B4-BE49-F238E27FC236}">
+                <a16:creationId xmlns:a16="http://schemas.microsoft.com/office/drawing/2014/main" id="{5FD9869F-04D6-43AF-85E7-C515426AD373}"/>
+              </a:ext>
+            </a:extLst>
+          </p:cNvPr>
+          <p:cNvSpPr>
+            <a:spLocks noGrp="1"/>
+          </p:cNvSpPr>
+          <p:nvPr/>
+        </p:nvSpPr>
+        <p:spPr>
+          <a:xfrm>
+            <a:off x="6057900" y="2581275"/>
+            <a:ext cx="2228850" cy="304800"/>
+          </a:xfrm>
+          <a:prstGeom prst="rect">
+            <a:avLst/>
+          </a:prstGeom>
+          <a:noFill/>
+          <a:ln w="0">
+            <a:noFill/>
+            <a:prstDash val="solid"/>
+          </a:ln>
+        </p:spPr>
+        <p:txBody>
+          <a:bodyPr wrap="square" lIns="0" tIns="0" rIns="0" bIns="0" anchor="ctr">
+            <a:noAutofit/>
+          </a:bodyPr>
+          <a:lstStyle/>
+          <a:p>
+            <a:pPr marL="0" indent="0" algn="ctr">
+              <a:spcAft>
+                <a:spcPts val="0"/>
+              </a:spcAft>
+              <a:buNone/>
+              <a:defRPr sz="1200" b="1">
+                <a:solidFill>
+                  <a:srgbClr val="1D7A4E"/>
+                </a:solidFill>
+                <a:latin typeface="Aptos"/>
+                <a:ea typeface="Aptos"/>
+                <a:cs typeface="Aptos"/>
+              </a:defRPr>
+            </a:pPr>
+            <a:r>
+              <a:rPr sz="1650" b="1" i="0">
+                <a:solidFill>
+                  <a:srgbClr val="1D7A4E"/>
+                </a:solidFill>
+                <a:latin typeface="Aptos"/>
+                <a:ea typeface="Aptos"/>
+                <a:cs typeface="Aptos"/>
+              </a:rPr>
+              <a:t>✓  Attribution</a:t>
+            </a:r>
+          </a:p>
+        </p:txBody>
+      </p:sp>
+      <p:sp>
+        <p:nvSpPr>
+          <p:cNvPr id="11" name="Rounded Rectangle 10">
+            <a:extLst>
+              <a:ext uri="{FF2B5EF4-FFF2-40B4-BE49-F238E27FC236}">
+                <a16:creationId xmlns:a16="http://schemas.microsoft.com/office/drawing/2014/main" id="{DE946C84-0237-47FE-BF50-0739C630DB48}"/>
+              </a:ext>
+            </a:extLst>
+          </p:cNvPr>
+          <p:cNvSpPr>
+            <a:spLocks noGrp="1"/>
+          </p:cNvSpPr>
+          <p:nvPr/>
+        </p:nvSpPr>
+        <p:spPr>
+          <a:xfrm>
+            <a:off x="8629650" y="2552700"/>
+            <a:ext cx="2381250" cy="361950"/>
+          </a:xfrm>
+          <a:prstGeom prst="roundRect">
+            <a:avLst>
+              <a:gd name="adj" fmla="val 15789"/>
+            </a:avLst>
+          </a:prstGeom>
+          <a:solidFill>
+            <a:srgbClr val="E4F4EA"/>
+          </a:solidFill>
+          <a:ln w="9525">
+            <a:solidFill>
+              <a:srgbClr val="9FD0B1"/>
+            </a:solidFill>
+            <a:prstDash val="solid"/>
+          </a:ln>
+        </p:spPr>
+      </p:sp>
+      <p:sp>
+        <p:nvSpPr>
+          <p:cNvPr id="12" name="Rectangle 11">
+            <a:extLst>
+              <a:ext uri="{FF2B5EF4-FFF2-40B4-BE49-F238E27FC236}">
+                <a16:creationId xmlns:a16="http://schemas.microsoft.com/office/drawing/2014/main" id="{631E8650-BE95-4930-B701-A981431D4D39}"/>
+              </a:ext>
+            </a:extLst>
+          </p:cNvPr>
+          <p:cNvSpPr>
+            <a:spLocks noGrp="1"/>
+          </p:cNvSpPr>
+          <p:nvPr/>
+        </p:nvSpPr>
+        <p:spPr>
+          <a:xfrm>
+            <a:off x="8705850" y="2581275"/>
+            <a:ext cx="2228850" cy="304800"/>
+          </a:xfrm>
+          <a:prstGeom prst="rect">
+            <a:avLst/>
+          </a:prstGeom>
+          <a:noFill/>
+          <a:ln w="0">
+            <a:noFill/>
+            <a:prstDash val="solid"/>
+          </a:ln>
+        </p:spPr>
+        <p:txBody>
+          <a:bodyPr wrap="square" lIns="0" tIns="0" rIns="0" bIns="0" anchor="ctr">
+            <a:noAutofit/>
+          </a:bodyPr>
+          <a:lstStyle/>
+          <a:p>
+            <a:pPr marL="0" indent="0" algn="ctr">
+              <a:spcAft>
+                <a:spcPts val="0"/>
+              </a:spcAft>
+              <a:buNone/>
+              <a:defRPr sz="1200" b="1">
+                <a:solidFill>
+                  <a:srgbClr val="1D7A4E"/>
+                </a:solidFill>
+                <a:latin typeface="Aptos"/>
+                <a:ea typeface="Aptos"/>
+                <a:cs typeface="Aptos"/>
+              </a:defRPr>
+            </a:pPr>
+            <a:r>
+              <a:rPr sz="1650" b="1" i="0">
+                <a:solidFill>
+                  <a:srgbClr val="1D7A4E"/>
+                </a:solidFill>
+                <a:latin typeface="Aptos"/>
+                <a:ea typeface="Aptos"/>
+                <a:cs typeface="Aptos"/>
+              </a:rPr>
+              <a:t>✓  Docker</a:t>
+            </a:r>
+          </a:p>
+        </p:txBody>
+      </p:sp>
+      <p:sp>
+        <p:nvSpPr>
+          <p:cNvPr id="13" name="Rectangle 12">
+            <a:extLst>
+              <a:ext uri="{FF2B5EF4-FFF2-40B4-BE49-F238E27FC236}">
+                <a16:creationId xmlns:a16="http://schemas.microsoft.com/office/drawing/2014/main" id="{76FB68F5-A87F-417F-8E14-04D9E3C088F0}"/>
+              </a:ext>
+            </a:extLst>
+          </p:cNvPr>
+          <p:cNvSpPr>
+            <a:spLocks noGrp="1"/>
+          </p:cNvSpPr>
+          <p:nvPr/>
+        </p:nvSpPr>
+        <p:spPr>
+          <a:xfrm>
+            <a:off x="5981700" y="3105150"/>
+            <a:ext cx="5562600" cy="685800"/>
+          </a:xfrm>
+          <a:prstGeom prst="rect">
+            <a:avLst/>
+          </a:prstGeom>
+          <a:noFill/>
+          <a:ln w="0">
+            <a:noFill/>
+            <a:prstDash val="solid"/>
+          </a:ln>
+        </p:spPr>
+        <p:txBody>
+          <a:bodyPr wrap="square" lIns="0" tIns="0" rIns="0" bIns="0" anchor="t">
+            <a:noAutofit/>
+          </a:bodyPr>
+          <a:lstStyle/>
+          <a:p>
+            <a:pPr marL="0" indent="0" algn="l">
+              <a:spcAft>
+                <a:spcPts val="0"/>
+              </a:spcAft>
+              <a:buNone/>
+              <a:defRPr sz="2400" b="1">
+                <a:solidFill>
+                  <a:srgbClr val="A9D8D3"/>
+                </a:solidFill>
+                <a:latin typeface="Aptos"/>
+                <a:ea typeface="Aptos"/>
+                <a:cs typeface="Aptos"/>
+              </a:defRPr>
+            </a:pPr>
+            <a:r>
+              <a:rPr sz="2400" b="1" i="0">
+                <a:solidFill>
+                  <a:srgbClr val="A9D8D3"/>
+                </a:solidFill>
+                <a:latin typeface="Aptos"/>
+                <a:ea typeface="Aptos"/>
+                <a:cs typeface="Aptos"/>
+              </a:rPr>
+              <a:t>ALIBABA CLOUD DEPLOYMENT ARCHITECTURE</a:t>
+            </a:r>
+          </a:p>
+        </p:txBody>
+      </p:sp>
+      <p:sp>
+        <p:nvSpPr>
+          <p:cNvPr id="14" name="Rounded Rectangle 13">
+            <a:extLst>
+              <a:ext uri="{FF2B5EF4-FFF2-40B4-BE49-F238E27FC236}">
+                <a16:creationId xmlns:a16="http://schemas.microsoft.com/office/drawing/2014/main" id="{2F5AEB77-2A67-4B1F-8D25-8CADDCD3C8D9}"/>
+              </a:ext>
+            </a:extLst>
+          </p:cNvPr>
+          <p:cNvSpPr>
+            <a:spLocks noGrp="1"/>
+          </p:cNvSpPr>
+          <p:nvPr/>
+        </p:nvSpPr>
+        <p:spPr>
+          <a:xfrm>
+            <a:off x="5981700" y="3924300"/>
+            <a:ext cx="1104900" cy="533400"/>
+          </a:xfrm>
+          <a:prstGeom prst="roundRect">
+            <a:avLst>
+              <a:gd name="adj" fmla="val 10714"/>
+            </a:avLst>
+          </a:prstGeom>
+          <a:solidFill>
+            <a:srgbClr val="FFFFFF"/>
+          </a:solidFill>
+          <a:ln w="9525">
+            <a:solidFill>
+              <a:srgbClr val="A9D8D3"/>
+            </a:solidFill>
+            <a:prstDash val="solid"/>
+          </a:ln>
+        </p:spPr>
+        <p:txBody>
+          <a:bodyPr wrap="square" lIns="57150" tIns="57150" rIns="57150" bIns="57150" anchor="ctr">
+            <a:noAutofit/>
+          </a:bodyPr>
+          <a:lstStyle/>
+          <a:p>
+            <a:pPr marL="0" indent="0" algn="ctr">
+              <a:spcAft>
+                <a:spcPts val="0"/>
+              </a:spcAft>
+              <a:buNone/>
+              <a:defRPr sz="1125" b="1">
+                <a:solidFill>
+                  <a:srgbClr val="132925"/>
+                </a:solidFill>
+                <a:latin typeface="Aptos"/>
+                <a:ea typeface="Aptos"/>
+                <a:cs typeface="Aptos"/>
+              </a:defRPr>
+            </a:pPr>
+            <a:r>
+              <a:rPr sz="1650" b="1" i="0">
+                <a:solidFill>
+                  <a:srgbClr val="132925"/>
+                </a:solidFill>
+                <a:latin typeface="Aptos"/>
+                <a:ea typeface="Aptos"/>
+                <a:cs typeface="Aptos"/>
+              </a:rPr>
+              <a:t>Browser</a:t>
+            </a:r>
+          </a:p>
+        </p:txBody>
+      </p:sp>
+      <p:sp>
+        <p:nvSpPr>
+          <p:cNvPr id="15" name="Rounded Rectangle 14">
+            <a:extLst>
+              <a:ext uri="{FF2B5EF4-FFF2-40B4-BE49-F238E27FC236}">
+                <a16:creationId xmlns:a16="http://schemas.microsoft.com/office/drawing/2014/main" id="{81861C35-94A9-465A-B8EC-CDCDC119DA9C}"/>
+              </a:ext>
+            </a:extLst>
+          </p:cNvPr>
+          <p:cNvSpPr>
+            <a:spLocks noGrp="1"/>
+          </p:cNvSpPr>
+          <p:nvPr/>
+        </p:nvSpPr>
+        <p:spPr>
+          <a:xfrm>
+            <a:off x="7448550" y="3848100"/>
+            <a:ext cx="1181100" cy="685800"/>
+          </a:xfrm>
+          <a:prstGeom prst="roundRect">
+            <a:avLst>
+              <a:gd name="adj" fmla="val 8333"/>
+            </a:avLst>
+          </a:prstGeom>
+          <a:solidFill>
+            <a:srgbClr val="FFFFFF"/>
+          </a:solidFill>
+          <a:ln w="9525">
+            <a:solidFill>
+              <a:srgbClr val="A9D8D3"/>
+            </a:solidFill>
+            <a:prstDash val="solid"/>
+          </a:ln>
+        </p:spPr>
+        <p:txBody>
+          <a:bodyPr wrap="square" lIns="57150" tIns="57150" rIns="57150" bIns="57150" anchor="ctr">
+            <a:noAutofit/>
+          </a:bodyPr>
+          <a:lstStyle/>
+          <a:p>
+            <a:pPr marL="0" indent="0" algn="ctr">
+              <a:spcAft>
+                <a:spcPts val="0"/>
+              </a:spcAft>
+              <a:buNone/>
+              <a:defRPr sz="1125" b="1">
+                <a:solidFill>
+                  <a:srgbClr val="132925"/>
+                </a:solidFill>
+                <a:latin typeface="Aptos"/>
+                <a:ea typeface="Aptos"/>
+                <a:cs typeface="Aptos"/>
+              </a:defRPr>
+            </a:pPr>
+            <a:r>
+              <a:rPr sz="1650" b="1" i="0">
+                <a:solidFill>
+                  <a:srgbClr val="132925"/>
+                </a:solidFill>
+                <a:latin typeface="Aptos"/>
+                <a:ea typeface="Aptos"/>
+                <a:cs typeface="Aptos"/>
+              </a:rPr>
+              <a:t>Alibaba
+Ingress</a:t>
+            </a:r>
+          </a:p>
+        </p:txBody>
+      </p:sp>
+      <p:sp>
+        <p:nvSpPr>
+          <p:cNvPr id="16" name="Rounded Rectangle 15">
+            <a:extLst>
+              <a:ext uri="{FF2B5EF4-FFF2-40B4-BE49-F238E27FC236}">
+                <a16:creationId xmlns:a16="http://schemas.microsoft.com/office/drawing/2014/main" id="{ABC37DA4-1276-4622-8062-28FF27D7A3C5}"/>
+              </a:ext>
+            </a:extLst>
+          </p:cNvPr>
+          <p:cNvSpPr>
+            <a:spLocks noGrp="1"/>
+          </p:cNvSpPr>
+          <p:nvPr/>
+        </p:nvSpPr>
+        <p:spPr>
+          <a:xfrm>
+            <a:off x="8991600" y="3848100"/>
+            <a:ext cx="1257300" cy="685800"/>
+          </a:xfrm>
+          <a:prstGeom prst="roundRect">
+            <a:avLst>
+              <a:gd name="adj" fmla="val 8333"/>
+            </a:avLst>
+          </a:prstGeom>
+          <a:solidFill>
+            <a:srgbClr val="DDF0ED"/>
+          </a:solidFill>
+          <a:ln w="9525">
+            <a:solidFill>
+              <a:srgbClr val="087C72"/>
+            </a:solidFill>
+            <a:prstDash val="solid"/>
+          </a:ln>
+        </p:spPr>
+        <p:txBody>
+          <a:bodyPr wrap="square" lIns="57150" tIns="57150" rIns="57150" bIns="57150" anchor="ctr">
+            <a:noAutofit/>
+          </a:bodyPr>
+          <a:lstStyle/>
+          <a:p>
+            <a:pPr marL="0" indent="0" algn="ctr">
+              <a:spcAft>
+                <a:spcPts val="0"/>
+              </a:spcAft>
+              <a:buNone/>
+              <a:defRPr sz="1125" b="1">
+                <a:solidFill>
+                  <a:srgbClr val="0B3D38"/>
+                </a:solidFill>
+                <a:latin typeface="Aptos"/>
+                <a:ea typeface="Aptos"/>
+                <a:cs typeface="Aptos"/>
+              </a:defRPr>
+            </a:pPr>
+            <a:r>
+              <a:rPr sz="1650" b="1" i="0">
+                <a:solidFill>
+                  <a:srgbClr val="0B3D38"/>
+                </a:solidFill>
+                <a:latin typeface="Aptos"/>
+                <a:ea typeface="Aptos"/>
+                <a:cs typeface="Aptos"/>
+              </a:rPr>
+              <a:t>BatchHelm
+UI + API</a:t>
+            </a:r>
+          </a:p>
+        </p:txBody>
+      </p:sp>
+      <p:sp>
+        <p:nvSpPr>
+          <p:cNvPr id="17" name="Rounded Rectangle 16">
+            <a:extLst>
+              <a:ext uri="{FF2B5EF4-FFF2-40B4-BE49-F238E27FC236}">
+                <a16:creationId xmlns:a16="http://schemas.microsoft.com/office/drawing/2014/main" id="{419CCE41-5F8A-489B-BCBA-CFC052C022BD}"/>
+              </a:ext>
+            </a:extLst>
+          </p:cNvPr>
+          <p:cNvSpPr>
+            <a:spLocks noGrp="1"/>
+          </p:cNvSpPr>
+          <p:nvPr/>
+        </p:nvSpPr>
+        <p:spPr>
+          <a:xfrm>
+            <a:off x="10420350" y="3924300"/>
+            <a:ext cx="1123950" cy="533400"/>
+          </a:xfrm>
+          <a:prstGeom prst="roundRect">
+            <a:avLst>
+              <a:gd name="adj" fmla="val 10714"/>
+            </a:avLst>
+          </a:prstGeom>
+          <a:solidFill>
+            <a:srgbClr val="FFFFFF"/>
+          </a:solidFill>
+          <a:ln w="9525">
+            <a:solidFill>
+              <a:srgbClr val="A9D8D3"/>
+            </a:solidFill>
+            <a:prstDash val="solid"/>
+          </a:ln>
+        </p:spPr>
+        <p:txBody>
+          <a:bodyPr wrap="square" lIns="57150" tIns="57150" rIns="57150" bIns="57150" anchor="ctr">
+            <a:noAutofit/>
+          </a:bodyPr>
+          <a:lstStyle/>
+          <a:p>
+            <a:pPr marL="0" indent="0" algn="ctr">
+              <a:spcAft>
+                <a:spcPts val="0"/>
+              </a:spcAft>
+              <a:buNone/>
+              <a:defRPr sz="1125" b="1">
+                <a:solidFill>
+                  <a:srgbClr val="132925"/>
+                </a:solidFill>
+                <a:latin typeface="Aptos"/>
+                <a:ea typeface="Aptos"/>
+                <a:cs typeface="Aptos"/>
+              </a:defRPr>
+            </a:pPr>
+            <a:r>
+              <a:rPr sz="1650" b="1" i="0">
+                <a:solidFill>
+                  <a:srgbClr val="132925"/>
+                </a:solidFill>
+                <a:latin typeface="Aptos"/>
+                <a:ea typeface="Aptos"/>
+                <a:cs typeface="Aptos"/>
+              </a:rPr>
+              <a:t>Qwen Cloud</a:t>
+            </a:r>
+          </a:p>
+        </p:txBody>
+      </p:sp>
+      <p:cxnSp>
+        <p:nvCxnSpPr>
+          <p:cNvPr id="42" name="Straight Arrow Connector 41"/>
+          <p:cNvCxnSpPr>
+            <a:stCxn id="14" idx="3"/>
+            <a:endCxn id="15" idx="1"/>
+          </p:cNvCxnSpPr>
+          <p:nvPr/>
+        </p:nvCxnSpPr>
+        <p:spPr>
+          <a:xfrm>
+            <a:off x="7086600" y="4191000"/>
+            <a:ext cx="361950" cy="0"/>
+          </a:xfrm>
+          <a:prstGeom prst="straightConnector1">
+            <a:avLst/>
+          </a:prstGeom>
+          <a:ln w="19050">
+            <a:solidFill>
+              <a:srgbClr val="7EB9B2"/>
+            </a:solidFill>
+            <a:prstDash val="solid"/>
+            <a:headEnd type="none" w="med" len="med"/>
+            <a:tailEnd type="arrow" w="sm" len="sm"/>
+          </a:ln>
+        </p:spPr>
+      </p:cxnSp>
+      <p:cxnSp>
+        <p:nvCxnSpPr>
+          <p:cNvPr id="43" name="Straight Arrow Connector 42"/>
+          <p:cNvCxnSpPr>
+            <a:stCxn id="15" idx="3"/>
+            <a:endCxn id="16" idx="1"/>
+          </p:cNvCxnSpPr>
+          <p:nvPr/>
+        </p:nvCxnSpPr>
+        <p:spPr>
+          <a:xfrm>
+            <a:off x="8629650" y="4191000"/>
+            <a:ext cx="361950" cy="0"/>
+          </a:xfrm>
+          <a:prstGeom prst="straightConnector1">
+            <a:avLst/>
+          </a:prstGeom>
+          <a:ln w="19050">
+            <a:solidFill>
+              <a:srgbClr val="7EB9B2"/>
+            </a:solidFill>
+            <a:prstDash val="solid"/>
+            <a:headEnd type="none" w="med" len="med"/>
+            <a:tailEnd type="arrow" w="sm" len="sm"/>
+          </a:ln>
+        </p:spPr>
+      </p:cxnSp>
+      <p:cxnSp>
+        <p:nvCxnSpPr>
+          <p:cNvPr id="44" name="Straight Arrow Connector 43"/>
+          <p:cNvCxnSpPr>
+            <a:stCxn id="16" idx="3"/>
+            <a:endCxn id="17" idx="1"/>
+          </p:cNvCxnSpPr>
+          <p:nvPr/>
+        </p:nvCxnSpPr>
+        <p:spPr>
+          <a:xfrm>
+            <a:off x="10248900" y="4191000"/>
+            <a:ext cx="171450" cy="0"/>
+          </a:xfrm>
+          <a:prstGeom prst="straightConnector1">
+            <a:avLst/>
+          </a:prstGeom>
+          <a:ln w="19050">
+            <a:solidFill>
+              <a:srgbClr val="7EB9B2"/>
+            </a:solidFill>
+            <a:prstDash val="solid"/>
+            <a:headEnd type="none" w="med" len="med"/>
+            <a:tailEnd type="arrow" w="sm" len="sm"/>
+          </a:ln>
+        </p:spPr>
+      </p:cxnSp>
+      <p:sp>
+        <p:nvSpPr>
+          <p:cNvPr id="21" name="Rounded Rectangle 20">
+            <a:extLst>
+              <a:ext uri="{FF2B5EF4-FFF2-40B4-BE49-F238E27FC236}">
+                <a16:creationId xmlns:a16="http://schemas.microsoft.com/office/drawing/2014/main" id="{CE11FF7F-5167-4827-B068-2EBC75672C4D}"/>
+              </a:ext>
+            </a:extLst>
+          </p:cNvPr>
+          <p:cNvSpPr>
+            <a:spLocks noGrp="1"/>
+          </p:cNvSpPr>
+          <p:nvPr/>
+        </p:nvSpPr>
+        <p:spPr>
+          <a:xfrm>
+            <a:off x="7772400" y="5048250"/>
+            <a:ext cx="1428750" cy="609600"/>
+          </a:xfrm>
+          <a:prstGeom prst="roundRect">
+            <a:avLst>
+              <a:gd name="adj" fmla="val 9375"/>
+            </a:avLst>
+          </a:prstGeom>
+          <a:solidFill>
+            <a:srgbClr val="FFFFFF"/>
+          </a:solidFill>
+          <a:ln w="9525">
+            <a:solidFill>
+              <a:srgbClr val="C47A00"/>
+            </a:solidFill>
+            <a:prstDash val="solid"/>
+          </a:ln>
+        </p:spPr>
+        <p:txBody>
+          <a:bodyPr wrap="square" lIns="57150" tIns="57150" rIns="57150" bIns="57150" anchor="ctr">
+            <a:noAutofit/>
+          </a:bodyPr>
+          <a:lstStyle/>
+          <a:p>
+            <a:pPr marL="0" indent="0" algn="ctr">
+              <a:spcAft>
+                <a:spcPts val="0"/>
+              </a:spcAft>
+              <a:buNone/>
+              <a:defRPr sz="1125" b="1">
+                <a:solidFill>
+                  <a:srgbClr val="132925"/>
+                </a:solidFill>
+                <a:latin typeface="Aptos"/>
+                <a:ea typeface="Aptos"/>
+                <a:cs typeface="Aptos"/>
+              </a:defRPr>
+            </a:pPr>
+            <a:r>
+              <a:rPr sz="1650" b="1" i="0">
+                <a:solidFill>
+                  <a:srgbClr val="132925"/>
+                </a:solidFill>
+                <a:latin typeface="Aptos"/>
+                <a:ea typeface="Aptos"/>
+                <a:cs typeface="Aptos"/>
+              </a:rPr>
+              <a:t>SQLite volume</a:t>
+            </a:r>
+          </a:p>
+        </p:txBody>
+      </p:sp>
+      <p:sp>
+        <p:nvSpPr>
+          <p:cNvPr id="22" name="Rounded Rectangle 21">
+            <a:extLst>
+              <a:ext uri="{FF2B5EF4-FFF2-40B4-BE49-F238E27FC236}">
+                <a16:creationId xmlns:a16="http://schemas.microsoft.com/office/drawing/2014/main" id="{142D66AA-0AD6-4672-BFEF-F85A77E9AECD}"/>
+              </a:ext>
+            </a:extLst>
+          </p:cNvPr>
+          <p:cNvSpPr>
+            <a:spLocks noGrp="1"/>
+          </p:cNvSpPr>
+          <p:nvPr/>
+        </p:nvSpPr>
+        <p:spPr>
+          <a:xfrm>
+            <a:off x="9410700" y="5048250"/>
+            <a:ext cx="1428750" cy="609600"/>
+          </a:xfrm>
+          <a:prstGeom prst="roundRect">
+            <a:avLst>
+              <a:gd name="adj" fmla="val 9375"/>
+            </a:avLst>
+          </a:prstGeom>
+          <a:solidFill>
+            <a:srgbClr val="FFFFFF"/>
+          </a:solidFill>
+          <a:ln w="9525">
+            <a:solidFill>
+              <a:srgbClr val="C47A00"/>
+            </a:solidFill>
+            <a:prstDash val="solid"/>
+          </a:ln>
+        </p:spPr>
+        <p:txBody>
+          <a:bodyPr wrap="square" lIns="57150" tIns="57150" rIns="57150" bIns="57150" anchor="ctr">
+            <a:noAutofit/>
+          </a:bodyPr>
+          <a:lstStyle/>
+          <a:p>
+            <a:pPr marL="0" indent="0" algn="ctr">
+              <a:spcAft>
+                <a:spcPts val="0"/>
+              </a:spcAft>
+              <a:buNone/>
+              <a:defRPr sz="1125" b="1">
+                <a:solidFill>
+                  <a:srgbClr val="132925"/>
+                </a:solidFill>
+                <a:latin typeface="Aptos"/>
+                <a:ea typeface="Aptos"/>
+                <a:cs typeface="Aptos"/>
+              </a:defRPr>
+            </a:pPr>
+            <a:r>
+              <a:rPr sz="1650" b="1" i="0">
+                <a:solidFill>
+                  <a:srgbClr val="132925"/>
+                </a:solidFill>
+                <a:latin typeface="Aptos"/>
+                <a:ea typeface="Aptos"/>
+                <a:cs typeface="Aptos"/>
+              </a:rPr>
+              <a:t>Artifact storage</a:t>
+            </a:r>
+          </a:p>
+        </p:txBody>
+      </p:sp>
+      <p:cxnSp>
+        <p:nvCxnSpPr>
+          <p:cNvPr id="47" name="Elbow Connector 46"/>
+          <p:cNvCxnSpPr>
+            <a:stCxn id="16" idx="2"/>
+            <a:endCxn id="21" idx="0"/>
+          </p:cNvCxnSpPr>
+          <p:nvPr/>
+        </p:nvCxnSpPr>
+        <p:spPr>
+          <a:xfrm flipH="1">
+            <a:off x="8486775" y="4533900"/>
+            <a:ext cx="1133475" cy="514350"/>
+          </a:xfrm>
+          <a:prstGeom prst="bentConnector4">
+            <a:avLst>
+              <a:gd name="adj1" fmla="val 0"/>
+              <a:gd name="adj2" fmla="val 50000"/>
+            </a:avLst>
+          </a:prstGeom>
+          <a:ln w="19050">
+            <a:solidFill>
+              <a:srgbClr val="D7B56D"/>
+            </a:solidFill>
+            <a:prstDash val="solid"/>
+            <a:headEnd type="none" w="med" len="med"/>
+            <a:tailEnd type="none" w="med" len="med"/>
+          </a:ln>
+        </p:spPr>
+      </p:cxnSp>
+      <p:cxnSp>
+        <p:nvCxnSpPr>
+          <p:cNvPr id="48" name="Elbow Connector 47"/>
+          <p:cNvCxnSpPr>
+            <a:stCxn id="16" idx="2"/>
+            <a:endCxn id="22" idx="0"/>
+          </p:cNvCxnSpPr>
+          <p:nvPr/>
+        </p:nvCxnSpPr>
+        <p:spPr>
+          <a:xfrm>
+            <a:off x="9620250" y="4533900"/>
+            <a:ext cx="504825" cy="514350"/>
+          </a:xfrm>
+          <a:prstGeom prst="bentConnector4">
+            <a:avLst>
+              <a:gd name="adj1" fmla="val 0"/>
+              <a:gd name="adj2" fmla="val 50000"/>
+            </a:avLst>
+          </a:prstGeom>
+          <a:ln w="19050">
+            <a:solidFill>
+              <a:srgbClr val="D7B56D"/>
+            </a:solidFill>
+            <a:prstDash val="solid"/>
+            <a:headEnd type="none" w="med" len="med"/>
+            <a:tailEnd type="none" w="med" len="med"/>
+          </a:ln>
+        </p:spPr>
+      </p:cxnSp>
+      <p:sp>
+        <p:nvSpPr>
+          <p:cNvPr id="25" name="Rectangle 24">
+            <a:extLst>
+              <a:ext uri="{FF2B5EF4-FFF2-40B4-BE49-F238E27FC236}">
+                <a16:creationId xmlns:a16="http://schemas.microsoft.com/office/drawing/2014/main" id="{61A41C06-81EC-46B6-B1D2-12C8DF02E2A7}"/>
+              </a:ext>
+            </a:extLst>
+          </p:cNvPr>
+          <p:cNvSpPr>
+            <a:spLocks noGrp="1"/>
+          </p:cNvSpPr>
+          <p:nvPr/>
+        </p:nvSpPr>
+        <p:spPr>
+          <a:xfrm>
+            <a:off x="5981700" y="5810250"/>
+            <a:ext cx="5562600" cy="457200"/>
+          </a:xfrm>
+          <a:prstGeom prst="rect">
+            <a:avLst/>
+          </a:prstGeom>
+          <a:noFill/>
+          <a:ln w="0">
+            <a:noFill/>
+            <a:prstDash val="solid"/>
+          </a:ln>
+        </p:spPr>
+        <p:txBody>
+          <a:bodyPr wrap="square" lIns="0" tIns="0" rIns="0" bIns="0" anchor="t">
+            <a:noAutofit/>
+          </a:bodyPr>
+          <a:lstStyle/>
+          <a:p>
+            <a:pPr marL="0" indent="0" algn="ctr">
+              <a:spcAft>
+                <a:spcPts val="0"/>
+              </a:spcAft>
+              <a:buNone/>
+              <a:defRPr sz="1125" b="0">
+                <a:solidFill>
+                  <a:srgbClr val="D6E3DF"/>
+                </a:solidFill>
+                <a:latin typeface="Aptos"/>
+                <a:ea typeface="Aptos"/>
+                <a:cs typeface="Aptos"/>
+              </a:defRPr>
+            </a:pPr>
+            <a:r>
+              <a:rPr sz="1650" b="0" i="0">
+                <a:solidFill>
+                  <a:srgbClr val="D6E3DF"/>
+                </a:solidFill>
+                <a:latin typeface="Aptos"/>
+                <a:ea typeface="Aptos"/>
+                <a:cs typeface="Aptos"/>
+              </a:rPr>
+              <a:t>Docker image · health checks · persistent volumes · one API replica</a:t>
             </a:r>
           </a:p>
         </p:txBody>
@@ -4855,7 +6297,7 @@
         </p:spPr>
         <p:txBody>
           <a:bodyPr wrap="square" lIns="0" tIns="0" rIns="0" bIns="0" anchor="ctr">
-            <a:normAutofit/>
+            <a:noAutofit/>
           </a:bodyPr>
           <a:lstStyle/>
           <a:p>
@@ -4911,7 +6353,7 @@
         </p:spPr>
         <p:txBody>
           <a:bodyPr wrap="square" lIns="0" tIns="0" rIns="76200" bIns="0" anchor="t">
-            <a:normAutofit/>
+            <a:noAutofit/>
           </a:bodyPr>
           <a:lstStyle/>
           <a:p>
@@ -5120,7 +6562,7 @@
               </a:defRPr>
             </a:pPr>
             <a:r>
-              <a:rPr sz="1425" b="1" i="0">
+              <a:rPr sz="1650" b="1" i="0">
                 <a:solidFill>
                   <a:srgbClr val="132925"/>
                 </a:solidFill>
@@ -5138,7 +6580,7 @@
           <p:cNvPr id="4" name="Rounded Rectangle 3">
             <a:extLst>
               <a:ext uri="{FF2B5EF4-FFF2-40B4-BE49-F238E27FC236}">
-                <a16:creationId xmlns:a16="http://schemas.microsoft.com/office/drawing/2014/main" id="{78E3EF89-EEAF-4F60-A1B1-4B4483142F6B}"/>
+                <a16:creationId xmlns:a16="http://schemas.microsoft.com/office/drawing/2014/main" id="{A0597062-CFCA-4A33-89EC-7B59CE1578BB}"/>
               </a:ext>
             </a:extLst>
           </p:cNvPr>
@@ -5150,11 +6592,11 @@
         <p:spPr>
           <a:xfrm>
             <a:off x="6019800" y="1504950"/>
-            <a:ext cx="2095500" cy="323850"/>
+            <a:ext cx="2286000" cy="361950"/>
           </a:xfrm>
           <a:prstGeom prst="roundRect">
             <a:avLst>
-              <a:gd name="adj" fmla="val 17647"/>
+              <a:gd name="adj" fmla="val 15789"/>
             </a:avLst>
           </a:prstGeom>
           <a:solidFill>
@@ -5167,20 +6609,13 @@
             <a:prstDash val="solid"/>
           </a:ln>
         </p:spPr>
-        <p:txBody>
-          <a:bodyPr/>
-          <a:lstStyle/>
-          <a:p>
-            <a:endParaRPr lang="en-US"/>
-          </a:p>
-        </p:txBody>
       </p:sp>
       <p:sp>
         <p:nvSpPr>
           <p:cNvPr id="5" name="Rectangle 4">
             <a:extLst>
               <a:ext uri="{FF2B5EF4-FFF2-40B4-BE49-F238E27FC236}">
-                <a16:creationId xmlns:a16="http://schemas.microsoft.com/office/drawing/2014/main" id="{32F7A7FA-E038-471F-8626-48B19F8B4F5C}"/>
+                <a16:creationId xmlns:a16="http://schemas.microsoft.com/office/drawing/2014/main" id="{1D97A436-483C-4B42-B3DC-566FD2A5F57F}"/>
               </a:ext>
             </a:extLst>
           </p:cNvPr>
@@ -5192,7 +6627,7 @@
         <p:spPr>
           <a:xfrm>
             <a:off x="6096000" y="1533525"/>
-            <a:ext cx="1943100" cy="266700"/>
+            <a:ext cx="2133600" cy="304800"/>
           </a:xfrm>
           <a:prstGeom prst="rect">
             <a:avLst/>
@@ -5205,7 +6640,7 @@
         </p:spPr>
         <p:txBody>
           <a:bodyPr wrap="square" lIns="0" tIns="0" rIns="0" bIns="0" anchor="ctr">
-            <a:normAutofit/>
+            <a:noAutofit/>
           </a:bodyPr>
           <a:lstStyle/>
           <a:p>
@@ -5224,7 +6659,7 @@
               </a:defRPr>
             </a:pPr>
             <a:r>
-              <a:rPr sz="1125" b="1" i="0">
+              <a:rPr sz="1650" b="1" i="0">
                 <a:solidFill>
                   <a:srgbClr val="B42318"/>
                 </a:solidFill>
@@ -5232,7 +6667,7 @@
                 <a:ea typeface="Aptos"/>
                 <a:cs typeface="Aptos"/>
               </a:rPr>
-              <a:t>SYNTHETIC DEMO PACKET</a:t>
+              <a:t>SYNTHETIC PACKET</a:t>
             </a:r>
           </a:p>
         </p:txBody>
@@ -5242,7 +6677,7 @@
           <p:cNvPr id="6" name="Rounded Rectangle 5">
             <a:extLst>
               <a:ext uri="{FF2B5EF4-FFF2-40B4-BE49-F238E27FC236}">
-                <a16:creationId xmlns:a16="http://schemas.microsoft.com/office/drawing/2014/main" id="{D5E98621-BDEE-428B-B5ED-F116E5DBBDAA}"/>
+                <a16:creationId xmlns:a16="http://schemas.microsoft.com/office/drawing/2014/main" id="{AF57F4E0-BA19-4FBB-8C1B-72EC57A6B6DF}"/>
               </a:ext>
             </a:extLst>
           </p:cNvPr>
@@ -5271,13 +6706,6 @@
             <a:prstDash val="solid"/>
           </a:ln>
         </p:spPr>
-        <p:txBody>
-          <a:bodyPr/>
-          <a:lstStyle/>
-          <a:p>
-            <a:endParaRPr lang="en-US"/>
-          </a:p>
-        </p:txBody>
       </p:sp>
       <p:pic>
         <p:nvPicPr>
@@ -5308,7 +6736,7 @@
           <p:cNvPr id="8" name="Rounded Rectangle 7">
             <a:extLst>
               <a:ext uri="{FF2B5EF4-FFF2-40B4-BE49-F238E27FC236}">
-                <a16:creationId xmlns:a16="http://schemas.microsoft.com/office/drawing/2014/main" id="{63DDFC06-13AF-4E9A-B444-8A604638BFF5}"/>
+                <a16:creationId xmlns:a16="http://schemas.microsoft.com/office/drawing/2014/main" id="{DC2598F8-DD4B-43AE-9A9E-6B57CF4A41C9}"/>
               </a:ext>
             </a:extLst>
           </p:cNvPr>
@@ -5337,13 +6765,6 @@
             <a:prstDash val="solid"/>
           </a:ln>
         </p:spPr>
-        <p:txBody>
-          <a:bodyPr/>
-          <a:lstStyle/>
-          <a:p>
-            <a:endParaRPr lang="en-US"/>
-          </a:p>
-        </p:txBody>
       </p:sp>
       <p:pic>
         <p:nvPicPr>
@@ -5377,7 +6798,7 @@
           <p:cNvPr id="10" name="Rectangle 9">
             <a:extLst>
               <a:ext uri="{FF2B5EF4-FFF2-40B4-BE49-F238E27FC236}">
-                <a16:creationId xmlns:a16="http://schemas.microsoft.com/office/drawing/2014/main" id="{50D66590-44F1-4708-8617-F8CEC4BC1F12}"/>
+                <a16:creationId xmlns:a16="http://schemas.microsoft.com/office/drawing/2014/main" id="{17CD7E11-2F55-45DD-84AD-5C3B4A62127D}"/>
               </a:ext>
             </a:extLst>
           </p:cNvPr>
@@ -5402,7 +6823,7 @@
         </p:spPr>
         <p:txBody>
           <a:bodyPr wrap="square" lIns="0" tIns="0" rIns="0" bIns="0" anchor="t">
-            <a:normAutofit/>
+            <a:noAutofit/>
           </a:bodyPr>
           <a:lstStyle/>
           <a:p>
@@ -5421,7 +6842,7 @@
               </a:defRPr>
             </a:pPr>
             <a:r>
-              <a:rPr sz="1500" b="1" i="0">
+              <a:rPr sz="1650" b="1" i="0">
                 <a:solidFill>
                   <a:srgbClr val="132925"/>
                 </a:solidFill>
@@ -5448,7 +6869,7 @@
               </a:defRPr>
             </a:pPr>
             <a:r>
-              <a:rPr sz="1350" b="0" i="0">
+              <a:rPr sz="1650" b="0" i="0">
                 <a:solidFill>
                   <a:srgbClr val="5B6F6A"/>
                 </a:solidFill>
@@ -5523,7 +6944,7 @@
         </p:spPr>
         <p:txBody>
           <a:bodyPr wrap="square" lIns="0" tIns="0" rIns="0" bIns="0" anchor="ctr">
-            <a:normAutofit/>
+            <a:noAutofit/>
           </a:bodyPr>
           <a:lstStyle/>
           <a:p>
@@ -5579,7 +7000,7 @@
         </p:spPr>
         <p:txBody>
           <a:bodyPr wrap="square" lIns="0" tIns="0" rIns="76200" bIns="0" anchor="t">
-            <a:normAutofit/>
+            <a:noAutofit/>
           </a:bodyPr>
           <a:lstStyle/>
           <a:p>
@@ -5636,7 +7057,7 @@
               <a:t>6</a:t>
             </a:r>
             <a:r>
-              <a:rPr sz="1350" b="0" i="0">
+              <a:rPr sz="1650" b="0" i="0">
                 <a:solidFill>
                   <a:srgbClr val="5B6F6A"/>
                 </a:solidFill>
@@ -5674,7 +7095,7 @@
               <a:t>2</a:t>
             </a:r>
             <a:r>
-              <a:rPr sz="1350" b="0" i="0">
+              <a:rPr sz="1650" b="0" i="0">
                 <a:solidFill>
                   <a:srgbClr val="5B6F6A"/>
                 </a:solidFill>
@@ -5712,7 +7133,7 @@
               <a:t>23</a:t>
             </a:r>
             <a:r>
-              <a:rPr sz="1350" b="0" i="0">
+              <a:rPr sz="1650" b="0" i="0">
                 <a:solidFill>
                   <a:srgbClr val="5B6F6A"/>
                 </a:solidFill>
@@ -5750,7 +7171,7 @@
               <a:t>2</a:t>
             </a:r>
             <a:r>
-              <a:rPr sz="1350" b="0" i="0">
+              <a:rPr sz="1650" b="0" i="0">
                 <a:solidFill>
                   <a:srgbClr val="5B6F6A"/>
                 </a:solidFill>
@@ -5788,7 +7209,7 @@
               <a:t>2</a:t>
             </a:r>
             <a:r>
-              <a:rPr sz="1350" b="0" i="0">
+              <a:rPr sz="1650" b="0" i="0">
                 <a:solidFill>
                   <a:srgbClr val="5B6F6A"/>
                 </a:solidFill>
@@ -5806,7 +7227,7 @@
           <p:cNvPr id="4" name="Rectangle 3">
             <a:extLst>
               <a:ext uri="{FF2B5EF4-FFF2-40B4-BE49-F238E27FC236}">
-                <a16:creationId xmlns:a16="http://schemas.microsoft.com/office/drawing/2014/main" id="{CFC7DA05-A0A6-43F1-B11C-649CC014A181}"/>
+                <a16:creationId xmlns:a16="http://schemas.microsoft.com/office/drawing/2014/main" id="{448087B0-126D-4652-AE30-C28FA3B8F607}"/>
               </a:ext>
             </a:extLst>
           </p:cNvPr>
@@ -5831,7 +7252,7 @@
         </p:spPr>
         <p:txBody>
           <a:bodyPr wrap="square" lIns="0" tIns="0" rIns="0" bIns="0" anchor="ctr">
-            <a:normAutofit/>
+            <a:noAutofit/>
           </a:bodyPr>
           <a:lstStyle/>
           <a:p>
@@ -5850,7 +7271,7 @@
               </a:defRPr>
             </a:pPr>
             <a:r>
-              <a:rPr sz="1200" b="1" i="0">
+              <a:rPr sz="1650" b="1" i="0">
                 <a:solidFill>
                   <a:srgbClr val="087C72"/>
                 </a:solidFill>
@@ -5861,7 +7282,7 @@
               <a:t>01</a:t>
             </a:r>
             <a:r>
-              <a:rPr sz="1200" b="1" i="0">
+              <a:rPr sz="1650" b="1" i="0">
                 <a:solidFill>
                   <a:srgbClr val="132925"/>
                 </a:solidFill>
@@ -5879,7 +7300,7 @@
           <p:cNvPr id="5" name="Rectangle 4">
             <a:extLst>
               <a:ext uri="{FF2B5EF4-FFF2-40B4-BE49-F238E27FC236}">
-                <a16:creationId xmlns:a16="http://schemas.microsoft.com/office/drawing/2014/main" id="{44638042-81DC-41E5-9A67-3D389E2985F3}"/>
+                <a16:creationId xmlns:a16="http://schemas.microsoft.com/office/drawing/2014/main" id="{1282F77C-A44D-44FE-8745-E22235300601}"/>
               </a:ext>
             </a:extLst>
           </p:cNvPr>
@@ -5906,20 +7327,13 @@
             <a:prstDash val="solid"/>
           </a:ln>
         </p:spPr>
-        <p:txBody>
-          <a:bodyPr/>
-          <a:lstStyle/>
-          <a:p>
-            <a:endParaRPr lang="en-US"/>
-          </a:p>
-        </p:txBody>
       </p:sp>
       <p:sp>
         <p:nvSpPr>
           <p:cNvPr id="6" name="Rectangle 5">
             <a:extLst>
               <a:ext uri="{FF2B5EF4-FFF2-40B4-BE49-F238E27FC236}">
-                <a16:creationId xmlns:a16="http://schemas.microsoft.com/office/drawing/2014/main" id="{80E8BE82-F1AB-47FF-908A-88220C0A9BAB}"/>
+                <a16:creationId xmlns:a16="http://schemas.microsoft.com/office/drawing/2014/main" id="{8463F2A2-C79F-4C83-A1E2-81404A95398F}"/>
               </a:ext>
             </a:extLst>
           </p:cNvPr>
@@ -5944,7 +7358,7 @@
         </p:spPr>
         <p:txBody>
           <a:bodyPr wrap="square" lIns="0" tIns="0" rIns="0" bIns="0" anchor="ctr">
-            <a:normAutofit/>
+            <a:noAutofit/>
           </a:bodyPr>
           <a:lstStyle/>
           <a:p>
@@ -5963,7 +7377,7 @@
               </a:defRPr>
             </a:pPr>
             <a:r>
-              <a:rPr sz="1200" b="1" i="0">
+              <a:rPr sz="1650" b="1" i="0">
                 <a:solidFill>
                   <a:srgbClr val="087C72"/>
                 </a:solidFill>
@@ -5974,7 +7388,7 @@
               <a:t>02</a:t>
             </a:r>
             <a:r>
-              <a:rPr sz="1200" b="1" i="0">
+              <a:rPr sz="1650" b="1" i="0">
                 <a:solidFill>
                   <a:srgbClr val="132925"/>
                 </a:solidFill>
@@ -5992,7 +7406,7 @@
           <p:cNvPr id="7" name="Rectangle 6">
             <a:extLst>
               <a:ext uri="{FF2B5EF4-FFF2-40B4-BE49-F238E27FC236}">
-                <a16:creationId xmlns:a16="http://schemas.microsoft.com/office/drawing/2014/main" id="{6DEA5E17-1DED-4E99-A8B9-1672AD49990E}"/>
+                <a16:creationId xmlns:a16="http://schemas.microsoft.com/office/drawing/2014/main" id="{9B78594E-68B8-4E27-A726-95342C8FB4E2}"/>
               </a:ext>
             </a:extLst>
           </p:cNvPr>
@@ -6019,20 +7433,13 @@
             <a:prstDash val="solid"/>
           </a:ln>
         </p:spPr>
-        <p:txBody>
-          <a:bodyPr/>
-          <a:lstStyle/>
-          <a:p>
-            <a:endParaRPr lang="en-US"/>
-          </a:p>
-        </p:txBody>
       </p:sp>
       <p:sp>
         <p:nvSpPr>
           <p:cNvPr id="8" name="Rectangle 7">
             <a:extLst>
               <a:ext uri="{FF2B5EF4-FFF2-40B4-BE49-F238E27FC236}">
-                <a16:creationId xmlns:a16="http://schemas.microsoft.com/office/drawing/2014/main" id="{E99D4AB8-3576-4BF6-87F2-74361EA1D8F7}"/>
+                <a16:creationId xmlns:a16="http://schemas.microsoft.com/office/drawing/2014/main" id="{5AFC7D99-F6A3-4565-ACBE-90F659169686}"/>
               </a:ext>
             </a:extLst>
           </p:cNvPr>
@@ -6057,7 +7464,7 @@
         </p:spPr>
         <p:txBody>
           <a:bodyPr wrap="square" lIns="0" tIns="0" rIns="0" bIns="0" anchor="ctr">
-            <a:normAutofit/>
+            <a:noAutofit/>
           </a:bodyPr>
           <a:lstStyle/>
           <a:p>
@@ -6076,7 +7483,7 @@
               </a:defRPr>
             </a:pPr>
             <a:r>
-              <a:rPr sz="1200" b="1" i="0">
+              <a:rPr sz="1650" b="1" i="0">
                 <a:solidFill>
                   <a:srgbClr val="087C72"/>
                 </a:solidFill>
@@ -6087,7 +7494,7 @@
               <a:t>03</a:t>
             </a:r>
             <a:r>
-              <a:rPr sz="1200" b="1" i="0">
+              <a:rPr sz="1650" b="1" i="0">
                 <a:solidFill>
                   <a:srgbClr val="132925"/>
                 </a:solidFill>
@@ -6105,7 +7512,7 @@
           <p:cNvPr id="9" name="Rounded Rectangle 8">
             <a:extLst>
               <a:ext uri="{FF2B5EF4-FFF2-40B4-BE49-F238E27FC236}">
-                <a16:creationId xmlns:a16="http://schemas.microsoft.com/office/drawing/2014/main" id="{9BAA7DC2-6A53-4B71-86D4-686B68C048A0}"/>
+                <a16:creationId xmlns:a16="http://schemas.microsoft.com/office/drawing/2014/main" id="{BF0D46D3-8740-49B6-B113-976D012467DB}"/>
               </a:ext>
             </a:extLst>
           </p:cNvPr>
@@ -6134,13 +7541,6 @@
             <a:prstDash val="solid"/>
           </a:ln>
         </p:spPr>
-        <p:txBody>
-          <a:bodyPr/>
-          <a:lstStyle/>
-          <a:p>
-            <a:endParaRPr lang="en-US"/>
-          </a:p>
-        </p:txBody>
       </p:sp>
       <p:pic>
         <p:nvPicPr>
@@ -6171,7 +7571,7 @@
           <p:cNvPr id="11" name="Rounded Rectangle 10">
             <a:extLst>
               <a:ext uri="{FF2B5EF4-FFF2-40B4-BE49-F238E27FC236}">
-                <a16:creationId xmlns:a16="http://schemas.microsoft.com/office/drawing/2014/main" id="{77FE3062-DBEF-436C-B97A-C14E87C5206B}"/>
+                <a16:creationId xmlns:a16="http://schemas.microsoft.com/office/drawing/2014/main" id="{7E479CD6-B606-4F03-B170-16CE5F08A67F}"/>
               </a:ext>
             </a:extLst>
           </p:cNvPr>
@@ -6200,13 +7600,6 @@
             <a:prstDash val="solid"/>
           </a:ln>
         </p:spPr>
-        <p:txBody>
-          <a:bodyPr/>
-          <a:lstStyle/>
-          <a:p>
-            <a:endParaRPr lang="en-US"/>
-          </a:p>
-        </p:txBody>
       </p:sp>
       <p:pic>
         <p:nvPicPr>
@@ -6237,7 +7630,7 @@
           <p:cNvPr id="13" name="Rounded Rectangle 12">
             <a:extLst>
               <a:ext uri="{FF2B5EF4-FFF2-40B4-BE49-F238E27FC236}">
-                <a16:creationId xmlns:a16="http://schemas.microsoft.com/office/drawing/2014/main" id="{AA875BFC-F62C-4C2E-A408-06B56D7BE6AD}"/>
+                <a16:creationId xmlns:a16="http://schemas.microsoft.com/office/drawing/2014/main" id="{301B94A6-BF77-4541-ADB6-99874AC40D4D}"/>
               </a:ext>
             </a:extLst>
           </p:cNvPr>
@@ -6266,20 +7659,13 @@
             <a:prstDash val="solid"/>
           </a:ln>
         </p:spPr>
-        <p:txBody>
-          <a:bodyPr/>
-          <a:lstStyle/>
-          <a:p>
-            <a:endParaRPr lang="en-US"/>
-          </a:p>
-        </p:txBody>
       </p:sp>
       <p:sp>
         <p:nvSpPr>
           <p:cNvPr id="14" name="Rectangle 13">
             <a:extLst>
               <a:ext uri="{FF2B5EF4-FFF2-40B4-BE49-F238E27FC236}">
-                <a16:creationId xmlns:a16="http://schemas.microsoft.com/office/drawing/2014/main" id="{E9AB5BA9-E7A0-44B8-8CF9-D684A23579E2}"/>
+                <a16:creationId xmlns:a16="http://schemas.microsoft.com/office/drawing/2014/main" id="{DBC99786-99C5-4FD1-84D9-DC93C9C92600}"/>
               </a:ext>
             </a:extLst>
           </p:cNvPr>
@@ -6304,7 +7690,7 @@
         </p:spPr>
         <p:txBody>
           <a:bodyPr wrap="square" lIns="0" tIns="0" rIns="0" bIns="0" anchor="t">
-            <a:normAutofit/>
+            <a:noAutofit/>
           </a:bodyPr>
           <a:lstStyle/>
           <a:p>
@@ -6350,7 +7736,7 @@
               </a:defRPr>
             </a:pPr>
             <a:r>
-              <a:rPr sz="1350" b="1" i="0">
+              <a:rPr sz="1650" b="1" i="0">
                 <a:solidFill>
                   <a:srgbClr val="087C72"/>
                 </a:solidFill>
@@ -6361,7 +7747,7 @@
               <a:t>Supplier notice</a:t>
             </a:r>
             <a:r>
-              <a:rPr sz="1350" b="0" i="0">
+              <a:rPr sz="1650" b="0" i="0">
                 <a:solidFill>
                   <a:srgbClr val="132925"/>
                 </a:solidFill>
@@ -6372,7 +7758,7 @@
               <a:t> identifies the product and lots. </a:t>
             </a:r>
             <a:r>
-              <a:rPr sz="1350" b="1" i="0">
+              <a:rPr sz="1650" b="1" i="0">
                 <a:solidFill>
                   <a:srgbClr val="087C72"/>
                 </a:solidFill>
@@ -6383,7 +7769,7 @@
               <a:t>Inventory rows</a:t>
             </a:r>
             <a:r>
-              <a:rPr sz="1350" b="0" i="0">
+              <a:rPr sz="1650" b="0" i="0">
                 <a:solidFill>
                   <a:srgbClr val="132925"/>
                 </a:solidFill>
@@ -6394,7 +7780,7 @@
               <a:t> carry accepted or rejected status. </a:t>
             </a:r>
             <a:r>
-              <a:rPr sz="1350" b="1" i="0">
+              <a:rPr sz="1650" b="1" i="0">
                 <a:solidFill>
                   <a:srgbClr val="087C72"/>
                 </a:solidFill>
@@ -6405,7 +7791,7 @@
               <a:t>Shelf evidence</a:t>
             </a:r>
             <a:r>
-              <a:rPr sz="1350" b="0" i="0">
+              <a:rPr sz="1650" b="0" i="0">
                 <a:solidFill>
                   <a:srgbClr val="132925"/>
                 </a:solidFill>
@@ -6480,7 +7866,7 @@
         </p:spPr>
         <p:txBody>
           <a:bodyPr wrap="square" lIns="0" tIns="0" rIns="0" bIns="0" anchor="ctr">
-            <a:normAutofit/>
+            <a:noAutofit/>
           </a:bodyPr>
           <a:lstStyle/>
           <a:p>
@@ -6536,7 +7922,7 @@
         </p:spPr>
         <p:txBody>
           <a:bodyPr wrap="square" lIns="0" tIns="0" rIns="76200" bIns="0" anchor="t">
-            <a:normAutofit/>
+            <a:noAutofit/>
           </a:bodyPr>
           <a:lstStyle/>
           <a:p>
@@ -6582,7 +7968,7 @@
               </a:defRPr>
             </a:pPr>
             <a:r>
-              <a:rPr sz="1125" b="1" i="0">
+              <a:rPr sz="1650" b="1" i="0">
                 <a:solidFill>
                   <a:srgbClr val="087C72"/>
                 </a:solidFill>
@@ -6593,7 +7979,7 @@
               <a:t>VERSIONED</a:t>
             </a:r>
             <a:r>
-              <a:rPr sz="1500" b="0" i="0">
+              <a:rPr sz="1650" b="0" i="0">
                 <a:solidFill>
                   <a:srgbClr val="132925"/>
                 </a:solidFill>
@@ -6620,7 +8006,7 @@
               </a:defRPr>
             </a:pPr>
             <a:r>
-              <a:rPr sz="1125" b="1" i="0">
+              <a:rPr sz="1650" b="1" i="0">
                 <a:solidFill>
                   <a:srgbClr val="B42318"/>
                 </a:solidFill>
@@ -6631,7 +8017,7 @@
               <a:t>CONFLICT</a:t>
             </a:r>
             <a:r>
-              <a:rPr sz="1500" b="0" i="0">
+              <a:rPr sz="1650" b="0" i="0">
                 <a:solidFill>
                   <a:srgbClr val="132925"/>
                 </a:solidFill>
@@ -6658,7 +8044,7 @@
               </a:defRPr>
             </a:pPr>
             <a:r>
-              <a:rPr sz="1125" b="1" i="0">
+              <a:rPr sz="1650" b="1" i="0">
                 <a:solidFill>
                   <a:srgbClr val="087C72"/>
                 </a:solidFill>
@@ -6669,7 +8055,7 @@
               <a:t>IMMUTABLE</a:t>
             </a:r>
             <a:r>
-              <a:rPr sz="1500" b="0" i="0">
+              <a:rPr sz="1650" b="0" i="0">
                 <a:solidFill>
                   <a:srgbClr val="132925"/>
                 </a:solidFill>
@@ -6696,7 +8082,7 @@
               </a:defRPr>
             </a:pPr>
             <a:r>
-              <a:rPr sz="1125" b="1" i="0">
+              <a:rPr sz="1650" b="1" i="0">
                 <a:solidFill>
                   <a:srgbClr val="B42318"/>
                 </a:solidFill>
@@ -6707,7 +8093,7 @@
               <a:t>BLOCKED</a:t>
             </a:r>
             <a:r>
-              <a:rPr sz="1500" b="0" i="0">
+              <a:rPr sz="1650" b="0" i="0">
                 <a:solidFill>
                   <a:srgbClr val="132925"/>
                 </a:solidFill>
@@ -6734,7 +8120,7 @@
               </a:defRPr>
             </a:pPr>
             <a:r>
-              <a:rPr sz="1125" b="1" i="0">
+              <a:rPr sz="1650" b="1" i="0">
                 <a:solidFill>
                   <a:srgbClr val="C47A00"/>
                 </a:solidFill>
@@ -6745,7 +8131,7 @@
               <a:t>UNKNOWN</a:t>
             </a:r>
             <a:r>
-              <a:rPr sz="1500" b="0" i="0">
+              <a:rPr sz="1650" b="0" i="0">
                 <a:solidFill>
                   <a:srgbClr val="132925"/>
                 </a:solidFill>
@@ -6763,7 +8149,7 @@
           <p:cNvPr id="4" name="Rounded Rectangle 3">
             <a:extLst>
               <a:ext uri="{FF2B5EF4-FFF2-40B4-BE49-F238E27FC236}">
-                <a16:creationId xmlns:a16="http://schemas.microsoft.com/office/drawing/2014/main" id="{0917426A-F966-42C6-9C13-11694049DB53}"/>
+                <a16:creationId xmlns:a16="http://schemas.microsoft.com/office/drawing/2014/main" id="{D453BFDA-E0AD-4E01-84C6-838AD3437A2D}"/>
               </a:ext>
             </a:extLst>
           </p:cNvPr>
@@ -6792,13 +8178,6 @@
             <a:prstDash val="solid"/>
           </a:ln>
         </p:spPr>
-        <p:txBody>
-          <a:bodyPr/>
-          <a:lstStyle/>
-          <a:p>
-            <a:endParaRPr lang="en-US"/>
-          </a:p>
-        </p:txBody>
       </p:sp>
       <p:pic>
         <p:nvPicPr>
@@ -6829,7 +8208,7 @@
           <p:cNvPr id="6" name="Rounded Rectangle 5">
             <a:extLst>
               <a:ext uri="{FF2B5EF4-FFF2-40B4-BE49-F238E27FC236}">
-                <a16:creationId xmlns:a16="http://schemas.microsoft.com/office/drawing/2014/main" id="{993A5729-2DBC-4C05-8873-26C4974EBDCB}"/>
+                <a16:creationId xmlns:a16="http://schemas.microsoft.com/office/drawing/2014/main" id="{193B25FC-CB1F-49A4-BC60-6D2C589BB77E}"/>
               </a:ext>
             </a:extLst>
           </p:cNvPr>
@@ -6858,20 +8237,13 @@
             <a:prstDash val="solid"/>
           </a:ln>
         </p:spPr>
-        <p:txBody>
-          <a:bodyPr/>
-          <a:lstStyle/>
-          <a:p>
-            <a:endParaRPr lang="en-US"/>
-          </a:p>
-        </p:txBody>
       </p:sp>
       <p:sp>
         <p:nvSpPr>
           <p:cNvPr id="7" name="Rectangle 6">
             <a:extLst>
               <a:ext uri="{FF2B5EF4-FFF2-40B4-BE49-F238E27FC236}">
-                <a16:creationId xmlns:a16="http://schemas.microsoft.com/office/drawing/2014/main" id="{1ECE6D09-8698-4331-89F3-ED8BBF53AEFE}"/>
+                <a16:creationId xmlns:a16="http://schemas.microsoft.com/office/drawing/2014/main" id="{F5402B70-5C27-42D8-AA4D-014C43B13D7A}"/>
               </a:ext>
             </a:extLst>
           </p:cNvPr>
@@ -6896,7 +8268,7 @@
         </p:spPr>
         <p:txBody>
           <a:bodyPr wrap="square" lIns="0" tIns="0" rIns="0" bIns="0" anchor="ctr">
-            <a:normAutofit/>
+            <a:noAutofit/>
           </a:bodyPr>
           <a:lstStyle/>
           <a:p>
@@ -6915,7 +8287,7 @@
               </a:defRPr>
             </a:pPr>
             <a:r>
-              <a:rPr sz="1125" b="1" i="0">
+              <a:rPr sz="1650" b="1" i="0">
                 <a:solidFill>
                   <a:srgbClr val="C47A00"/>
                 </a:solidFill>
@@ -6933,7 +8305,7 @@
           <p:cNvPr id="8" name="Rounded Rectangle 7">
             <a:extLst>
               <a:ext uri="{FF2B5EF4-FFF2-40B4-BE49-F238E27FC236}">
-                <a16:creationId xmlns:a16="http://schemas.microsoft.com/office/drawing/2014/main" id="{08BC1510-2D23-40C2-9A8C-45F903658CC6}"/>
+                <a16:creationId xmlns:a16="http://schemas.microsoft.com/office/drawing/2014/main" id="{5C511DFB-27AD-4220-A6B0-E272FF499C13}"/>
               </a:ext>
             </a:extLst>
           </p:cNvPr>
@@ -6945,11 +8317,11 @@
         <p:spPr>
           <a:xfrm>
             <a:off x="8553450" y="2247900"/>
-            <a:ext cx="2667000" cy="1657350"/>
+            <a:ext cx="2667000" cy="1809750"/>
           </a:xfrm>
           <a:prstGeom prst="roundRect">
             <a:avLst>
-              <a:gd name="adj" fmla="val 3448"/>
+              <a:gd name="adj" fmla="val 3158"/>
             </a:avLst>
           </a:prstGeom>
           <a:solidFill>
@@ -6962,20 +8334,13 @@
             <a:prstDash val="solid"/>
           </a:ln>
         </p:spPr>
-        <p:txBody>
-          <a:bodyPr/>
-          <a:lstStyle/>
-          <a:p>
-            <a:endParaRPr lang="en-US"/>
-          </a:p>
-        </p:txBody>
       </p:sp>
       <p:sp>
         <p:nvSpPr>
           <p:cNvPr id="9" name="Rectangle 8">
             <a:extLst>
               <a:ext uri="{FF2B5EF4-FFF2-40B4-BE49-F238E27FC236}">
-                <a16:creationId xmlns:a16="http://schemas.microsoft.com/office/drawing/2014/main" id="{A0CD4B93-2C96-42C7-89EF-2610DF10808D}"/>
+                <a16:creationId xmlns:a16="http://schemas.microsoft.com/office/drawing/2014/main" id="{8D4E912B-20BE-4A78-96CC-7C10364705D4}"/>
               </a:ext>
             </a:extLst>
           </p:cNvPr>
@@ -6987,7 +8352,7 @@
         <p:spPr>
           <a:xfrm>
             <a:off x="8782050" y="2457450"/>
-            <a:ext cx="2209800" cy="1200150"/>
+            <a:ext cx="2209800" cy="1447800"/>
           </a:xfrm>
           <a:prstGeom prst="rect">
             <a:avLst/>
@@ -7000,7 +8365,7 @@
         </p:spPr>
         <p:txBody>
           <a:bodyPr wrap="square" lIns="0" tIns="0" rIns="0" bIns="0" anchor="t">
-            <a:normAutofit fontScale="92724"/>
+            <a:noAutofit/>
           </a:bodyPr>
           <a:lstStyle/>
           <a:p>
@@ -7046,7 +8411,7 @@
               </a:defRPr>
             </a:pPr>
             <a:r>
-              <a:rPr sz="1350" b="0" i="0">
+              <a:rPr sz="1650" b="0" i="0">
                 <a:solidFill>
                   <a:srgbClr val="5B6F6A"/>
                 </a:solidFill>
@@ -7054,7 +8419,7 @@
                 <a:ea typeface="Aptos"/>
                 <a:cs typeface="Aptos"/>
               </a:rPr>
-              <a:t>An arbitrary image never becomes a false match. It stays unknown, preserves provenance, and requires review.</a:t>
+              <a:t>Arbitrary images never become matches. Unknown evidence keeps provenance and requires review.</a:t>
             </a:r>
           </a:p>
         </p:txBody>
@@ -7064,7 +8429,7 @@
           <p:cNvPr id="10" name="Rectangle 9">
             <a:extLst>
               <a:ext uri="{FF2B5EF4-FFF2-40B4-BE49-F238E27FC236}">
-                <a16:creationId xmlns:a16="http://schemas.microsoft.com/office/drawing/2014/main" id="{925F015E-3C71-4651-9F92-4739E6B50B04}"/>
+                <a16:creationId xmlns:a16="http://schemas.microsoft.com/office/drawing/2014/main" id="{AA0788DD-A2F1-4683-902B-655D5D9802AC}"/>
               </a:ext>
             </a:extLst>
           </p:cNvPr>
@@ -7091,20 +8456,13 @@
             <a:prstDash val="solid"/>
           </a:ln>
         </p:spPr>
-        <p:txBody>
-          <a:bodyPr/>
-          <a:lstStyle/>
-          <a:p>
-            <a:endParaRPr lang="en-US"/>
-          </a:p>
-        </p:txBody>
       </p:sp>
       <p:sp>
         <p:nvSpPr>
           <p:cNvPr id="11" name="Rectangle 10">
             <a:extLst>
               <a:ext uri="{FF2B5EF4-FFF2-40B4-BE49-F238E27FC236}">
-                <a16:creationId xmlns:a16="http://schemas.microsoft.com/office/drawing/2014/main" id="{B2CE3884-1CAE-4A20-BF01-B79DDD309CC8}"/>
+                <a16:creationId xmlns:a16="http://schemas.microsoft.com/office/drawing/2014/main" id="{82AD469F-292A-48AF-964E-B5771E2384D9}"/>
               </a:ext>
             </a:extLst>
           </p:cNvPr>
@@ -7129,7 +8487,7 @@
         </p:spPr>
         <p:txBody>
           <a:bodyPr wrap="square" lIns="0" tIns="0" rIns="0" bIns="0" anchor="ctr">
-            <a:normAutofit/>
+            <a:noAutofit/>
           </a:bodyPr>
           <a:lstStyle/>
           <a:p>
@@ -7159,7 +8517,7 @@
               <a:t>2</a:t>
             </a:r>
             <a:r>
-              <a:rPr sz="1275" b="0" i="0">
+              <a:rPr sz="1650" b="0" i="0">
                 <a:solidFill>
                   <a:srgbClr val="5B6F6A"/>
                 </a:solidFill>
@@ -7177,7 +8535,7 @@
           <p:cNvPr id="12" name="Rectangle 11">
             <a:extLst>
               <a:ext uri="{FF2B5EF4-FFF2-40B4-BE49-F238E27FC236}">
-                <a16:creationId xmlns:a16="http://schemas.microsoft.com/office/drawing/2014/main" id="{A20F7DEE-372C-4C20-85AC-F449420C6317}"/>
+                <a16:creationId xmlns:a16="http://schemas.microsoft.com/office/drawing/2014/main" id="{EDC40047-B9A8-4028-9567-08BBB0D86D10}"/>
               </a:ext>
             </a:extLst>
           </p:cNvPr>
@@ -7204,20 +8562,13 @@
             <a:prstDash val="solid"/>
           </a:ln>
         </p:spPr>
-        <p:txBody>
-          <a:bodyPr/>
-          <a:lstStyle/>
-          <a:p>
-            <a:endParaRPr lang="en-US"/>
-          </a:p>
-        </p:txBody>
       </p:sp>
       <p:sp>
         <p:nvSpPr>
           <p:cNvPr id="13" name="Rectangle 12">
             <a:extLst>
               <a:ext uri="{FF2B5EF4-FFF2-40B4-BE49-F238E27FC236}">
-                <a16:creationId xmlns:a16="http://schemas.microsoft.com/office/drawing/2014/main" id="{9745E85A-CD3D-413F-98F5-11D4AC34A478}"/>
+                <a16:creationId xmlns:a16="http://schemas.microsoft.com/office/drawing/2014/main" id="{33589060-8B33-4798-8745-70DA4ADA488F}"/>
               </a:ext>
             </a:extLst>
           </p:cNvPr>
@@ -7242,7 +8593,7 @@
         </p:spPr>
         <p:txBody>
           <a:bodyPr wrap="square" lIns="0" tIns="0" rIns="0" bIns="0" anchor="ctr">
-            <a:normAutofit/>
+            <a:noAutofit/>
           </a:bodyPr>
           <a:lstStyle/>
           <a:p>
@@ -7272,7 +8623,7 @@
               <a:t>1</a:t>
             </a:r>
             <a:r>
-              <a:rPr sz="1275" b="0" i="0">
+              <a:rPr sz="1650" b="0" i="0">
                 <a:solidFill>
                   <a:srgbClr val="5B6F6A"/>
                 </a:solidFill>
@@ -7280,7 +8631,7 @@
                 <a:ea typeface="Aptos"/>
                 <a:cs typeface="Aptos"/>
               </a:rPr>
-              <a:t>  confirmation unlocks launch</a:t>
+              <a:t>  confirm to unlock launch</a:t>
             </a:r>
           </a:p>
         </p:txBody>
@@ -7347,7 +8698,7 @@
         </p:spPr>
         <p:txBody>
           <a:bodyPr wrap="square" lIns="0" tIns="0" rIns="0" bIns="0" anchor="ctr">
-            <a:normAutofit/>
+            <a:noAutofit/>
           </a:bodyPr>
           <a:lstStyle/>
           <a:p>
@@ -7403,7 +8754,7 @@
         </p:spPr>
         <p:txBody>
           <a:bodyPr wrap="square" lIns="0" tIns="0" rIns="76200" bIns="0" anchor="t">
-            <a:normAutofit/>
+            <a:noAutofit/>
           </a:bodyPr>
           <a:lstStyle/>
           <a:p>
@@ -7449,7 +8800,7 @@
               </a:defRPr>
             </a:pPr>
             <a:r>
-              <a:rPr sz="1125" b="1" i="0">
+              <a:rPr sz="1650" b="1" i="0">
                 <a:solidFill>
                   <a:srgbClr val="087C72"/>
                 </a:solidFill>
@@ -7460,7 +8811,7 @@
               <a:t>EXTRACT</a:t>
             </a:r>
             <a:r>
-              <a:rPr sz="1500" b="0" i="0">
+              <a:rPr sz="1650" b="0" i="0">
                 <a:solidFill>
                   <a:srgbClr val="132925"/>
                 </a:solidFill>
@@ -7487,7 +8838,7 @@
               </a:defRPr>
             </a:pPr>
             <a:r>
-              <a:rPr sz="1125" b="1" i="0">
+              <a:rPr sz="1650" b="1" i="0">
                 <a:solidFill>
                   <a:srgbClr val="087C72"/>
                 </a:solidFill>
@@ -7498,7 +8849,7 @@
               <a:t>SEE</a:t>
             </a:r>
             <a:r>
-              <a:rPr sz="1500" b="0" i="0">
+              <a:rPr sz="1650" b="0" i="0">
                 <a:solidFill>
                   <a:srgbClr val="132925"/>
                 </a:solidFill>
@@ -7525,7 +8876,7 @@
               </a:defRPr>
             </a:pPr>
             <a:r>
-              <a:rPr sz="1125" b="1" i="0">
+              <a:rPr sz="1650" b="1" i="0">
                 <a:solidFill>
                   <a:srgbClr val="087C72"/>
                 </a:solidFill>
@@ -7536,7 +8887,7 @@
               <a:t>MATCH</a:t>
             </a:r>
             <a:r>
-              <a:rPr sz="1500" b="0" i="0">
+              <a:rPr sz="1650" b="0" i="0">
                 <a:solidFill>
                   <a:srgbClr val="132925"/>
                 </a:solidFill>
@@ -7563,7 +8914,7 @@
               </a:defRPr>
             </a:pPr>
             <a:r>
-              <a:rPr sz="1125" b="1" i="0">
+              <a:rPr sz="1650" b="1" i="0">
                 <a:solidFill>
                   <a:srgbClr val="087C72"/>
                 </a:solidFill>
@@ -7574,7 +8925,7 @@
               <a:t>CLASSIFY</a:t>
             </a:r>
             <a:r>
-              <a:rPr sz="1500" b="0" i="0">
+              <a:rPr sz="1650" b="0" i="0">
                 <a:solidFill>
                   <a:srgbClr val="132925"/>
                 </a:solidFill>
@@ -7601,7 +8952,7 @@
               </a:defRPr>
             </a:pPr>
             <a:r>
-              <a:rPr sz="1125" b="1" i="0">
+              <a:rPr sz="1650" b="1" i="0">
                 <a:solidFill>
                   <a:srgbClr val="087C72"/>
                 </a:solidFill>
@@ -7612,7 +8963,7 @@
               <a:t>WRITE</a:t>
             </a:r>
             <a:r>
-              <a:rPr sz="1500" b="0" i="0">
+              <a:rPr sz="1650" b="0" i="0">
                 <a:solidFill>
                   <a:srgbClr val="132925"/>
                 </a:solidFill>
@@ -7639,7 +8990,7 @@
               </a:defRPr>
             </a:pPr>
             <a:r>
-              <a:rPr sz="1125" b="1" i="0">
+              <a:rPr sz="1650" b="1" i="0">
                 <a:solidFill>
                   <a:srgbClr val="087C72"/>
                 </a:solidFill>
@@ -7650,7 +9001,7 @@
               <a:t>BRIEF</a:t>
             </a:r>
             <a:r>
-              <a:rPr sz="1500" b="0" i="0">
+              <a:rPr sz="1650" b="0" i="0">
                 <a:solidFill>
                   <a:srgbClr val="132925"/>
                 </a:solidFill>
@@ -7668,7 +9019,7 @@
           <p:cNvPr id="4" name="Rectangle 3">
             <a:extLst>
               <a:ext uri="{FF2B5EF4-FFF2-40B4-BE49-F238E27FC236}">
-                <a16:creationId xmlns:a16="http://schemas.microsoft.com/office/drawing/2014/main" id="{C8584D73-AD4A-4E85-A0B5-E18B7830F84C}"/>
+                <a16:creationId xmlns:a16="http://schemas.microsoft.com/office/drawing/2014/main" id="{AAF58F10-B833-45D6-A4C6-DCD09A597C4A}"/>
               </a:ext>
             </a:extLst>
           </p:cNvPr>
@@ -7693,7 +9044,7 @@
         </p:spPr>
         <p:txBody>
           <a:bodyPr wrap="square" lIns="0" tIns="0" rIns="0" bIns="0" anchor="t">
-            <a:normAutofit/>
+            <a:noAutofit/>
           </a:bodyPr>
           <a:lstStyle/>
           <a:p>
@@ -7702,17 +9053,17 @@
                 <a:spcPts val="0"/>
               </a:spcAft>
               <a:buNone/>
-              <a:defRPr sz="2025" b="0">
-                <a:solidFill>
-                  <a:srgbClr val="132925"/>
-                </a:solidFill>
-                <a:latin typeface="Aptos"/>
-                <a:ea typeface="Aptos"/>
-                <a:cs typeface="Aptos"/>
-              </a:defRPr>
-            </a:pPr>
-            <a:r>
-              <a:rPr sz="2025" b="1" i="0">
+              <a:defRPr sz="2400" b="0">
+                <a:solidFill>
+                  <a:srgbClr val="132925"/>
+                </a:solidFill>
+                <a:latin typeface="Aptos"/>
+                <a:ea typeface="Aptos"/>
+                <a:cs typeface="Aptos"/>
+              </a:defRPr>
+            </a:pPr>
+            <a:r>
+              <a:rPr sz="2400" b="1" i="0">
                 <a:solidFill>
                   <a:srgbClr val="0B3D38"/>
                 </a:solidFill>
@@ -7730,7 +9081,7 @@
           <p:cNvPr id="5" name="Rectangle 4">
             <a:extLst>
               <a:ext uri="{FF2B5EF4-FFF2-40B4-BE49-F238E27FC236}">
-                <a16:creationId xmlns:a16="http://schemas.microsoft.com/office/drawing/2014/main" id="{49DB38AB-AB7C-4A4F-A99D-4E2FEA9214AB}"/>
+                <a16:creationId xmlns:a16="http://schemas.microsoft.com/office/drawing/2014/main" id="{F0DF93E5-F517-407B-BE5B-ACF60E939C54}"/>
               </a:ext>
             </a:extLst>
           </p:cNvPr>
@@ -7757,20 +9108,13 @@
             <a:prstDash val="solid"/>
           </a:ln>
         </p:spPr>
-        <p:txBody>
-          <a:bodyPr/>
-          <a:lstStyle/>
-          <a:p>
-            <a:endParaRPr lang="en-US"/>
-          </a:p>
-        </p:txBody>
       </p:sp>
       <p:sp>
         <p:nvSpPr>
           <p:cNvPr id="6" name="Rectangle 5">
             <a:extLst>
               <a:ext uri="{FF2B5EF4-FFF2-40B4-BE49-F238E27FC236}">
-                <a16:creationId xmlns:a16="http://schemas.microsoft.com/office/drawing/2014/main" id="{E3DA5237-1074-41E6-BEA6-93001745959B}"/>
+                <a16:creationId xmlns:a16="http://schemas.microsoft.com/office/drawing/2014/main" id="{48D1850C-6A41-4EF0-9D2E-B5ECC4EAAB42}"/>
               </a:ext>
             </a:extLst>
           </p:cNvPr>
@@ -7795,7 +9139,7 @@
         </p:spPr>
         <p:txBody>
           <a:bodyPr wrap="square" lIns="0" tIns="0" rIns="0" bIns="0" anchor="ctr">
-            <a:normAutofit/>
+            <a:noAutofit/>
           </a:bodyPr>
           <a:lstStyle/>
           <a:p>
@@ -7814,7 +9158,7 @@
               </a:defRPr>
             </a:pPr>
             <a:r>
-              <a:rPr sz="1125" b="1" i="0">
+              <a:rPr sz="1650" b="1" i="0">
                 <a:solidFill>
                   <a:srgbClr val="087C72"/>
                 </a:solidFill>
@@ -7825,7 +9169,7 @@
               <a:t>01</a:t>
             </a:r>
             <a:r>
-              <a:rPr sz="1500" b="0" i="0">
+              <a:rPr sz="1650" b="0" i="0">
                 <a:solidFill>
                   <a:srgbClr val="132925"/>
                 </a:solidFill>
@@ -7843,7 +9187,7 @@
           <p:cNvPr id="7" name="Rectangle 6">
             <a:extLst>
               <a:ext uri="{FF2B5EF4-FFF2-40B4-BE49-F238E27FC236}">
-                <a16:creationId xmlns:a16="http://schemas.microsoft.com/office/drawing/2014/main" id="{EFC9E596-08BE-4DF3-85FA-17C060743901}"/>
+                <a16:creationId xmlns:a16="http://schemas.microsoft.com/office/drawing/2014/main" id="{03FF5431-F253-430E-AE31-48A8D0902D2D}"/>
               </a:ext>
             </a:extLst>
           </p:cNvPr>
@@ -7870,20 +9214,13 @@
             <a:prstDash val="solid"/>
           </a:ln>
         </p:spPr>
-        <p:txBody>
-          <a:bodyPr/>
-          <a:lstStyle/>
-          <a:p>
-            <a:endParaRPr lang="en-US"/>
-          </a:p>
-        </p:txBody>
       </p:sp>
       <p:sp>
         <p:nvSpPr>
           <p:cNvPr id="8" name="Rectangle 7">
             <a:extLst>
               <a:ext uri="{FF2B5EF4-FFF2-40B4-BE49-F238E27FC236}">
-                <a16:creationId xmlns:a16="http://schemas.microsoft.com/office/drawing/2014/main" id="{9D79E248-48DE-4726-8F29-A7B904595117}"/>
+                <a16:creationId xmlns:a16="http://schemas.microsoft.com/office/drawing/2014/main" id="{53B39180-4F82-4AF8-A8B8-E0C2B31186D7}"/>
               </a:ext>
             </a:extLst>
           </p:cNvPr>
@@ -7908,7 +9245,7 @@
         </p:spPr>
         <p:txBody>
           <a:bodyPr wrap="square" lIns="0" tIns="0" rIns="0" bIns="0" anchor="ctr">
-            <a:normAutofit/>
+            <a:noAutofit/>
           </a:bodyPr>
           <a:lstStyle/>
           <a:p>
@@ -7927,7 +9264,7 @@
               </a:defRPr>
             </a:pPr>
             <a:r>
-              <a:rPr sz="1125" b="1" i="0">
+              <a:rPr sz="1650" b="1" i="0">
                 <a:solidFill>
                   <a:srgbClr val="087C72"/>
                 </a:solidFill>
@@ -7938,7 +9275,7 @@
               <a:t>02</a:t>
             </a:r>
             <a:r>
-              <a:rPr sz="1500" b="0" i="0">
+              <a:rPr sz="1650" b="0" i="0">
                 <a:solidFill>
                   <a:srgbClr val="132925"/>
                 </a:solidFill>
@@ -7956,7 +9293,7 @@
           <p:cNvPr id="9" name="Rectangle 8">
             <a:extLst>
               <a:ext uri="{FF2B5EF4-FFF2-40B4-BE49-F238E27FC236}">
-                <a16:creationId xmlns:a16="http://schemas.microsoft.com/office/drawing/2014/main" id="{6D5F2987-D25E-4119-AAC8-8264DACC307B}"/>
+                <a16:creationId xmlns:a16="http://schemas.microsoft.com/office/drawing/2014/main" id="{76DD70E7-60DF-430D-A2CE-1BE5B04B669E}"/>
               </a:ext>
             </a:extLst>
           </p:cNvPr>
@@ -7983,20 +9320,13 @@
             <a:prstDash val="solid"/>
           </a:ln>
         </p:spPr>
-        <p:txBody>
-          <a:bodyPr/>
-          <a:lstStyle/>
-          <a:p>
-            <a:endParaRPr lang="en-US"/>
-          </a:p>
-        </p:txBody>
       </p:sp>
       <p:sp>
         <p:nvSpPr>
           <p:cNvPr id="10" name="Rectangle 9">
             <a:extLst>
               <a:ext uri="{FF2B5EF4-FFF2-40B4-BE49-F238E27FC236}">
-                <a16:creationId xmlns:a16="http://schemas.microsoft.com/office/drawing/2014/main" id="{C0B5066D-2CA3-4354-88FF-0FAA5F182691}"/>
+                <a16:creationId xmlns:a16="http://schemas.microsoft.com/office/drawing/2014/main" id="{9064CC38-21E4-4CA5-A442-2D1A7F9CD19F}"/>
               </a:ext>
             </a:extLst>
           </p:cNvPr>
@@ -8021,7 +9351,7 @@
         </p:spPr>
         <p:txBody>
           <a:bodyPr wrap="square" lIns="0" tIns="0" rIns="0" bIns="0" anchor="ctr">
-            <a:normAutofit/>
+            <a:noAutofit/>
           </a:bodyPr>
           <a:lstStyle/>
           <a:p>
@@ -8040,7 +9370,7 @@
               </a:defRPr>
             </a:pPr>
             <a:r>
-              <a:rPr sz="1125" b="1" i="0">
+              <a:rPr sz="1650" b="1" i="0">
                 <a:solidFill>
                   <a:srgbClr val="087C72"/>
                 </a:solidFill>
@@ -8051,7 +9381,7 @@
               <a:t>03</a:t>
             </a:r>
             <a:r>
-              <a:rPr sz="1500" b="0" i="0">
+              <a:rPr sz="1650" b="0" i="0">
                 <a:solidFill>
                   <a:srgbClr val="132925"/>
                 </a:solidFill>
@@ -8069,7 +9399,7 @@
           <p:cNvPr id="11" name="Rectangle 10">
             <a:extLst>
               <a:ext uri="{FF2B5EF4-FFF2-40B4-BE49-F238E27FC236}">
-                <a16:creationId xmlns:a16="http://schemas.microsoft.com/office/drawing/2014/main" id="{57DFB12F-8FDB-4B31-A927-13C6316248D5}"/>
+                <a16:creationId xmlns:a16="http://schemas.microsoft.com/office/drawing/2014/main" id="{208EAF7E-AE18-45DC-833C-1365E8E02D1A}"/>
               </a:ext>
             </a:extLst>
           </p:cNvPr>
@@ -8096,20 +9426,13 @@
             <a:prstDash val="solid"/>
           </a:ln>
         </p:spPr>
-        <p:txBody>
-          <a:bodyPr/>
-          <a:lstStyle/>
-          <a:p>
-            <a:endParaRPr lang="en-US"/>
-          </a:p>
-        </p:txBody>
       </p:sp>
       <p:sp>
         <p:nvSpPr>
           <p:cNvPr id="12" name="Rectangle 11">
             <a:extLst>
               <a:ext uri="{FF2B5EF4-FFF2-40B4-BE49-F238E27FC236}">
-                <a16:creationId xmlns:a16="http://schemas.microsoft.com/office/drawing/2014/main" id="{5B0460DF-E78A-4095-BBE2-0CD3F0C79C0C}"/>
+                <a16:creationId xmlns:a16="http://schemas.microsoft.com/office/drawing/2014/main" id="{EADC1967-4C2E-4D60-AFE6-D47D1E9602F6}"/>
               </a:ext>
             </a:extLst>
           </p:cNvPr>
@@ -8134,7 +9457,7 @@
         </p:spPr>
         <p:txBody>
           <a:bodyPr wrap="square" lIns="0" tIns="0" rIns="0" bIns="0" anchor="ctr">
-            <a:normAutofit/>
+            <a:noAutofit/>
           </a:bodyPr>
           <a:lstStyle/>
           <a:p>
@@ -8153,7 +9476,7 @@
               </a:defRPr>
             </a:pPr>
             <a:r>
-              <a:rPr sz="1125" b="1" i="0">
+              <a:rPr sz="1650" b="1" i="0">
                 <a:solidFill>
                   <a:srgbClr val="087C72"/>
                 </a:solidFill>
@@ -8164,7 +9487,7 @@
               <a:t>04</a:t>
             </a:r>
             <a:r>
-              <a:rPr sz="1500" b="0" i="0">
+              <a:rPr sz="1650" b="0" i="0">
                 <a:solidFill>
                   <a:srgbClr val="132925"/>
                 </a:solidFill>
@@ -8182,7 +9505,7 @@
           <p:cNvPr id="13" name="Rectangle 12">
             <a:extLst>
               <a:ext uri="{FF2B5EF4-FFF2-40B4-BE49-F238E27FC236}">
-                <a16:creationId xmlns:a16="http://schemas.microsoft.com/office/drawing/2014/main" id="{A39D5B80-1B5B-4286-9620-92C429A8B330}"/>
+                <a16:creationId xmlns:a16="http://schemas.microsoft.com/office/drawing/2014/main" id="{4B88DBCD-53B4-4202-ADB1-93C756F8B48A}"/>
               </a:ext>
             </a:extLst>
           </p:cNvPr>
@@ -8209,20 +9532,13 @@
             <a:prstDash val="solid"/>
           </a:ln>
         </p:spPr>
-        <p:txBody>
-          <a:bodyPr/>
-          <a:lstStyle/>
-          <a:p>
-            <a:endParaRPr lang="en-US"/>
-          </a:p>
-        </p:txBody>
       </p:sp>
       <p:sp>
         <p:nvSpPr>
           <p:cNvPr id="14" name="Rectangle 13">
             <a:extLst>
               <a:ext uri="{FF2B5EF4-FFF2-40B4-BE49-F238E27FC236}">
-                <a16:creationId xmlns:a16="http://schemas.microsoft.com/office/drawing/2014/main" id="{041887C9-0313-4101-90F4-BA7FF15B84C4}"/>
+                <a16:creationId xmlns:a16="http://schemas.microsoft.com/office/drawing/2014/main" id="{264D0DF8-1E3A-41F3-8AD6-EF422367595E}"/>
               </a:ext>
             </a:extLst>
           </p:cNvPr>
@@ -8247,7 +9563,7 @@
         </p:spPr>
         <p:txBody>
           <a:bodyPr wrap="square" lIns="0" tIns="0" rIns="0" bIns="0" anchor="ctr">
-            <a:normAutofit/>
+            <a:noAutofit/>
           </a:bodyPr>
           <a:lstStyle/>
           <a:p>
@@ -8266,7 +9582,7 @@
               </a:defRPr>
             </a:pPr>
             <a:r>
-              <a:rPr sz="1125" b="1" i="0">
+              <a:rPr sz="1650" b="1" i="0">
                 <a:solidFill>
                   <a:srgbClr val="087C72"/>
                 </a:solidFill>
@@ -8277,7 +9593,7 @@
               <a:t>05</a:t>
             </a:r>
             <a:r>
-              <a:rPr sz="1500" b="0" i="0">
+              <a:rPr sz="1650" b="0" i="0">
                 <a:solidFill>
                   <a:srgbClr val="132925"/>
                 </a:solidFill>
@@ -8295,7 +9611,7 @@
           <p:cNvPr id="15" name="Rectangle 14">
             <a:extLst>
               <a:ext uri="{FF2B5EF4-FFF2-40B4-BE49-F238E27FC236}">
-                <a16:creationId xmlns:a16="http://schemas.microsoft.com/office/drawing/2014/main" id="{134E4B33-BAAC-4BC3-A75A-AC4EC8CE840B}"/>
+                <a16:creationId xmlns:a16="http://schemas.microsoft.com/office/drawing/2014/main" id="{A0B22207-588B-46FA-9138-A9E601A2AD42}"/>
               </a:ext>
             </a:extLst>
           </p:cNvPr>
@@ -8322,20 +9638,13 @@
             <a:prstDash val="solid"/>
           </a:ln>
         </p:spPr>
-        <p:txBody>
-          <a:bodyPr/>
-          <a:lstStyle/>
-          <a:p>
-            <a:endParaRPr lang="en-US"/>
-          </a:p>
-        </p:txBody>
       </p:sp>
       <p:sp>
         <p:nvSpPr>
           <p:cNvPr id="16" name="Rectangle 15">
             <a:extLst>
               <a:ext uri="{FF2B5EF4-FFF2-40B4-BE49-F238E27FC236}">
-                <a16:creationId xmlns:a16="http://schemas.microsoft.com/office/drawing/2014/main" id="{BC703536-F208-4981-B203-65FEF62FB97A}"/>
+                <a16:creationId xmlns:a16="http://schemas.microsoft.com/office/drawing/2014/main" id="{C21C3F9F-F7EE-4348-A875-8377BA4D6FEE}"/>
               </a:ext>
             </a:extLst>
           </p:cNvPr>
@@ -8360,7 +9669,7 @@
         </p:spPr>
         <p:txBody>
           <a:bodyPr wrap="square" lIns="0" tIns="0" rIns="0" bIns="0" anchor="ctr">
-            <a:normAutofit/>
+            <a:noAutofit/>
           </a:bodyPr>
           <a:lstStyle/>
           <a:p>
@@ -8379,7 +9688,7 @@
               </a:defRPr>
             </a:pPr>
             <a:r>
-              <a:rPr sz="1125" b="1" i="0">
+              <a:rPr sz="1650" b="1" i="0">
                 <a:solidFill>
                   <a:srgbClr val="087C72"/>
                 </a:solidFill>
@@ -8390,7 +9699,7 @@
               <a:t>06</a:t>
             </a:r>
             <a:r>
-              <a:rPr sz="1500" b="0" i="0">
+              <a:rPr sz="1650" b="0" i="0">
                 <a:solidFill>
                   <a:srgbClr val="132925"/>
                 </a:solidFill>
@@ -8408,7 +9717,7 @@
           <p:cNvPr id="17" name="Rounded Rectangle 16">
             <a:extLst>
               <a:ext uri="{FF2B5EF4-FFF2-40B4-BE49-F238E27FC236}">
-                <a16:creationId xmlns:a16="http://schemas.microsoft.com/office/drawing/2014/main" id="{C70B5286-C410-45B7-8366-7B2BDAF15EF1}"/>
+                <a16:creationId xmlns:a16="http://schemas.microsoft.com/office/drawing/2014/main" id="{88407D14-859C-47F8-9655-F4ADA43DA76E}"/>
               </a:ext>
             </a:extLst>
           </p:cNvPr>
@@ -8437,20 +9746,13 @@
             <a:prstDash val="solid"/>
           </a:ln>
         </p:spPr>
-        <p:txBody>
-          <a:bodyPr/>
-          <a:lstStyle/>
-          <a:p>
-            <a:endParaRPr lang="en-US"/>
-          </a:p>
-        </p:txBody>
       </p:sp>
       <p:sp>
         <p:nvSpPr>
           <p:cNvPr id="18" name="Rectangle 17">
             <a:extLst>
               <a:ext uri="{FF2B5EF4-FFF2-40B4-BE49-F238E27FC236}">
-                <a16:creationId xmlns:a16="http://schemas.microsoft.com/office/drawing/2014/main" id="{42095DF7-0447-4EA6-912C-3ECB67796EBD}"/>
+                <a16:creationId xmlns:a16="http://schemas.microsoft.com/office/drawing/2014/main" id="{9719FA1A-1CC5-46DF-85EB-48BDEA0F64D1}"/>
               </a:ext>
             </a:extLst>
           </p:cNvPr>
@@ -8475,7 +9777,7 @@
         </p:spPr>
         <p:txBody>
           <a:bodyPr wrap="square" lIns="0" tIns="0" rIns="0" bIns="0" anchor="ctr">
-            <a:normAutofit fontScale="92593"/>
+            <a:noAutofit/>
           </a:bodyPr>
           <a:lstStyle/>
           <a:p>
@@ -8494,7 +9796,7 @@
               </a:defRPr>
             </a:pPr>
             <a:r>
-              <a:rPr sz="1350" b="1" i="0">
+              <a:rPr sz="1650" b="1" i="0">
                 <a:solidFill>
                   <a:srgbClr val="0B3D38"/>
                 </a:solidFill>
@@ -8569,7 +9871,7 @@
         </p:spPr>
         <p:txBody>
           <a:bodyPr wrap="square" lIns="0" tIns="0" rIns="0" bIns="0" anchor="ctr">
-            <a:normAutofit/>
+            <a:noAutofit/>
           </a:bodyPr>
           <a:lstStyle/>
           <a:p>
@@ -8625,7 +9927,7 @@
         </p:spPr>
         <p:txBody>
           <a:bodyPr wrap="square" lIns="0" tIns="0" rIns="76200" bIns="0" anchor="t">
-            <a:normAutofit/>
+            <a:noAutofit/>
           </a:bodyPr>
           <a:lstStyle/>
           <a:p>
@@ -8682,7 +9984,7 @@
               <a:t>9</a:t>
             </a:r>
             <a:r>
-              <a:rPr sz="1425" b="0" i="0">
+              <a:rPr sz="1650" b="0" i="0">
                 <a:solidFill>
                   <a:srgbClr val="5B6F6A"/>
                 </a:solidFill>
@@ -8720,7 +10022,7 @@
               <a:t>6</a:t>
             </a:r>
             <a:r>
-              <a:rPr sz="1425" b="0" i="0">
+              <a:rPr sz="1650" b="0" i="0">
                 <a:solidFill>
                   <a:srgbClr val="5B6F6A"/>
                 </a:solidFill>
@@ -8747,7 +10049,7 @@
               </a:defRPr>
             </a:pPr>
             <a:r>
-              <a:rPr sz="1425" b="0" i="0">
+              <a:rPr sz="1650" b="0" i="0">
                 <a:solidFill>
                   <a:srgbClr val="132925"/>
                 </a:solidFill>
@@ -8774,7 +10076,7 @@
               </a:defRPr>
             </a:pPr>
             <a:r>
-              <a:rPr sz="1425" b="0" i="0">
+              <a:rPr sz="1650" b="0" i="0">
                 <a:solidFill>
                   <a:srgbClr val="132925"/>
                 </a:solidFill>
@@ -8801,7 +10103,7 @@
               </a:defRPr>
             </a:pPr>
             <a:r>
-              <a:rPr sz="1425" b="0" i="0">
+              <a:rPr sz="1650" b="0" i="0">
                 <a:solidFill>
                   <a:srgbClr val="132925"/>
                 </a:solidFill>
@@ -8819,7 +10121,7 @@
           <p:cNvPr id="4" name="Rectangle 3">
             <a:extLst>
               <a:ext uri="{FF2B5EF4-FFF2-40B4-BE49-F238E27FC236}">
-                <a16:creationId xmlns:a16="http://schemas.microsoft.com/office/drawing/2014/main" id="{29EEA03C-86AC-4A5B-B91F-F6A4015AA49C}"/>
+                <a16:creationId xmlns:a16="http://schemas.microsoft.com/office/drawing/2014/main" id="{8D8C45FE-4C21-4C0C-9FEC-303D488C56F5}"/>
               </a:ext>
             </a:extLst>
           </p:cNvPr>
@@ -8830,7 +10132,7 @@
         </p:nvSpPr>
         <p:spPr>
           <a:xfrm>
-            <a:off x="4286250" y="1485900"/>
+            <a:off x="4191000" y="1485900"/>
             <a:ext cx="1028700" cy="228600"/>
           </a:xfrm>
           <a:prstGeom prst="rect">
@@ -8844,7 +10146,7 @@
         </p:spPr>
         <p:txBody>
           <a:bodyPr wrap="square" lIns="0" tIns="0" rIns="0" bIns="0" anchor="ctr">
-            <a:normAutofit/>
+            <a:noAutofit/>
           </a:bodyPr>
           <a:lstStyle/>
           <a:p>
@@ -8863,7 +10165,7 @@
               </a:defRPr>
             </a:pPr>
             <a:r>
-              <a:rPr sz="1050" b="1" i="0">
+              <a:rPr sz="1650" b="1" i="0">
                 <a:solidFill>
                   <a:srgbClr val="5B6F6A"/>
                 </a:solidFill>
@@ -8881,7 +10183,7 @@
           <p:cNvPr id="5" name="Rectangle 4">
             <a:extLst>
               <a:ext uri="{FF2B5EF4-FFF2-40B4-BE49-F238E27FC236}">
-                <a16:creationId xmlns:a16="http://schemas.microsoft.com/office/drawing/2014/main" id="{448B59A9-F171-4885-9112-2B2E44DEFC44}"/>
+                <a16:creationId xmlns:a16="http://schemas.microsoft.com/office/drawing/2014/main" id="{C2924EAC-8C64-40C0-9DD6-3C0D8FE5E04F}"/>
               </a:ext>
             </a:extLst>
           </p:cNvPr>
@@ -8892,7 +10194,7 @@
         </p:nvSpPr>
         <p:spPr>
           <a:xfrm>
-            <a:off x="5467350" y="1485900"/>
+            <a:off x="5391150" y="1485900"/>
             <a:ext cx="1028700" cy="228600"/>
           </a:xfrm>
           <a:prstGeom prst="rect">
@@ -8906,7 +10208,7 @@
         </p:spPr>
         <p:txBody>
           <a:bodyPr wrap="square" lIns="0" tIns="0" rIns="0" bIns="0" anchor="ctr">
-            <a:normAutofit/>
+            <a:noAutofit/>
           </a:bodyPr>
           <a:lstStyle/>
           <a:p>
@@ -8925,7 +10227,7 @@
               </a:defRPr>
             </a:pPr>
             <a:r>
-              <a:rPr sz="1050" b="1" i="0">
+              <a:rPr sz="1650" b="1" i="0">
                 <a:solidFill>
                   <a:srgbClr val="5B6F6A"/>
                 </a:solidFill>
@@ -8943,7 +10245,7 @@
           <p:cNvPr id="6" name="Rectangle 5">
             <a:extLst>
               <a:ext uri="{FF2B5EF4-FFF2-40B4-BE49-F238E27FC236}">
-                <a16:creationId xmlns:a16="http://schemas.microsoft.com/office/drawing/2014/main" id="{076B9771-8E2F-43EF-93C9-7FF88C97696C}"/>
+                <a16:creationId xmlns:a16="http://schemas.microsoft.com/office/drawing/2014/main" id="{0E5A7024-9573-4F22-99E5-DF5B2DD84824}"/>
               </a:ext>
             </a:extLst>
           </p:cNvPr>
@@ -8954,7 +10256,7 @@
         </p:nvSpPr>
         <p:spPr>
           <a:xfrm>
-            <a:off x="6648450" y="1485900"/>
+            <a:off x="6591300" y="1485900"/>
             <a:ext cx="1028700" cy="228600"/>
           </a:xfrm>
           <a:prstGeom prst="rect">
@@ -8968,7 +10270,7 @@
         </p:spPr>
         <p:txBody>
           <a:bodyPr wrap="square" lIns="0" tIns="0" rIns="0" bIns="0" anchor="ctr">
-            <a:normAutofit/>
+            <a:noAutofit/>
           </a:bodyPr>
           <a:lstStyle/>
           <a:p>
@@ -8987,7 +10289,7 @@
               </a:defRPr>
             </a:pPr>
             <a:r>
-              <a:rPr sz="1050" b="1" i="0">
+              <a:rPr sz="1650" b="1" i="0">
                 <a:solidFill>
                   <a:srgbClr val="5B6F6A"/>
                 </a:solidFill>
@@ -9005,7 +10307,7 @@
           <p:cNvPr id="7" name="Rectangle 6">
             <a:extLst>
               <a:ext uri="{FF2B5EF4-FFF2-40B4-BE49-F238E27FC236}">
-                <a16:creationId xmlns:a16="http://schemas.microsoft.com/office/drawing/2014/main" id="{D3A3C6BB-2617-4AF4-AD54-2BC1B55DA1E3}"/>
+                <a16:creationId xmlns:a16="http://schemas.microsoft.com/office/drawing/2014/main" id="{451D7D90-EEC2-482E-92FA-AB1362BD713D}"/>
               </a:ext>
             </a:extLst>
           </p:cNvPr>
@@ -9016,7 +10318,7 @@
         </p:nvSpPr>
         <p:spPr>
           <a:xfrm>
-            <a:off x="7829550" y="1485900"/>
+            <a:off x="7791450" y="1485900"/>
             <a:ext cx="1028700" cy="228600"/>
           </a:xfrm>
           <a:prstGeom prst="rect">
@@ -9030,7 +10332,7 @@
         </p:spPr>
         <p:txBody>
           <a:bodyPr wrap="square" lIns="0" tIns="0" rIns="0" bIns="0" anchor="ctr">
-            <a:normAutofit/>
+            <a:noAutofit/>
           </a:bodyPr>
           <a:lstStyle/>
           <a:p>
@@ -9049,7 +10351,7 @@
               </a:defRPr>
             </a:pPr>
             <a:r>
-              <a:rPr sz="1050" b="1" i="0">
+              <a:rPr sz="1650" b="1" i="0">
                 <a:solidFill>
                   <a:srgbClr val="5B6F6A"/>
                 </a:solidFill>
@@ -9067,7 +10369,7 @@
           <p:cNvPr id="8" name="Rectangle 7">
             <a:extLst>
               <a:ext uri="{FF2B5EF4-FFF2-40B4-BE49-F238E27FC236}">
-                <a16:creationId xmlns:a16="http://schemas.microsoft.com/office/drawing/2014/main" id="{F314FDCC-DD12-4E9F-88CE-E7F622534F4E}"/>
+                <a16:creationId xmlns:a16="http://schemas.microsoft.com/office/drawing/2014/main" id="{1C6E7676-4D0B-4B20-9454-4B73622741E8}"/>
               </a:ext>
             </a:extLst>
           </p:cNvPr>
@@ -9078,7 +10380,7 @@
         </p:nvSpPr>
         <p:spPr>
           <a:xfrm>
-            <a:off x="9010650" y="1485900"/>
+            <a:off x="8991600" y="1485900"/>
             <a:ext cx="1028700" cy="228600"/>
           </a:xfrm>
           <a:prstGeom prst="rect">
@@ -9092,7 +10394,7 @@
         </p:spPr>
         <p:txBody>
           <a:bodyPr wrap="square" lIns="0" tIns="0" rIns="0" bIns="0" anchor="ctr">
-            <a:normAutofit/>
+            <a:noAutofit/>
           </a:bodyPr>
           <a:lstStyle/>
           <a:p>
@@ -9111,7 +10413,7 @@
               </a:defRPr>
             </a:pPr>
             <a:r>
-              <a:rPr sz="1050" b="1" i="0">
+              <a:rPr sz="1650" b="1" i="0">
                 <a:solidFill>
                   <a:srgbClr val="5B6F6A"/>
                 </a:solidFill>
@@ -9129,7 +10431,7 @@
           <p:cNvPr id="9" name="Rectangle 8">
             <a:extLst>
               <a:ext uri="{FF2B5EF4-FFF2-40B4-BE49-F238E27FC236}">
-                <a16:creationId xmlns:a16="http://schemas.microsoft.com/office/drawing/2014/main" id="{16E2F162-5FD6-4800-837D-C4C22BBB3C7B}"/>
+                <a16:creationId xmlns:a16="http://schemas.microsoft.com/office/drawing/2014/main" id="{3778E09B-950D-4CB3-828C-1CF1A1128D7A}"/>
               </a:ext>
             </a:extLst>
           </p:cNvPr>
@@ -9140,7 +10442,7 @@
         </p:nvSpPr>
         <p:spPr>
           <a:xfrm>
-            <a:off x="10306050" y="1485900"/>
+            <a:off x="10134600" y="1485900"/>
             <a:ext cx="1028700" cy="228600"/>
           </a:xfrm>
           <a:prstGeom prst="rect">
@@ -9154,7 +10456,7 @@
         </p:spPr>
         <p:txBody>
           <a:bodyPr wrap="square" lIns="0" tIns="0" rIns="0" bIns="0" anchor="ctr">
-            <a:normAutofit/>
+            <a:noAutofit/>
           </a:bodyPr>
           <a:lstStyle/>
           <a:p>
@@ -9173,7 +10475,7 @@
               </a:defRPr>
             </a:pPr>
             <a:r>
-              <a:rPr sz="1050" b="1" i="0">
+              <a:rPr sz="1650" b="1" i="0">
                 <a:solidFill>
                   <a:srgbClr val="5B6F6A"/>
                 </a:solidFill>
@@ -9191,7 +10493,7 @@
           <p:cNvPr id="10" name="Rounded Rectangle 9">
             <a:extLst>
               <a:ext uri="{FF2B5EF4-FFF2-40B4-BE49-F238E27FC236}">
-                <a16:creationId xmlns:a16="http://schemas.microsoft.com/office/drawing/2014/main" id="{68DCF7F5-881C-4FA9-BB53-654E0BF8E77A}"/>
+                <a16:creationId xmlns:a16="http://schemas.microsoft.com/office/drawing/2014/main" id="{9397120C-0F62-42CF-B058-9A9F0FF3C1D8}"/>
               </a:ext>
             </a:extLst>
           </p:cNvPr>
@@ -9202,12 +10504,12 @@
         </p:nvSpPr>
         <p:spPr>
           <a:xfrm>
-            <a:off x="4286250" y="2266950"/>
-            <a:ext cx="1028700" cy="628650"/>
+            <a:off x="4191000" y="2228850"/>
+            <a:ext cx="1123950" cy="742950"/>
           </a:xfrm>
           <a:prstGeom prst="roundRect">
             <a:avLst>
-              <a:gd name="adj" fmla="val 9091"/>
+              <a:gd name="adj" fmla="val 7692"/>
             </a:avLst>
           </a:prstGeom>
           <a:solidFill>
@@ -9222,7 +10524,7 @@
         </p:spPr>
         <p:txBody>
           <a:bodyPr wrap="square" lIns="57150" tIns="57150" rIns="57150" bIns="57150" anchor="ctr">
-            <a:normAutofit/>
+            <a:noAutofit/>
           </a:bodyPr>
           <a:lstStyle/>
           <a:p>
@@ -9241,7 +10543,7 @@
               </a:defRPr>
             </a:pPr>
             <a:r>
-              <a:rPr sz="1200" b="1" i="0">
+              <a:rPr sz="1650" b="1" i="0">
                 <a:solidFill>
                   <a:srgbClr val="132925"/>
                 </a:solidFill>
@@ -9260,7 +10562,7 @@
           <p:cNvPr id="11" name="Rounded Rectangle 10">
             <a:extLst>
               <a:ext uri="{FF2B5EF4-FFF2-40B4-BE49-F238E27FC236}">
-                <a16:creationId xmlns:a16="http://schemas.microsoft.com/office/drawing/2014/main" id="{4F83EC5C-7D46-4A2B-940C-CE3E71AB943D}"/>
+                <a16:creationId xmlns:a16="http://schemas.microsoft.com/office/drawing/2014/main" id="{C4EB2DD4-91F9-4336-BACB-3B01CBF5A853}"/>
               </a:ext>
             </a:extLst>
           </p:cNvPr>
@@ -9271,12 +10573,12 @@
         </p:nvSpPr>
         <p:spPr>
           <a:xfrm>
-            <a:off x="5467350" y="2266950"/>
-            <a:ext cx="1028700" cy="628650"/>
+            <a:off x="5391150" y="2228850"/>
+            <a:ext cx="1123950" cy="742950"/>
           </a:xfrm>
           <a:prstGeom prst="roundRect">
             <a:avLst>
-              <a:gd name="adj" fmla="val 9091"/>
+              <a:gd name="adj" fmla="val 7692"/>
             </a:avLst>
           </a:prstGeom>
           <a:solidFill>
@@ -9291,7 +10593,7 @@
         </p:spPr>
         <p:txBody>
           <a:bodyPr wrap="square" lIns="57150" tIns="57150" rIns="57150" bIns="57150" anchor="ctr">
-            <a:normAutofit/>
+            <a:noAutofit/>
           </a:bodyPr>
           <a:lstStyle/>
           <a:p>
@@ -9310,7 +10612,7 @@
               </a:defRPr>
             </a:pPr>
             <a:r>
-              <a:rPr sz="1200" b="1" i="0">
+              <a:rPr sz="1650" b="1" i="0">
                 <a:solidFill>
                   <a:srgbClr val="132925"/>
                 </a:solidFill>
@@ -9329,7 +10631,7 @@
           <p:cNvPr id="12" name="Rounded Rectangle 11">
             <a:extLst>
               <a:ext uri="{FF2B5EF4-FFF2-40B4-BE49-F238E27FC236}">
-                <a16:creationId xmlns:a16="http://schemas.microsoft.com/office/drawing/2014/main" id="{AC608A92-6048-4570-87D8-8F47F9EA861D}"/>
+                <a16:creationId xmlns:a16="http://schemas.microsoft.com/office/drawing/2014/main" id="{47AE87B7-3E66-4CDB-96B4-9DEA512F825F}"/>
               </a:ext>
             </a:extLst>
           </p:cNvPr>
@@ -9340,12 +10642,12 @@
         </p:nvSpPr>
         <p:spPr>
           <a:xfrm>
-            <a:off x="6648450" y="1924050"/>
-            <a:ext cx="1028700" cy="552450"/>
+            <a:off x="6591300" y="1847850"/>
+            <a:ext cx="1123950" cy="666750"/>
           </a:xfrm>
           <a:prstGeom prst="roundRect">
             <a:avLst>
-              <a:gd name="adj" fmla="val 10345"/>
+              <a:gd name="adj" fmla="val 8571"/>
             </a:avLst>
           </a:prstGeom>
           <a:solidFill>
@@ -9360,7 +10662,7 @@
         </p:spPr>
         <p:txBody>
           <a:bodyPr wrap="square" lIns="57150" tIns="57150" rIns="57150" bIns="57150" anchor="ctr">
-            <a:normAutofit/>
+            <a:noAutofit/>
           </a:bodyPr>
           <a:lstStyle/>
           <a:p>
@@ -9379,7 +10681,7 @@
               </a:defRPr>
             </a:pPr>
             <a:r>
-              <a:rPr sz="1125" b="1" i="0">
+              <a:rPr sz="1650" b="1" i="0">
                 <a:solidFill>
                   <a:srgbClr val="132925"/>
                 </a:solidFill>
@@ -9398,7 +10700,7 @@
           <p:cNvPr id="13" name="Rounded Rectangle 12">
             <a:extLst>
               <a:ext uri="{FF2B5EF4-FFF2-40B4-BE49-F238E27FC236}">
-                <a16:creationId xmlns:a16="http://schemas.microsoft.com/office/drawing/2014/main" id="{802F5D04-2040-4DD5-8D55-3F83CFD34CEA}"/>
+                <a16:creationId xmlns:a16="http://schemas.microsoft.com/office/drawing/2014/main" id="{287540BF-A338-461E-BE92-A7B817B7B5C7}"/>
               </a:ext>
             </a:extLst>
           </p:cNvPr>
@@ -9409,12 +10711,12 @@
         </p:nvSpPr>
         <p:spPr>
           <a:xfrm>
-            <a:off x="6648450" y="2686050"/>
-            <a:ext cx="1028700" cy="552450"/>
+            <a:off x="6591300" y="2647950"/>
+            <a:ext cx="1123950" cy="666750"/>
           </a:xfrm>
           <a:prstGeom prst="roundRect">
             <a:avLst>
-              <a:gd name="adj" fmla="val 10345"/>
+              <a:gd name="adj" fmla="val 8571"/>
             </a:avLst>
           </a:prstGeom>
           <a:solidFill>
@@ -9429,7 +10731,7 @@
         </p:spPr>
         <p:txBody>
           <a:bodyPr wrap="square" lIns="57150" tIns="57150" rIns="57150" bIns="57150" anchor="ctr">
-            <a:normAutofit/>
+            <a:noAutofit/>
           </a:bodyPr>
           <a:lstStyle/>
           <a:p>
@@ -9448,7 +10750,7 @@
               </a:defRPr>
             </a:pPr>
             <a:r>
-              <a:rPr sz="1125" b="1" i="0">
+              <a:rPr sz="1650" b="1" i="0">
                 <a:solidFill>
                   <a:srgbClr val="132925"/>
                 </a:solidFill>
@@ -9467,7 +10769,7 @@
           <p:cNvPr id="14" name="Rounded Rectangle 13">
             <a:extLst>
               <a:ext uri="{FF2B5EF4-FFF2-40B4-BE49-F238E27FC236}">
-                <a16:creationId xmlns:a16="http://schemas.microsoft.com/office/drawing/2014/main" id="{3B2E78B3-8F8B-4049-BCAF-1E40DCFF6C12}"/>
+                <a16:creationId xmlns:a16="http://schemas.microsoft.com/office/drawing/2014/main" id="{A74E5D12-00C3-442D-B8E8-CA47C9A81AFD}"/>
               </a:ext>
             </a:extLst>
           </p:cNvPr>
@@ -9478,12 +10780,12 @@
         </p:nvSpPr>
         <p:spPr>
           <a:xfrm>
-            <a:off x="7829550" y="1924050"/>
-            <a:ext cx="1028700" cy="552450"/>
+            <a:off x="7791450" y="1847850"/>
+            <a:ext cx="1123950" cy="666750"/>
           </a:xfrm>
           <a:prstGeom prst="roundRect">
             <a:avLst>
-              <a:gd name="adj" fmla="val 10345"/>
+              <a:gd name="adj" fmla="val 8571"/>
             </a:avLst>
           </a:prstGeom>
           <a:solidFill>
@@ -9498,7 +10800,7 @@
         </p:spPr>
         <p:txBody>
           <a:bodyPr wrap="square" lIns="57150" tIns="57150" rIns="57150" bIns="57150" anchor="ctr">
-            <a:normAutofit/>
+            <a:noAutofit/>
           </a:bodyPr>
           <a:lstStyle/>
           <a:p>
@@ -9517,7 +10819,7 @@
               </a:defRPr>
             </a:pPr>
             <a:r>
-              <a:rPr sz="1125" b="1" i="0">
+              <a:rPr sz="1650" b="1" i="0">
                 <a:solidFill>
                   <a:srgbClr val="132925"/>
                 </a:solidFill>
@@ -9536,7 +10838,7 @@
           <p:cNvPr id="15" name="Rounded Rectangle 14">
             <a:extLst>
               <a:ext uri="{FF2B5EF4-FFF2-40B4-BE49-F238E27FC236}">
-                <a16:creationId xmlns:a16="http://schemas.microsoft.com/office/drawing/2014/main" id="{B664A8C3-2A39-4ADB-971F-CE6FB368DDDD}"/>
+                <a16:creationId xmlns:a16="http://schemas.microsoft.com/office/drawing/2014/main" id="{42E1D594-FD99-4725-8562-65A477B44C3B}"/>
               </a:ext>
             </a:extLst>
           </p:cNvPr>
@@ -9547,12 +10849,12 @@
         </p:nvSpPr>
         <p:spPr>
           <a:xfrm>
-            <a:off x="7829550" y="2686050"/>
-            <a:ext cx="1028700" cy="552450"/>
+            <a:off x="7791450" y="2647950"/>
+            <a:ext cx="1123950" cy="666750"/>
           </a:xfrm>
           <a:prstGeom prst="roundRect">
             <a:avLst>
-              <a:gd name="adj" fmla="val 10345"/>
+              <a:gd name="adj" fmla="val 8571"/>
             </a:avLst>
           </a:prstGeom>
           <a:solidFill>
@@ -9567,7 +10869,7 @@
         </p:spPr>
         <p:txBody>
           <a:bodyPr wrap="square" lIns="57150" tIns="57150" rIns="57150" bIns="57150" anchor="ctr">
-            <a:normAutofit/>
+            <a:noAutofit/>
           </a:bodyPr>
           <a:lstStyle/>
           <a:p>
@@ -9586,7 +10888,7 @@
               </a:defRPr>
             </a:pPr>
             <a:r>
-              <a:rPr sz="1125" b="1" i="0">
+              <a:rPr sz="1650" b="1" i="0">
                 <a:solidFill>
                   <a:srgbClr val="132925"/>
                 </a:solidFill>
@@ -9604,7 +10906,7 @@
           <p:cNvPr id="16" name="Rounded Rectangle 15">
             <a:extLst>
               <a:ext uri="{FF2B5EF4-FFF2-40B4-BE49-F238E27FC236}">
-                <a16:creationId xmlns:a16="http://schemas.microsoft.com/office/drawing/2014/main" id="{0EC09146-F730-4511-B356-1196A87315C4}"/>
+                <a16:creationId xmlns:a16="http://schemas.microsoft.com/office/drawing/2014/main" id="{DFC6839B-8B82-4AB3-BF27-E8A9E56908E0}"/>
               </a:ext>
             </a:extLst>
           </p:cNvPr>
@@ -9615,12 +10917,12 @@
         </p:nvSpPr>
         <p:spPr>
           <a:xfrm>
-            <a:off x="9010650" y="1924050"/>
-            <a:ext cx="1028700" cy="552450"/>
+            <a:off x="8991600" y="1847850"/>
+            <a:ext cx="1047750" cy="666750"/>
           </a:xfrm>
           <a:prstGeom prst="roundRect">
             <a:avLst>
-              <a:gd name="adj" fmla="val 10345"/>
+              <a:gd name="adj" fmla="val 8571"/>
             </a:avLst>
           </a:prstGeom>
           <a:solidFill>
@@ -9635,7 +10937,7 @@
         </p:spPr>
         <p:txBody>
           <a:bodyPr wrap="square" lIns="57150" tIns="57150" rIns="57150" bIns="57150" anchor="ctr">
-            <a:normAutofit/>
+            <a:noAutofit/>
           </a:bodyPr>
           <a:lstStyle/>
           <a:p>
@@ -9654,15 +10956,15 @@
               </a:defRPr>
             </a:pPr>
             <a:r>
-              <a:rPr sz="1125" b="1" i="0">
-                <a:solidFill>
-                  <a:srgbClr val="132925"/>
-                </a:solidFill>
-                <a:latin typeface="Aptos"/>
-                <a:ea typeface="Aptos"/>
-                <a:cs typeface="Aptos"/>
-              </a:rPr>
-              <a:t>Operations
+              <a:rPr sz="1650" b="1" i="0">
+                <a:solidFill>
+                  <a:srgbClr val="132925"/>
+                </a:solidFill>
+                <a:latin typeface="Aptos"/>
+                <a:ea typeface="Aptos"/>
+                <a:cs typeface="Aptos"/>
+              </a:rPr>
+              <a:t>Ops
 Task</a:t>
             </a:r>
           </a:p>
@@ -9673,7 +10975,7 @@
           <p:cNvPr id="17" name="Rounded Rectangle 16">
             <a:extLst>
               <a:ext uri="{FF2B5EF4-FFF2-40B4-BE49-F238E27FC236}">
-                <a16:creationId xmlns:a16="http://schemas.microsoft.com/office/drawing/2014/main" id="{34C5F984-1002-4636-8C3E-DD368301D16A}"/>
+                <a16:creationId xmlns:a16="http://schemas.microsoft.com/office/drawing/2014/main" id="{82511023-5735-4430-836F-0DBA1568D3E4}"/>
               </a:ext>
             </a:extLst>
           </p:cNvPr>
@@ -9684,12 +10986,12 @@
         </p:nvSpPr>
         <p:spPr>
           <a:xfrm>
-            <a:off x="9010650" y="2686050"/>
-            <a:ext cx="1162050" cy="552450"/>
+            <a:off x="8991600" y="2647950"/>
+            <a:ext cx="1047750" cy="666750"/>
           </a:xfrm>
           <a:prstGeom prst="roundRect">
             <a:avLst>
-              <a:gd name="adj" fmla="val 10345"/>
+              <a:gd name="adj" fmla="val 8571"/>
             </a:avLst>
           </a:prstGeom>
           <a:solidFill>
@@ -9704,7 +11006,7 @@
         </p:spPr>
         <p:txBody>
           <a:bodyPr wrap="square" lIns="57150" tIns="57150" rIns="57150" bIns="57150" anchor="ctr">
-            <a:normAutofit/>
+            <a:noAutofit/>
           </a:bodyPr>
           <a:lstStyle/>
           <a:p>
@@ -9713,25 +11015,26 @@
                 <a:spcPts val="0"/>
               </a:spcAft>
               <a:buNone/>
-              <a:defRPr sz="1050" b="1">
-                <a:solidFill>
-                  <a:srgbClr val="132925"/>
-                </a:solidFill>
-                <a:latin typeface="Aptos"/>
-                <a:ea typeface="Aptos"/>
-                <a:cs typeface="Aptos"/>
-              </a:defRPr>
-            </a:pPr>
-            <a:r>
-              <a:rPr sz="1050" b="1" i="0">
-                <a:solidFill>
-                  <a:srgbClr val="132925"/>
-                </a:solidFill>
-                <a:latin typeface="Aptos"/>
-                <a:ea typeface="Aptos"/>
-                <a:cs typeface="Aptos"/>
-              </a:rPr>
-              <a:t>Communications</a:t>
+              <a:defRPr sz="1200" b="1">
+                <a:solidFill>
+                  <a:srgbClr val="132925"/>
+                </a:solidFill>
+                <a:latin typeface="Aptos"/>
+                <a:ea typeface="Aptos"/>
+                <a:cs typeface="Aptos"/>
+              </a:defRPr>
+            </a:pPr>
+            <a:r>
+              <a:rPr sz="1650" b="1" i="0">
+                <a:solidFill>
+                  <a:srgbClr val="132925"/>
+                </a:solidFill>
+                <a:latin typeface="Aptos"/>
+                <a:ea typeface="Aptos"/>
+                <a:cs typeface="Aptos"/>
+              </a:rPr>
+              <a:t>Comms
+Agent</a:t>
             </a:r>
           </a:p>
         </p:txBody>
@@ -9741,7 +11044,7 @@
           <p:cNvPr id="18" name="Rounded Rectangle 17">
             <a:extLst>
               <a:ext uri="{FF2B5EF4-FFF2-40B4-BE49-F238E27FC236}">
-                <a16:creationId xmlns:a16="http://schemas.microsoft.com/office/drawing/2014/main" id="{8ADCE7A4-E669-4DB8-879D-3310E39878B7}"/>
+                <a16:creationId xmlns:a16="http://schemas.microsoft.com/office/drawing/2014/main" id="{679550DB-BFB9-4C5F-AF30-ACBAF9A54276}"/>
               </a:ext>
             </a:extLst>
           </p:cNvPr>
@@ -9752,12 +11055,12 @@
         </p:nvSpPr>
         <p:spPr>
           <a:xfrm>
-            <a:off x="10306050" y="2266950"/>
-            <a:ext cx="1028700" cy="628650"/>
+            <a:off x="10134600" y="2228850"/>
+            <a:ext cx="1352550" cy="742950"/>
           </a:xfrm>
           <a:prstGeom prst="roundRect">
             <a:avLst>
-              <a:gd name="adj" fmla="val 9091"/>
+              <a:gd name="adj" fmla="val 7692"/>
             </a:avLst>
           </a:prstGeom>
           <a:solidFill>
@@ -9772,7 +11075,7 @@
         </p:spPr>
         <p:txBody>
           <a:bodyPr wrap="square" lIns="57150" tIns="57150" rIns="57150" bIns="57150" anchor="ctr">
-            <a:normAutofit/>
+            <a:noAutofit/>
           </a:bodyPr>
           <a:lstStyle/>
           <a:p>
@@ -9791,7 +11094,7 @@
               </a:defRPr>
             </a:pPr>
             <a:r>
-              <a:rPr sz="1125" b="1" i="0">
+              <a:rPr sz="1650" b="1" i="0">
                 <a:solidFill>
                   <a:srgbClr val="FFFFFF"/>
                 </a:solidFill>
@@ -9816,8 +11119,8 @@
         </p:nvCxnSpPr>
         <p:spPr>
           <a:xfrm>
-            <a:off x="5314950" y="2581275"/>
-            <a:ext cx="152400" cy="0"/>
+            <a:off x="5314950" y="2600325"/>
+            <a:ext cx="76200" cy="0"/>
           </a:xfrm>
           <a:prstGeom prst="straightConnector1">
             <a:avLst/>
@@ -9843,8 +11146,8 @@
         </p:nvCxnSpPr>
         <p:spPr>
           <a:xfrm flipV="1">
-            <a:off x="6496050" y="2200275"/>
-            <a:ext cx="152400" cy="381000"/>
+            <a:off x="6515100" y="2181225"/>
+            <a:ext cx="76200" cy="419100"/>
           </a:xfrm>
           <a:prstGeom prst="bentConnector3">
             <a:avLst>
@@ -9872,8 +11175,8 @@
         </p:nvCxnSpPr>
         <p:spPr>
           <a:xfrm>
-            <a:off x="6496050" y="2581275"/>
-            <a:ext cx="152400" cy="381000"/>
+            <a:off x="6515100" y="2600325"/>
+            <a:ext cx="76200" cy="381000"/>
           </a:xfrm>
           <a:prstGeom prst="bentConnector3">
             <a:avLst>
@@ -9901,8 +11204,8 @@
         </p:nvCxnSpPr>
         <p:spPr>
           <a:xfrm>
-            <a:off x="7677150" y="2200275"/>
-            <a:ext cx="152400" cy="0"/>
+            <a:off x="7715250" y="2181225"/>
+            <a:ext cx="76200" cy="0"/>
           </a:xfrm>
           <a:prstGeom prst="straightConnector1">
             <a:avLst/>
@@ -9928,8 +11231,8 @@
         </p:nvCxnSpPr>
         <p:spPr>
           <a:xfrm>
-            <a:off x="7677150" y="2200275"/>
-            <a:ext cx="152400" cy="762000"/>
+            <a:off x="7715250" y="2181225"/>
+            <a:ext cx="76200" cy="800100"/>
           </a:xfrm>
           <a:prstGeom prst="bentConnector3">
             <a:avLst>
@@ -9957,8 +11260,8 @@
         </p:nvCxnSpPr>
         <p:spPr>
           <a:xfrm flipV="1">
-            <a:off x="7677150" y="2200275"/>
-            <a:ext cx="152400" cy="762000"/>
+            <a:off x="7715250" y="2181225"/>
+            <a:ext cx="76200" cy="800100"/>
           </a:xfrm>
           <a:prstGeom prst="bentConnector3">
             <a:avLst>
@@ -9986,8 +11289,8 @@
         </p:nvCxnSpPr>
         <p:spPr>
           <a:xfrm>
-            <a:off x="8858250" y="2200275"/>
-            <a:ext cx="152400" cy="0"/>
+            <a:off x="8915400" y="2181225"/>
+            <a:ext cx="76200" cy="0"/>
           </a:xfrm>
           <a:prstGeom prst="straightConnector1">
             <a:avLst/>
@@ -10013,8 +11316,8 @@
         </p:nvCxnSpPr>
         <p:spPr>
           <a:xfrm>
-            <a:off x="8858250" y="2200275"/>
-            <a:ext cx="152400" cy="762000"/>
+            <a:off x="8915400" y="2181225"/>
+            <a:ext cx="76200" cy="800100"/>
           </a:xfrm>
           <a:prstGeom prst="bentConnector3">
             <a:avLst>
@@ -10042,8 +11345,8 @@
         </p:nvCxnSpPr>
         <p:spPr>
           <a:xfrm flipV="1">
-            <a:off x="8858250" y="2200275"/>
-            <a:ext cx="152400" cy="762000"/>
+            <a:off x="8915400" y="2181225"/>
+            <a:ext cx="76200" cy="800100"/>
           </a:xfrm>
           <a:prstGeom prst="bentConnector3">
             <a:avLst>
@@ -10071,8 +11374,8 @@
         </p:nvCxnSpPr>
         <p:spPr>
           <a:xfrm>
-            <a:off x="8858250" y="2962275"/>
-            <a:ext cx="152400" cy="0"/>
+            <a:off x="8915400" y="2981325"/>
+            <a:ext cx="76200" cy="0"/>
           </a:xfrm>
           <a:prstGeom prst="straightConnector1">
             <a:avLst/>
@@ -10098,8 +11401,8 @@
         </p:nvCxnSpPr>
         <p:spPr>
           <a:xfrm>
-            <a:off x="10039350" y="2200275"/>
-            <a:ext cx="266700" cy="381000"/>
+            <a:off x="10039350" y="2181225"/>
+            <a:ext cx="95250" cy="419100"/>
           </a:xfrm>
           <a:prstGeom prst="bentConnector3">
             <a:avLst>
@@ -10127,8 +11430,8 @@
         </p:nvCxnSpPr>
         <p:spPr>
           <a:xfrm flipV="1">
-            <a:off x="10172700" y="2581275"/>
-            <a:ext cx="133350" cy="381000"/>
+            <a:off x="10039350" y="2600325"/>
+            <a:ext cx="95250" cy="381000"/>
           </a:xfrm>
           <a:prstGeom prst="bentConnector3">
             <a:avLst>
@@ -10150,7 +11453,7 @@
           <p:cNvPr id="31" name="Rounded Rectangle 30">
             <a:extLst>
               <a:ext uri="{FF2B5EF4-FFF2-40B4-BE49-F238E27FC236}">
-                <a16:creationId xmlns:a16="http://schemas.microsoft.com/office/drawing/2014/main" id="{2C39C159-3EA0-4B5C-A6D5-3C34CEB85E64}"/>
+                <a16:creationId xmlns:a16="http://schemas.microsoft.com/office/drawing/2014/main" id="{103546EC-7522-4457-83A7-B598182BC3CC}"/>
               </a:ext>
             </a:extLst>
           </p:cNvPr>
@@ -10161,12 +11464,12 @@
         </p:nvSpPr>
         <p:spPr>
           <a:xfrm>
-            <a:off x="4286250" y="3543300"/>
-            <a:ext cx="1866900" cy="285750"/>
+            <a:off x="4286250" y="3562350"/>
+            <a:ext cx="2190750" cy="361950"/>
           </a:xfrm>
           <a:prstGeom prst="roundRect">
             <a:avLst>
-              <a:gd name="adj" fmla="val 20000"/>
+              <a:gd name="adj" fmla="val 15789"/>
             </a:avLst>
           </a:prstGeom>
           <a:solidFill>
@@ -10179,20 +11482,13 @@
             <a:prstDash val="solid"/>
           </a:ln>
         </p:spPr>
-        <p:txBody>
-          <a:bodyPr/>
-          <a:lstStyle/>
-          <a:p>
-            <a:endParaRPr lang="en-US"/>
-          </a:p>
-        </p:txBody>
       </p:sp>
       <p:sp>
         <p:nvSpPr>
           <p:cNvPr id="32" name="Rectangle 31">
             <a:extLst>
               <a:ext uri="{FF2B5EF4-FFF2-40B4-BE49-F238E27FC236}">
-                <a16:creationId xmlns:a16="http://schemas.microsoft.com/office/drawing/2014/main" id="{17953843-179C-45F6-B613-B7637671B7FF}"/>
+                <a16:creationId xmlns:a16="http://schemas.microsoft.com/office/drawing/2014/main" id="{06EB4C30-C710-43CD-8D64-8ED7E27B4CFB}"/>
               </a:ext>
             </a:extLst>
           </p:cNvPr>
@@ -10203,8 +11499,8 @@
         </p:nvSpPr>
         <p:spPr>
           <a:xfrm>
-            <a:off x="4362450" y="3571875"/>
-            <a:ext cx="1714500" cy="228600"/>
+            <a:off x="4362450" y="3590925"/>
+            <a:ext cx="2038350" cy="304800"/>
           </a:xfrm>
           <a:prstGeom prst="rect">
             <a:avLst/>
@@ -10217,7 +11513,7 @@
         </p:spPr>
         <p:txBody>
           <a:bodyPr wrap="square" lIns="0" tIns="0" rIns="0" bIns="0" anchor="ctr">
-            <a:normAutofit/>
+            <a:noAutofit/>
           </a:bodyPr>
           <a:lstStyle/>
           <a:p>
@@ -10236,7 +11532,7 @@
               </a:defRPr>
             </a:pPr>
             <a:r>
-              <a:rPr sz="975" b="1" i="0">
+              <a:rPr sz="1650" b="1" i="0">
                 <a:solidFill>
                   <a:srgbClr val="087C72"/>
                 </a:solidFill>
@@ -10244,7 +11540,7 @@
                 <a:ea typeface="Aptos"/>
                 <a:cs typeface="Aptos"/>
               </a:rPr>
-              <a:t>REAL MISSION CONTROL</a:t>
+              <a:t>MISSION CONTROL</a:t>
             </a:r>
           </a:p>
         </p:txBody>
@@ -10254,7 +11550,7 @@
           <p:cNvPr id="33" name="Rounded Rectangle 32">
             <a:extLst>
               <a:ext uri="{FF2B5EF4-FFF2-40B4-BE49-F238E27FC236}">
-                <a16:creationId xmlns:a16="http://schemas.microsoft.com/office/drawing/2014/main" id="{EEBAE474-9FED-4BF3-A4E5-AFD77D68A122}"/>
+                <a16:creationId xmlns:a16="http://schemas.microsoft.com/office/drawing/2014/main" id="{F5F19F14-77AD-4651-ACAF-EA0426689665}"/>
               </a:ext>
             </a:extLst>
           </p:cNvPr>
@@ -10283,13 +11579,6 @@
             <a:prstDash val="solid"/>
           </a:ln>
         </p:spPr>
-        <p:txBody>
-          <a:bodyPr/>
-          <a:lstStyle/>
-          <a:p>
-            <a:endParaRPr lang="en-US"/>
-          </a:p>
-        </p:txBody>
       </p:sp>
       <p:pic>
         <p:nvPicPr>
@@ -10380,7 +11669,7 @@
         </p:spPr>
         <p:txBody>
           <a:bodyPr wrap="square" lIns="0" tIns="0" rIns="0" bIns="0" anchor="ctr">
-            <a:normAutofit/>
+            <a:noAutofit/>
           </a:bodyPr>
           <a:lstStyle/>
           <a:p>
@@ -10436,7 +11725,7 @@
         </p:spPr>
         <p:txBody>
           <a:bodyPr wrap="square" lIns="0" tIns="0" rIns="76200" bIns="0" anchor="t">
-            <a:normAutofit/>
+            <a:noAutofit/>
           </a:bodyPr>
           <a:lstStyle/>
           <a:p>
@@ -10482,7 +11771,7 @@
               </a:defRPr>
             </a:pPr>
             <a:r>
-              <a:rPr sz="1050" b="1" i="0">
+              <a:rPr sz="1650" b="1" i="0">
                 <a:solidFill>
                   <a:srgbClr val="087C72"/>
                 </a:solidFill>
@@ -10493,7 +11782,7 @@
               <a:t>IDEMPOTENT</a:t>
             </a:r>
             <a:r>
-              <a:rPr sz="1350" b="0" i="0">
+              <a:rPr sz="1650" b="0" i="0">
                 <a:solidFill>
                   <a:srgbClr val="132925"/>
                 </a:solidFill>
@@ -10520,7 +11809,7 @@
               </a:defRPr>
             </a:pPr>
             <a:r>
-              <a:rPr sz="1050" b="1" i="0">
+              <a:rPr sz="1650" b="1" i="0">
                 <a:solidFill>
                   <a:srgbClr val="087C72"/>
                 </a:solidFill>
@@ -10531,7 +11820,7 @@
               <a:t>ORDERED</a:t>
             </a:r>
             <a:r>
-              <a:rPr sz="1350" b="0" i="0">
+              <a:rPr sz="1650" b="0" i="0">
                 <a:solidFill>
                   <a:srgbClr val="132925"/>
                 </a:solidFill>
@@ -10558,7 +11847,7 @@
               </a:defRPr>
             </a:pPr>
             <a:r>
-              <a:rPr sz="1050" b="1" i="0">
+              <a:rPr sz="1650" b="1" i="0">
                 <a:solidFill>
                   <a:srgbClr val="087C72"/>
                 </a:solidFill>
@@ -10569,7 +11858,7 @@
               <a:t>REPLAYABLE</a:t>
             </a:r>
             <a:r>
-              <a:rPr sz="1350" b="0" i="0">
+              <a:rPr sz="1650" b="0" i="0">
                 <a:solidFill>
                   <a:srgbClr val="132925"/>
                 </a:solidFill>
@@ -10596,7 +11885,7 @@
               </a:defRPr>
             </a:pPr>
             <a:r>
-              <a:rPr sz="1050" b="1" i="0">
+              <a:rPr sz="1650" b="1" i="0">
                 <a:solidFill>
                   <a:srgbClr val="087C72"/>
                 </a:solidFill>
@@ -10607,7 +11896,7 @@
               <a:t>RESUMABLE</a:t>
             </a:r>
             <a:r>
-              <a:rPr sz="1350" b="0" i="0">
+              <a:rPr sz="1650" b="0" i="0">
                 <a:solidFill>
                   <a:srgbClr val="132925"/>
                 </a:solidFill>
@@ -10634,7 +11923,7 @@
               </a:defRPr>
             </a:pPr>
             <a:r>
-              <a:rPr sz="1050" b="1" i="0">
+              <a:rPr sz="1650" b="1" i="0">
                 <a:solidFill>
                   <a:srgbClr val="087C72"/>
                 </a:solidFill>
@@ -10645,7 +11934,7 @@
               <a:t>RECOVERED</a:t>
             </a:r>
             <a:r>
-              <a:rPr sz="1350" b="0" i="0">
+              <a:rPr sz="1650" b="0" i="0">
                 <a:solidFill>
                   <a:srgbClr val="132925"/>
                 </a:solidFill>
@@ -10663,7 +11952,7 @@
           <p:cNvPr id="4" name="Rounded Rectangle 3">
             <a:extLst>
               <a:ext uri="{FF2B5EF4-FFF2-40B4-BE49-F238E27FC236}">
-                <a16:creationId xmlns:a16="http://schemas.microsoft.com/office/drawing/2014/main" id="{926D0B11-8DB3-41CB-9F56-FD61FE522E43}"/>
+                <a16:creationId xmlns:a16="http://schemas.microsoft.com/office/drawing/2014/main" id="{C166035D-C56F-4C67-A3F9-C2DFCF839F34}"/>
               </a:ext>
             </a:extLst>
           </p:cNvPr>
@@ -10694,7 +11983,7 @@
         </p:spPr>
         <p:txBody>
           <a:bodyPr wrap="square" lIns="57150" tIns="57150" rIns="57150" bIns="57150" anchor="ctr">
-            <a:normAutofit/>
+            <a:noAutofit/>
           </a:bodyPr>
           <a:lstStyle/>
           <a:p>
@@ -10713,7 +12002,7 @@
               </a:defRPr>
             </a:pPr>
             <a:r>
-              <a:rPr sz="1200" b="1" i="0">
+              <a:rPr sz="1650" b="1" i="0">
                 <a:solidFill>
                   <a:srgbClr val="132925"/>
                 </a:solidFill>
@@ -10731,7 +12020,7 @@
           <p:cNvPr id="5" name="Rounded Rectangle 4">
             <a:extLst>
               <a:ext uri="{FF2B5EF4-FFF2-40B4-BE49-F238E27FC236}">
-                <a16:creationId xmlns:a16="http://schemas.microsoft.com/office/drawing/2014/main" id="{75D6BDBC-8361-49D4-86B4-A907B184369B}"/>
+                <a16:creationId xmlns:a16="http://schemas.microsoft.com/office/drawing/2014/main" id="{522ACAEE-0E63-477E-B76C-9FC086EE9D0B}"/>
               </a:ext>
             </a:extLst>
           </p:cNvPr>
@@ -10762,7 +12051,7 @@
         </p:spPr>
         <p:txBody>
           <a:bodyPr wrap="square" lIns="57150" tIns="57150" rIns="57150" bIns="57150" anchor="ctr">
-            <a:normAutofit/>
+            <a:noAutofit/>
           </a:bodyPr>
           <a:lstStyle/>
           <a:p>
@@ -10781,7 +12070,7 @@
               </a:defRPr>
             </a:pPr>
             <a:r>
-              <a:rPr sz="1200" b="1" i="0">
+              <a:rPr sz="1650" b="1" i="0">
                 <a:solidFill>
                   <a:srgbClr val="FFFFFF"/>
                 </a:solidFill>
@@ -10800,7 +12089,7 @@
           <p:cNvPr id="6" name="Rounded Rectangle 5">
             <a:extLst>
               <a:ext uri="{FF2B5EF4-FFF2-40B4-BE49-F238E27FC236}">
-                <a16:creationId xmlns:a16="http://schemas.microsoft.com/office/drawing/2014/main" id="{2DC5CCE1-177D-45E5-BA48-28C71FFB0248}"/>
+                <a16:creationId xmlns:a16="http://schemas.microsoft.com/office/drawing/2014/main" id="{B67C40DC-3536-4CAF-AF6D-917696AE6C9A}"/>
               </a:ext>
             </a:extLst>
           </p:cNvPr>
@@ -10831,7 +12120,7 @@
         </p:spPr>
         <p:txBody>
           <a:bodyPr wrap="square" lIns="57150" tIns="57150" rIns="57150" bIns="57150" anchor="ctr">
-            <a:normAutofit/>
+            <a:noAutofit/>
           </a:bodyPr>
           <a:lstStyle/>
           <a:p>
@@ -10850,7 +12139,7 @@
               </a:defRPr>
             </a:pPr>
             <a:r>
-              <a:rPr sz="1200" b="1" i="0">
+              <a:rPr sz="1650" b="1" i="0">
                 <a:solidFill>
                   <a:srgbClr val="132925"/>
                 </a:solidFill>
@@ -10869,7 +12158,7 @@
           <p:cNvPr id="7" name="Rounded Rectangle 6">
             <a:extLst>
               <a:ext uri="{FF2B5EF4-FFF2-40B4-BE49-F238E27FC236}">
-                <a16:creationId xmlns:a16="http://schemas.microsoft.com/office/drawing/2014/main" id="{BF40EC12-658B-4625-9587-CF4334D7441B}"/>
+                <a16:creationId xmlns:a16="http://schemas.microsoft.com/office/drawing/2014/main" id="{91553C9D-8AD8-46E2-8062-8F9B21E0BF91}"/>
               </a:ext>
             </a:extLst>
           </p:cNvPr>
@@ -10900,7 +12189,7 @@
         </p:spPr>
         <p:txBody>
           <a:bodyPr wrap="square" lIns="57150" tIns="57150" rIns="57150" bIns="57150" anchor="ctr">
-            <a:normAutofit/>
+            <a:noAutofit/>
           </a:bodyPr>
           <a:lstStyle/>
           <a:p>
@@ -10919,7 +12208,7 @@
               </a:defRPr>
             </a:pPr>
             <a:r>
-              <a:rPr sz="1200" b="1" i="0">
+              <a:rPr sz="1650" b="1" i="0">
                 <a:solidFill>
                   <a:srgbClr val="132925"/>
                 </a:solidFill>
@@ -11019,7 +12308,7 @@
           <p:cNvPr id="11" name="Rectangle 10">
             <a:extLst>
               <a:ext uri="{FF2B5EF4-FFF2-40B4-BE49-F238E27FC236}">
-                <a16:creationId xmlns:a16="http://schemas.microsoft.com/office/drawing/2014/main" id="{A70AC137-056C-4AF0-9D66-21E634B4884F}"/>
+                <a16:creationId xmlns:a16="http://schemas.microsoft.com/office/drawing/2014/main" id="{2599DF84-8704-49DA-B176-532FB03EC8A2}"/>
               </a:ext>
             </a:extLst>
           </p:cNvPr>
@@ -11030,8 +12319,8 @@
         </p:nvSpPr>
         <p:spPr>
           <a:xfrm>
-            <a:off x="7715250" y="1352550"/>
-            <a:ext cx="2152650" cy="247650"/>
+            <a:off x="7543800" y="1352550"/>
+            <a:ext cx="2476500" cy="266700"/>
           </a:xfrm>
           <a:prstGeom prst="rect">
             <a:avLst/>
@@ -11044,7 +12333,7 @@
         </p:spPr>
         <p:txBody>
           <a:bodyPr wrap="square" lIns="0" tIns="0" rIns="0" bIns="0" anchor="ctr">
-            <a:normAutofit/>
+            <a:noAutofit/>
           </a:bodyPr>
           <a:lstStyle/>
           <a:p>
@@ -11063,7 +12352,7 @@
               </a:defRPr>
             </a:pPr>
             <a:r>
-              <a:rPr sz="975" b="1" i="0">
+              <a:rPr sz="1650" b="1" i="0">
                 <a:solidFill>
                   <a:srgbClr val="087C72"/>
                 </a:solidFill>
@@ -11071,7 +12360,7 @@
                 <a:ea typeface="Aptos"/>
                 <a:cs typeface="Aptos"/>
               </a:rPr>
-              <a:t>PERSIST BEFORE PUBLISH</a:t>
+              <a:t>PERSIST BEFORE SSE</a:t>
             </a:r>
           </a:p>
         </p:txBody>
@@ -11081,7 +12370,7 @@
           <p:cNvPr id="12" name="Rounded Rectangle 11">
             <a:extLst>
               <a:ext uri="{FF2B5EF4-FFF2-40B4-BE49-F238E27FC236}">
-                <a16:creationId xmlns:a16="http://schemas.microsoft.com/office/drawing/2014/main" id="{77156681-EB9F-49FE-9F27-4CAC03995782}"/>
+                <a16:creationId xmlns:a16="http://schemas.microsoft.com/office/drawing/2014/main" id="{3F37230F-3944-4E52-B47C-180B070731EA}"/>
               </a:ext>
             </a:extLst>
           </p:cNvPr>
@@ -11092,12 +12381,12 @@
         </p:nvSpPr>
         <p:spPr>
           <a:xfrm>
-            <a:off x="4324350" y="3600450"/>
-            <a:ext cx="1600200" cy="1123950"/>
+            <a:off x="4324350" y="3524250"/>
+            <a:ext cx="1600200" cy="1238250"/>
           </a:xfrm>
           <a:prstGeom prst="roundRect">
             <a:avLst>
-              <a:gd name="adj" fmla="val 5085"/>
+              <a:gd name="adj" fmla="val 4615"/>
             </a:avLst>
           </a:prstGeom>
           <a:solidFill>
@@ -11112,7 +12401,7 @@
         </p:spPr>
         <p:txBody>
           <a:bodyPr wrap="square" lIns="95250" tIns="95250" rIns="95250" bIns="95250" anchor="ctr">
-            <a:normAutofit/>
+            <a:noAutofit/>
           </a:bodyPr>
           <a:lstStyle/>
           <a:p>
@@ -11131,15 +12420,15 @@
               </a:defRPr>
             </a:pPr>
             <a:r>
-              <a:rPr sz="1350" b="1" i="0">
-                <a:solidFill>
-                  <a:srgbClr val="132925"/>
-                </a:solidFill>
-                <a:latin typeface="Aptos"/>
-                <a:ea typeface="Aptos"/>
-                <a:cs typeface="Aptos"/>
-              </a:rPr>
-              <a:t>Intake store</a:t>
+              <a:rPr sz="1650" b="1" i="0">
+                <a:solidFill>
+                  <a:srgbClr val="132925"/>
+                </a:solidFill>
+                <a:latin typeface="Aptos"/>
+                <a:ea typeface="Aptos"/>
+                <a:cs typeface="Aptos"/>
+              </a:rPr>
+              <a:t>Intake</a:t>
             </a:r>
           </a:p>
           <a:p>
@@ -11158,7 +12447,7 @@
               </a:defRPr>
             </a:pPr>
             <a:r>
-              <a:rPr sz="1125" b="0" i="0">
+              <a:rPr sz="1650" b="0" i="0">
                 <a:solidFill>
                   <a:srgbClr val="5B6F6A"/>
                 </a:solidFill>
@@ -11166,7 +12455,7 @@
                 <a:ea typeface="Aptos"/>
                 <a:cs typeface="Aptos"/>
               </a:rPr>
-              <a:t>Lifecycle + confirmed snapshots</a:t>
+              <a:t>Lifecycle + snapshots</a:t>
             </a:r>
           </a:p>
         </p:txBody>
@@ -11176,7 +12465,7 @@
           <p:cNvPr id="13" name="Rounded Rectangle 12">
             <a:extLst>
               <a:ext uri="{FF2B5EF4-FFF2-40B4-BE49-F238E27FC236}">
-                <a16:creationId xmlns:a16="http://schemas.microsoft.com/office/drawing/2014/main" id="{074178AE-4EDB-4CCF-B658-3DEA4F6C394B}"/>
+                <a16:creationId xmlns:a16="http://schemas.microsoft.com/office/drawing/2014/main" id="{D97C85DA-7912-4D31-932C-5C69C385FBA0}"/>
               </a:ext>
             </a:extLst>
           </p:cNvPr>
@@ -11187,12 +12476,12 @@
         </p:nvSpPr>
         <p:spPr>
           <a:xfrm>
-            <a:off x="6096000" y="3600450"/>
-            <a:ext cx="1600200" cy="1123950"/>
+            <a:off x="6096000" y="3524250"/>
+            <a:ext cx="1600200" cy="1238250"/>
           </a:xfrm>
           <a:prstGeom prst="roundRect">
             <a:avLst>
-              <a:gd name="adj" fmla="val 5085"/>
+              <a:gd name="adj" fmla="val 4615"/>
             </a:avLst>
           </a:prstGeom>
           <a:solidFill>
@@ -11207,7 +12496,7 @@
         </p:spPr>
         <p:txBody>
           <a:bodyPr wrap="square" lIns="95250" tIns="95250" rIns="95250" bIns="95250" anchor="ctr">
-            <a:normAutofit/>
+            <a:noAutofit/>
           </a:bodyPr>
           <a:lstStyle/>
           <a:p>
@@ -11226,15 +12515,15 @@
               </a:defRPr>
             </a:pPr>
             <a:r>
-              <a:rPr sz="1350" b="1" i="0">
-                <a:solidFill>
-                  <a:srgbClr val="132925"/>
-                </a:solidFill>
-                <a:latin typeface="Aptos"/>
-                <a:ea typeface="Aptos"/>
-                <a:cs typeface="Aptos"/>
-              </a:rPr>
-              <a:t>Artifact files</a:t>
+              <a:rPr sz="1650" b="1" i="0">
+                <a:solidFill>
+                  <a:srgbClr val="132925"/>
+                </a:solidFill>
+                <a:latin typeface="Aptos"/>
+                <a:ea typeface="Aptos"/>
+                <a:cs typeface="Aptos"/>
+              </a:rPr>
+              <a:t>Artifacts</a:t>
             </a:r>
           </a:p>
           <a:p>
@@ -11253,7 +12542,7 @@
               </a:defRPr>
             </a:pPr>
             <a:r>
-              <a:rPr sz="1125" b="0" i="0">
+              <a:rPr sz="1650" b="0" i="0">
                 <a:solidFill>
                   <a:srgbClr val="5B6F6A"/>
                 </a:solidFill>
@@ -11261,7 +12550,7 @@
                 <a:ea typeface="Aptos"/>
                 <a:cs typeface="Aptos"/>
               </a:rPr>
-              <a:t>Immutable uploaded evidence</a:t>
+              <a:t>Immutable evidence</a:t>
             </a:r>
           </a:p>
         </p:txBody>
@@ -11271,7 +12560,7 @@
           <p:cNvPr id="14" name="Rounded Rectangle 13">
             <a:extLst>
               <a:ext uri="{FF2B5EF4-FFF2-40B4-BE49-F238E27FC236}">
-                <a16:creationId xmlns:a16="http://schemas.microsoft.com/office/drawing/2014/main" id="{03FA926D-8DF7-4C91-894D-6ACB2275098C}"/>
+                <a16:creationId xmlns:a16="http://schemas.microsoft.com/office/drawing/2014/main" id="{23CC6947-B136-4638-BEA5-49B6CACD1329}"/>
               </a:ext>
             </a:extLst>
           </p:cNvPr>
@@ -11282,12 +12571,12 @@
         </p:nvSpPr>
         <p:spPr>
           <a:xfrm>
-            <a:off x="7867650" y="3600450"/>
-            <a:ext cx="1600200" cy="1123950"/>
+            <a:off x="7867650" y="3524250"/>
+            <a:ext cx="1600200" cy="1238250"/>
           </a:xfrm>
           <a:prstGeom prst="roundRect">
             <a:avLst>
-              <a:gd name="adj" fmla="val 5085"/>
+              <a:gd name="adj" fmla="val 4615"/>
             </a:avLst>
           </a:prstGeom>
           <a:solidFill>
@@ -11302,7 +12591,7 @@
         </p:spPr>
         <p:txBody>
           <a:bodyPr wrap="square" lIns="95250" tIns="95250" rIns="95250" bIns="95250" anchor="ctr">
-            <a:normAutofit/>
+            <a:noAutofit/>
           </a:bodyPr>
           <a:lstStyle/>
           <a:p>
@@ -11321,15 +12610,15 @@
               </a:defRPr>
             </a:pPr>
             <a:r>
-              <a:rPr sz="1350" b="1" i="0">
-                <a:solidFill>
-                  <a:srgbClr val="132925"/>
-                </a:solidFill>
-                <a:latin typeface="Aptos"/>
-                <a:ea typeface="Aptos"/>
-                <a:cs typeface="Aptos"/>
-              </a:rPr>
-              <a:t>Run + event store</a:t>
+              <a:rPr sz="1650" b="1" i="0">
+                <a:solidFill>
+                  <a:srgbClr val="132925"/>
+                </a:solidFill>
+                <a:latin typeface="Aptos"/>
+                <a:ea typeface="Aptos"/>
+                <a:cs typeface="Aptos"/>
+              </a:rPr>
+              <a:t>Run ledger</a:t>
             </a:r>
           </a:p>
           <a:p>
@@ -11348,7 +12637,7 @@
               </a:defRPr>
             </a:pPr>
             <a:r>
-              <a:rPr sz="1125" b="0" i="0">
+              <a:rPr sz="1650" b="0" i="0">
                 <a:solidFill>
                   <a:srgbClr val="5B6F6A"/>
                 </a:solidFill>
@@ -11356,7 +12645,7 @@
                 <a:ea typeface="Aptos"/>
                 <a:cs typeface="Aptos"/>
               </a:rPr>
-              <a:t>Events + wave checkpoints</a:t>
+              <a:t>Events + checkpoints</a:t>
             </a:r>
           </a:p>
         </p:txBody>
@@ -11366,7 +12655,7 @@
           <p:cNvPr id="15" name="Rounded Rectangle 14">
             <a:extLst>
               <a:ext uri="{FF2B5EF4-FFF2-40B4-BE49-F238E27FC236}">
-                <a16:creationId xmlns:a16="http://schemas.microsoft.com/office/drawing/2014/main" id="{08E7F768-7919-4B4D-BF81-AD98246DAF23}"/>
+                <a16:creationId xmlns:a16="http://schemas.microsoft.com/office/drawing/2014/main" id="{E358669B-01AC-4F69-BD42-29824480529A}"/>
               </a:ext>
             </a:extLst>
           </p:cNvPr>
@@ -11377,12 +12666,12 @@
         </p:nvSpPr>
         <p:spPr>
           <a:xfrm>
-            <a:off x="9639300" y="3600450"/>
-            <a:ext cx="1600200" cy="1123950"/>
+            <a:off x="9639300" y="3524250"/>
+            <a:ext cx="1600200" cy="1238250"/>
           </a:xfrm>
           <a:prstGeom prst="roundRect">
             <a:avLst>
-              <a:gd name="adj" fmla="val 5085"/>
+              <a:gd name="adj" fmla="val 4615"/>
             </a:avLst>
           </a:prstGeom>
           <a:solidFill>
@@ -11397,7 +12686,7 @@
         </p:spPr>
         <p:txBody>
           <a:bodyPr wrap="square" lIns="95250" tIns="95250" rIns="95250" bIns="95250" anchor="ctr">
-            <a:normAutofit/>
+            <a:noAutofit/>
           </a:bodyPr>
           <a:lstStyle/>
           <a:p>
@@ -11416,15 +12705,15 @@
               </a:defRPr>
             </a:pPr>
             <a:r>
-              <a:rPr sz="1350" b="1" i="0">
-                <a:solidFill>
-                  <a:srgbClr val="132925"/>
-                </a:solidFill>
-                <a:latin typeface="Aptos"/>
-                <a:ea typeface="Aptos"/>
-                <a:cs typeface="Aptos"/>
-              </a:rPr>
-              <a:t>Memory + review</a:t>
+              <a:rPr sz="1650" b="1" i="0">
+                <a:solidFill>
+                  <a:srgbClr val="132925"/>
+                </a:solidFill>
+                <a:latin typeface="Aptos"/>
+                <a:ea typeface="Aptos"/>
+                <a:cs typeface="Aptos"/>
+              </a:rPr>
+              <a:t>Memory</a:t>
             </a:r>
           </a:p>
           <a:p>
@@ -11443,7 +12732,7 @@
               </a:defRPr>
             </a:pPr>
             <a:r>
-              <a:rPr sz="1125" b="0" i="0">
+              <a:rPr sz="1650" b="0" i="0">
                 <a:solidFill>
                   <a:srgbClr val="5B6F6A"/>
                 </a:solidFill>
@@ -11451,7 +12740,7 @@
                 <a:ea typeface="Aptos"/>
                 <a:cs typeface="Aptos"/>
               </a:rPr>
-              <a:t>Decision and reviewer ledgers</a:t>
+              <a:t>Review ledger</a:t>
             </a:r>
           </a:p>
         </p:txBody>
@@ -11468,7 +12757,7 @@
         <p:spPr>
           <a:xfrm>
             <a:off x="5029200" y="2362200"/>
-            <a:ext cx="95250" cy="1238250"/>
+            <a:ext cx="95250" cy="1162050"/>
           </a:xfrm>
           <a:prstGeom prst="bentConnector4">
             <a:avLst>
@@ -11498,7 +12787,7 @@
         <p:spPr>
           <a:xfrm>
             <a:off x="5029200" y="2362200"/>
-            <a:ext cx="1866900" cy="1238250"/>
+            <a:ext cx="1866900" cy="1162050"/>
           </a:xfrm>
           <a:prstGeom prst="bentConnector4">
             <a:avLst>
@@ -11528,7 +12817,7 @@
         <p:spPr>
           <a:xfrm>
             <a:off x="6886575" y="2438400"/>
-            <a:ext cx="1781175" cy="1162050"/>
+            <a:ext cx="1781175" cy="1085850"/>
           </a:xfrm>
           <a:prstGeom prst="bentConnector4">
             <a:avLst>
@@ -11558,7 +12847,7 @@
         <p:spPr>
           <a:xfrm>
             <a:off x="6886575" y="2438400"/>
-            <a:ext cx="3552825" cy="1162050"/>
+            <a:ext cx="3552825" cy="1085850"/>
           </a:xfrm>
           <a:prstGeom prst="bentConnector4">
             <a:avLst>
@@ -11581,7 +12870,7 @@
           <p:cNvPr id="20" name="Rounded Rectangle 19">
             <a:extLst>
               <a:ext uri="{FF2B5EF4-FFF2-40B4-BE49-F238E27FC236}">
-                <a16:creationId xmlns:a16="http://schemas.microsoft.com/office/drawing/2014/main" id="{45AFE64D-26AC-4552-9D2E-942A2126A0C8}"/>
+                <a16:creationId xmlns:a16="http://schemas.microsoft.com/office/drawing/2014/main" id="{975A0D4E-DC82-4124-AC71-82CF3F348988}"/>
               </a:ext>
             </a:extLst>
           </p:cNvPr>
@@ -11616,7 +12905,7 @@
           <p:cNvPr id="21" name="Rectangle 20">
             <a:extLst>
               <a:ext uri="{FF2B5EF4-FFF2-40B4-BE49-F238E27FC236}">
-                <a16:creationId xmlns:a16="http://schemas.microsoft.com/office/drawing/2014/main" id="{2E893F84-4BFD-46E4-84E4-1F7E4BEF04CE}"/>
+                <a16:creationId xmlns:a16="http://schemas.microsoft.com/office/drawing/2014/main" id="{A2CF99F3-D05B-405C-841F-9BD4C331D29D}"/>
               </a:ext>
             </a:extLst>
           </p:cNvPr>
@@ -11641,7 +12930,7 @@
         </p:spPr>
         <p:txBody>
           <a:bodyPr wrap="square" lIns="0" tIns="0" rIns="0" bIns="0" anchor="ctr">
-            <a:normAutofit fontScale="94595"/>
+            <a:noAutofit/>
           </a:bodyPr>
           <a:lstStyle/>
           <a:p>
@@ -11660,7 +12949,7 @@
               </a:defRPr>
             </a:pPr>
             <a:r>
-              <a:rPr sz="1575" b="1" i="0">
+              <a:rPr sz="1650" b="1" i="0">
                 <a:solidFill>
                   <a:srgbClr val="132925"/>
                 </a:solidFill>
@@ -11671,7 +12960,7 @@
               <a:t>Current SQLite lifecycle: one API replica</a:t>
             </a:r>
             <a:r>
-              <a:rPr sz="1200" b="0" i="0">
+              <a:rPr sz="1650" b="0" i="0">
                 <a:solidFill>
                   <a:srgbClr val="5B6F6A"/>
                 </a:solidFill>
@@ -11700,6 +12989,14 @@
 <file path=ppt/slides/slide8.xml><?xml version="1.0" encoding="utf-8"?>
 <p:sld xmlns:a="http://schemas.openxmlformats.org/drawingml/2006/main" xmlns:r="http://schemas.openxmlformats.org/officeDocument/2006/relationships" xmlns:p="http://schemas.openxmlformats.org/presentationml/2006/main">
   <p:cSld>
+    <p:bg>
+      <p:bgPr>
+        <a:solidFill>
+          <a:srgbClr val="F8FBFA"/>
+        </a:solidFill>
+        <a:effectLst/>
+      </p:bgPr>
+    </p:bg>
     <p:spTree>
       <p:nvGrpSpPr>
         <p:cNvPr id="1" name=""/>
@@ -11730,21 +13027,42 @@
             <p:ph type="title"/>
           </p:nvPr>
         </p:nvSpPr>
-        <p:spPr/>
-        <p:txBody>
-          <a:bodyPr/>
-          <a:lstStyle/>
-          <a:p>
-            <a:pPr>
-              <a:buNone/>
-              <a:defRPr sz="3200">
-                <a:solidFill>
-                  <a:srgbClr val="1F6FEB"/>
-                </a:solidFill>
-              </a:defRPr>
-            </a:pPr>
-            <a:r>
-              <a:t>Benchmark: Agent Society vs. Single-Agent Baseline</a:t>
+        <p:spPr>
+          <a:xfrm>
+            <a:off x="609600" y="419100"/>
+            <a:ext cx="10934700" cy="781050"/>
+          </a:xfrm>
+        </p:spPr>
+        <p:txBody>
+          <a:bodyPr wrap="square" lIns="0" tIns="0" rIns="0" bIns="0" anchor="ctr">
+            <a:noAutofit/>
+          </a:bodyPr>
+          <a:lstStyle/>
+          <a:p>
+            <a:pPr marL="0" indent="0" algn="l">
+              <a:spcAft>
+                <a:spcPts val="0"/>
+              </a:spcAft>
+              <a:buNone/>
+              <a:defRPr sz="3600" b="1">
+                <a:solidFill>
+                  <a:srgbClr val="132925"/>
+                </a:solidFill>
+                <a:latin typeface="Aptos Display"/>
+                <a:ea typeface="Aptos Display"/>
+                <a:cs typeface="Aptos Display"/>
+              </a:defRPr>
+            </a:pPr>
+            <a:r>
+              <a:rPr sz="3600" b="1" i="0">
+                <a:solidFill>
+                  <a:srgbClr val="132925"/>
+                </a:solidFill>
+                <a:latin typeface="Aptos Display"/>
+                <a:ea typeface="Aptos Display"/>
+                <a:cs typeface="Aptos Display"/>
+              </a:rPr>
+              <a:t>The DAG earns its complexity</a:t>
             </a:r>
           </a:p>
         </p:txBody>
@@ -11765,60 +13083,563 @@
             <p:ph idx="1"/>
           </p:nvPr>
         </p:nvSpPr>
-        <p:spPr/>
-        <p:txBody>
-          <a:bodyPr wrap="square"/>
-          <a:lstStyle/>
-          <a:p>
-            <a:pPr>
-              <a:buNone/>
-            </a:pPr>
-            <a:r>
-              <a:rPr sz="1800">
-                <a:solidFill>
-                  <a:srgbClr val="222222"/>
-                </a:solidFill>
-              </a:rPr>
-              <a:t>Same nine specialist agents, same demo incident, only the execution strategy differs — measured with services/api/scripts/benchmark_agent_society.py.</a:t>
-            </a:r>
-          </a:p>
-          <a:p>
-            <a:pPr>
-              <a:buNone/>
-            </a:pPr>
-            <a:r>
-              <a:rPr sz="1800">
-                <a:solidFill>
-                  <a:srgbClr val="222222"/>
-                </a:solidFill>
-              </a:rPr>
-              <a:t>Latency: the 6-wave DAG completed 1.49x faster than a strictly sequential single-agent pipeline at identical per-agent cost.</a:t>
-            </a:r>
-          </a:p>
-          <a:p>
-            <a:pPr>
-              <a:buNone/>
-            </a:pPr>
-            <a:r>
-              <a:rPr sz="1800">
-                <a:solidFill>
-                  <a:srgbClr val="222222"/>
-                </a:solidFill>
-              </a:rPr>
-              <a:t>Failure isolation: forcing one agent to fail, the DAG still delivered 4/9 completed agents with clean downstream skips; the sequential baseline aborted the entire run after 3/9 agents.</a:t>
-            </a:r>
-          </a:p>
-          <a:p>
-            <a:pPr>
-              <a:buNone/>
-            </a:pPr>
-            <a:r>
-              <a:rPr sz="1800">
-                <a:solidFill>
-                  <a:srgbClr val="222222"/>
-                </a:solidFill>
-              </a:rPr>
-              <a:t>Checkpoint/resume: after a simulated crash, the DAG re-ran only 3/9 agents (33%) from its last checkpoint; the baseline has no resume mechanism and would re-run 9/9 (100%).</a:t>
+        <p:spPr>
+          <a:xfrm>
+            <a:off x="685800" y="1466850"/>
+            <a:ext cx="3105150" cy="4286250"/>
+          </a:xfrm>
+        </p:spPr>
+        <p:txBody>
+          <a:bodyPr wrap="square" lIns="0" tIns="0" rIns="76200" bIns="0" anchor="t">
+            <a:noAutofit/>
+          </a:bodyPr>
+          <a:lstStyle/>
+          <a:p>
+            <a:pPr marL="0" indent="0" algn="l">
+              <a:spcAft>
+                <a:spcPts val="7"/>
+              </a:spcAft>
+              <a:buNone/>
+              <a:defRPr sz="1350" b="0">
+                <a:solidFill>
+                  <a:srgbClr val="132925"/>
+                </a:solidFill>
+                <a:latin typeface="Aptos"/>
+                <a:ea typeface="Aptos"/>
+                <a:cs typeface="Aptos"/>
+              </a:defRPr>
+            </a:pPr>
+            <a:r>
+              <a:rPr sz="3900" b="1" i="0">
+                <a:solidFill>
+                  <a:srgbClr val="087C72"/>
+                </a:solidFill>
+                <a:latin typeface="Aptos"/>
+                <a:ea typeface="Aptos"/>
+                <a:cs typeface="Aptos"/>
+              </a:rPr>
+              <a:t>1.49x</a:t>
+            </a:r>
+            <a:r>
+              <a:rPr sz="1875" b="1" i="0">
+                <a:solidFill>
+                  <a:srgbClr val="132925"/>
+                </a:solidFill>
+                <a:latin typeface="Aptos"/>
+                <a:ea typeface="Aptos"/>
+                <a:cs typeface="Aptos"/>
+              </a:rPr>
+              <a:t> faster</a:t>
+            </a:r>
+          </a:p>
+          <a:p>
+            <a:pPr marL="0" indent="0" algn="l">
+              <a:spcAft>
+                <a:spcPts val="30"/>
+              </a:spcAft>
+              <a:buNone/>
+              <a:defRPr sz="1350" b="0">
+                <a:solidFill>
+                  <a:srgbClr val="132925"/>
+                </a:solidFill>
+                <a:latin typeface="Aptos"/>
+                <a:ea typeface="Aptos"/>
+                <a:cs typeface="Aptos"/>
+              </a:defRPr>
+            </a:pPr>
+            <a:r>
+              <a:rPr sz="1650" b="0" i="0">
+                <a:solidFill>
+                  <a:srgbClr val="5B6F6A"/>
+                </a:solidFill>
+                <a:latin typeface="Aptos"/>
+                <a:ea typeface="Aptos"/>
+                <a:cs typeface="Aptos"/>
+              </a:rPr>
+              <a:t>1095.3 ms  vs  1633.9 ms</a:t>
+            </a:r>
+          </a:p>
+          <a:p>
+            <a:pPr marL="0" indent="0" algn="l">
+              <a:spcAft>
+                <a:spcPts val="6"/>
+              </a:spcAft>
+              <a:buNone/>
+              <a:defRPr sz="1350" b="0">
+                <a:solidFill>
+                  <a:srgbClr val="132925"/>
+                </a:solidFill>
+                <a:latin typeface="Aptos"/>
+                <a:ea typeface="Aptos"/>
+                <a:cs typeface="Aptos"/>
+              </a:defRPr>
+            </a:pPr>
+            <a:r>
+              <a:rPr sz="1650" b="1" i="0">
+                <a:solidFill>
+                  <a:srgbClr val="C47A00"/>
+                </a:solidFill>
+                <a:latin typeface="Aptos"/>
+                <a:ea typeface="Aptos"/>
+                <a:cs typeface="Aptos"/>
+              </a:rPr>
+              <a:t>VISION FAILURE</a:t>
+            </a:r>
+          </a:p>
+          <a:p>
+            <a:pPr marL="0" indent="0" algn="l">
+              <a:spcAft>
+                <a:spcPts val="6"/>
+              </a:spcAft>
+              <a:buNone/>
+              <a:defRPr sz="1350" b="0">
+                <a:solidFill>
+                  <a:srgbClr val="132925"/>
+                </a:solidFill>
+                <a:latin typeface="Aptos"/>
+                <a:ea typeface="Aptos"/>
+                <a:cs typeface="Aptos"/>
+              </a:defRPr>
+            </a:pPr>
+            <a:r>
+              <a:rPr sz="2250" b="1" i="0">
+                <a:solidFill>
+                  <a:srgbClr val="132925"/>
+                </a:solidFill>
+                <a:latin typeface="Aptos"/>
+                <a:ea typeface="Aptos"/>
+                <a:cs typeface="Aptos"/>
+              </a:rPr>
+              <a:t>4/9</a:t>
+            </a:r>
+            <a:r>
+              <a:rPr sz="1650" b="0" i="0">
+                <a:solidFill>
+                  <a:srgbClr val="5B6F6A"/>
+                </a:solidFill>
+                <a:latin typeface="Aptos"/>
+                <a:ea typeface="Aptos"/>
+                <a:cs typeface="Aptos"/>
+              </a:rPr>
+              <a:t> agents still complete</a:t>
+            </a:r>
+          </a:p>
+          <a:p>
+            <a:pPr marL="0" indent="0" algn="l">
+              <a:spcAft>
+                <a:spcPts val="26"/>
+              </a:spcAft>
+              <a:buNone/>
+              <a:defRPr sz="1350" b="0">
+                <a:solidFill>
+                  <a:srgbClr val="132925"/>
+                </a:solidFill>
+                <a:latin typeface="Aptos"/>
+                <a:ea typeface="Aptos"/>
+                <a:cs typeface="Aptos"/>
+              </a:defRPr>
+            </a:pPr>
+            <a:r>
+              <a:rPr sz="1650" b="0" i="0">
+                <a:solidFill>
+                  <a:srgbClr val="5B6F6A"/>
+                </a:solidFill>
+                <a:latin typeface="Aptos"/>
+                <a:ea typeface="Aptos"/>
+                <a:cs typeface="Aptos"/>
+              </a:rPr>
+              <a:t>Sequential baseline aborts after 3/9.</a:t>
+            </a:r>
+          </a:p>
+          <a:p>
+            <a:pPr marL="0" indent="0" algn="l">
+              <a:spcAft>
+                <a:spcPts val="6"/>
+              </a:spcAft>
+              <a:buNone/>
+              <a:defRPr sz="1350" b="0">
+                <a:solidFill>
+                  <a:srgbClr val="132925"/>
+                </a:solidFill>
+                <a:latin typeface="Aptos"/>
+                <a:ea typeface="Aptos"/>
+                <a:cs typeface="Aptos"/>
+              </a:defRPr>
+            </a:pPr>
+            <a:r>
+              <a:rPr sz="1650" b="1" i="0">
+                <a:solidFill>
+                  <a:srgbClr val="087C72"/>
+                </a:solidFill>
+                <a:latin typeface="Aptos"/>
+                <a:ea typeface="Aptos"/>
+                <a:cs typeface="Aptos"/>
+              </a:rPr>
+              <a:t>CRASH RECOVERY</a:t>
+            </a:r>
+          </a:p>
+          <a:p>
+            <a:pPr marL="0" indent="0" algn="l">
+              <a:spcAft>
+                <a:spcPts val="6"/>
+              </a:spcAft>
+              <a:buNone/>
+              <a:defRPr sz="1350" b="0">
+                <a:solidFill>
+                  <a:srgbClr val="132925"/>
+                </a:solidFill>
+                <a:latin typeface="Aptos"/>
+                <a:ea typeface="Aptos"/>
+                <a:cs typeface="Aptos"/>
+              </a:defRPr>
+            </a:pPr>
+            <a:r>
+              <a:rPr sz="2250" b="1" i="0">
+                <a:solidFill>
+                  <a:srgbClr val="132925"/>
+                </a:solidFill>
+                <a:latin typeface="Aptos"/>
+                <a:ea typeface="Aptos"/>
+                <a:cs typeface="Aptos"/>
+              </a:rPr>
+              <a:t>3/9</a:t>
+            </a:r>
+            <a:r>
+              <a:rPr sz="1650" b="0" i="0">
+                <a:solidFill>
+                  <a:srgbClr val="5B6F6A"/>
+                </a:solidFill>
+                <a:latin typeface="Aptos"/>
+                <a:ea typeface="Aptos"/>
+                <a:cs typeface="Aptos"/>
+              </a:rPr>
+              <a:t> agents rerun</a:t>
+            </a:r>
+          </a:p>
+          <a:p>
+            <a:pPr marL="0" indent="0" algn="l">
+              <a:spcAft>
+                <a:spcPts val="12"/>
+              </a:spcAft>
+              <a:buNone/>
+              <a:defRPr sz="1350" b="0">
+                <a:solidFill>
+                  <a:srgbClr val="132925"/>
+                </a:solidFill>
+                <a:latin typeface="Aptos"/>
+                <a:ea typeface="Aptos"/>
+                <a:cs typeface="Aptos"/>
+              </a:defRPr>
+            </a:pPr>
+            <a:r>
+              <a:rPr sz="1650" b="0" i="0">
+                <a:solidFill>
+                  <a:srgbClr val="5B6F6A"/>
+                </a:solidFill>
+                <a:latin typeface="Aptos"/>
+                <a:ea typeface="Aptos"/>
+                <a:cs typeface="Aptos"/>
+              </a:rPr>
+              <a:t>Sequential baseline reruns 9/9.</a:t>
+            </a:r>
+          </a:p>
+        </p:txBody>
+      </p:sp>
+      <p:graphicFrame>
+        <p:nvGraphicFramePr>
+          <p:cNvPr id="12" name="Chart"/>
+          <p:cNvGraphicFramePr/>
+          <p:nvPr/>
+        </p:nvGraphicFramePr>
+        <p:xfrm>
+          <a:off x="4438650" y="1714500"/>
+          <a:ext cx="6800850" cy="2571750"/>
+        </p:xfrm>
+        <a:graphic>
+          <a:graphicData uri="http://schemas.openxmlformats.org/drawingml/2006/chart">
+            <c:chart xmlns:c="http://schemas.openxmlformats.org/drawingml/2006/chart" xmlns:r="http://schemas.openxmlformats.org/officeDocument/2006/relationships" r:id="rId3"/>
+          </a:graphicData>
+        </a:graphic>
+      </p:graphicFrame>
+      <p:sp>
+        <p:nvSpPr>
+          <p:cNvPr id="5" name="Rectangle 4">
+            <a:extLst>
+              <a:ext uri="{FF2B5EF4-FFF2-40B4-BE49-F238E27FC236}">
+                <a16:creationId xmlns:a16="http://schemas.microsoft.com/office/drawing/2014/main" id="{D38064AF-3161-4F50-A55F-09CDEBF750D2}"/>
+              </a:ext>
+            </a:extLst>
+          </p:cNvPr>
+          <p:cNvSpPr>
+            <a:spLocks noGrp="1"/>
+          </p:cNvSpPr>
+          <p:nvPr/>
+        </p:nvSpPr>
+        <p:spPr>
+          <a:xfrm>
+            <a:off x="5905500" y="2724150"/>
+            <a:ext cx="2247900" cy="304800"/>
+          </a:xfrm>
+          <a:prstGeom prst="rect">
+            <a:avLst/>
+          </a:prstGeom>
+          <a:noFill/>
+          <a:ln w="0">
+            <a:noFill/>
+            <a:prstDash val="solid"/>
+          </a:ln>
+        </p:spPr>
+        <p:txBody>
+          <a:bodyPr wrap="square" lIns="0" tIns="0" rIns="0" bIns="0" anchor="ctr">
+            <a:noAutofit/>
+          </a:bodyPr>
+          <a:lstStyle/>
+          <a:p>
+            <a:pPr marL="0" indent="0" algn="l">
+              <a:spcAft>
+                <a:spcPts val="0"/>
+              </a:spcAft>
+              <a:buNone/>
+              <a:defRPr sz="1650" b="0">
+                <a:solidFill>
+                  <a:srgbClr val="132925"/>
+                </a:solidFill>
+                <a:latin typeface="Aptos"/>
+                <a:ea typeface="Aptos"/>
+                <a:cs typeface="Aptos"/>
+              </a:defRPr>
+            </a:pPr>
+            <a:r>
+              <a:rPr sz="1650" b="0" i="0">
+                <a:solidFill>
+                  <a:srgbClr val="132925"/>
+                </a:solidFill>
+                <a:latin typeface="Aptos"/>
+                <a:ea typeface="Aptos"/>
+                <a:cs typeface="Aptos"/>
+              </a:rPr>
+              <a:t>Sequential baseline</a:t>
+            </a:r>
+          </a:p>
+        </p:txBody>
+      </p:sp>
+      <p:sp>
+        <p:nvSpPr>
+          <p:cNvPr id="6" name="Rectangle 5">
+            <a:extLst>
+              <a:ext uri="{FF2B5EF4-FFF2-40B4-BE49-F238E27FC236}">
+                <a16:creationId xmlns:a16="http://schemas.microsoft.com/office/drawing/2014/main" id="{923366A2-1BE4-4465-95B8-EF7DFFEEF29C}"/>
+              </a:ext>
+            </a:extLst>
+          </p:cNvPr>
+          <p:cNvSpPr>
+            <a:spLocks noGrp="1"/>
+          </p:cNvSpPr>
+          <p:nvPr/>
+        </p:nvSpPr>
+        <p:spPr>
+          <a:xfrm>
+            <a:off x="5905500" y="3429000"/>
+            <a:ext cx="2057400" cy="304800"/>
+          </a:xfrm>
+          <a:prstGeom prst="rect">
+            <a:avLst/>
+          </a:prstGeom>
+          <a:noFill/>
+          <a:ln w="0">
+            <a:noFill/>
+            <a:prstDash val="solid"/>
+          </a:ln>
+        </p:spPr>
+        <p:txBody>
+          <a:bodyPr wrap="square" lIns="0" tIns="0" rIns="0" bIns="0" anchor="ctr">
+            <a:noAutofit/>
+          </a:bodyPr>
+          <a:lstStyle/>
+          <a:p>
+            <a:pPr marL="0" indent="0" algn="l">
+              <a:spcAft>
+                <a:spcPts val="0"/>
+              </a:spcAft>
+              <a:buNone/>
+              <a:defRPr sz="1650" b="1">
+                <a:solidFill>
+                  <a:srgbClr val="FFFFFF"/>
+                </a:solidFill>
+                <a:latin typeface="Aptos"/>
+                <a:ea typeface="Aptos"/>
+                <a:cs typeface="Aptos"/>
+              </a:defRPr>
+            </a:pPr>
+            <a:r>
+              <a:rPr sz="1650" b="1" i="0">
+                <a:solidFill>
+                  <a:srgbClr val="FFFFFF"/>
+                </a:solidFill>
+                <a:latin typeface="Aptos"/>
+                <a:ea typeface="Aptos"/>
+                <a:cs typeface="Aptos"/>
+              </a:rPr>
+              <a:t>Agent Society DAG</a:t>
+            </a:r>
+          </a:p>
+        </p:txBody>
+      </p:sp>
+      <p:sp>
+        <p:nvSpPr>
+          <p:cNvPr id="7" name="Rounded Rectangle 6">
+            <a:extLst>
+              <a:ext uri="{FF2B5EF4-FFF2-40B4-BE49-F238E27FC236}">
+                <a16:creationId xmlns:a16="http://schemas.microsoft.com/office/drawing/2014/main" id="{6C1B1DE9-3BC6-4564-8D2C-BF39C8CC2CC8}"/>
+              </a:ext>
+            </a:extLst>
+          </p:cNvPr>
+          <p:cNvSpPr>
+            <a:spLocks noGrp="1"/>
+          </p:cNvSpPr>
+          <p:nvPr/>
+        </p:nvSpPr>
+        <p:spPr>
+          <a:xfrm>
+            <a:off x="4438650" y="4533900"/>
+            <a:ext cx="6800850" cy="1066800"/>
+          </a:xfrm>
+          <a:prstGeom prst="roundRect">
+            <a:avLst>
+              <a:gd name="adj" fmla="val 5357"/>
+            </a:avLst>
+          </a:prstGeom>
+          <a:solidFill>
+            <a:srgbClr val="E6F3F1"/>
+          </a:solidFill>
+          <a:ln w="9525">
+            <a:solidFill>
+              <a:srgbClr val="B8DAD6"/>
+            </a:solidFill>
+            <a:prstDash val="solid"/>
+          </a:ln>
+        </p:spPr>
+      </p:sp>
+      <p:sp>
+        <p:nvSpPr>
+          <p:cNvPr id="8" name="Rectangle 7">
+            <a:extLst>
+              <a:ext uri="{FF2B5EF4-FFF2-40B4-BE49-F238E27FC236}">
+                <a16:creationId xmlns:a16="http://schemas.microsoft.com/office/drawing/2014/main" id="{991ABE88-EF26-45AE-B44E-CC64D5FC47DC}"/>
+              </a:ext>
+            </a:extLst>
+          </p:cNvPr>
+          <p:cNvSpPr>
+            <a:spLocks noGrp="1"/>
+          </p:cNvSpPr>
+          <p:nvPr/>
+        </p:nvSpPr>
+        <p:spPr>
+          <a:xfrm>
+            <a:off x="4686300" y="4772025"/>
+            <a:ext cx="6305550" cy="571500"/>
+          </a:xfrm>
+          <a:prstGeom prst="rect">
+            <a:avLst/>
+          </a:prstGeom>
+          <a:noFill/>
+          <a:ln w="0">
+            <a:noFill/>
+            <a:prstDash val="solid"/>
+          </a:ln>
+        </p:spPr>
+        <p:txBody>
+          <a:bodyPr wrap="square" lIns="0" tIns="0" rIns="0" bIns="0" anchor="ctr">
+            <a:noAutofit/>
+          </a:bodyPr>
+          <a:lstStyle/>
+          <a:p>
+            <a:pPr marL="0" indent="0" algn="l">
+              <a:spcAft>
+                <a:spcPts val="0"/>
+              </a:spcAft>
+              <a:buNone/>
+              <a:defRPr sz="1650" b="0">
+                <a:solidFill>
+                  <a:srgbClr val="132925"/>
+                </a:solidFill>
+                <a:latin typeface="Aptos"/>
+                <a:ea typeface="Aptos"/>
+                <a:cs typeface="Aptos"/>
+              </a:defRPr>
+            </a:pPr>
+            <a:r>
+              <a:rPr sz="1650" b="1" i="0">
+                <a:solidFill>
+                  <a:srgbClr val="0B3D38"/>
+                </a:solidFill>
+                <a:latin typeface="Aptos"/>
+                <a:ea typeface="Aptos"/>
+                <a:cs typeface="Aptos"/>
+              </a:rPr>
+              <a:t>Parallel work improves speed without giving up useful partial results or restart efficiency.</a:t>
+            </a:r>
+          </a:p>
+        </p:txBody>
+      </p:sp>
+      <p:sp>
+        <p:nvSpPr>
+          <p:cNvPr id="9" name="Rectangle 8">
+            <a:extLst>
+              <a:ext uri="{FF2B5EF4-FFF2-40B4-BE49-F238E27FC236}">
+                <a16:creationId xmlns:a16="http://schemas.microsoft.com/office/drawing/2014/main" id="{A2C0CBEB-6D82-4EB3-A486-3F3A18F28218}"/>
+              </a:ext>
+            </a:extLst>
+          </p:cNvPr>
+          <p:cNvSpPr>
+            <a:spLocks noGrp="1"/>
+          </p:cNvSpPr>
+          <p:nvPr/>
+        </p:nvSpPr>
+        <p:spPr>
+          <a:xfrm>
+            <a:off x="685800" y="5810250"/>
+            <a:ext cx="10553700" cy="552450"/>
+          </a:xfrm>
+          <a:prstGeom prst="rect">
+            <a:avLst/>
+          </a:prstGeom>
+          <a:noFill/>
+          <a:ln w="0">
+            <a:noFill/>
+            <a:prstDash val="solid"/>
+          </a:ln>
+        </p:spPr>
+        <p:txBody>
+          <a:bodyPr wrap="square" lIns="0" tIns="0" rIns="0" bIns="0" anchor="t">
+            <a:noAutofit/>
+          </a:bodyPr>
+          <a:lstStyle/>
+          <a:p>
+            <a:pPr marL="0" indent="0" algn="l">
+              <a:spcAft>
+                <a:spcPts val="0"/>
+              </a:spcAft>
+              <a:buNone/>
+              <a:defRPr sz="1650" b="0">
+                <a:solidFill>
+                  <a:srgbClr val="132925"/>
+                </a:solidFill>
+                <a:latin typeface="Aptos"/>
+                <a:ea typeface="Aptos"/>
+                <a:cs typeface="Aptos"/>
+              </a:defRPr>
+            </a:pPr>
+            <a:r>
+              <a:rPr sz="1650" b="0" i="0">
+                <a:solidFill>
+                  <a:srgbClr val="5B6F6A"/>
+                </a:solidFill>
+                <a:latin typeface="Aptos"/>
+                <a:ea typeface="Aptos"/>
+                <a:cs typeface="Aptos"/>
+              </a:rPr>
+              <a:t>Deterministic fallback benchmark. Both arms use the same synthetic 180 ms delay per agent to isolate orchestration strategy from provider latency.</a:t>
             </a:r>
           </a:p>
         </p:txBody>
@@ -11839,6 +13660,14 @@
 <file path=ppt/slides/slide9.xml><?xml version="1.0" encoding="utf-8"?>
 <p:sld xmlns:a="http://schemas.openxmlformats.org/drawingml/2006/main" xmlns:r="http://schemas.openxmlformats.org/officeDocument/2006/relationships" xmlns:p="http://schemas.openxmlformats.org/presentationml/2006/main">
   <p:cSld>
+    <p:bg>
+      <p:bgPr>
+        <a:solidFill>
+          <a:srgbClr val="F8FBFA"/>
+        </a:solidFill>
+        <a:effectLst/>
+      </p:bgPr>
+    </p:bg>
     <p:spTree>
       <p:nvGrpSpPr>
         <p:cNvPr id="1" name=""/>
@@ -11869,21 +13698,42 @@
             <p:ph type="title"/>
           </p:nvPr>
         </p:nvSpPr>
-        <p:spPr/>
-        <p:txBody>
-          <a:bodyPr/>
-          <a:lstStyle/>
-          <a:p>
-            <a:pPr>
-              <a:buNone/>
-              <a:defRPr sz="3200">
-                <a:solidFill>
-                  <a:srgbClr val="1F6FEB"/>
-                </a:solidFill>
-              </a:defRPr>
-            </a:pPr>
-            <a:r>
-              <a:t>Impact &amp; Judging Criteria Coverage</a:t>
+        <p:spPr>
+          <a:xfrm>
+            <a:off x="609600" y="419100"/>
+            <a:ext cx="10934700" cy="781050"/>
+          </a:xfrm>
+        </p:spPr>
+        <p:txBody>
+          <a:bodyPr wrap="square" lIns="0" tIns="0" rIns="0" bIns="0" anchor="ctr">
+            <a:noAutofit/>
+          </a:bodyPr>
+          <a:lstStyle/>
+          <a:p>
+            <a:pPr marL="0" indent="0" algn="l">
+              <a:spcAft>
+                <a:spcPts val="0"/>
+              </a:spcAft>
+              <a:buNone/>
+              <a:defRPr sz="3600" b="1">
+                <a:solidFill>
+                  <a:srgbClr val="132925"/>
+                </a:solidFill>
+                <a:latin typeface="Aptos Display"/>
+                <a:ea typeface="Aptos Display"/>
+                <a:cs typeface="Aptos Display"/>
+              </a:defRPr>
+            </a:pPr>
+            <a:r>
+              <a:rPr sz="3600" b="1" i="0">
+                <a:solidFill>
+                  <a:srgbClr val="132925"/>
+                </a:solidFill>
+                <a:latin typeface="Aptos Display"/>
+                <a:ea typeface="Aptos Display"/>
+                <a:cs typeface="Aptos Display"/>
+              </a:rPr>
+              <a:t>One sample incident proves operational value</a:t>
             </a:r>
           </a:p>
         </p:txBody>
@@ -11904,60 +13754,813 @@
             <p:ph idx="1"/>
           </p:nvPr>
         </p:nvSpPr>
-        <p:spPr/>
-        <p:txBody>
-          <a:bodyPr wrap="square"/>
-          <a:lstStyle/>
-          <a:p>
-            <a:pPr>
-              <a:buNone/>
-            </a:pPr>
-            <a:r>
-              <a:rPr sz="1800">
-                <a:solidFill>
-                  <a:srgbClr val="222222"/>
-                </a:solidFill>
-              </a:rPr>
-              <a:t>Problem value: recall response for small grocers, restaurants, pharmacies, cafeterias, and distributors that lack enterprise tooling — with an audit-ready evidence packet as the output that matters.</a:t>
-            </a:r>
-          </a:p>
-          <a:p>
-            <a:pPr>
-              <a:buNone/>
-            </a:pPr>
-            <a:r>
-              <a:rPr sz="1800">
-                <a:solidFill>
-                  <a:srgbClr val="222222"/>
-                </a:solidFill>
-              </a:rPr>
-              <a:t>Innovation &amp; AI creativity: a real multi-agent society, Qwen-driven structured reasoning, conflict reconciliation between model output and ground truth, and persistent cross-run memory.</a:t>
-            </a:r>
-          </a:p>
-          <a:p>
-            <a:pPr>
-              <a:buNone/>
-            </a:pPr>
-            <a:r>
-              <a:rPr sz="1800">
-                <a:solidFill>
-                  <a:srgbClr val="222222"/>
-                </a:solidFill>
-              </a:rPr>
-              <a:t>Technical depth: DAG orchestration with parallel waves, retries, typed restart checkpoints, persisted SSE replay, validated Qwen schemas, idempotent SQLite ledgers, Docker/Compose/CI.</a:t>
-            </a:r>
-          </a:p>
-          <a:p>
-            <a:pPr>
-              <a:buNone/>
-            </a:pPr>
-            <a:r>
-              <a:rPr sz="1800">
-                <a:solidFill>
-                  <a:srgbClr val="222222"/>
-                </a:solidFill>
-              </a:rPr>
-              <a:t>Presentation &amp; docs: README, architecture diagram, Qwen integration guide, deployment guide, demo script, and an honest known-limitations doc.</a:t>
+        <p:spPr>
+          <a:xfrm>
+            <a:off x="685800" y="1447800"/>
+            <a:ext cx="3676650" cy="4857750"/>
+          </a:xfrm>
+        </p:spPr>
+        <p:txBody>
+          <a:bodyPr wrap="square" lIns="0" tIns="0" rIns="76200" bIns="0" anchor="t">
+            <a:noAutofit/>
+          </a:bodyPr>
+          <a:lstStyle/>
+          <a:p>
+            <a:pPr marL="0" indent="0" algn="l">
+              <a:spcAft>
+                <a:spcPts val="18"/>
+              </a:spcAft>
+              <a:buNone/>
+              <a:defRPr sz="1425" b="0">
+                <a:solidFill>
+                  <a:srgbClr val="132925"/>
+                </a:solidFill>
+                <a:latin typeface="Aptos"/>
+                <a:ea typeface="Aptos"/>
+                <a:cs typeface="Aptos"/>
+              </a:defRPr>
+            </a:pPr>
+            <a:r>
+              <a:rPr sz="1650" b="1" i="0">
+                <a:solidFill>
+                  <a:srgbClr val="B42318"/>
+                </a:solidFill>
+                <a:latin typeface="Aptos"/>
+                <a:ea typeface="Aptos"/>
+                <a:cs typeface="Aptos"/>
+              </a:rPr>
+              <a:t>Synthetic demo incident</a:t>
+            </a:r>
+          </a:p>
+          <a:p>
+            <a:pPr marL="0" indent="0" algn="l">
+              <a:spcAft>
+                <a:spcPts val="7"/>
+              </a:spcAft>
+              <a:buNone/>
+              <a:defRPr sz="1425" b="0">
+                <a:solidFill>
+                  <a:srgbClr val="132925"/>
+                </a:solidFill>
+                <a:latin typeface="Aptos"/>
+                <a:ea typeface="Aptos"/>
+                <a:cs typeface="Aptos"/>
+              </a:defRPr>
+            </a:pPr>
+            <a:r>
+              <a:rPr sz="2700" b="1" i="0">
+                <a:solidFill>
+                  <a:srgbClr val="087C72"/>
+                </a:solidFill>
+                <a:latin typeface="Aptos"/>
+                <a:ea typeface="Aptos"/>
+                <a:cs typeface="Aptos"/>
+              </a:rPr>
+              <a:t>2</a:t>
+            </a:r>
+            <a:r>
+              <a:rPr sz="1650" b="0" i="0">
+                <a:solidFill>
+                  <a:srgbClr val="5B6F6A"/>
+                </a:solidFill>
+                <a:latin typeface="Aptos"/>
+                <a:ea typeface="Aptos"/>
+                <a:cs typeface="Aptos"/>
+              </a:rPr>
+              <a:t> stores</a:t>
+            </a:r>
+          </a:p>
+          <a:p>
+            <a:pPr marL="0" indent="0" algn="l">
+              <a:spcAft>
+                <a:spcPts val="7"/>
+              </a:spcAft>
+              <a:buNone/>
+              <a:defRPr sz="1425" b="0">
+                <a:solidFill>
+                  <a:srgbClr val="132925"/>
+                </a:solidFill>
+                <a:latin typeface="Aptos"/>
+                <a:ea typeface="Aptos"/>
+                <a:cs typeface="Aptos"/>
+              </a:defRPr>
+            </a:pPr>
+            <a:r>
+              <a:rPr sz="2700" b="1" i="0">
+                <a:solidFill>
+                  <a:srgbClr val="132925"/>
+                </a:solidFill>
+                <a:latin typeface="Aptos"/>
+                <a:ea typeface="Aptos"/>
+                <a:cs typeface="Aptos"/>
+              </a:rPr>
+              <a:t>23</a:t>
+            </a:r>
+            <a:r>
+              <a:rPr sz="1650" b="0" i="0">
+                <a:solidFill>
+                  <a:srgbClr val="5B6F6A"/>
+                </a:solidFill>
+                <a:latin typeface="Aptos"/>
+                <a:ea typeface="Aptos"/>
+                <a:cs typeface="Aptos"/>
+              </a:rPr>
+              <a:t> affected units</a:t>
+            </a:r>
+          </a:p>
+          <a:p>
+            <a:pPr marL="0" indent="0" algn="l">
+              <a:spcAft>
+                <a:spcPts val="7"/>
+              </a:spcAft>
+              <a:buNone/>
+              <a:defRPr sz="1425" b="0">
+                <a:solidFill>
+                  <a:srgbClr val="132925"/>
+                </a:solidFill>
+                <a:latin typeface="Aptos"/>
+                <a:ea typeface="Aptos"/>
+                <a:cs typeface="Aptos"/>
+              </a:defRPr>
+            </a:pPr>
+            <a:r>
+              <a:rPr sz="2700" b="1" i="0">
+                <a:solidFill>
+                  <a:srgbClr val="087C72"/>
+                </a:solidFill>
+                <a:latin typeface="Aptos"/>
+                <a:ea typeface="Aptos"/>
+                <a:cs typeface="Aptos"/>
+              </a:rPr>
+              <a:t>6</a:t>
+            </a:r>
+            <a:r>
+              <a:rPr sz="1650" b="0" i="0">
+                <a:solidFill>
+                  <a:srgbClr val="5B6F6A"/>
+                </a:solidFill>
+                <a:latin typeface="Aptos"/>
+                <a:ea typeface="Aptos"/>
+                <a:cs typeface="Aptos"/>
+              </a:rPr>
+              <a:t> valid inventory rows</a:t>
+            </a:r>
+          </a:p>
+          <a:p>
+            <a:pPr marL="0" indent="0" algn="l">
+              <a:spcAft>
+                <a:spcPts val="7"/>
+              </a:spcAft>
+              <a:buNone/>
+              <a:defRPr sz="1425" b="0">
+                <a:solidFill>
+                  <a:srgbClr val="132925"/>
+                </a:solidFill>
+                <a:latin typeface="Aptos"/>
+                <a:ea typeface="Aptos"/>
+                <a:cs typeface="Aptos"/>
+              </a:defRPr>
+            </a:pPr>
+            <a:r>
+              <a:rPr sz="2700" b="1" i="0">
+                <a:solidFill>
+                  <a:srgbClr val="B42318"/>
+                </a:solidFill>
+                <a:latin typeface="Aptos"/>
+                <a:ea typeface="Aptos"/>
+                <a:cs typeface="Aptos"/>
+              </a:rPr>
+              <a:t>2</a:t>
+            </a:r>
+            <a:r>
+              <a:rPr sz="1650" b="0" i="0">
+                <a:solidFill>
+                  <a:srgbClr val="5B6F6A"/>
+                </a:solidFill>
+                <a:latin typeface="Aptos"/>
+                <a:ea typeface="Aptos"/>
+                <a:cs typeface="Aptos"/>
+              </a:rPr>
+              <a:t> safely rejected rows</a:t>
+            </a:r>
+          </a:p>
+          <a:p>
+            <a:pPr marL="0" indent="0" algn="l">
+              <a:spcAft>
+                <a:spcPts val="7"/>
+              </a:spcAft>
+              <a:buNone/>
+              <a:defRPr sz="1425" b="0">
+                <a:solidFill>
+                  <a:srgbClr val="132925"/>
+                </a:solidFill>
+                <a:latin typeface="Aptos"/>
+                <a:ea typeface="Aptos"/>
+                <a:cs typeface="Aptos"/>
+              </a:defRPr>
+            </a:pPr>
+            <a:r>
+              <a:rPr sz="2700" b="1" i="0">
+                <a:solidFill>
+                  <a:srgbClr val="132925"/>
+                </a:solidFill>
+                <a:latin typeface="Aptos"/>
+                <a:ea typeface="Aptos"/>
+                <a:cs typeface="Aptos"/>
+              </a:rPr>
+              <a:t>5</a:t>
+            </a:r>
+            <a:r>
+              <a:rPr sz="1650" b="0" i="0">
+                <a:solidFill>
+                  <a:srgbClr val="5B6F6A"/>
+                </a:solidFill>
+                <a:latin typeface="Aptos"/>
+                <a:ea typeface="Aptos"/>
+                <a:cs typeface="Aptos"/>
+              </a:rPr>
+              <a:t> affected lots</a:t>
+            </a:r>
+          </a:p>
+          <a:p>
+            <a:pPr marL="0" indent="0" algn="l">
+              <a:spcAft>
+                <a:spcPts val="7"/>
+              </a:spcAft>
+              <a:buNone/>
+              <a:defRPr sz="1425" b="0">
+                <a:solidFill>
+                  <a:srgbClr val="132925"/>
+                </a:solidFill>
+                <a:latin typeface="Aptos"/>
+                <a:ea typeface="Aptos"/>
+                <a:cs typeface="Aptos"/>
+              </a:defRPr>
+            </a:pPr>
+            <a:r>
+              <a:rPr sz="2700" b="1" i="0">
+                <a:solidFill>
+                  <a:srgbClr val="C47A00"/>
+                </a:solidFill>
+                <a:latin typeface="Aptos"/>
+                <a:ea typeface="Aptos"/>
+                <a:cs typeface="Aptos"/>
+              </a:rPr>
+              <a:t>1</a:t>
+            </a:r>
+            <a:r>
+              <a:rPr sz="1650" b="0" i="0">
+                <a:solidFill>
+                  <a:srgbClr val="5B6F6A"/>
+                </a:solidFill>
+                <a:latin typeface="Aptos"/>
+                <a:ea typeface="Aptos"/>
+                <a:cs typeface="Aptos"/>
+              </a:rPr>
+              <a:t> optional shelf artifact</a:t>
+            </a:r>
+          </a:p>
+        </p:txBody>
+      </p:sp>
+      <p:sp>
+        <p:nvSpPr>
+          <p:cNvPr id="4" name="Rounded Rectangle 3">
+            <a:extLst>
+              <a:ext uri="{FF2B5EF4-FFF2-40B4-BE49-F238E27FC236}">
+                <a16:creationId xmlns:a16="http://schemas.microsoft.com/office/drawing/2014/main" id="{1EF08243-9C62-49A7-A5B0-C39F2F4B2C87}"/>
+              </a:ext>
+            </a:extLst>
+          </p:cNvPr>
+          <p:cNvSpPr>
+            <a:spLocks noGrp="1"/>
+          </p:cNvSpPr>
+          <p:nvPr/>
+        </p:nvSpPr>
+        <p:spPr>
+          <a:xfrm>
+            <a:off x="4991100" y="1600200"/>
+            <a:ext cx="6381750" cy="2781300"/>
+          </a:xfrm>
+          <a:prstGeom prst="roundRect">
+            <a:avLst>
+              <a:gd name="adj" fmla="val 2055"/>
+            </a:avLst>
+          </a:prstGeom>
+          <a:solidFill>
+            <a:srgbClr val="FFFFFF"/>
+          </a:solidFill>
+          <a:ln w="9525">
+            <a:solidFill>
+              <a:srgbClr val="D6E3DF"/>
+            </a:solidFill>
+            <a:prstDash val="solid"/>
+          </a:ln>
+        </p:spPr>
+      </p:sp>
+      <p:pic>
+        <p:nvPicPr>
+          <p:cNvPr id="19" name="Picture 18"/>
+          <p:cNvPicPr>
+            <a:picLocks noChangeAspect="1"/>
+          </p:cNvPicPr>
+          <p:nvPr/>
+        </p:nvPicPr>
+        <p:blipFill>
+          <a:blip r:embed="rId3"/>
+          <a:srcRect t="11562" b="11562"/>
+          <a:stretch>
+            <a:fillRect/>
+          </a:stretch>
+        </p:blipFill>
+        <p:spPr>
+          <a:xfrm>
+            <a:off x="5010150" y="1619250"/>
+            <a:ext cx="6343650" cy="2743200"/>
+          </a:xfrm>
+          <a:prstGeom prst="roundRect">
+            <a:avLst>
+              <a:gd name="adj" fmla="val 2083"/>
+            </a:avLst>
+          </a:prstGeom>
+        </p:spPr>
+      </p:pic>
+      <p:sp>
+        <p:nvSpPr>
+          <p:cNvPr id="6" name="Rounded Rectangle 5">
+            <a:extLst>
+              <a:ext uri="{FF2B5EF4-FFF2-40B4-BE49-F238E27FC236}">
+                <a16:creationId xmlns:a16="http://schemas.microsoft.com/office/drawing/2014/main" id="{ACE8E1EB-CA90-4FD2-A1ED-BC9BA7C1C6FE}"/>
+              </a:ext>
+            </a:extLst>
+          </p:cNvPr>
+          <p:cNvSpPr>
+            <a:spLocks noGrp="1"/>
+          </p:cNvSpPr>
+          <p:nvPr/>
+        </p:nvSpPr>
+        <p:spPr>
+          <a:xfrm>
+            <a:off x="5010150" y="4838700"/>
+            <a:ext cx="1047750" cy="742950"/>
+          </a:xfrm>
+          <a:prstGeom prst="roundRect">
+            <a:avLst>
+              <a:gd name="adj" fmla="val 7692"/>
+            </a:avLst>
+          </a:prstGeom>
+          <a:solidFill>
+            <a:srgbClr val="FFFFFF"/>
+          </a:solidFill>
+          <a:ln w="9525">
+            <a:solidFill>
+              <a:srgbClr val="B42318"/>
+            </a:solidFill>
+            <a:prstDash val="solid"/>
+          </a:ln>
+        </p:spPr>
+        <p:txBody>
+          <a:bodyPr wrap="square" lIns="57150" tIns="57150" rIns="57150" bIns="57150" anchor="ctr">
+            <a:noAutofit/>
+          </a:bodyPr>
+          <a:lstStyle/>
+          <a:p>
+            <a:pPr marL="0" indent="0" algn="ctr">
+              <a:spcAft>
+                <a:spcPts val="0"/>
+              </a:spcAft>
+              <a:buNone/>
+              <a:defRPr sz="1050" b="1">
+                <a:solidFill>
+                  <a:srgbClr val="132925"/>
+                </a:solidFill>
+                <a:latin typeface="Aptos"/>
+                <a:ea typeface="Aptos"/>
+                <a:cs typeface="Aptos"/>
+              </a:defRPr>
+            </a:pPr>
+            <a:r>
+              <a:rPr sz="1650" b="1" i="0">
+                <a:solidFill>
+                  <a:srgbClr val="132925"/>
+                </a:solidFill>
+                <a:latin typeface="Aptos"/>
+                <a:ea typeface="Aptos"/>
+                <a:cs typeface="Aptos"/>
+              </a:rPr>
+              <a:t>Supplier
+notice</a:t>
+            </a:r>
+          </a:p>
+        </p:txBody>
+      </p:sp>
+      <p:sp>
+        <p:nvSpPr>
+          <p:cNvPr id="7" name="Rounded Rectangle 6">
+            <a:extLst>
+              <a:ext uri="{FF2B5EF4-FFF2-40B4-BE49-F238E27FC236}">
+                <a16:creationId xmlns:a16="http://schemas.microsoft.com/office/drawing/2014/main" id="{A4B1C5C9-8454-4798-8F11-0FB0BA5D734F}"/>
+              </a:ext>
+            </a:extLst>
+          </p:cNvPr>
+          <p:cNvSpPr>
+            <a:spLocks noGrp="1"/>
+          </p:cNvSpPr>
+          <p:nvPr/>
+        </p:nvSpPr>
+        <p:spPr>
+          <a:xfrm>
+            <a:off x="6153150" y="4838700"/>
+            <a:ext cx="1352550" cy="742950"/>
+          </a:xfrm>
+          <a:prstGeom prst="roundRect">
+            <a:avLst>
+              <a:gd name="adj" fmla="val 7692"/>
+            </a:avLst>
+          </a:prstGeom>
+          <a:solidFill>
+            <a:srgbClr val="FFFFFF"/>
+          </a:solidFill>
+          <a:ln w="9525">
+            <a:solidFill>
+              <a:srgbClr val="087C72"/>
+            </a:solidFill>
+            <a:prstDash val="solid"/>
+          </a:ln>
+        </p:spPr>
+        <p:txBody>
+          <a:bodyPr wrap="square" lIns="57150" tIns="57150" rIns="57150" bIns="57150" anchor="ctr">
+            <a:noAutofit/>
+          </a:bodyPr>
+          <a:lstStyle/>
+          <a:p>
+            <a:pPr marL="0" indent="0" algn="ctr">
+              <a:spcAft>
+                <a:spcPts val="0"/>
+              </a:spcAft>
+              <a:buNone/>
+              <a:defRPr sz="1050" b="1">
+                <a:solidFill>
+                  <a:srgbClr val="132925"/>
+                </a:solidFill>
+                <a:latin typeface="Aptos"/>
+                <a:ea typeface="Aptos"/>
+                <a:cs typeface="Aptos"/>
+              </a:defRPr>
+            </a:pPr>
+            <a:r>
+              <a:rPr sz="1650" b="1" i="0">
+                <a:solidFill>
+                  <a:srgbClr val="132925"/>
+                </a:solidFill>
+                <a:latin typeface="Aptos"/>
+                <a:ea typeface="Aptos"/>
+                <a:cs typeface="Aptos"/>
+              </a:rPr>
+              <a:t>Confirmed
+snapshot</a:t>
+            </a:r>
+          </a:p>
+        </p:txBody>
+      </p:sp>
+      <p:sp>
+        <p:nvSpPr>
+          <p:cNvPr id="8" name="Rounded Rectangle 7">
+            <a:extLst>
+              <a:ext uri="{FF2B5EF4-FFF2-40B4-BE49-F238E27FC236}">
+                <a16:creationId xmlns:a16="http://schemas.microsoft.com/office/drawing/2014/main" id="{66E4DF2E-3363-41DD-9AFC-8F64A8270D8E}"/>
+              </a:ext>
+            </a:extLst>
+          </p:cNvPr>
+          <p:cNvSpPr>
+            <a:spLocks noGrp="1"/>
+          </p:cNvSpPr>
+          <p:nvPr/>
+        </p:nvSpPr>
+        <p:spPr>
+          <a:xfrm>
+            <a:off x="7600950" y="4838700"/>
+            <a:ext cx="1047750" cy="742950"/>
+          </a:xfrm>
+          <a:prstGeom prst="roundRect">
+            <a:avLst>
+              <a:gd name="adj" fmla="val 7692"/>
+            </a:avLst>
+          </a:prstGeom>
+          <a:solidFill>
+            <a:srgbClr val="FFFFFF"/>
+          </a:solidFill>
+          <a:ln w="9525">
+            <a:solidFill>
+              <a:srgbClr val="087C72"/>
+            </a:solidFill>
+            <a:prstDash val="solid"/>
+          </a:ln>
+        </p:spPr>
+        <p:txBody>
+          <a:bodyPr wrap="square" lIns="57150" tIns="57150" rIns="57150" bIns="57150" anchor="ctr">
+            <a:noAutofit/>
+          </a:bodyPr>
+          <a:lstStyle/>
+          <a:p>
+            <a:pPr marL="0" indent="0" algn="ctr">
+              <a:spcAft>
+                <a:spcPts val="0"/>
+              </a:spcAft>
+              <a:buNone/>
+              <a:defRPr sz="1050" b="1">
+                <a:solidFill>
+                  <a:srgbClr val="132925"/>
+                </a:solidFill>
+                <a:latin typeface="Aptos"/>
+                <a:ea typeface="Aptos"/>
+                <a:cs typeface="Aptos"/>
+              </a:defRPr>
+            </a:pPr>
+            <a:r>
+              <a:rPr sz="1650" b="1" i="0">
+                <a:solidFill>
+                  <a:srgbClr val="132925"/>
+                </a:solidFill>
+                <a:latin typeface="Aptos"/>
+                <a:ea typeface="Aptos"/>
+                <a:cs typeface="Aptos"/>
+              </a:rPr>
+              <a:t>Durable
+run</a:t>
+            </a:r>
+          </a:p>
+        </p:txBody>
+      </p:sp>
+      <p:sp>
+        <p:nvSpPr>
+          <p:cNvPr id="9" name="Rounded Rectangle 8">
+            <a:extLst>
+              <a:ext uri="{FF2B5EF4-FFF2-40B4-BE49-F238E27FC236}">
+                <a16:creationId xmlns:a16="http://schemas.microsoft.com/office/drawing/2014/main" id="{C3ACAEE0-066F-45EB-8AE1-8C51F987BAF0}"/>
+              </a:ext>
+            </a:extLst>
+          </p:cNvPr>
+          <p:cNvSpPr>
+            <a:spLocks noGrp="1"/>
+          </p:cNvSpPr>
+          <p:nvPr/>
+        </p:nvSpPr>
+        <p:spPr>
+          <a:xfrm>
+            <a:off x="8743950" y="4838700"/>
+            <a:ext cx="1238250" cy="742950"/>
+          </a:xfrm>
+          <a:prstGeom prst="roundRect">
+            <a:avLst>
+              <a:gd name="adj" fmla="val 7692"/>
+            </a:avLst>
+          </a:prstGeom>
+          <a:solidFill>
+            <a:srgbClr val="0B3D38"/>
+          </a:solidFill>
+          <a:ln w="9525">
+            <a:solidFill>
+              <a:srgbClr val="0B3D38"/>
+            </a:solidFill>
+            <a:prstDash val="solid"/>
+          </a:ln>
+        </p:spPr>
+        <p:txBody>
+          <a:bodyPr wrap="square" lIns="57150" tIns="57150" rIns="57150" bIns="57150" anchor="ctr">
+            <a:noAutofit/>
+          </a:bodyPr>
+          <a:lstStyle/>
+          <a:p>
+            <a:pPr marL="0" indent="0" algn="ctr">
+              <a:spcAft>
+                <a:spcPts val="0"/>
+              </a:spcAft>
+              <a:buNone/>
+              <a:defRPr sz="1050" b="1">
+                <a:solidFill>
+                  <a:srgbClr val="FFFFFF"/>
+                </a:solidFill>
+                <a:latin typeface="Aptos"/>
+                <a:ea typeface="Aptos"/>
+                <a:cs typeface="Aptos"/>
+              </a:defRPr>
+            </a:pPr>
+            <a:r>
+              <a:rPr sz="1650" b="1" i="0">
+                <a:solidFill>
+                  <a:srgbClr val="FFFFFF"/>
+                </a:solidFill>
+                <a:latin typeface="Aptos"/>
+                <a:ea typeface="Aptos"/>
+                <a:cs typeface="Aptos"/>
+              </a:rPr>
+              <a:t>37 ordered
+events</a:t>
+            </a:r>
+          </a:p>
+        </p:txBody>
+      </p:sp>
+      <p:cxnSp>
+        <p:nvCxnSpPr>
+          <p:cNvPr id="24" name="Straight Arrow Connector 23"/>
+          <p:cNvCxnSpPr>
+            <a:stCxn id="6" idx="3"/>
+            <a:endCxn id="7" idx="1"/>
+          </p:cNvCxnSpPr>
+          <p:nvPr/>
+        </p:nvCxnSpPr>
+        <p:spPr>
+          <a:xfrm>
+            <a:off x="6057900" y="5210175"/>
+            <a:ext cx="95250" cy="0"/>
+          </a:xfrm>
+          <a:prstGeom prst="straightConnector1">
+            <a:avLst/>
+          </a:prstGeom>
+          <a:ln w="19050">
+            <a:solidFill>
+              <a:srgbClr val="D6E3DF"/>
+            </a:solidFill>
+            <a:prstDash val="solid"/>
+            <a:headEnd type="none" w="med" len="med"/>
+            <a:tailEnd type="arrow" w="sm" len="sm"/>
+          </a:ln>
+        </p:spPr>
+      </p:cxnSp>
+      <p:cxnSp>
+        <p:nvCxnSpPr>
+          <p:cNvPr id="25" name="Straight Arrow Connector 24"/>
+          <p:cNvCxnSpPr>
+            <a:stCxn id="7" idx="3"/>
+            <a:endCxn id="8" idx="1"/>
+          </p:cNvCxnSpPr>
+          <p:nvPr/>
+        </p:nvCxnSpPr>
+        <p:spPr>
+          <a:xfrm>
+            <a:off x="7505700" y="5210175"/>
+            <a:ext cx="95250" cy="0"/>
+          </a:xfrm>
+          <a:prstGeom prst="straightConnector1">
+            <a:avLst/>
+          </a:prstGeom>
+          <a:ln w="19050">
+            <a:solidFill>
+              <a:srgbClr val="D6E3DF"/>
+            </a:solidFill>
+            <a:prstDash val="solid"/>
+            <a:headEnd type="none" w="med" len="med"/>
+            <a:tailEnd type="arrow" w="sm" len="sm"/>
+          </a:ln>
+        </p:spPr>
+      </p:cxnSp>
+      <p:cxnSp>
+        <p:nvCxnSpPr>
+          <p:cNvPr id="26" name="Straight Arrow Connector 25"/>
+          <p:cNvCxnSpPr>
+            <a:stCxn id="8" idx="3"/>
+            <a:endCxn id="9" idx="1"/>
+          </p:cNvCxnSpPr>
+          <p:nvPr/>
+        </p:nvCxnSpPr>
+        <p:spPr>
+          <a:xfrm>
+            <a:off x="8648700" y="5210175"/>
+            <a:ext cx="95250" cy="0"/>
+          </a:xfrm>
+          <a:prstGeom prst="straightConnector1">
+            <a:avLst/>
+          </a:prstGeom>
+          <a:ln w="19050">
+            <a:solidFill>
+              <a:srgbClr val="D6E3DF"/>
+            </a:solidFill>
+            <a:prstDash val="solid"/>
+            <a:headEnd type="none" w="med" len="med"/>
+            <a:tailEnd type="arrow" w="sm" len="sm"/>
+          </a:ln>
+        </p:spPr>
+      </p:cxnSp>
+      <p:sp>
+        <p:nvSpPr>
+          <p:cNvPr id="13" name="Rounded Rectangle 12">
+            <a:extLst>
+              <a:ext uri="{FF2B5EF4-FFF2-40B4-BE49-F238E27FC236}">
+                <a16:creationId xmlns:a16="http://schemas.microsoft.com/office/drawing/2014/main" id="{4ED9E097-3CED-48B0-BD52-F83DB04FF3E9}"/>
+              </a:ext>
+            </a:extLst>
+          </p:cNvPr>
+          <p:cNvSpPr>
+            <a:spLocks noGrp="1"/>
+          </p:cNvSpPr>
+          <p:nvPr/>
+        </p:nvSpPr>
+        <p:spPr>
+          <a:xfrm>
+            <a:off x="10077450" y="4667250"/>
+            <a:ext cx="1295400" cy="1200150"/>
+          </a:xfrm>
+          <a:prstGeom prst="roundRect">
+            <a:avLst>
+              <a:gd name="adj" fmla="val 4762"/>
+            </a:avLst>
+          </a:prstGeom>
+          <a:solidFill>
+            <a:srgbClr val="FFFFFF"/>
+          </a:solidFill>
+          <a:ln w="9525">
+            <a:solidFill>
+              <a:srgbClr val="D6E3DF"/>
+            </a:solidFill>
+            <a:prstDash val="solid"/>
+          </a:ln>
+        </p:spPr>
+      </p:sp>
+      <p:pic>
+        <p:nvPicPr>
+          <p:cNvPr id="28" name="Picture 27"/>
+          <p:cNvPicPr>
+            <a:picLocks noChangeAspect="1"/>
+          </p:cNvPicPr>
+          <p:nvPr/>
+        </p:nvPicPr>
+        <p:blipFill>
+          <a:blip r:embed="rId4"/>
+          <a:srcRect l="17246" r="17246"/>
+          <a:stretch>
+            <a:fillRect/>
+          </a:stretch>
+        </p:blipFill>
+        <p:spPr>
+          <a:xfrm>
+            <a:off x="10096500" y="4686300"/>
+            <a:ext cx="1257300" cy="1162050"/>
+          </a:xfrm>
+          <a:prstGeom prst="roundRect">
+            <a:avLst>
+              <a:gd name="adj" fmla="val 4918"/>
+            </a:avLst>
+          </a:prstGeom>
+        </p:spPr>
+      </p:pic>
+      <p:sp>
+        <p:nvSpPr>
+          <p:cNvPr id="15" name="Rectangle 14">
+            <a:extLst>
+              <a:ext uri="{FF2B5EF4-FFF2-40B4-BE49-F238E27FC236}">
+                <a16:creationId xmlns:a16="http://schemas.microsoft.com/office/drawing/2014/main" id="{724B06E4-4A6B-4832-8192-EF11E6DFE098}"/>
+              </a:ext>
+            </a:extLst>
+          </p:cNvPr>
+          <p:cNvSpPr>
+            <a:spLocks noGrp="1"/>
+          </p:cNvSpPr>
+          <p:nvPr/>
+        </p:nvSpPr>
+        <p:spPr>
+          <a:xfrm>
+            <a:off x="5010150" y="5905500"/>
+            <a:ext cx="6343650" cy="323850"/>
+          </a:xfrm>
+          <a:prstGeom prst="rect">
+            <a:avLst/>
+          </a:prstGeom>
+          <a:noFill/>
+          <a:ln w="0">
+            <a:noFill/>
+            <a:prstDash val="solid"/>
+          </a:ln>
+        </p:spPr>
+        <p:txBody>
+          <a:bodyPr wrap="square" lIns="0" tIns="0" rIns="0" bIns="0" anchor="t">
+            <a:noAutofit/>
+          </a:bodyPr>
+          <a:lstStyle/>
+          <a:p>
+            <a:pPr marL="0" indent="0" algn="l">
+              <a:spcAft>
+                <a:spcPts val="0"/>
+              </a:spcAft>
+              <a:buNone/>
+              <a:defRPr sz="1275" b="1">
+                <a:solidFill>
+                  <a:srgbClr val="0B3D38"/>
+                </a:solidFill>
+                <a:latin typeface="Aptos"/>
+                <a:ea typeface="Aptos"/>
+                <a:cs typeface="Aptos"/>
+              </a:defRPr>
+            </a:pPr>
+            <a:r>
+              <a:rPr sz="1650" b="1" i="0">
+                <a:solidFill>
+                  <a:srgbClr val="0B3D38"/>
+                </a:solidFill>
+                <a:latin typeface="Aptos"/>
+                <a:ea typeface="Aptos"/>
+                <a:cs typeface="Aptos"/>
+              </a:rPr>
+              <a:t>Evidence remains inspectable from notice to ordered event.</a:t>
             </a:r>
           </a:p>
         </p:txBody>
